--- a/26Workshop.pptx
+++ b/26Workshop.pptx
@@ -5,15 +5,17 @@
     <p:sldMasterId id="2147483648" r:id="rId1"/>
   </p:sldMasterIdLst>
   <p:notesMasterIdLst>
-    <p:notesMasterId r:id="rId5"/>
+    <p:notesMasterId r:id="rId7"/>
   </p:notesMasterIdLst>
   <p:handoutMasterIdLst>
-    <p:handoutMasterId r:id="rId6"/>
+    <p:handoutMasterId r:id="rId8"/>
   </p:handoutMasterIdLst>
   <p:sldIdLst>
     <p:sldId id="256" r:id="rId2"/>
     <p:sldId id="257" r:id="rId3"/>
     <p:sldId id="258" r:id="rId4"/>
+    <p:sldId id="259" r:id="rId5"/>
+    <p:sldId id="260" r:id="rId6"/>
   </p:sldIdLst>
   <p:sldSz cx="24384000" cy="13716000"/>
   <p:notesSz cx="6858000" cy="9144000"/>
@@ -330,6 +332,9 @@
         </p15:guide>
       </p15:sldGuideLst>
     </p:ext>
+    <p:ext uri="{2D200454-40CA-4A62-9FC3-DE9A4176ACB9}">
+      <p15:notesGuideLst xmlns:p15="http://schemas.microsoft.com/office/powerpoint/2012/main"/>
+    </p:ext>
   </p:extLst>
 </p:presentation>
 </file>
@@ -2798,7 +2803,7 @@
           </a:ln>
           <a:extLst>
             <a:ext uri="{C572A759-6A51-4108-AA02-DFA0A04FC94B}">
-              <ma14:wrappingTextBoxFlag xmlns:ma14="http://schemas.microsoft.com/office/mac/drawingml/2011/main" xmlns:a14="http://schemas.microsoft.com/office/drawing/2010/main" xmlns:m="http://schemas.openxmlformats.org/officeDocument/2006/math" xmlns="" val="1"/>
+              <ma14:wrappingTextBoxFlag xmlns="" xmlns:m="http://schemas.openxmlformats.org/officeDocument/2006/math" xmlns:a14="http://schemas.microsoft.com/office/drawing/2010/main" xmlns:ma14="http://schemas.microsoft.com/office/mac/drawingml/2011/main" val="1"/>
             </a:ext>
           </a:extLst>
         </p:spPr>
@@ -3364,7 +3369,7 @@
           </a:ln>
           <a:extLst>
             <a:ext uri="{C572A759-6A51-4108-AA02-DFA0A04FC94B}">
-              <ma14:wrappingTextBoxFlag xmlns:ma14="http://schemas.microsoft.com/office/mac/drawingml/2011/main" xmlns:a14="http://schemas.microsoft.com/office/drawing/2010/main" xmlns:m="http://schemas.openxmlformats.org/officeDocument/2006/math" xmlns="" val="1"/>
+              <ma14:wrappingTextBoxFlag xmlns="" xmlns:m="http://schemas.openxmlformats.org/officeDocument/2006/math" xmlns:a14="http://schemas.microsoft.com/office/drawing/2010/main" xmlns:ma14="http://schemas.microsoft.com/office/mac/drawingml/2011/main" val="1"/>
             </a:ext>
           </a:extLst>
         </p:spPr>
@@ -3844,7 +3849,7 @@
           </a:ln>
           <a:extLst>
             <a:ext uri="{C572A759-6A51-4108-AA02-DFA0A04FC94B}">
-              <ma14:wrappingTextBoxFlag xmlns:ma14="http://schemas.microsoft.com/office/mac/drawingml/2011/main" xmlns:a14="http://schemas.microsoft.com/office/drawing/2010/main" xmlns:m="http://schemas.openxmlformats.org/officeDocument/2006/math" xmlns="" val="1"/>
+              <ma14:wrappingTextBoxFlag xmlns="" xmlns:m="http://schemas.openxmlformats.org/officeDocument/2006/math" xmlns:a14="http://schemas.microsoft.com/office/drawing/2010/main" xmlns:ma14="http://schemas.microsoft.com/office/mac/drawingml/2011/main" val="1"/>
             </a:ext>
           </a:extLst>
         </p:spPr>
@@ -4248,7 +4253,7 @@
           </a:ln>
           <a:extLst>
             <a:ext uri="{C572A759-6A51-4108-AA02-DFA0A04FC94B}">
-              <ma14:wrappingTextBoxFlag xmlns:ma14="http://schemas.microsoft.com/office/mac/drawingml/2011/main" xmlns:a14="http://schemas.microsoft.com/office/drawing/2010/main" xmlns:m="http://schemas.openxmlformats.org/officeDocument/2006/math" xmlns="" val="1"/>
+              <ma14:wrappingTextBoxFlag xmlns="" xmlns:m="http://schemas.openxmlformats.org/officeDocument/2006/math" xmlns:a14="http://schemas.microsoft.com/office/drawing/2010/main" xmlns:ma14="http://schemas.microsoft.com/office/mac/drawingml/2011/main" val="1"/>
             </a:ext>
           </a:extLst>
         </p:spPr>
@@ -7642,7 +7647,7 @@
           </a:ln>
           <a:extLst>
             <a:ext uri="{C572A759-6A51-4108-AA02-DFA0A04FC94B}">
-              <ma14:wrappingTextBoxFlag xmlns:ma14="http://schemas.microsoft.com/office/mac/drawingml/2011/main" xmlns:a14="http://schemas.microsoft.com/office/drawing/2010/main" xmlns:m="http://schemas.openxmlformats.org/officeDocument/2006/math" xmlns="" val="1"/>
+              <ma14:wrappingTextBoxFlag xmlns="" xmlns:m="http://schemas.openxmlformats.org/officeDocument/2006/math" xmlns:a14="http://schemas.microsoft.com/office/drawing/2010/main" xmlns:ma14="http://schemas.microsoft.com/office/mac/drawingml/2011/main" val="1"/>
             </a:ext>
           </a:extLst>
         </p:spPr>
@@ -7681,7 +7686,7 @@
           </a:ln>
           <a:extLst>
             <a:ext uri="{C572A759-6A51-4108-AA02-DFA0A04FC94B}">
-              <ma14:wrappingTextBoxFlag xmlns:ma14="http://schemas.microsoft.com/office/mac/drawingml/2011/main" xmlns:a14="http://schemas.microsoft.com/office/drawing/2010/main" xmlns:m="http://schemas.openxmlformats.org/officeDocument/2006/math" xmlns="" val="1"/>
+              <ma14:wrappingTextBoxFlag xmlns="" xmlns:m="http://schemas.openxmlformats.org/officeDocument/2006/math" xmlns:a14="http://schemas.microsoft.com/office/drawing/2010/main" xmlns:ma14="http://schemas.microsoft.com/office/mac/drawingml/2011/main" val="1"/>
             </a:ext>
           </a:extLst>
         </p:spPr>
@@ -8630,7 +8635,7 @@
           </a:prstGeom>
           <a:extLst>
             <a:ext uri="{C572A759-6A51-4108-AA02-DFA0A04FC94B}">
-              <ma14:wrappingTextBoxFlag xmlns:ma14="http://schemas.microsoft.com/office/mac/drawingml/2011/main" xmlns:a14="http://schemas.microsoft.com/office/drawing/2010/main" xmlns:m="http://schemas.openxmlformats.org/officeDocument/2006/math" xmlns="" val="1"/>
+              <ma14:wrappingTextBoxFlag xmlns="" xmlns:m="http://schemas.openxmlformats.org/officeDocument/2006/math" xmlns:a14="http://schemas.microsoft.com/office/drawing/2010/main" xmlns:ma14="http://schemas.microsoft.com/office/mac/drawingml/2011/main" val="1"/>
             </a:ext>
           </a:extLst>
         </p:spPr>
@@ -8738,7 +8743,7 @@
           </a:prstGeom>
           <a:extLst>
             <a:ext uri="{C572A759-6A51-4108-AA02-DFA0A04FC94B}">
-              <ma14:wrappingTextBoxFlag xmlns:ma14="http://schemas.microsoft.com/office/mac/drawingml/2011/main" xmlns:a14="http://schemas.microsoft.com/office/drawing/2010/main" xmlns:m="http://schemas.openxmlformats.org/officeDocument/2006/math" xmlns="" val="1"/>
+              <ma14:wrappingTextBoxFlag xmlns="" xmlns:m="http://schemas.openxmlformats.org/officeDocument/2006/math" xmlns:a14="http://schemas.microsoft.com/office/drawing/2010/main" xmlns:ma14="http://schemas.microsoft.com/office/mac/drawingml/2011/main" val="1"/>
             </a:ext>
           </a:extLst>
         </p:spPr>
@@ -8868,7 +8873,7 @@
           </a:prstGeom>
           <a:extLst>
             <a:ext uri="{C572A759-6A51-4108-AA02-DFA0A04FC94B}">
-              <ma14:wrappingTextBoxFlag xmlns:ma14="http://schemas.microsoft.com/office/mac/drawingml/2011/main" xmlns:a14="http://schemas.microsoft.com/office/drawing/2010/main" xmlns:m="http://schemas.openxmlformats.org/officeDocument/2006/math" xmlns="" val="1"/>
+              <ma14:wrappingTextBoxFlag xmlns="" xmlns:m="http://schemas.openxmlformats.org/officeDocument/2006/math" xmlns:a14="http://schemas.microsoft.com/office/drawing/2010/main" xmlns:ma14="http://schemas.microsoft.com/office/mac/drawingml/2011/main" val="1"/>
             </a:ext>
           </a:extLst>
         </p:spPr>
@@ -8902,7 +8907,7 @@
           </a:ln>
           <a:extLst>
             <a:ext uri="{C572A759-6A51-4108-AA02-DFA0A04FC94B}">
-              <ma14:wrappingTextBoxFlag xmlns:ma14="http://schemas.microsoft.com/office/mac/drawingml/2011/main" xmlns:a14="http://schemas.microsoft.com/office/drawing/2010/main" xmlns:m="http://schemas.openxmlformats.org/officeDocument/2006/math" xmlns="" val="1"/>
+              <ma14:wrappingTextBoxFlag xmlns="" xmlns:m="http://schemas.openxmlformats.org/officeDocument/2006/math" xmlns:a14="http://schemas.microsoft.com/office/drawing/2010/main" xmlns:ma14="http://schemas.microsoft.com/office/mac/drawingml/2011/main" val="1"/>
             </a:ext>
           </a:extLst>
         </p:spPr>
@@ -8983,6 +8988,139 @@
         </p:txBody>
       </p:sp>
     </p:spTree>
+  </p:cSld>
+  <p:clrMapOvr>
+    <a:masterClrMapping/>
+  </p:clrMapOvr>
+  <p:transition spd="med"/>
+</p:sld>
+</file>
+
+<file path=ppt/slides/slide4.xml><?xml version="1.0" encoding="utf-8"?>
+<p:sld xmlns:a="http://schemas.openxmlformats.org/drawingml/2006/main" xmlns:r="http://schemas.openxmlformats.org/officeDocument/2006/relationships" xmlns:p="http://schemas.openxmlformats.org/presentationml/2006/main">
+  <p:cSld>
+    <p:spTree>
+      <p:nvGrpSpPr>
+        <p:cNvPr id="1" name=""/>
+        <p:cNvGrpSpPr/>
+        <p:nvPr/>
+      </p:nvGrpSpPr>
+      <p:grpSpPr>
+        <a:xfrm>
+          <a:off x="0" y="0"/>
+          <a:ext cx="0" cy="0"/>
+          <a:chOff x="0" y="0"/>
+          <a:chExt cx="0" cy="0"/>
+        </a:xfrm>
+      </p:grpSpPr>
+      <p:sp>
+        <p:nvSpPr>
+          <p:cNvPr id="2" name="Título 1">
+            <a:extLst>
+              <a:ext uri="{FF2B5EF4-FFF2-40B4-BE49-F238E27FC236}">
+                <a16:creationId xmlns:a16="http://schemas.microsoft.com/office/drawing/2014/main" id="{AE0AC092-D7C9-1413-22C7-2BF4D0120034}"/>
+              </a:ext>
+            </a:extLst>
+          </p:cNvPr>
+          <p:cNvSpPr>
+            <a:spLocks noGrp="1"/>
+          </p:cNvSpPr>
+          <p:nvPr>
+            <p:ph type="title"/>
+          </p:nvPr>
+        </p:nvSpPr>
+        <p:spPr/>
+        <p:txBody>
+          <a:bodyPr/>
+          <a:lstStyle/>
+          <a:p>
+            <a:endParaRPr lang="es-ES"/>
+          </a:p>
+        </p:txBody>
+      </p:sp>
+    </p:spTree>
+    <p:extLst>
+      <p:ext uri="{BB962C8B-B14F-4D97-AF65-F5344CB8AC3E}">
+        <p14:creationId xmlns:p14="http://schemas.microsoft.com/office/powerpoint/2010/main" val="376384476"/>
+      </p:ext>
+    </p:extLst>
+  </p:cSld>
+  <p:clrMapOvr>
+    <a:masterClrMapping/>
+  </p:clrMapOvr>
+  <p:transition spd="med"/>
+</p:sld>
+</file>
+
+<file path=ppt/slides/slide5.xml><?xml version="1.0" encoding="utf-8"?>
+<p:sld xmlns:a="http://schemas.openxmlformats.org/drawingml/2006/main" xmlns:r="http://schemas.openxmlformats.org/officeDocument/2006/relationships" xmlns:p="http://schemas.openxmlformats.org/presentationml/2006/main">
+  <p:cSld>
+    <p:spTree>
+      <p:nvGrpSpPr>
+        <p:cNvPr id="1" name=""/>
+        <p:cNvGrpSpPr/>
+        <p:nvPr/>
+      </p:nvGrpSpPr>
+      <p:grpSpPr>
+        <a:xfrm>
+          <a:off x="0" y="0"/>
+          <a:ext cx="0" cy="0"/>
+          <a:chOff x="0" y="0"/>
+          <a:chExt cx="0" cy="0"/>
+        </a:xfrm>
+      </p:grpSpPr>
+      <p:pic>
+        <p:nvPicPr>
+          <p:cNvPr id="6" name="Imagen 5">
+            <a:extLst>
+              <a:ext uri="{FF2B5EF4-FFF2-40B4-BE49-F238E27FC236}">
+                <a16:creationId xmlns:a16="http://schemas.microsoft.com/office/drawing/2014/main" id="{941FC7A1-2CE2-A606-58B3-7BDE8EAC2CF1}"/>
+              </a:ext>
+            </a:extLst>
+          </p:cNvPr>
+          <p:cNvPicPr>
+            <a:picLocks noChangeAspect="1" noChangeArrowheads="1"/>
+          </p:cNvPicPr>
+          <p:nvPr/>
+        </p:nvPicPr>
+        <p:blipFill>
+          <a:blip r:embed="rId2">
+            <a:extLst>
+              <a:ext uri="{28A0092B-C50C-407E-A947-70E740481C1C}">
+                <a14:useLocalDpi xmlns:a14="http://schemas.microsoft.com/office/drawing/2010/main" val="0"/>
+              </a:ext>
+            </a:extLst>
+          </a:blip>
+          <a:stretch>
+            <a:fillRect/>
+          </a:stretch>
+        </p:blipFill>
+        <p:spPr bwMode="auto">
+          <a:xfrm>
+            <a:off x="5423960" y="136525"/>
+            <a:ext cx="13536081" cy="12387263"/>
+          </a:xfrm>
+          <a:prstGeom prst="rect">
+            <a:avLst/>
+          </a:prstGeom>
+          <a:noFill/>
+          <a:extLst>
+            <a:ext uri="{909E8E84-426E-40DD-AFC4-6F175D3DCCD1}">
+              <a14:hiddenFill xmlns:a14="http://schemas.microsoft.com/office/drawing/2010/main">
+                <a:solidFill>
+                  <a:srgbClr val="FFFFFF"/>
+                </a:solidFill>
+              </a14:hiddenFill>
+            </a:ext>
+          </a:extLst>
+        </p:spPr>
+      </p:pic>
+    </p:spTree>
+    <p:extLst>
+      <p:ext uri="{BB962C8B-B14F-4D97-AF65-F5344CB8AC3E}">
+        <p14:creationId xmlns:p14="http://schemas.microsoft.com/office/powerpoint/2010/main" val="2799412023"/>
+      </p:ext>
+    </p:extLst>
   </p:cSld>
   <p:clrMapOvr>
     <a:masterClrMapping/>

--- a/26Workshop.pptx
+++ b/26Workshop.pptx
@@ -5,17 +5,19 @@
     <p:sldMasterId id="2147483648" r:id="rId1"/>
   </p:sldMasterIdLst>
   <p:notesMasterIdLst>
-    <p:notesMasterId r:id="rId7"/>
+    <p:notesMasterId r:id="rId9"/>
   </p:notesMasterIdLst>
   <p:handoutMasterIdLst>
-    <p:handoutMasterId r:id="rId8"/>
+    <p:handoutMasterId r:id="rId10"/>
   </p:handoutMasterIdLst>
   <p:sldIdLst>
     <p:sldId id="256" r:id="rId2"/>
-    <p:sldId id="257" r:id="rId3"/>
-    <p:sldId id="258" r:id="rId4"/>
-    <p:sldId id="259" r:id="rId5"/>
-    <p:sldId id="260" r:id="rId6"/>
+    <p:sldId id="260" r:id="rId3"/>
+    <p:sldId id="257" r:id="rId4"/>
+    <p:sldId id="261" r:id="rId5"/>
+    <p:sldId id="264" r:id="rId6"/>
+    <p:sldId id="265" r:id="rId7"/>
+    <p:sldId id="258" r:id="rId8"/>
   </p:sldIdLst>
   <p:sldSz cx="24384000" cy="13716000"/>
   <p:notesSz cx="6858000" cy="9144000"/>
@@ -433,7 +435,7 @@
           <a:p>
             <a:fld id="{7F503C6F-49BD-47BC-9EDA-98E10EA3EBA1}" type="datetimeFigureOut">
               <a:rPr lang="es-ES" smtClean="0"/>
-              <a:t>14/04/2026</a:t>
+              <a:t>14/4/26</a:t>
             </a:fld>
             <a:endParaRPr lang="es-ES"/>
           </a:p>
@@ -765,7 +767,7 @@
         </p:blipFill>
         <p:spPr>
           <a:xfrm>
-            <a:off x="14141994" y="0"/>
+            <a:off x="14157257" y="-49240"/>
             <a:ext cx="10261229" cy="13765240"/>
           </a:xfrm>
           <a:prstGeom prst="rect">
@@ -1014,8 +1016,8 @@
         </p:blipFill>
         <p:spPr>
           <a:xfrm>
-            <a:off x="14141994" y="0"/>
-            <a:ext cx="3711788" cy="13919200"/>
+            <a:off x="14128673" y="-49240"/>
+            <a:ext cx="3711788" cy="13968440"/>
           </a:xfrm>
           <a:prstGeom prst="rect">
             <a:avLst/>
@@ -1124,320 +1126,6 @@
 </file>
 
 <file path=ppt/slideLayouts/slideLayout10.xml><?xml version="1.0" encoding="utf-8"?>
-<p:sldLayout xmlns:a="http://schemas.openxmlformats.org/drawingml/2006/main" xmlns:r="http://schemas.openxmlformats.org/officeDocument/2006/relationships" xmlns:p="http://schemas.openxmlformats.org/presentationml/2006/main" showMasterSp="0" type="tx">
-  <p:cSld name="Título, viñetas y foto azul">
-    <p:bg>
-      <p:bgPr>
-        <a:solidFill>
-          <a:srgbClr val="3579BB"/>
-        </a:solidFill>
-        <a:effectLst/>
-      </p:bgPr>
-    </p:bg>
-    <p:spTree>
-      <p:nvGrpSpPr>
-        <p:cNvPr id="1" name=""/>
-        <p:cNvGrpSpPr/>
-        <p:nvPr/>
-      </p:nvGrpSpPr>
-      <p:grpSpPr>
-        <a:xfrm>
-          <a:off x="0" y="0"/>
-          <a:ext cx="0" cy="0"/>
-          <a:chOff x="0" y="0"/>
-          <a:chExt cx="0" cy="0"/>
-        </a:xfrm>
-      </p:grpSpPr>
-      <p:sp>
-        <p:nvSpPr>
-          <p:cNvPr id="120" name="Subtítulo de la diapositiva"/>
-          <p:cNvSpPr txBox="1">
-            <a:spLocks noGrp="1"/>
-          </p:cNvSpPr>
-          <p:nvPr>
-            <p:ph type="body" sz="quarter" idx="21" hasCustomPrompt="1"/>
-          </p:nvPr>
-        </p:nvSpPr>
-        <p:spPr>
-          <a:xfrm>
-            <a:off x="1206500" y="2372962"/>
-            <a:ext cx="9779000" cy="934780"/>
-          </a:xfrm>
-          <a:prstGeom prst="rect">
-            <a:avLst/>
-          </a:prstGeom>
-        </p:spPr>
-        <p:txBody>
-          <a:bodyPr lIns="45719" tIns="45719" rIns="45719" bIns="45719"/>
-          <a:lstStyle>
-            <a:lvl1pPr marL="0" indent="0" defTabSz="825500">
-              <a:lnSpc>
-                <a:spcPct val="100000"/>
-              </a:lnSpc>
-              <a:spcBef>
-                <a:spcPts val="0"/>
-              </a:spcBef>
-              <a:buSzTx/>
-              <a:buNone/>
-              <a:defRPr sz="5500" b="1" i="1">
-                <a:solidFill>
-                  <a:srgbClr val="D5D5D5"/>
-                </a:solidFill>
-              </a:defRPr>
-            </a:lvl1pPr>
-          </a:lstStyle>
-          <a:p>
-            <a:r>
-              <a:t>Subtítulo de la diapositiva</a:t>
-            </a:r>
-          </a:p>
-        </p:txBody>
-      </p:sp>
-      <p:sp>
-        <p:nvSpPr>
-          <p:cNvPr id="121" name="Nivel de texto 1…"/>
-          <p:cNvSpPr txBox="1">
-            <a:spLocks noGrp="1"/>
-          </p:cNvSpPr>
-          <p:nvPr>
-            <p:ph type="body" sz="half" idx="1" hasCustomPrompt="1"/>
-          </p:nvPr>
-        </p:nvSpPr>
-        <p:spPr>
-          <a:xfrm>
-            <a:off x="1206500" y="4248504"/>
-            <a:ext cx="9779000" cy="8256630"/>
-          </a:xfrm>
-          <a:prstGeom prst="rect">
-            <a:avLst/>
-          </a:prstGeom>
-        </p:spPr>
-        <p:txBody>
-          <a:bodyPr/>
-          <a:lstStyle>
-            <a:lvl1pPr>
-              <a:defRPr>
-                <a:solidFill>
-                  <a:srgbClr val="FFFFFF"/>
-                </a:solidFill>
-              </a:defRPr>
-            </a:lvl1pPr>
-            <a:lvl2pPr>
-              <a:defRPr>
-                <a:solidFill>
-                  <a:srgbClr val="FFFFFF"/>
-                </a:solidFill>
-              </a:defRPr>
-            </a:lvl2pPr>
-            <a:lvl3pPr>
-              <a:defRPr>
-                <a:solidFill>
-                  <a:srgbClr val="FFFFFF"/>
-                </a:solidFill>
-              </a:defRPr>
-            </a:lvl3pPr>
-            <a:lvl4pPr>
-              <a:defRPr>
-                <a:solidFill>
-                  <a:srgbClr val="FFFFFF"/>
-                </a:solidFill>
-              </a:defRPr>
-            </a:lvl4pPr>
-            <a:lvl5pPr>
-              <a:defRPr>
-                <a:solidFill>
-                  <a:srgbClr val="FFFFFF"/>
-                </a:solidFill>
-              </a:defRPr>
-            </a:lvl5pPr>
-          </a:lstStyle>
-          <a:p>
-            <a:r>
-              <a:t>Texto de viñeta de la diapositiva</a:t>
-            </a:r>
-          </a:p>
-          <a:p>
-            <a:pPr lvl="1"/>
-            <a:endParaRPr/>
-          </a:p>
-          <a:p>
-            <a:pPr lvl="2"/>
-            <a:endParaRPr/>
-          </a:p>
-          <a:p>
-            <a:pPr lvl="3"/>
-            <a:endParaRPr/>
-          </a:p>
-          <a:p>
-            <a:pPr lvl="4"/>
-            <a:endParaRPr/>
-          </a:p>
-        </p:txBody>
-      </p:sp>
-      <p:sp>
-        <p:nvSpPr>
-          <p:cNvPr id="122" name="Cuenco de pappardelle con mantequilla de perejil, avellanas tostadas y lascas de queso parmesano"/>
-          <p:cNvSpPr>
-            <a:spLocks noGrp="1"/>
-          </p:cNvSpPr>
-          <p:nvPr>
-            <p:ph type="pic" idx="22"/>
-          </p:nvPr>
-        </p:nvSpPr>
-        <p:spPr>
-          <a:xfrm>
-            <a:off x="12192000" y="-407266"/>
-            <a:ext cx="10916874" cy="14555832"/>
-          </a:xfrm>
-          <a:prstGeom prst="rect">
-            <a:avLst/>
-          </a:prstGeom>
-        </p:spPr>
-        <p:txBody>
-          <a:bodyPr lIns="91439" tIns="45719" rIns="91439" bIns="45719">
-            <a:noAutofit/>
-          </a:bodyPr>
-          <a:lstStyle/>
-          <a:p>
-            <a:endParaRPr/>
-          </a:p>
-        </p:txBody>
-      </p:sp>
-      <p:sp>
-        <p:nvSpPr>
-          <p:cNvPr id="123" name="Título de la diapositiva"/>
-          <p:cNvSpPr txBox="1">
-            <a:spLocks noGrp="1"/>
-          </p:cNvSpPr>
-          <p:nvPr>
-            <p:ph type="title" hasCustomPrompt="1"/>
-          </p:nvPr>
-        </p:nvSpPr>
-        <p:spPr>
-          <a:xfrm>
-            <a:off x="1206500" y="1079500"/>
-            <a:ext cx="9779000" cy="1435100"/>
-          </a:xfrm>
-          <a:prstGeom prst="rect">
-            <a:avLst/>
-          </a:prstGeom>
-        </p:spPr>
-        <p:txBody>
-          <a:bodyPr/>
-          <a:lstStyle>
-            <a:lvl1pPr>
-              <a:defRPr>
-                <a:solidFill>
-                  <a:srgbClr val="FFFFFF"/>
-                </a:solidFill>
-              </a:defRPr>
-            </a:lvl1pPr>
-          </a:lstStyle>
-          <a:p>
-            <a:r>
-              <a:t>Título de la diapositiva</a:t>
-            </a:r>
-          </a:p>
-        </p:txBody>
-      </p:sp>
-      <p:pic>
-        <p:nvPicPr>
-          <p:cNvPr id="124" name="UPC-blanc-fons-transp.png" descr="UPC-blanc-fons-transp.png"/>
-          <p:cNvPicPr>
-            <a:picLocks noChangeAspect="1"/>
-          </p:cNvPicPr>
-          <p:nvPr/>
-        </p:nvPicPr>
-        <p:blipFill>
-          <a:blip r:embed="rId2"/>
-          <a:stretch>
-            <a:fillRect/>
-          </a:stretch>
-        </p:blipFill>
-        <p:spPr>
-          <a:xfrm>
-            <a:off x="20853400" y="12661900"/>
-            <a:ext cx="3517900" cy="1054750"/>
-          </a:xfrm>
-          <a:prstGeom prst="rect">
-            <a:avLst/>
-          </a:prstGeom>
-          <a:ln w="12700">
-            <a:miter lim="400000"/>
-          </a:ln>
-        </p:spPr>
-      </p:pic>
-      <p:pic>
-        <p:nvPicPr>
-          <p:cNvPr id="125" name="TTL-logo_white.png" descr="TTL-logo_white.png"/>
-          <p:cNvPicPr>
-            <a:picLocks noChangeAspect="1"/>
-          </p:cNvPicPr>
-          <p:nvPr/>
-        </p:nvPicPr>
-        <p:blipFill>
-          <a:blip r:embed="rId3"/>
-          <a:stretch>
-            <a:fillRect/>
-          </a:stretch>
-        </p:blipFill>
-        <p:spPr>
-          <a:xfrm>
-            <a:off x="17703800" y="12801600"/>
-            <a:ext cx="3111500" cy="723456"/>
-          </a:xfrm>
-          <a:prstGeom prst="rect">
-            <a:avLst/>
-          </a:prstGeom>
-          <a:ln w="12700">
-            <a:miter lim="400000"/>
-          </a:ln>
-        </p:spPr>
-      </p:pic>
-      <p:sp>
-        <p:nvSpPr>
-          <p:cNvPr id="126" name="Número de diapositiva"/>
-          <p:cNvSpPr txBox="1">
-            <a:spLocks noGrp="1"/>
-          </p:cNvSpPr>
-          <p:nvPr>
-            <p:ph type="sldNum" sz="quarter" idx="2"/>
-          </p:nvPr>
-        </p:nvSpPr>
-        <p:spPr>
-          <a:prstGeom prst="rect">
-            <a:avLst/>
-          </a:prstGeom>
-        </p:spPr>
-        <p:txBody>
-          <a:bodyPr/>
-          <a:lstStyle>
-            <a:lvl1pPr>
-              <a:defRPr>
-                <a:solidFill>
-                  <a:srgbClr val="D5D5D5"/>
-                </a:solidFill>
-              </a:defRPr>
-            </a:lvl1pPr>
-          </a:lstStyle>
-          <a:p>
-            <a:fld id="{86CB4B4D-7CA3-9044-876B-883B54F8677D}" type="slidenum">
-              <a:t>‹Nº›</a:t>
-            </a:fld>
-            <a:endParaRPr/>
-          </a:p>
-        </p:txBody>
-      </p:sp>
-    </p:spTree>
-  </p:cSld>
-  <p:clrMapOvr>
-    <a:masterClrMapping/>
-  </p:clrMapOvr>
-  <p:transition spd="med"/>
-</p:sldLayout>
-</file>
-
-<file path=ppt/slideLayouts/slideLayout11.xml><?xml version="1.0" encoding="utf-8"?>
 <p:sldLayout xmlns:a="http://schemas.openxmlformats.org/drawingml/2006/main" xmlns:r="http://schemas.openxmlformats.org/officeDocument/2006/relationships" xmlns:p="http://schemas.openxmlformats.org/presentationml/2006/main" type="tx">
   <p:cSld name="Solo títulocentro">
     <p:spTree>
@@ -1520,7 +1208,7 @@
 </p:sldLayout>
 </file>
 
-<file path=ppt/slideLayouts/slideLayout12.xml><?xml version="1.0" encoding="utf-8"?>
+<file path=ppt/slideLayouts/slideLayout11.xml><?xml version="1.0" encoding="utf-8"?>
 <p:sldLayout xmlns:a="http://schemas.openxmlformats.org/drawingml/2006/main" xmlns:r="http://schemas.openxmlformats.org/officeDocument/2006/relationships" xmlns:p="http://schemas.openxmlformats.org/presentationml/2006/main" showMasterSp="0" type="tx">
   <p:cSld name="Solo título centro azul">
     <p:bg>
@@ -1609,33 +1297,6 @@
           </a:ln>
         </p:spPr>
       </p:pic>
-      <p:pic>
-        <p:nvPicPr>
-          <p:cNvPr id="143" name="TTL-logo_white.png" descr="TTL-logo_white.png"/>
-          <p:cNvPicPr>
-            <a:picLocks noChangeAspect="1"/>
-          </p:cNvPicPr>
-          <p:nvPr/>
-        </p:nvPicPr>
-        <p:blipFill>
-          <a:blip r:embed="rId3"/>
-          <a:stretch>
-            <a:fillRect/>
-          </a:stretch>
-        </p:blipFill>
-        <p:spPr>
-          <a:xfrm>
-            <a:off x="17703800" y="12801600"/>
-            <a:ext cx="3111500" cy="723456"/>
-          </a:xfrm>
-          <a:prstGeom prst="rect">
-            <a:avLst/>
-          </a:prstGeom>
-          <a:ln w="12700">
-            <a:miter lim="400000"/>
-          </a:ln>
-        </p:spPr>
-      </p:pic>
       <p:sp>
         <p:nvSpPr>
           <p:cNvPr id="144" name="Número de diapositiva"/>
@@ -1670,6 +1331,53 @@
           </a:p>
         </p:txBody>
       </p:sp>
+      <p:pic>
+        <p:nvPicPr>
+          <p:cNvPr id="2" name="Picture 2" descr="Industry Office - Industry Office - Connecting Science &amp; Industry">
+            <a:extLst>
+              <a:ext uri="{FF2B5EF4-FFF2-40B4-BE49-F238E27FC236}">
+                <a16:creationId xmlns:a16="http://schemas.microsoft.com/office/drawing/2014/main" id="{1DBA55C8-6D08-7A12-9CB9-7DA5ADA8FC92}"/>
+              </a:ext>
+            </a:extLst>
+          </p:cNvPr>
+          <p:cNvPicPr>
+            <a:picLocks noChangeAspect="1" noChangeArrowheads="1"/>
+          </p:cNvPicPr>
+          <p:nvPr userDrawn="1"/>
+        </p:nvPicPr>
+        <p:blipFill>
+          <a:blip r:embed="rId3">
+            <a:extLst>
+              <a:ext uri="{28A0092B-C50C-407E-A947-70E740481C1C}">
+                <a14:useLocalDpi xmlns:a14="http://schemas.microsoft.com/office/drawing/2010/main" val="0"/>
+              </a:ext>
+            </a:extLst>
+          </a:blip>
+          <a:srcRect/>
+          <a:stretch>
+            <a:fillRect/>
+          </a:stretch>
+        </p:blipFill>
+        <p:spPr bwMode="auto">
+          <a:xfrm>
+            <a:off x="16865600" y="12708830"/>
+            <a:ext cx="3749816" cy="960890"/>
+          </a:xfrm>
+          <a:prstGeom prst="rect">
+            <a:avLst/>
+          </a:prstGeom>
+          <a:noFill/>
+          <a:extLst>
+            <a:ext uri="{909E8E84-426E-40DD-AFC4-6F175D3DCCD1}">
+              <a14:hiddenFill xmlns:a14="http://schemas.microsoft.com/office/drawing/2010/main">
+                <a:solidFill>
+                  <a:srgbClr val="FFFFFF"/>
+                </a:solidFill>
+              </a14:hiddenFill>
+            </a:ext>
+          </a:extLst>
+        </p:spPr>
+      </p:pic>
     </p:spTree>
   </p:cSld>
   <p:clrMapOvr>
@@ -1679,7 +1387,7 @@
 </p:sldLayout>
 </file>
 
-<file path=ppt/slideLayouts/slideLayout13.xml><?xml version="1.0" encoding="utf-8"?>
+<file path=ppt/slideLayouts/slideLayout12.xml><?xml version="1.0" encoding="utf-8"?>
 <p:sldLayout xmlns:a="http://schemas.openxmlformats.org/drawingml/2006/main" xmlns:r="http://schemas.openxmlformats.org/officeDocument/2006/relationships" xmlns:p="http://schemas.openxmlformats.org/presentationml/2006/main" type="tx">
   <p:cSld name="Dato importante">
     <p:spTree>
@@ -1873,7 +1581,7 @@
 </p:sldLayout>
 </file>
 
-<file path=ppt/slideLayouts/slideLayout14.xml><?xml version="1.0" encoding="utf-8"?>
+<file path=ppt/slideLayouts/slideLayout13.xml><?xml version="1.0" encoding="utf-8"?>
 <p:sldLayout xmlns:a="http://schemas.openxmlformats.org/drawingml/2006/main" xmlns:r="http://schemas.openxmlformats.org/officeDocument/2006/relationships" xmlns:p="http://schemas.openxmlformats.org/presentationml/2006/main" showMasterSp="0" type="tx">
   <p:cSld name="Dato importante azul">
     <p:bg>
@@ -2091,33 +1799,6 @@
           </a:ln>
         </p:spPr>
       </p:pic>
-      <p:pic>
-        <p:nvPicPr>
-          <p:cNvPr id="163" name="TTL-logo_white.png" descr="TTL-logo_white.png"/>
-          <p:cNvPicPr>
-            <a:picLocks noChangeAspect="1"/>
-          </p:cNvPicPr>
-          <p:nvPr/>
-        </p:nvPicPr>
-        <p:blipFill>
-          <a:blip r:embed="rId3"/>
-          <a:stretch>
-            <a:fillRect/>
-          </a:stretch>
-        </p:blipFill>
-        <p:spPr>
-          <a:xfrm>
-            <a:off x="17703800" y="12801600"/>
-            <a:ext cx="3111500" cy="723456"/>
-          </a:xfrm>
-          <a:prstGeom prst="rect">
-            <a:avLst/>
-          </a:prstGeom>
-          <a:ln w="12700">
-            <a:miter lim="400000"/>
-          </a:ln>
-        </p:spPr>
-      </p:pic>
       <p:sp>
         <p:nvSpPr>
           <p:cNvPr id="164" name="Número de diapositiva"/>
@@ -2152,6 +1833,53 @@
           </a:p>
         </p:txBody>
       </p:sp>
+      <p:pic>
+        <p:nvPicPr>
+          <p:cNvPr id="2" name="Picture 2" descr="Industry Office - Industry Office - Connecting Science &amp; Industry">
+            <a:extLst>
+              <a:ext uri="{FF2B5EF4-FFF2-40B4-BE49-F238E27FC236}">
+                <a16:creationId xmlns:a16="http://schemas.microsoft.com/office/drawing/2014/main" id="{EAF2CD8D-319F-1CFD-0FAF-806CDF69FD4F}"/>
+              </a:ext>
+            </a:extLst>
+          </p:cNvPr>
+          <p:cNvPicPr>
+            <a:picLocks noChangeAspect="1" noChangeArrowheads="1"/>
+          </p:cNvPicPr>
+          <p:nvPr userDrawn="1"/>
+        </p:nvPicPr>
+        <p:blipFill>
+          <a:blip r:embed="rId3">
+            <a:extLst>
+              <a:ext uri="{28A0092B-C50C-407E-A947-70E740481C1C}">
+                <a14:useLocalDpi xmlns:a14="http://schemas.microsoft.com/office/drawing/2010/main" val="0"/>
+              </a:ext>
+            </a:extLst>
+          </a:blip>
+          <a:srcRect/>
+          <a:stretch>
+            <a:fillRect/>
+          </a:stretch>
+        </p:blipFill>
+        <p:spPr bwMode="auto">
+          <a:xfrm>
+            <a:off x="16865600" y="12708830"/>
+            <a:ext cx="3749816" cy="960890"/>
+          </a:xfrm>
+          <a:prstGeom prst="rect">
+            <a:avLst/>
+          </a:prstGeom>
+          <a:noFill/>
+          <a:extLst>
+            <a:ext uri="{909E8E84-426E-40DD-AFC4-6F175D3DCCD1}">
+              <a14:hiddenFill xmlns:a14="http://schemas.microsoft.com/office/drawing/2010/main">
+                <a:solidFill>
+                  <a:srgbClr val="FFFFFF"/>
+                </a:solidFill>
+              </a14:hiddenFill>
+            </a:ext>
+          </a:extLst>
+        </p:spPr>
+      </p:pic>
     </p:spTree>
   </p:cSld>
   <p:clrMapOvr>
@@ -2161,7 +1889,7 @@
 </p:sldLayout>
 </file>
 
-<file path=ppt/slideLayouts/slideLayout15.xml><?xml version="1.0" encoding="utf-8"?>
+<file path=ppt/slideLayouts/slideLayout14.xml><?xml version="1.0" encoding="utf-8"?>
 <p:sldLayout xmlns:a="http://schemas.openxmlformats.org/drawingml/2006/main" xmlns:r="http://schemas.openxmlformats.org/officeDocument/2006/relationships" xmlns:p="http://schemas.openxmlformats.org/presentationml/2006/main" type="tx">
   <p:cSld name="En blanco">
     <p:spTree>
@@ -2213,7 +1941,7 @@
 </p:sldLayout>
 </file>
 
-<file path=ppt/slideLayouts/slideLayout16.xml><?xml version="1.0" encoding="utf-8"?>
+<file path=ppt/slideLayouts/slideLayout15.xml><?xml version="1.0" encoding="utf-8"?>
 <p:sldLayout xmlns:a="http://schemas.openxmlformats.org/drawingml/2006/main" xmlns:r="http://schemas.openxmlformats.org/officeDocument/2006/relationships" xmlns:p="http://schemas.openxmlformats.org/presentationml/2006/main" showMasterSp="0" type="tx">
   <p:cSld name="En blanco azul">
     <p:bg>
@@ -2265,33 +1993,6 @@
           </a:ln>
         </p:spPr>
       </p:pic>
-      <p:pic>
-        <p:nvPicPr>
-          <p:cNvPr id="179" name="TTL-logo_white.png" descr="TTL-logo_white.png"/>
-          <p:cNvPicPr>
-            <a:picLocks noChangeAspect="1"/>
-          </p:cNvPicPr>
-          <p:nvPr/>
-        </p:nvPicPr>
-        <p:blipFill>
-          <a:blip r:embed="rId3"/>
-          <a:stretch>
-            <a:fillRect/>
-          </a:stretch>
-        </p:blipFill>
-        <p:spPr>
-          <a:xfrm>
-            <a:off x="17703800" y="12801600"/>
-            <a:ext cx="3111500" cy="723456"/>
-          </a:xfrm>
-          <a:prstGeom prst="rect">
-            <a:avLst/>
-          </a:prstGeom>
-          <a:ln w="12700">
-            <a:miter lim="400000"/>
-          </a:ln>
-        </p:spPr>
-      </p:pic>
       <p:sp>
         <p:nvSpPr>
           <p:cNvPr id="180" name="Número de diapositiva"/>
@@ -2326,6 +2027,53 @@
           </a:p>
         </p:txBody>
       </p:sp>
+      <p:pic>
+        <p:nvPicPr>
+          <p:cNvPr id="2" name="Picture 2" descr="Industry Office - Industry Office - Connecting Science &amp; Industry">
+            <a:extLst>
+              <a:ext uri="{FF2B5EF4-FFF2-40B4-BE49-F238E27FC236}">
+                <a16:creationId xmlns:a16="http://schemas.microsoft.com/office/drawing/2014/main" id="{C049BA94-6E18-3EDA-7240-9D556D3ADBC9}"/>
+              </a:ext>
+            </a:extLst>
+          </p:cNvPr>
+          <p:cNvPicPr>
+            <a:picLocks noChangeAspect="1" noChangeArrowheads="1"/>
+          </p:cNvPicPr>
+          <p:nvPr userDrawn="1"/>
+        </p:nvPicPr>
+        <p:blipFill>
+          <a:blip r:embed="rId3">
+            <a:extLst>
+              <a:ext uri="{28A0092B-C50C-407E-A947-70E740481C1C}">
+                <a14:useLocalDpi xmlns:a14="http://schemas.microsoft.com/office/drawing/2010/main" val="0"/>
+              </a:ext>
+            </a:extLst>
+          </a:blip>
+          <a:srcRect/>
+          <a:stretch>
+            <a:fillRect/>
+          </a:stretch>
+        </p:blipFill>
+        <p:spPr bwMode="auto">
+          <a:xfrm>
+            <a:off x="16865600" y="12708830"/>
+            <a:ext cx="3749816" cy="960890"/>
+          </a:xfrm>
+          <a:prstGeom prst="rect">
+            <a:avLst/>
+          </a:prstGeom>
+          <a:noFill/>
+          <a:extLst>
+            <a:ext uri="{909E8E84-426E-40DD-AFC4-6F175D3DCCD1}">
+              <a14:hiddenFill xmlns:a14="http://schemas.microsoft.com/office/drawing/2010/main">
+                <a:solidFill>
+                  <a:srgbClr val="FFFFFF"/>
+                </a:solidFill>
+              </a14:hiddenFill>
+            </a:ext>
+          </a:extLst>
+        </p:spPr>
+      </p:pic>
     </p:spTree>
   </p:cSld>
   <p:clrMapOvr>
@@ -2335,7 +2083,7 @@
 </p:sldLayout>
 </file>
 
-<file path=ppt/slideLayouts/slideLayout17.xml><?xml version="1.0" encoding="utf-8"?>
+<file path=ppt/slideLayouts/slideLayout16.xml><?xml version="1.0" encoding="utf-8"?>
 <p:sldLayout xmlns:a="http://schemas.openxmlformats.org/drawingml/2006/main" xmlns:r="http://schemas.openxmlformats.org/officeDocument/2006/relationships" xmlns:p="http://schemas.openxmlformats.org/presentationml/2006/main" type="tx">
   <p:cSld name="3 fotos">
     <p:spTree>
@@ -2474,7 +2222,7 @@
 </p:sldLayout>
 </file>
 
-<file path=ppt/slideLayouts/slideLayout18.xml><?xml version="1.0" encoding="utf-8"?>
+<file path=ppt/slideLayouts/slideLayout17.xml><?xml version="1.0" encoding="utf-8"?>
 <p:sldLayout xmlns:a="http://schemas.openxmlformats.org/drawingml/2006/main" xmlns:r="http://schemas.openxmlformats.org/officeDocument/2006/relationships" xmlns:p="http://schemas.openxmlformats.org/presentationml/2006/main" showMasterSp="0" type="tx">
   <p:cSld name="3 fotos azul">
     <p:bg>
@@ -2613,33 +2361,6 @@
           </a:ln>
         </p:spPr>
       </p:pic>
-      <p:pic>
-        <p:nvPicPr>
-          <p:cNvPr id="201" name="TTL-logo_white.png" descr="TTL-logo_white.png"/>
-          <p:cNvPicPr>
-            <a:picLocks noChangeAspect="1"/>
-          </p:cNvPicPr>
-          <p:nvPr/>
-        </p:nvPicPr>
-        <p:blipFill>
-          <a:blip r:embed="rId3"/>
-          <a:stretch>
-            <a:fillRect/>
-          </a:stretch>
-        </p:blipFill>
-        <p:spPr>
-          <a:xfrm>
-            <a:off x="17703800" y="12801600"/>
-            <a:ext cx="3111500" cy="723456"/>
-          </a:xfrm>
-          <a:prstGeom prst="rect">
-            <a:avLst/>
-          </a:prstGeom>
-          <a:ln w="12700">
-            <a:miter lim="400000"/>
-          </a:ln>
-        </p:spPr>
-      </p:pic>
       <p:sp>
         <p:nvSpPr>
           <p:cNvPr id="202" name="Número de diapositiva"/>
@@ -2674,6 +2395,53 @@
           </a:p>
         </p:txBody>
       </p:sp>
+      <p:pic>
+        <p:nvPicPr>
+          <p:cNvPr id="2" name="Picture 2" descr="Industry Office - Industry Office - Connecting Science &amp; Industry">
+            <a:extLst>
+              <a:ext uri="{FF2B5EF4-FFF2-40B4-BE49-F238E27FC236}">
+                <a16:creationId xmlns:a16="http://schemas.microsoft.com/office/drawing/2014/main" id="{32CC4742-5AC1-C79B-CB2D-103ADD534C03}"/>
+              </a:ext>
+            </a:extLst>
+          </p:cNvPr>
+          <p:cNvPicPr>
+            <a:picLocks noChangeAspect="1" noChangeArrowheads="1"/>
+          </p:cNvPicPr>
+          <p:nvPr userDrawn="1"/>
+        </p:nvPicPr>
+        <p:blipFill>
+          <a:blip r:embed="rId3">
+            <a:extLst>
+              <a:ext uri="{28A0092B-C50C-407E-A947-70E740481C1C}">
+                <a14:useLocalDpi xmlns:a14="http://schemas.microsoft.com/office/drawing/2010/main" val="0"/>
+              </a:ext>
+            </a:extLst>
+          </a:blip>
+          <a:srcRect/>
+          <a:stretch>
+            <a:fillRect/>
+          </a:stretch>
+        </p:blipFill>
+        <p:spPr bwMode="auto">
+          <a:xfrm>
+            <a:off x="16865600" y="12708830"/>
+            <a:ext cx="3749816" cy="960890"/>
+          </a:xfrm>
+          <a:prstGeom prst="rect">
+            <a:avLst/>
+          </a:prstGeom>
+          <a:noFill/>
+          <a:extLst>
+            <a:ext uri="{909E8E84-426E-40DD-AFC4-6F175D3DCCD1}">
+              <a14:hiddenFill xmlns:a14="http://schemas.microsoft.com/office/drawing/2010/main">
+                <a:solidFill>
+                  <a:srgbClr val="FFFFFF"/>
+                </a:solidFill>
+              </a14:hiddenFill>
+            </a:ext>
+          </a:extLst>
+        </p:spPr>
+      </p:pic>
     </p:spTree>
   </p:cSld>
   <p:clrMapOvr>
@@ -2683,7 +2451,7 @@
 </p:sldLayout>
 </file>
 
-<file path=ppt/slideLayouts/slideLayout19.xml><?xml version="1.0" encoding="utf-8"?>
+<file path=ppt/slideLayouts/slideLayout18.xml><?xml version="1.0" encoding="utf-8"?>
 <p:sldLayout xmlns:a="http://schemas.openxmlformats.org/drawingml/2006/main" xmlns:r="http://schemas.openxmlformats.org/officeDocument/2006/relationships" xmlns:p="http://schemas.openxmlformats.org/presentationml/2006/main" type="tx">
   <p:cSld name="2 fotos">
     <p:spTree>
@@ -2803,7 +2571,7 @@
           </a:ln>
           <a:extLst>
             <a:ext uri="{C572A759-6A51-4108-AA02-DFA0A04FC94B}">
-              <ma14:wrappingTextBoxFlag xmlns="" xmlns:m="http://schemas.openxmlformats.org/officeDocument/2006/math" xmlns:a14="http://schemas.microsoft.com/office/drawing/2010/main" xmlns:ma14="http://schemas.microsoft.com/office/mac/drawingml/2011/main" val="1"/>
+              <ma14:wrappingTextBoxFlag xmlns:ma14="http://schemas.microsoft.com/office/mac/drawingml/2011/main" xmlns:a14="http://schemas.microsoft.com/office/drawing/2010/main" xmlns:m="http://schemas.openxmlformats.org/officeDocument/2006/math" xmlns="" val="1"/>
             </a:ext>
           </a:extLst>
         </p:spPr>
@@ -2830,6 +2598,252 @@
           </a:p>
         </p:txBody>
       </p:sp>
+    </p:spTree>
+  </p:cSld>
+  <p:clrMapOvr>
+    <a:masterClrMapping/>
+  </p:clrMapOvr>
+  <p:transition spd="med"/>
+</p:sldLayout>
+</file>
+
+<file path=ppt/slideLayouts/slideLayout19.xml><?xml version="1.0" encoding="utf-8"?>
+<p:sldLayout xmlns:a="http://schemas.openxmlformats.org/drawingml/2006/main" xmlns:r="http://schemas.openxmlformats.org/officeDocument/2006/relationships" xmlns:p="http://schemas.openxmlformats.org/presentationml/2006/main" showMasterSp="0" type="tx">
+  <p:cSld name="2 fotos azul">
+    <p:bg>
+      <p:bgPr>
+        <a:solidFill>
+          <a:srgbClr val="3579BB"/>
+        </a:solidFill>
+        <a:effectLst/>
+      </p:bgPr>
+    </p:bg>
+    <p:spTree>
+      <p:nvGrpSpPr>
+        <p:cNvPr id="1" name=""/>
+        <p:cNvGrpSpPr/>
+        <p:nvPr/>
+      </p:nvGrpSpPr>
+      <p:grpSpPr>
+        <a:xfrm>
+          <a:off x="0" y="0"/>
+          <a:ext cx="0" cy="0"/>
+          <a:chOff x="0" y="0"/>
+          <a:chExt cx="0" cy="0"/>
+        </a:xfrm>
+      </p:grpSpPr>
+      <p:sp>
+        <p:nvSpPr>
+          <p:cNvPr id="219" name="Cuenco de ensalada con arroz frito, huevos duros y palillos"/>
+          <p:cNvSpPr>
+            <a:spLocks noGrp="1"/>
+          </p:cNvSpPr>
+          <p:nvPr>
+            <p:ph type="pic" sz="half" idx="21"/>
+          </p:nvPr>
+        </p:nvSpPr>
+        <p:spPr>
+          <a:xfrm>
+            <a:off x="12467095" y="1979684"/>
+            <a:ext cx="11454099" cy="11173104"/>
+          </a:xfrm>
+          <a:prstGeom prst="rect">
+            <a:avLst/>
+          </a:prstGeom>
+        </p:spPr>
+        <p:txBody>
+          <a:bodyPr lIns="91439" tIns="45719" rIns="91439" bIns="45719">
+            <a:noAutofit/>
+          </a:bodyPr>
+          <a:lstStyle/>
+          <a:p>
+            <a:endParaRPr/>
+          </a:p>
+        </p:txBody>
+      </p:sp>
+      <p:sp>
+        <p:nvSpPr>
+          <p:cNvPr id="220" name="Cuenco de pappardelle con mantequilla de perejil, avellanas tostadas y lascas de queso parmesano"/>
+          <p:cNvSpPr>
+            <a:spLocks noGrp="1"/>
+          </p:cNvSpPr>
+          <p:nvPr>
+            <p:ph type="pic" idx="22"/>
+          </p:nvPr>
+        </p:nvSpPr>
+        <p:spPr>
+          <a:xfrm>
+            <a:off x="-540920" y="1756648"/>
+            <a:ext cx="13400896" cy="11257884"/>
+          </a:xfrm>
+          <a:prstGeom prst="rect">
+            <a:avLst/>
+          </a:prstGeom>
+        </p:spPr>
+        <p:txBody>
+          <a:bodyPr lIns="91439" tIns="45719" rIns="91439" bIns="45719">
+            <a:noAutofit/>
+          </a:bodyPr>
+          <a:lstStyle/>
+          <a:p>
+            <a:endParaRPr/>
+          </a:p>
+        </p:txBody>
+      </p:sp>
+      <p:sp>
+        <p:nvSpPr>
+          <p:cNvPr id="221" name="Número de diapositiva"/>
+          <p:cNvSpPr txBox="1">
+            <a:spLocks noGrp="1"/>
+          </p:cNvSpPr>
+          <p:nvPr>
+            <p:ph type="sldNum" sz="quarter" idx="2"/>
+          </p:nvPr>
+        </p:nvSpPr>
+        <p:spPr>
+          <a:prstGeom prst="rect">
+            <a:avLst/>
+          </a:prstGeom>
+        </p:spPr>
+        <p:txBody>
+          <a:bodyPr/>
+          <a:lstStyle>
+            <a:lvl1pPr>
+              <a:defRPr>
+                <a:solidFill>
+                  <a:srgbClr val="D5D5D5"/>
+                </a:solidFill>
+              </a:defRPr>
+            </a:lvl1pPr>
+          </a:lstStyle>
+          <a:p>
+            <a:fld id="{86CB4B4D-7CA3-9044-876B-883B54F8677D}" type="slidenum">
+              <a:t>‹Nº›</a:t>
+            </a:fld>
+            <a:endParaRPr/>
+          </a:p>
+        </p:txBody>
+      </p:sp>
+      <p:sp>
+        <p:nvSpPr>
+          <p:cNvPr id="222" name="Título de la diapositiva"/>
+          <p:cNvSpPr txBox="1"/>
+          <p:nvPr/>
+        </p:nvSpPr>
+        <p:spPr>
+          <a:xfrm>
+            <a:off x="576297" y="715921"/>
+            <a:ext cx="9779001" cy="1435101"/>
+          </a:xfrm>
+          <a:prstGeom prst="rect">
+            <a:avLst/>
+          </a:prstGeom>
+          <a:ln w="12700">
+            <a:miter lim="400000"/>
+          </a:ln>
+          <a:extLst>
+            <a:ext uri="{C572A759-6A51-4108-AA02-DFA0A04FC94B}">
+              <ma14:wrappingTextBoxFlag xmlns:ma14="http://schemas.microsoft.com/office/mac/drawingml/2011/main" xmlns:a14="http://schemas.microsoft.com/office/drawing/2010/main" xmlns:m="http://schemas.openxmlformats.org/officeDocument/2006/math" xmlns="" val="1"/>
+            </a:ext>
+          </a:extLst>
+        </p:spPr>
+        <p:txBody>
+          <a:bodyPr lIns="50800" tIns="50800" rIns="50800" bIns="50800">
+            <a:normAutofit/>
+          </a:bodyPr>
+          <a:lstStyle>
+            <a:lvl1pPr algn="l" defTabSz="2121354">
+              <a:lnSpc>
+                <a:spcPct val="80000"/>
+              </a:lnSpc>
+              <a:defRPr sz="7394" b="1" spc="-147">
+                <a:solidFill>
+                  <a:srgbClr val="FFFFFF"/>
+                </a:solidFill>
+              </a:defRPr>
+            </a:lvl1pPr>
+          </a:lstStyle>
+          <a:p>
+            <a:r>
+              <a:t>Título de la diapositiva</a:t>
+            </a:r>
+          </a:p>
+        </p:txBody>
+      </p:sp>
+      <p:pic>
+        <p:nvPicPr>
+          <p:cNvPr id="223" name="UPC-blanc-fons-transp.png" descr="UPC-blanc-fons-transp.png"/>
+          <p:cNvPicPr>
+            <a:picLocks noChangeAspect="1"/>
+          </p:cNvPicPr>
+          <p:nvPr/>
+        </p:nvPicPr>
+        <p:blipFill>
+          <a:blip r:embed="rId2"/>
+          <a:stretch>
+            <a:fillRect/>
+          </a:stretch>
+        </p:blipFill>
+        <p:spPr>
+          <a:xfrm>
+            <a:off x="20853400" y="12661900"/>
+            <a:ext cx="3517900" cy="1054750"/>
+          </a:xfrm>
+          <a:prstGeom prst="rect">
+            <a:avLst/>
+          </a:prstGeom>
+          <a:ln w="12700">
+            <a:miter lim="400000"/>
+          </a:ln>
+        </p:spPr>
+      </p:pic>
+      <p:pic>
+        <p:nvPicPr>
+          <p:cNvPr id="2" name="Picture 2" descr="Industry Office - Industry Office - Connecting Science &amp; Industry">
+            <a:extLst>
+              <a:ext uri="{FF2B5EF4-FFF2-40B4-BE49-F238E27FC236}">
+                <a16:creationId xmlns:a16="http://schemas.microsoft.com/office/drawing/2014/main" id="{2AAA4391-31A1-991F-DA1C-883D18698F35}"/>
+              </a:ext>
+            </a:extLst>
+          </p:cNvPr>
+          <p:cNvPicPr>
+            <a:picLocks noChangeAspect="1" noChangeArrowheads="1"/>
+          </p:cNvPicPr>
+          <p:nvPr userDrawn="1"/>
+        </p:nvPicPr>
+        <p:blipFill>
+          <a:blip r:embed="rId3">
+            <a:extLst>
+              <a:ext uri="{28A0092B-C50C-407E-A947-70E740481C1C}">
+                <a14:useLocalDpi xmlns:a14="http://schemas.microsoft.com/office/drawing/2010/main" val="0"/>
+              </a:ext>
+            </a:extLst>
+          </a:blip>
+          <a:srcRect/>
+          <a:stretch>
+            <a:fillRect/>
+          </a:stretch>
+        </p:blipFill>
+        <p:spPr bwMode="auto">
+          <a:xfrm>
+            <a:off x="16865600" y="12708830"/>
+            <a:ext cx="3749816" cy="960890"/>
+          </a:xfrm>
+          <a:prstGeom prst="rect">
+            <a:avLst/>
+          </a:prstGeom>
+          <a:noFill/>
+          <a:extLst>
+            <a:ext uri="{909E8E84-426E-40DD-AFC4-6F175D3DCCD1}">
+              <a14:hiddenFill xmlns:a14="http://schemas.microsoft.com/office/drawing/2010/main">
+                <a:solidFill>
+                  <a:srgbClr val="FFFFFF"/>
+                </a:solidFill>
+              </a14:hiddenFill>
+            </a:ext>
+          </a:extLst>
+        </p:spPr>
+      </p:pic>
     </p:spTree>
   </p:cSld>
   <p:clrMapOvr>
@@ -3062,8 +3076,8 @@
         </p:blipFill>
         <p:spPr>
           <a:xfrm>
-            <a:off x="14121083" y="-101600"/>
-            <a:ext cx="3711788" cy="13919200"/>
+            <a:off x="14094546" y="0"/>
+            <a:ext cx="3711788" cy="13728625"/>
           </a:xfrm>
           <a:prstGeom prst="rect">
             <a:avLst/>
@@ -3073,77 +3087,6 @@
           </a:ln>
         </p:spPr>
       </p:pic>
-      <p:sp>
-        <p:nvSpPr>
-          <p:cNvPr id="31" name="Triángulo"/>
-          <p:cNvSpPr/>
-          <p:nvPr/>
-        </p:nvSpPr>
-        <p:spPr>
-          <a:xfrm>
-            <a:off x="14099153" y="-43542"/>
-            <a:ext cx="3984247" cy="13828484"/>
-          </a:xfrm>
-          <a:custGeom>
-            <a:avLst/>
-            <a:gdLst/>
-            <a:ahLst/>
-            <a:cxnLst>
-              <a:cxn ang="0">
-                <a:pos x="wd2" y="hd2"/>
-              </a:cxn>
-              <a:cxn ang="5400000">
-                <a:pos x="wd2" y="hd2"/>
-              </a:cxn>
-              <a:cxn ang="10800000">
-                <a:pos x="wd2" y="hd2"/>
-              </a:cxn>
-              <a:cxn ang="16200000">
-                <a:pos x="wd2" y="hd2"/>
-              </a:cxn>
-            </a:cxnLst>
-            <a:rect l="0" t="0" r="r" b="b"/>
-            <a:pathLst>
-              <a:path w="21600" h="21600" extrusionOk="0">
-                <a:moveTo>
-                  <a:pt x="0" y="21600"/>
-                </a:moveTo>
-                <a:lnTo>
-                  <a:pt x="0" y="0"/>
-                </a:lnTo>
-                <a:lnTo>
-                  <a:pt x="21600" y="0"/>
-                </a:lnTo>
-                <a:close/>
-              </a:path>
-            </a:pathLst>
-          </a:custGeom>
-          <a:solidFill>
-            <a:srgbClr val="FFFFFF"/>
-          </a:solidFill>
-          <a:ln w="12700">
-            <a:miter lim="400000"/>
-          </a:ln>
-        </p:spPr>
-        <p:txBody>
-          <a:bodyPr lIns="50800" tIns="50800" rIns="50800" bIns="50800" anchor="ctr"/>
-          <a:lstStyle/>
-          <a:p>
-            <a:pPr defTabSz="825500">
-              <a:defRPr sz="3200">
-                <a:solidFill>
-                  <a:srgbClr val="FFFFFF"/>
-                </a:solidFill>
-                <a:latin typeface="Helvetica Neue Medium"/>
-                <a:ea typeface="Helvetica Neue Medium"/>
-                <a:cs typeface="Helvetica Neue Medium"/>
-                <a:sym typeface="Helvetica Neue Medium"/>
-              </a:defRPr>
-            </a:pPr>
-            <a:endParaRPr/>
-          </a:p>
-        </p:txBody>
-      </p:sp>
       <p:pic>
         <p:nvPicPr>
           <p:cNvPr id="32" name="UPC-blanc-fons-transp.png" descr="UPC-blanc-fons-transp.png"/>
@@ -3171,33 +3114,6 @@
           </a:ln>
         </p:spPr>
       </p:pic>
-      <p:pic>
-        <p:nvPicPr>
-          <p:cNvPr id="33" name="TTL-logo_white.png" descr="TTL-logo_white.png"/>
-          <p:cNvPicPr>
-            <a:picLocks noChangeAspect="1"/>
-          </p:cNvPicPr>
-          <p:nvPr/>
-        </p:nvPicPr>
-        <p:blipFill>
-          <a:blip r:embed="rId4"/>
-          <a:stretch>
-            <a:fillRect/>
-          </a:stretch>
-        </p:blipFill>
-        <p:spPr>
-          <a:xfrm>
-            <a:off x="17984134" y="3256183"/>
-            <a:ext cx="5740401" cy="1334703"/>
-          </a:xfrm>
-          <a:prstGeom prst="rect">
-            <a:avLst/>
-          </a:prstGeom>
-          <a:ln w="12700">
-            <a:miter lim="400000"/>
-          </a:ln>
-        </p:spPr>
-      </p:pic>
       <p:sp>
         <p:nvSpPr>
           <p:cNvPr id="34" name="Número de diapositiva"/>
@@ -3224,6 +3140,53 @@
           </a:p>
         </p:txBody>
       </p:sp>
+      <p:pic>
+        <p:nvPicPr>
+          <p:cNvPr id="1026" name="Picture 2" descr="Industry Office - Industry Office - Connecting Science &amp; Industry">
+            <a:extLst>
+              <a:ext uri="{FF2B5EF4-FFF2-40B4-BE49-F238E27FC236}">
+                <a16:creationId xmlns:a16="http://schemas.microsoft.com/office/drawing/2014/main" id="{11B78ADA-EB64-29AA-C7AB-52F7A6F43E73}"/>
+              </a:ext>
+            </a:extLst>
+          </p:cNvPr>
+          <p:cNvPicPr>
+            <a:picLocks noChangeAspect="1" noChangeArrowheads="1"/>
+          </p:cNvPicPr>
+          <p:nvPr userDrawn="1"/>
+        </p:nvPicPr>
+        <p:blipFill>
+          <a:blip r:embed="rId4">
+            <a:extLst>
+              <a:ext uri="{28A0092B-C50C-407E-A947-70E740481C1C}">
+                <a14:useLocalDpi xmlns:a14="http://schemas.microsoft.com/office/drawing/2010/main" val="0"/>
+              </a:ext>
+            </a:extLst>
+          </a:blip>
+          <a:srcRect/>
+          <a:stretch>
+            <a:fillRect/>
+          </a:stretch>
+        </p:blipFill>
+        <p:spPr bwMode="auto">
+          <a:xfrm>
+            <a:off x="18045251" y="3236715"/>
+            <a:ext cx="5618166" cy="1439655"/>
+          </a:xfrm>
+          <a:prstGeom prst="rect">
+            <a:avLst/>
+          </a:prstGeom>
+          <a:noFill/>
+          <a:extLst>
+            <a:ext uri="{909E8E84-426E-40DD-AFC4-6F175D3DCCD1}">
+              <a14:hiddenFill xmlns:a14="http://schemas.microsoft.com/office/drawing/2010/main">
+                <a:solidFill>
+                  <a:srgbClr val="FFFFFF"/>
+                </a:solidFill>
+              </a14:hiddenFill>
+            </a:ext>
+          </a:extLst>
+        </p:spPr>
+      </p:pic>
     </p:spTree>
   </p:cSld>
   <p:clrMapOvr>
@@ -3234,232 +3197,6 @@
 </file>
 
 <file path=ppt/slideLayouts/slideLayout20.xml><?xml version="1.0" encoding="utf-8"?>
-<p:sldLayout xmlns:a="http://schemas.openxmlformats.org/drawingml/2006/main" xmlns:r="http://schemas.openxmlformats.org/officeDocument/2006/relationships" xmlns:p="http://schemas.openxmlformats.org/presentationml/2006/main" showMasterSp="0" type="tx">
-  <p:cSld name="2 fotos azul">
-    <p:bg>
-      <p:bgPr>
-        <a:solidFill>
-          <a:srgbClr val="3579BB"/>
-        </a:solidFill>
-        <a:effectLst/>
-      </p:bgPr>
-    </p:bg>
-    <p:spTree>
-      <p:nvGrpSpPr>
-        <p:cNvPr id="1" name=""/>
-        <p:cNvGrpSpPr/>
-        <p:nvPr/>
-      </p:nvGrpSpPr>
-      <p:grpSpPr>
-        <a:xfrm>
-          <a:off x="0" y="0"/>
-          <a:ext cx="0" cy="0"/>
-          <a:chOff x="0" y="0"/>
-          <a:chExt cx="0" cy="0"/>
-        </a:xfrm>
-      </p:grpSpPr>
-      <p:sp>
-        <p:nvSpPr>
-          <p:cNvPr id="219" name="Cuenco de ensalada con arroz frito, huevos duros y palillos"/>
-          <p:cNvSpPr>
-            <a:spLocks noGrp="1"/>
-          </p:cNvSpPr>
-          <p:nvPr>
-            <p:ph type="pic" sz="half" idx="21"/>
-          </p:nvPr>
-        </p:nvSpPr>
-        <p:spPr>
-          <a:xfrm>
-            <a:off x="12467095" y="1979684"/>
-            <a:ext cx="11454099" cy="11173104"/>
-          </a:xfrm>
-          <a:prstGeom prst="rect">
-            <a:avLst/>
-          </a:prstGeom>
-        </p:spPr>
-        <p:txBody>
-          <a:bodyPr lIns="91439" tIns="45719" rIns="91439" bIns="45719">
-            <a:noAutofit/>
-          </a:bodyPr>
-          <a:lstStyle/>
-          <a:p>
-            <a:endParaRPr/>
-          </a:p>
-        </p:txBody>
-      </p:sp>
-      <p:sp>
-        <p:nvSpPr>
-          <p:cNvPr id="220" name="Cuenco de pappardelle con mantequilla de perejil, avellanas tostadas y lascas de queso parmesano"/>
-          <p:cNvSpPr>
-            <a:spLocks noGrp="1"/>
-          </p:cNvSpPr>
-          <p:nvPr>
-            <p:ph type="pic" idx="22"/>
-          </p:nvPr>
-        </p:nvSpPr>
-        <p:spPr>
-          <a:xfrm>
-            <a:off x="-540920" y="1756648"/>
-            <a:ext cx="13400896" cy="11257884"/>
-          </a:xfrm>
-          <a:prstGeom prst="rect">
-            <a:avLst/>
-          </a:prstGeom>
-        </p:spPr>
-        <p:txBody>
-          <a:bodyPr lIns="91439" tIns="45719" rIns="91439" bIns="45719">
-            <a:noAutofit/>
-          </a:bodyPr>
-          <a:lstStyle/>
-          <a:p>
-            <a:endParaRPr/>
-          </a:p>
-        </p:txBody>
-      </p:sp>
-      <p:sp>
-        <p:nvSpPr>
-          <p:cNvPr id="221" name="Número de diapositiva"/>
-          <p:cNvSpPr txBox="1">
-            <a:spLocks noGrp="1"/>
-          </p:cNvSpPr>
-          <p:nvPr>
-            <p:ph type="sldNum" sz="quarter" idx="2"/>
-          </p:nvPr>
-        </p:nvSpPr>
-        <p:spPr>
-          <a:prstGeom prst="rect">
-            <a:avLst/>
-          </a:prstGeom>
-        </p:spPr>
-        <p:txBody>
-          <a:bodyPr/>
-          <a:lstStyle>
-            <a:lvl1pPr>
-              <a:defRPr>
-                <a:solidFill>
-                  <a:srgbClr val="D5D5D5"/>
-                </a:solidFill>
-              </a:defRPr>
-            </a:lvl1pPr>
-          </a:lstStyle>
-          <a:p>
-            <a:fld id="{86CB4B4D-7CA3-9044-876B-883B54F8677D}" type="slidenum">
-              <a:t>‹Nº›</a:t>
-            </a:fld>
-            <a:endParaRPr/>
-          </a:p>
-        </p:txBody>
-      </p:sp>
-      <p:sp>
-        <p:nvSpPr>
-          <p:cNvPr id="222" name="Título de la diapositiva"/>
-          <p:cNvSpPr txBox="1"/>
-          <p:nvPr/>
-        </p:nvSpPr>
-        <p:spPr>
-          <a:xfrm>
-            <a:off x="576297" y="715921"/>
-            <a:ext cx="9779001" cy="1435101"/>
-          </a:xfrm>
-          <a:prstGeom prst="rect">
-            <a:avLst/>
-          </a:prstGeom>
-          <a:ln w="12700">
-            <a:miter lim="400000"/>
-          </a:ln>
-          <a:extLst>
-            <a:ext uri="{C572A759-6A51-4108-AA02-DFA0A04FC94B}">
-              <ma14:wrappingTextBoxFlag xmlns="" xmlns:m="http://schemas.openxmlformats.org/officeDocument/2006/math" xmlns:a14="http://schemas.microsoft.com/office/drawing/2010/main" xmlns:ma14="http://schemas.microsoft.com/office/mac/drawingml/2011/main" val="1"/>
-            </a:ext>
-          </a:extLst>
-        </p:spPr>
-        <p:txBody>
-          <a:bodyPr lIns="50800" tIns="50800" rIns="50800" bIns="50800">
-            <a:normAutofit/>
-          </a:bodyPr>
-          <a:lstStyle>
-            <a:lvl1pPr algn="l" defTabSz="2121354">
-              <a:lnSpc>
-                <a:spcPct val="80000"/>
-              </a:lnSpc>
-              <a:defRPr sz="7394" b="1" spc="-147">
-                <a:solidFill>
-                  <a:srgbClr val="FFFFFF"/>
-                </a:solidFill>
-              </a:defRPr>
-            </a:lvl1pPr>
-          </a:lstStyle>
-          <a:p>
-            <a:r>
-              <a:t>Título de la diapositiva</a:t>
-            </a:r>
-          </a:p>
-        </p:txBody>
-      </p:sp>
-      <p:pic>
-        <p:nvPicPr>
-          <p:cNvPr id="223" name="UPC-blanc-fons-transp.png" descr="UPC-blanc-fons-transp.png"/>
-          <p:cNvPicPr>
-            <a:picLocks noChangeAspect="1"/>
-          </p:cNvPicPr>
-          <p:nvPr/>
-        </p:nvPicPr>
-        <p:blipFill>
-          <a:blip r:embed="rId2"/>
-          <a:stretch>
-            <a:fillRect/>
-          </a:stretch>
-        </p:blipFill>
-        <p:spPr>
-          <a:xfrm>
-            <a:off x="20853400" y="12661900"/>
-            <a:ext cx="3517900" cy="1054750"/>
-          </a:xfrm>
-          <a:prstGeom prst="rect">
-            <a:avLst/>
-          </a:prstGeom>
-          <a:ln w="12700">
-            <a:miter lim="400000"/>
-          </a:ln>
-        </p:spPr>
-      </p:pic>
-      <p:pic>
-        <p:nvPicPr>
-          <p:cNvPr id="224" name="TTL-logo_white.png" descr="TTL-logo_white.png"/>
-          <p:cNvPicPr>
-            <a:picLocks noChangeAspect="1"/>
-          </p:cNvPicPr>
-          <p:nvPr/>
-        </p:nvPicPr>
-        <p:blipFill>
-          <a:blip r:embed="rId3"/>
-          <a:stretch>
-            <a:fillRect/>
-          </a:stretch>
-        </p:blipFill>
-        <p:spPr>
-          <a:xfrm>
-            <a:off x="17703800" y="12801600"/>
-            <a:ext cx="3111500" cy="723456"/>
-          </a:xfrm>
-          <a:prstGeom prst="rect">
-            <a:avLst/>
-          </a:prstGeom>
-          <a:ln w="12700">
-            <a:miter lim="400000"/>
-          </a:ln>
-        </p:spPr>
-      </p:pic>
-    </p:spTree>
-  </p:cSld>
-  <p:clrMapOvr>
-    <a:masterClrMapping/>
-  </p:clrMapOvr>
-  <p:transition spd="med"/>
-</p:sldLayout>
-</file>
-
-<file path=ppt/slideLayouts/slideLayout21.xml><?xml version="1.0" encoding="utf-8"?>
 <p:sldLayout xmlns:a="http://schemas.openxmlformats.org/drawingml/2006/main" xmlns:r="http://schemas.openxmlformats.org/officeDocument/2006/relationships" xmlns:p="http://schemas.openxmlformats.org/presentationml/2006/main" showMasterSp="0" type="tx">
   <p:cSld name="Foto">
     <p:spTree>
@@ -3548,7 +3285,7 @@
 </p:sldLayout>
 </file>
 
-<file path=ppt/slideLayouts/slideLayout22.xml><?xml version="1.0" encoding="utf-8"?>
+<file path=ppt/slideLayouts/slideLayout21.xml><?xml version="1.0" encoding="utf-8"?>
 <p:sldLayout xmlns:a="http://schemas.openxmlformats.org/drawingml/2006/main" xmlns:r="http://schemas.openxmlformats.org/officeDocument/2006/relationships" xmlns:p="http://schemas.openxmlformats.org/presentationml/2006/main" showMasterSp="0" type="tx">
   <p:cSld name="Cierre">
     <p:spTree>
@@ -3567,7 +3304,7 @@
       </p:grpSpPr>
       <p:pic>
         <p:nvPicPr>
-          <p:cNvPr id="239" name="TTL-logo_color.png" descr="TTL-logo_color.png"/>
+          <p:cNvPr id="240" name="UPC-positiu-p3005.png" descr="UPC-positiu-p3005.png"/>
           <p:cNvPicPr>
             <a:picLocks noChangeAspect="1"/>
           </p:cNvPicPr>
@@ -3581,33 +3318,6 @@
         </p:blipFill>
         <p:spPr>
           <a:xfrm>
-            <a:off x="17193052" y="1061210"/>
-            <a:ext cx="5923101" cy="1488158"/>
-          </a:xfrm>
-          <a:prstGeom prst="rect">
-            <a:avLst/>
-          </a:prstGeom>
-          <a:ln w="12700">
-            <a:miter lim="400000"/>
-          </a:ln>
-        </p:spPr>
-      </p:pic>
-      <p:pic>
-        <p:nvPicPr>
-          <p:cNvPr id="240" name="UPC-positiu-p3005.png" descr="UPC-positiu-p3005.png"/>
-          <p:cNvPicPr>
-            <a:picLocks noChangeAspect="1"/>
-          </p:cNvPicPr>
-          <p:nvPr/>
-        </p:nvPicPr>
-        <p:blipFill>
-          <a:blip r:embed="rId3"/>
-          <a:stretch>
-            <a:fillRect/>
-          </a:stretch>
-        </p:blipFill>
-        <p:spPr>
-          <a:xfrm>
             <a:off x="967944" y="804729"/>
             <a:ext cx="6674319" cy="2001119"/>
           </a:xfrm>
@@ -3628,7 +3338,7 @@
           <p:nvPr/>
         </p:nvPicPr>
         <p:blipFill>
-          <a:blip r:embed="rId4"/>
+          <a:blip r:embed="rId3"/>
           <a:stretch>
             <a:fillRect/>
           </a:stretch>
@@ -3711,6 +3421,53 @@
           </a:p>
         </p:txBody>
       </p:sp>
+      <p:pic>
+        <p:nvPicPr>
+          <p:cNvPr id="3" name="Picture 2" descr="Hipoteca Caixabank - Genial Banking">
+            <a:extLst>
+              <a:ext uri="{FF2B5EF4-FFF2-40B4-BE49-F238E27FC236}">
+                <a16:creationId xmlns:a16="http://schemas.microsoft.com/office/drawing/2014/main" id="{DB1600DA-C563-4D84-2C97-9FD3A3FA804E}"/>
+              </a:ext>
+            </a:extLst>
+          </p:cNvPr>
+          <p:cNvPicPr>
+            <a:picLocks noChangeAspect="1" noChangeArrowheads="1"/>
+          </p:cNvPicPr>
+          <p:nvPr userDrawn="1"/>
+        </p:nvPicPr>
+        <p:blipFill rotWithShape="1">
+          <a:blip r:embed="rId4" cstate="print">
+            <a:extLst>
+              <a:ext uri="{28A0092B-C50C-407E-A947-70E740481C1C}">
+                <a14:useLocalDpi xmlns:a14="http://schemas.microsoft.com/office/drawing/2010/main" val="0"/>
+              </a:ext>
+            </a:extLst>
+          </a:blip>
+          <a:srcRect t="27531" b="26543"/>
+          <a:stretch>
+            <a:fillRect/>
+          </a:stretch>
+        </p:blipFill>
+        <p:spPr bwMode="auto">
+          <a:xfrm>
+            <a:off x="17218451" y="1040220"/>
+            <a:ext cx="5923101" cy="1530136"/>
+          </a:xfrm>
+          <a:prstGeom prst="rect">
+            <a:avLst/>
+          </a:prstGeom>
+          <a:noFill/>
+          <a:extLst>
+            <a:ext uri="{909E8E84-426E-40DD-AFC4-6F175D3DCCD1}">
+              <a14:hiddenFill xmlns:a14="http://schemas.microsoft.com/office/drawing/2010/main">
+                <a:solidFill>
+                  <a:srgbClr val="FFFFFF"/>
+                </a:solidFill>
+              </a14:hiddenFill>
+            </a:ext>
+          </a:extLst>
+        </p:spPr>
+      </p:pic>
     </p:spTree>
   </p:cSld>
   <p:clrMapOvr>
@@ -3720,7 +3477,7 @@
 </p:sldLayout>
 </file>
 
-<file path=ppt/slideLayouts/slideLayout23.xml><?xml version="1.0" encoding="utf-8"?>
+<file path=ppt/slideLayouts/slideLayout22.xml><?xml version="1.0" encoding="utf-8"?>
 <p:sldLayout xmlns:a="http://schemas.openxmlformats.org/drawingml/2006/main" xmlns:r="http://schemas.openxmlformats.org/officeDocument/2006/relationships" xmlns:p="http://schemas.openxmlformats.org/presentationml/2006/main" showMasterSp="0" type="tx">
   <p:cSld name="Cierre Spanish">
     <p:spTree>
@@ -3739,7 +3496,7 @@
       </p:grpSpPr>
       <p:pic>
         <p:nvPicPr>
-          <p:cNvPr id="250" name="TTL-logo_color.png" descr="TTL-logo_color.png"/>
+          <p:cNvPr id="251" name="UPC-positiu-p3005.png" descr="UPC-positiu-p3005.png"/>
           <p:cNvPicPr>
             <a:picLocks noChangeAspect="1"/>
           </p:cNvPicPr>
@@ -3747,33 +3504,6 @@
         </p:nvPicPr>
         <p:blipFill>
           <a:blip r:embed="rId2"/>
-          <a:stretch>
-            <a:fillRect/>
-          </a:stretch>
-        </p:blipFill>
-        <p:spPr>
-          <a:xfrm>
-            <a:off x="17193052" y="1061210"/>
-            <a:ext cx="5923101" cy="1488158"/>
-          </a:xfrm>
-          <a:prstGeom prst="rect">
-            <a:avLst/>
-          </a:prstGeom>
-          <a:ln w="12700">
-            <a:miter lim="400000"/>
-          </a:ln>
-        </p:spPr>
-      </p:pic>
-      <p:pic>
-        <p:nvPicPr>
-          <p:cNvPr id="251" name="UPC-positiu-p3005.png" descr="UPC-positiu-p3005.png"/>
-          <p:cNvPicPr>
-            <a:picLocks noChangeAspect="1"/>
-          </p:cNvPicPr>
-          <p:nvPr/>
-        </p:nvPicPr>
-        <p:blipFill>
-          <a:blip r:embed="rId3"/>
           <a:stretch>
             <a:fillRect/>
           </a:stretch>
@@ -3849,7 +3579,7 @@
           </a:ln>
           <a:extLst>
             <a:ext uri="{C572A759-6A51-4108-AA02-DFA0A04FC94B}">
-              <ma14:wrappingTextBoxFlag xmlns="" xmlns:m="http://schemas.openxmlformats.org/officeDocument/2006/math" xmlns:a14="http://schemas.microsoft.com/office/drawing/2010/main" xmlns:ma14="http://schemas.microsoft.com/office/mac/drawingml/2011/main" val="1"/>
+              <ma14:wrappingTextBoxFlag xmlns:ma14="http://schemas.microsoft.com/office/mac/drawingml/2011/main" xmlns:a14="http://schemas.microsoft.com/office/drawing/2010/main" xmlns:m="http://schemas.openxmlformats.org/officeDocument/2006/math" xmlns="" val="1"/>
             </a:ext>
           </a:extLst>
         </p:spPr>
@@ -3903,6 +3633,53 @@
           </a:p>
         </p:txBody>
       </p:sp>
+      <p:pic>
+        <p:nvPicPr>
+          <p:cNvPr id="2" name="Picture 2" descr="Hipoteca Caixabank - Genial Banking">
+            <a:extLst>
+              <a:ext uri="{FF2B5EF4-FFF2-40B4-BE49-F238E27FC236}">
+                <a16:creationId xmlns:a16="http://schemas.microsoft.com/office/drawing/2014/main" id="{72C01F63-C0F9-274C-2FDC-FC80FFDF242D}"/>
+              </a:ext>
+            </a:extLst>
+          </p:cNvPr>
+          <p:cNvPicPr>
+            <a:picLocks noChangeAspect="1" noChangeArrowheads="1"/>
+          </p:cNvPicPr>
+          <p:nvPr userDrawn="1"/>
+        </p:nvPicPr>
+        <p:blipFill rotWithShape="1">
+          <a:blip r:embed="rId3" cstate="print">
+            <a:extLst>
+              <a:ext uri="{28A0092B-C50C-407E-A947-70E740481C1C}">
+                <a14:useLocalDpi xmlns:a14="http://schemas.microsoft.com/office/drawing/2010/main" val="0"/>
+              </a:ext>
+            </a:extLst>
+          </a:blip>
+          <a:srcRect t="27531" b="26543"/>
+          <a:stretch>
+            <a:fillRect/>
+          </a:stretch>
+        </p:blipFill>
+        <p:spPr bwMode="auto">
+          <a:xfrm>
+            <a:off x="17218451" y="1040220"/>
+            <a:ext cx="5923101" cy="1530136"/>
+          </a:xfrm>
+          <a:prstGeom prst="rect">
+            <a:avLst/>
+          </a:prstGeom>
+          <a:noFill/>
+          <a:extLst>
+            <a:ext uri="{909E8E84-426E-40DD-AFC4-6F175D3DCCD1}">
+              <a14:hiddenFill xmlns:a14="http://schemas.microsoft.com/office/drawing/2010/main">
+                <a:solidFill>
+                  <a:srgbClr val="FFFFFF"/>
+                </a:solidFill>
+              </a14:hiddenFill>
+            </a:ext>
+          </a:extLst>
+        </p:spPr>
+      </p:pic>
     </p:spTree>
   </p:cSld>
   <p:clrMapOvr>
@@ -3928,7 +3705,7 @@
 </p:sldLayout>
 </file>
 
-<file path=ppt/slideLayouts/slideLayout24.xml><?xml version="1.0" encoding="utf-8"?>
+<file path=ppt/slideLayouts/slideLayout23.xml><?xml version="1.0" encoding="utf-8"?>
 <p:sldLayout xmlns:a="http://schemas.openxmlformats.org/drawingml/2006/main" xmlns:r="http://schemas.openxmlformats.org/officeDocument/2006/relationships" xmlns:p="http://schemas.openxmlformats.org/presentationml/2006/main" showMasterSp="0" type="tx">
   <p:cSld name="Cierre azul">
     <p:bg>
@@ -4050,33 +3827,6 @@
           </a:ln>
         </p:spPr>
       </p:pic>
-      <p:pic>
-        <p:nvPicPr>
-          <p:cNvPr id="264" name="TTL-logo_white.png" descr="TTL-logo_white.png"/>
-          <p:cNvPicPr>
-            <a:picLocks noChangeAspect="1"/>
-          </p:cNvPicPr>
-          <p:nvPr/>
-        </p:nvPicPr>
-        <p:blipFill>
-          <a:blip r:embed="rId4"/>
-          <a:stretch>
-            <a:fillRect/>
-          </a:stretch>
-        </p:blipFill>
-        <p:spPr>
-          <a:xfrm>
-            <a:off x="17195800" y="1129148"/>
-            <a:ext cx="5816006" cy="1352282"/>
-          </a:xfrm>
-          <a:prstGeom prst="rect">
-            <a:avLst/>
-          </a:prstGeom>
-          <a:ln w="12700">
-            <a:miter lim="400000"/>
-          </a:ln>
-        </p:spPr>
-      </p:pic>
       <p:sp>
         <p:nvSpPr>
           <p:cNvPr id="265" name="Número de diapositiva"/>
@@ -4103,6 +3853,53 @@
           </a:p>
         </p:txBody>
       </p:sp>
+      <p:pic>
+        <p:nvPicPr>
+          <p:cNvPr id="2" name="Picture 2" descr="Industry Office - Industry Office - Connecting Science &amp; Industry">
+            <a:extLst>
+              <a:ext uri="{FF2B5EF4-FFF2-40B4-BE49-F238E27FC236}">
+                <a16:creationId xmlns:a16="http://schemas.microsoft.com/office/drawing/2014/main" id="{0BA7670F-8B53-2BE7-9E8F-36267782545B}"/>
+              </a:ext>
+            </a:extLst>
+          </p:cNvPr>
+          <p:cNvPicPr>
+            <a:picLocks noChangeAspect="1" noChangeArrowheads="1"/>
+          </p:cNvPicPr>
+          <p:nvPr userDrawn="1"/>
+        </p:nvPicPr>
+        <p:blipFill>
+          <a:blip r:embed="rId4">
+            <a:extLst>
+              <a:ext uri="{28A0092B-C50C-407E-A947-70E740481C1C}">
+                <a14:useLocalDpi xmlns:a14="http://schemas.microsoft.com/office/drawing/2010/main" val="0"/>
+              </a:ext>
+            </a:extLst>
+          </a:blip>
+          <a:srcRect/>
+          <a:stretch>
+            <a:fillRect/>
+          </a:stretch>
+        </p:blipFill>
+        <p:spPr bwMode="auto">
+          <a:xfrm>
+            <a:off x="17430750" y="1060112"/>
+            <a:ext cx="5816006" cy="1490351"/>
+          </a:xfrm>
+          <a:prstGeom prst="rect">
+            <a:avLst/>
+          </a:prstGeom>
+          <a:noFill/>
+          <a:extLst>
+            <a:ext uri="{909E8E84-426E-40DD-AFC4-6F175D3DCCD1}">
+              <a14:hiddenFill xmlns:a14="http://schemas.microsoft.com/office/drawing/2010/main">
+                <a:solidFill>
+                  <a:srgbClr val="FFFFFF"/>
+                </a:solidFill>
+              </a14:hiddenFill>
+            </a:ext>
+          </a:extLst>
+        </p:spPr>
+      </p:pic>
     </p:spTree>
   </p:cSld>
   <p:clrMapOvr>
@@ -4112,7 +3909,7 @@
 </p:sldLayout>
 </file>
 
-<file path=ppt/slideLayouts/slideLayout25.xml><?xml version="1.0" encoding="utf-8"?>
+<file path=ppt/slideLayouts/slideLayout24.xml><?xml version="1.0" encoding="utf-8"?>
 <p:sldLayout xmlns:a="http://schemas.openxmlformats.org/drawingml/2006/main" xmlns:r="http://schemas.openxmlformats.org/officeDocument/2006/relationships" xmlns:p="http://schemas.openxmlformats.org/presentationml/2006/main" showMasterSp="0" type="tx">
   <p:cSld name="Cierre azul Spanish">
     <p:bg>
@@ -4175,8 +3972,18 @@
           </a:lstStyle>
           <a:p>
             <a:r>
-              <a:t>Título de la diapositiva</a:t>
+              <a:rPr dirty="0" err="1"/>
+              <a:t>Título</a:t>
             </a:r>
+            <a:r>
+              <a:rPr dirty="0"/>
+              <a:t> de la </a:t>
+            </a:r>
+            <a:r>
+              <a:rPr dirty="0" err="1"/>
+              <a:t>diapositiva</a:t>
+            </a:r>
+            <a:endParaRPr dirty="0"/>
           </a:p>
         </p:txBody>
       </p:sp>
@@ -4207,33 +4014,6 @@
           </a:ln>
         </p:spPr>
       </p:pic>
-      <p:pic>
-        <p:nvPicPr>
-          <p:cNvPr id="274" name="TTL-logo_white.png" descr="TTL-logo_white.png"/>
-          <p:cNvPicPr>
-            <a:picLocks noChangeAspect="1"/>
-          </p:cNvPicPr>
-          <p:nvPr/>
-        </p:nvPicPr>
-        <p:blipFill>
-          <a:blip r:embed="rId3"/>
-          <a:stretch>
-            <a:fillRect/>
-          </a:stretch>
-        </p:blipFill>
-        <p:spPr>
-          <a:xfrm>
-            <a:off x="17195800" y="1129148"/>
-            <a:ext cx="5816006" cy="1352282"/>
-          </a:xfrm>
-          <a:prstGeom prst="rect">
-            <a:avLst/>
-          </a:prstGeom>
-          <a:ln w="12700">
-            <a:miter lim="400000"/>
-          </a:ln>
-        </p:spPr>
-      </p:pic>
       <p:sp>
         <p:nvSpPr>
           <p:cNvPr id="275" name="¡Gracias!"/>
@@ -4253,7 +4033,7 @@
           </a:ln>
           <a:extLst>
             <a:ext uri="{C572A759-6A51-4108-AA02-DFA0A04FC94B}">
-              <ma14:wrappingTextBoxFlag xmlns="" xmlns:m="http://schemas.openxmlformats.org/officeDocument/2006/math" xmlns:a14="http://schemas.microsoft.com/office/drawing/2010/main" xmlns:ma14="http://schemas.microsoft.com/office/mac/drawingml/2011/main" val="1"/>
+              <ma14:wrappingTextBoxFlag xmlns:ma14="http://schemas.microsoft.com/office/mac/drawingml/2011/main" xmlns:a14="http://schemas.microsoft.com/office/drawing/2010/main" xmlns:m="http://schemas.openxmlformats.org/officeDocument/2006/math" xmlns="" val="1"/>
             </a:ext>
           </a:extLst>
         </p:spPr>
@@ -4308,6 +4088,53 @@
           </a:p>
         </p:txBody>
       </p:sp>
+      <p:pic>
+        <p:nvPicPr>
+          <p:cNvPr id="2" name="Picture 2" descr="Industry Office - Industry Office - Connecting Science &amp; Industry">
+            <a:extLst>
+              <a:ext uri="{FF2B5EF4-FFF2-40B4-BE49-F238E27FC236}">
+                <a16:creationId xmlns:a16="http://schemas.microsoft.com/office/drawing/2014/main" id="{884FE520-0349-B1EA-C51F-A94D7F4EE19C}"/>
+              </a:ext>
+            </a:extLst>
+          </p:cNvPr>
+          <p:cNvPicPr>
+            <a:picLocks noChangeAspect="1" noChangeArrowheads="1"/>
+          </p:cNvPicPr>
+          <p:nvPr userDrawn="1"/>
+        </p:nvPicPr>
+        <p:blipFill>
+          <a:blip r:embed="rId3">
+            <a:extLst>
+              <a:ext uri="{28A0092B-C50C-407E-A947-70E740481C1C}">
+                <a14:useLocalDpi xmlns:a14="http://schemas.microsoft.com/office/drawing/2010/main" val="0"/>
+              </a:ext>
+            </a:extLst>
+          </a:blip>
+          <a:srcRect/>
+          <a:stretch>
+            <a:fillRect/>
+          </a:stretch>
+        </p:blipFill>
+        <p:spPr bwMode="auto">
+          <a:xfrm>
+            <a:off x="17430750" y="1060112"/>
+            <a:ext cx="5816006" cy="1490351"/>
+          </a:xfrm>
+          <a:prstGeom prst="rect">
+            <a:avLst/>
+          </a:prstGeom>
+          <a:noFill/>
+          <a:extLst>
+            <a:ext uri="{909E8E84-426E-40DD-AFC4-6F175D3DCCD1}">
+              <a14:hiddenFill xmlns:a14="http://schemas.microsoft.com/office/drawing/2010/main">
+                <a:solidFill>
+                  <a:srgbClr val="FFFFFF"/>
+                </a:solidFill>
+              </a14:hiddenFill>
+            </a:ext>
+          </a:extLst>
+        </p:spPr>
+      </p:pic>
     </p:spTree>
   </p:cSld>
   <p:clrMapOvr>
@@ -4333,1194 +4160,7 @@
 </p:sldLayout>
 </file>
 
-<file path=ppt/slideLayouts/slideLayout26.xml><?xml version="1.0" encoding="utf-8"?>
-<p:sldLayout xmlns:a="http://schemas.openxmlformats.org/drawingml/2006/main" xmlns:r="http://schemas.openxmlformats.org/officeDocument/2006/relationships" xmlns:p="http://schemas.openxmlformats.org/presentationml/2006/main" showMasterSp="0" type="tx">
-  <p:cSld name="TITLE_AND_BODY">
-    <p:spTree>
-      <p:nvGrpSpPr>
-        <p:cNvPr id="1" name=""/>
-        <p:cNvGrpSpPr/>
-        <p:nvPr/>
-      </p:nvGrpSpPr>
-      <p:grpSpPr>
-        <a:xfrm>
-          <a:off x="0" y="0"/>
-          <a:ext cx="0" cy="0"/>
-          <a:chOff x="0" y="0"/>
-          <a:chExt cx="0" cy="0"/>
-        </a:xfrm>
-      </p:grpSpPr>
-      <p:sp>
-        <p:nvSpPr>
-          <p:cNvPr id="283" name="Texto del título"/>
-          <p:cNvSpPr txBox="1">
-            <a:spLocks noGrp="1"/>
-          </p:cNvSpPr>
-          <p:nvPr>
-            <p:ph type="title"/>
-          </p:nvPr>
-        </p:nvSpPr>
-        <p:spPr>
-          <a:xfrm>
-            <a:off x="831199" y="1186733"/>
-            <a:ext cx="22721602" cy="1527201"/>
-          </a:xfrm>
-          <a:prstGeom prst="rect">
-            <a:avLst/>
-          </a:prstGeom>
-        </p:spPr>
-        <p:txBody>
-          <a:bodyPr lIns="243799" tIns="243799" rIns="243799" bIns="243799"/>
-          <a:lstStyle>
-            <a:lvl1pPr defTabSz="2438400">
-              <a:lnSpc>
-                <a:spcPct val="100000"/>
-              </a:lnSpc>
-              <a:defRPr sz="7400" b="0" spc="0">
-                <a:latin typeface="Arial"/>
-                <a:ea typeface="Arial"/>
-                <a:cs typeface="Arial"/>
-                <a:sym typeface="Arial"/>
-              </a:defRPr>
-            </a:lvl1pPr>
-          </a:lstStyle>
-          <a:p>
-            <a:r>
-              <a:t>Texto del título</a:t>
-            </a:r>
-          </a:p>
-        </p:txBody>
-      </p:sp>
-      <p:sp>
-        <p:nvSpPr>
-          <p:cNvPr id="284" name="Nivel de texto 1…"/>
-          <p:cNvSpPr txBox="1">
-            <a:spLocks noGrp="1"/>
-          </p:cNvSpPr>
-          <p:nvPr>
-            <p:ph type="body" idx="1"/>
-          </p:nvPr>
-        </p:nvSpPr>
-        <p:spPr>
-          <a:xfrm>
-            <a:off x="831199" y="3073266"/>
-            <a:ext cx="22721602" cy="9110401"/>
-          </a:xfrm>
-          <a:prstGeom prst="rect">
-            <a:avLst/>
-          </a:prstGeom>
-        </p:spPr>
-        <p:txBody>
-          <a:bodyPr lIns="243799" tIns="243799" rIns="243799" bIns="243799"/>
-          <a:lstStyle>
-            <a:lvl1pPr marL="1028700" indent="-914400" defTabSz="2438400">
-              <a:lnSpc>
-                <a:spcPct val="115000"/>
-              </a:lnSpc>
-              <a:spcBef>
-                <a:spcPts val="0"/>
-              </a:spcBef>
-              <a:buClr>
-                <a:srgbClr val="595959"/>
-              </a:buClr>
-              <a:buSzPts val="4800"/>
-              <a:buFont typeface="Arial"/>
-              <a:buChar char="●"/>
-              <a:defRPr>
-                <a:solidFill>
-                  <a:srgbClr val="595959"/>
-                </a:solidFill>
-                <a:latin typeface="Arial"/>
-                <a:ea typeface="Arial"/>
-                <a:cs typeface="Arial"/>
-                <a:sym typeface="Arial"/>
-              </a:defRPr>
-            </a:lvl1pPr>
-            <a:lvl2pPr marL="1685471" indent="-1088571" defTabSz="2438400">
-              <a:lnSpc>
-                <a:spcPct val="115000"/>
-              </a:lnSpc>
-              <a:spcBef>
-                <a:spcPts val="0"/>
-              </a:spcBef>
-              <a:buClr>
-                <a:srgbClr val="595959"/>
-              </a:buClr>
-              <a:buSzPts val="4800"/>
-              <a:buFont typeface="Arial"/>
-              <a:buChar char="○"/>
-              <a:defRPr>
-                <a:solidFill>
-                  <a:srgbClr val="595959"/>
-                </a:solidFill>
-                <a:latin typeface="Arial"/>
-                <a:ea typeface="Arial"/>
-                <a:cs typeface="Arial"/>
-                <a:sym typeface="Arial"/>
-              </a:defRPr>
-            </a:lvl2pPr>
-            <a:lvl3pPr marL="2142671" indent="-1088571" defTabSz="2438400">
-              <a:lnSpc>
-                <a:spcPct val="115000"/>
-              </a:lnSpc>
-              <a:spcBef>
-                <a:spcPts val="0"/>
-              </a:spcBef>
-              <a:buClr>
-                <a:srgbClr val="595959"/>
-              </a:buClr>
-              <a:buSzPts val="4800"/>
-              <a:buFont typeface="Arial"/>
-              <a:buChar char="■"/>
-              <a:defRPr>
-                <a:solidFill>
-                  <a:srgbClr val="595959"/>
-                </a:solidFill>
-                <a:latin typeface="Arial"/>
-                <a:ea typeface="Arial"/>
-                <a:cs typeface="Arial"/>
-                <a:sym typeface="Arial"/>
-              </a:defRPr>
-            </a:lvl3pPr>
-            <a:lvl4pPr marL="2599871" indent="-1088571" defTabSz="2438400">
-              <a:lnSpc>
-                <a:spcPct val="115000"/>
-              </a:lnSpc>
-              <a:spcBef>
-                <a:spcPts val="0"/>
-              </a:spcBef>
-              <a:buClr>
-                <a:srgbClr val="595959"/>
-              </a:buClr>
-              <a:buSzPts val="4800"/>
-              <a:buFont typeface="Arial"/>
-              <a:buChar char="●"/>
-              <a:defRPr>
-                <a:solidFill>
-                  <a:srgbClr val="595959"/>
-                </a:solidFill>
-                <a:latin typeface="Arial"/>
-                <a:ea typeface="Arial"/>
-                <a:cs typeface="Arial"/>
-                <a:sym typeface="Arial"/>
-              </a:defRPr>
-            </a:lvl4pPr>
-            <a:lvl5pPr marL="3057071" indent="-1088571" defTabSz="2438400">
-              <a:lnSpc>
-                <a:spcPct val="115000"/>
-              </a:lnSpc>
-              <a:spcBef>
-                <a:spcPts val="0"/>
-              </a:spcBef>
-              <a:buClr>
-                <a:srgbClr val="595959"/>
-              </a:buClr>
-              <a:buSzPts val="4800"/>
-              <a:buFont typeface="Arial"/>
-              <a:buChar char="○"/>
-              <a:defRPr>
-                <a:solidFill>
-                  <a:srgbClr val="595959"/>
-                </a:solidFill>
-                <a:latin typeface="Arial"/>
-                <a:ea typeface="Arial"/>
-                <a:cs typeface="Arial"/>
-                <a:sym typeface="Arial"/>
-              </a:defRPr>
-            </a:lvl5pPr>
-          </a:lstStyle>
-          <a:p>
-            <a:r>
-              <a:t>Nivel de texto 1</a:t>
-            </a:r>
-          </a:p>
-          <a:p>
-            <a:pPr lvl="1"/>
-            <a:r>
-              <a:t>Nivel de texto 2</a:t>
-            </a:r>
-          </a:p>
-          <a:p>
-            <a:pPr lvl="2"/>
-            <a:r>
-              <a:t>Nivel de texto 3</a:t>
-            </a:r>
-          </a:p>
-          <a:p>
-            <a:pPr lvl="3"/>
-            <a:r>
-              <a:t>Nivel de texto 4</a:t>
-            </a:r>
-          </a:p>
-          <a:p>
-            <a:pPr lvl="4"/>
-            <a:r>
-              <a:t>Nivel de texto 5</a:t>
-            </a:r>
-          </a:p>
-        </p:txBody>
-      </p:sp>
-      <p:sp>
-        <p:nvSpPr>
-          <p:cNvPr id="285" name="Número de diapositiva"/>
-          <p:cNvSpPr txBox="1">
-            <a:spLocks noGrp="1"/>
-          </p:cNvSpPr>
-          <p:nvPr>
-            <p:ph type="sldNum" sz="quarter" idx="2"/>
-          </p:nvPr>
-        </p:nvSpPr>
-        <p:spPr>
-          <a:xfrm>
-            <a:off x="23188838" y="12524796"/>
-            <a:ext cx="867584" cy="870499"/>
-          </a:xfrm>
-          <a:prstGeom prst="rect">
-            <a:avLst/>
-          </a:prstGeom>
-        </p:spPr>
-        <p:txBody>
-          <a:bodyPr lIns="243799" tIns="243799" rIns="243799" bIns="243799" anchor="ctr">
-            <a:normAutofit/>
-          </a:bodyPr>
-          <a:lstStyle>
-            <a:lvl1pPr algn="r" defTabSz="2438400">
-              <a:defRPr sz="2600">
-                <a:solidFill>
-                  <a:srgbClr val="595959"/>
-                </a:solidFill>
-                <a:latin typeface="Arial"/>
-                <a:ea typeface="Arial"/>
-                <a:cs typeface="Arial"/>
-                <a:sym typeface="Arial"/>
-              </a:defRPr>
-            </a:lvl1pPr>
-          </a:lstStyle>
-          <a:p>
-            <a:fld id="{86CB4B4D-7CA3-9044-876B-883B54F8677D}" type="slidenum">
-              <a:t>‹Nº›</a:t>
-            </a:fld>
-            <a:endParaRPr/>
-          </a:p>
-        </p:txBody>
-      </p:sp>
-    </p:spTree>
-  </p:cSld>
-  <p:clrMapOvr>
-    <a:masterClrMapping/>
-  </p:clrMapOvr>
-  <p:transition spd="med"/>
-</p:sldLayout>
-</file>
-
-<file path=ppt/slideLayouts/slideLayout27.xml><?xml version="1.0" encoding="utf-8"?>
-<p:sldLayout xmlns:a="http://schemas.openxmlformats.org/drawingml/2006/main" xmlns:r="http://schemas.openxmlformats.org/officeDocument/2006/relationships" xmlns:p="http://schemas.openxmlformats.org/presentationml/2006/main" showMasterSp="0" type="tx">
-  <p:cSld name="SECTION_HEADER">
-    <p:spTree>
-      <p:nvGrpSpPr>
-        <p:cNvPr id="1" name=""/>
-        <p:cNvGrpSpPr/>
-        <p:nvPr/>
-      </p:nvGrpSpPr>
-      <p:grpSpPr>
-        <a:xfrm>
-          <a:off x="0" y="0"/>
-          <a:ext cx="0" cy="0"/>
-          <a:chOff x="0" y="0"/>
-          <a:chExt cx="0" cy="0"/>
-        </a:xfrm>
-      </p:grpSpPr>
-      <p:sp>
-        <p:nvSpPr>
-          <p:cNvPr id="292" name="Texto del título"/>
-          <p:cNvSpPr txBox="1">
-            <a:spLocks noGrp="1"/>
-          </p:cNvSpPr>
-          <p:nvPr>
-            <p:ph type="title"/>
-          </p:nvPr>
-        </p:nvSpPr>
-        <p:spPr>
-          <a:xfrm>
-            <a:off x="831199" y="5735599"/>
-            <a:ext cx="22721602" cy="2244801"/>
-          </a:xfrm>
-          <a:prstGeom prst="rect">
-            <a:avLst/>
-          </a:prstGeom>
-        </p:spPr>
-        <p:txBody>
-          <a:bodyPr lIns="243799" tIns="243799" rIns="243799" bIns="243799" anchor="ctr"/>
-          <a:lstStyle>
-            <a:lvl1pPr algn="ctr" defTabSz="2438400">
-              <a:lnSpc>
-                <a:spcPct val="100000"/>
-              </a:lnSpc>
-              <a:defRPr sz="9600" b="0" spc="0">
-                <a:latin typeface="Arial"/>
-                <a:ea typeface="Arial"/>
-                <a:cs typeface="Arial"/>
-                <a:sym typeface="Arial"/>
-              </a:defRPr>
-            </a:lvl1pPr>
-          </a:lstStyle>
-          <a:p>
-            <a:r>
-              <a:t>Texto del título</a:t>
-            </a:r>
-          </a:p>
-        </p:txBody>
-      </p:sp>
-      <p:sp>
-        <p:nvSpPr>
-          <p:cNvPr id="293" name="Número de diapositiva"/>
-          <p:cNvSpPr txBox="1">
-            <a:spLocks noGrp="1"/>
-          </p:cNvSpPr>
-          <p:nvPr>
-            <p:ph type="sldNum" sz="quarter" idx="2"/>
-          </p:nvPr>
-        </p:nvSpPr>
-        <p:spPr>
-          <a:xfrm>
-            <a:off x="23188838" y="12524796"/>
-            <a:ext cx="867584" cy="870499"/>
-          </a:xfrm>
-          <a:prstGeom prst="rect">
-            <a:avLst/>
-          </a:prstGeom>
-        </p:spPr>
-        <p:txBody>
-          <a:bodyPr lIns="243799" tIns="243799" rIns="243799" bIns="243799" anchor="ctr">
-            <a:normAutofit/>
-          </a:bodyPr>
-          <a:lstStyle>
-            <a:lvl1pPr algn="r" defTabSz="2438400">
-              <a:defRPr sz="2600">
-                <a:solidFill>
-                  <a:srgbClr val="595959"/>
-                </a:solidFill>
-                <a:latin typeface="Arial"/>
-                <a:ea typeface="Arial"/>
-                <a:cs typeface="Arial"/>
-                <a:sym typeface="Arial"/>
-              </a:defRPr>
-            </a:lvl1pPr>
-          </a:lstStyle>
-          <a:p>
-            <a:fld id="{86CB4B4D-7CA3-9044-876B-883B54F8677D}" type="slidenum">
-              <a:t>‹Nº›</a:t>
-            </a:fld>
-            <a:endParaRPr/>
-          </a:p>
-        </p:txBody>
-      </p:sp>
-    </p:spTree>
-  </p:cSld>
-  <p:clrMapOvr>
-    <a:masterClrMapping/>
-  </p:clrMapOvr>
-  <p:transition spd="med"/>
-</p:sldLayout>
-</file>
-
-<file path=ppt/slideLayouts/slideLayout28.xml><?xml version="1.0" encoding="utf-8"?>
-<p:sldLayout xmlns:a="http://schemas.openxmlformats.org/drawingml/2006/main" xmlns:r="http://schemas.openxmlformats.org/officeDocument/2006/relationships" xmlns:p="http://schemas.openxmlformats.org/presentationml/2006/main" showMasterSp="0" type="tx">
-  <p:cSld name="Título">
-    <p:spTree>
-      <p:nvGrpSpPr>
-        <p:cNvPr id="1" name=""/>
-        <p:cNvGrpSpPr/>
-        <p:nvPr/>
-      </p:nvGrpSpPr>
-      <p:grpSpPr>
-        <a:xfrm>
-          <a:off x="0" y="0"/>
-          <a:ext cx="0" cy="0"/>
-          <a:chOff x="0" y="0"/>
-          <a:chExt cx="0" cy="0"/>
-        </a:xfrm>
-      </p:grpSpPr>
-      <p:sp>
-        <p:nvSpPr>
-          <p:cNvPr id="300" name="Texto del título"/>
-          <p:cNvSpPr txBox="1">
-            <a:spLocks noGrp="1"/>
-          </p:cNvSpPr>
-          <p:nvPr>
-            <p:ph type="title"/>
-          </p:nvPr>
-        </p:nvSpPr>
-        <p:spPr>
-          <a:xfrm>
-            <a:off x="767999" y="623999"/>
-            <a:ext cx="22848002" cy="1536801"/>
-          </a:xfrm>
-          <a:prstGeom prst="rect">
-            <a:avLst/>
-          </a:prstGeom>
-        </p:spPr>
-        <p:txBody>
-          <a:bodyPr lIns="0" tIns="0" rIns="0" bIns="0" anchor="ctr"/>
-          <a:lstStyle>
-            <a:lvl1pPr defTabSz="2438400">
-              <a:lnSpc>
-                <a:spcPct val="90000"/>
-              </a:lnSpc>
-              <a:defRPr sz="6400" b="0" spc="0"/>
-            </a:lvl1pPr>
-          </a:lstStyle>
-          <a:p>
-            <a:r>
-              <a:t>Texto del título</a:t>
-            </a:r>
-          </a:p>
-        </p:txBody>
-      </p:sp>
-      <p:sp>
-        <p:nvSpPr>
-          <p:cNvPr id="301" name="Número de diapositiva"/>
-          <p:cNvSpPr txBox="1">
-            <a:spLocks noGrp="1"/>
-          </p:cNvSpPr>
-          <p:nvPr>
-            <p:ph type="sldNum" sz="quarter" idx="2"/>
-          </p:nvPr>
-        </p:nvSpPr>
-        <p:spPr>
-          <a:xfrm>
-            <a:off x="766231" y="12783698"/>
-            <a:ext cx="379984" cy="382899"/>
-          </a:xfrm>
-          <a:prstGeom prst="rect">
-            <a:avLst/>
-          </a:prstGeom>
-        </p:spPr>
-        <p:txBody>
-          <a:bodyPr lIns="0" tIns="0" rIns="0" bIns="0" anchor="ctr">
-            <a:normAutofit/>
-          </a:bodyPr>
-          <a:lstStyle>
-            <a:lvl1pPr algn="l" defTabSz="2438400">
-              <a:defRPr sz="2600">
-                <a:solidFill>
-                  <a:srgbClr val="595959"/>
-                </a:solidFill>
-                <a:latin typeface="Arial"/>
-                <a:ea typeface="Arial"/>
-                <a:cs typeface="Arial"/>
-                <a:sym typeface="Arial"/>
-              </a:defRPr>
-            </a:lvl1pPr>
-          </a:lstStyle>
-          <a:p>
-            <a:fld id="{86CB4B4D-7CA3-9044-876B-883B54F8677D}" type="slidenum">
-              <a:t>‹Nº›</a:t>
-            </a:fld>
-            <a:endParaRPr/>
-          </a:p>
-        </p:txBody>
-      </p:sp>
-    </p:spTree>
-  </p:cSld>
-  <p:clrMapOvr>
-    <a:masterClrMapping/>
-  </p:clrMapOvr>
-  <p:transition spd="med"/>
-</p:sldLayout>
-</file>
-
-<file path=ppt/slideLayouts/slideLayout29.xml><?xml version="1.0" encoding="utf-8"?>
-<p:sldLayout xmlns:a="http://schemas.openxmlformats.org/drawingml/2006/main" xmlns:r="http://schemas.openxmlformats.org/officeDocument/2006/relationships" xmlns:p="http://schemas.openxmlformats.org/presentationml/2006/main" showMasterSp="0" type="tx">
-  <p:cSld name="2_Título y objetos con foto_2_2_3_1_3">
-    <p:spTree>
-      <p:nvGrpSpPr>
-        <p:cNvPr id="1" name=""/>
-        <p:cNvGrpSpPr/>
-        <p:nvPr/>
-      </p:nvGrpSpPr>
-      <p:grpSpPr>
-        <a:xfrm>
-          <a:off x="0" y="0"/>
-          <a:ext cx="0" cy="0"/>
-          <a:chOff x="0" y="0"/>
-          <a:chExt cx="0" cy="0"/>
-        </a:xfrm>
-      </p:grpSpPr>
-      <p:sp>
-        <p:nvSpPr>
-          <p:cNvPr id="308" name="Nivel de texto 1…"/>
-          <p:cNvSpPr txBox="1">
-            <a:spLocks noGrp="1"/>
-          </p:cNvSpPr>
-          <p:nvPr>
-            <p:ph type="body" sz="half" idx="1"/>
-          </p:nvPr>
-        </p:nvSpPr>
-        <p:spPr>
-          <a:xfrm>
-            <a:off x="600132" y="2743199"/>
-            <a:ext cx="13542403" cy="9041601"/>
-          </a:xfrm>
-          <a:prstGeom prst="rect">
-            <a:avLst/>
-          </a:prstGeom>
-        </p:spPr>
-        <p:txBody>
-          <a:bodyPr lIns="143999" tIns="143999" rIns="143999" bIns="143999"/>
-          <a:lstStyle>
-            <a:lvl1pPr marL="1028700" indent="-914400" defTabSz="2438400">
-              <a:lnSpc>
-                <a:spcPct val="100000"/>
-              </a:lnSpc>
-              <a:spcBef>
-                <a:spcPts val="1300"/>
-              </a:spcBef>
-              <a:buClr>
-                <a:srgbClr val="595959"/>
-              </a:buClr>
-              <a:buSzPts val="4800"/>
-              <a:buFont typeface="Arial"/>
-              <a:buChar char="●"/>
-              <a:defRPr>
-                <a:solidFill>
-                  <a:srgbClr val="595959"/>
-                </a:solidFill>
-                <a:latin typeface="Arial"/>
-                <a:ea typeface="Arial"/>
-                <a:cs typeface="Arial"/>
-                <a:sym typeface="Arial"/>
-              </a:defRPr>
-            </a:lvl1pPr>
-            <a:lvl2pPr marL="1685471" indent="-1088571" defTabSz="2438400">
-              <a:lnSpc>
-                <a:spcPct val="100000"/>
-              </a:lnSpc>
-              <a:spcBef>
-                <a:spcPts val="1300"/>
-              </a:spcBef>
-              <a:buClr>
-                <a:srgbClr val="595959"/>
-              </a:buClr>
-              <a:buSzPts val="4800"/>
-              <a:buFont typeface="Arial"/>
-              <a:buChar char="○"/>
-              <a:defRPr>
-                <a:solidFill>
-                  <a:srgbClr val="595959"/>
-                </a:solidFill>
-                <a:latin typeface="Arial"/>
-                <a:ea typeface="Arial"/>
-                <a:cs typeface="Arial"/>
-                <a:sym typeface="Arial"/>
-              </a:defRPr>
-            </a:lvl2pPr>
-            <a:lvl3pPr marL="2142671" indent="-1088571" defTabSz="2438400">
-              <a:lnSpc>
-                <a:spcPct val="100000"/>
-              </a:lnSpc>
-              <a:spcBef>
-                <a:spcPts val="1300"/>
-              </a:spcBef>
-              <a:buClr>
-                <a:srgbClr val="595959"/>
-              </a:buClr>
-              <a:buSzPts val="4800"/>
-              <a:buFont typeface="Arial"/>
-              <a:buChar char="■"/>
-              <a:defRPr>
-                <a:solidFill>
-                  <a:srgbClr val="595959"/>
-                </a:solidFill>
-                <a:latin typeface="Arial"/>
-                <a:ea typeface="Arial"/>
-                <a:cs typeface="Arial"/>
-                <a:sym typeface="Arial"/>
-              </a:defRPr>
-            </a:lvl3pPr>
-            <a:lvl4pPr marL="2599871" indent="-1088571" defTabSz="2438400">
-              <a:lnSpc>
-                <a:spcPct val="100000"/>
-              </a:lnSpc>
-              <a:spcBef>
-                <a:spcPts val="1300"/>
-              </a:spcBef>
-              <a:buClr>
-                <a:srgbClr val="595959"/>
-              </a:buClr>
-              <a:buSzPts val="4800"/>
-              <a:buFont typeface="Arial"/>
-              <a:buChar char="●"/>
-              <a:defRPr>
-                <a:solidFill>
-                  <a:srgbClr val="595959"/>
-                </a:solidFill>
-                <a:latin typeface="Arial"/>
-                <a:ea typeface="Arial"/>
-                <a:cs typeface="Arial"/>
-                <a:sym typeface="Arial"/>
-              </a:defRPr>
-            </a:lvl4pPr>
-            <a:lvl5pPr marL="3057071" indent="-1088571" defTabSz="2438400">
-              <a:lnSpc>
-                <a:spcPct val="100000"/>
-              </a:lnSpc>
-              <a:spcBef>
-                <a:spcPts val="1300"/>
-              </a:spcBef>
-              <a:buClr>
-                <a:srgbClr val="595959"/>
-              </a:buClr>
-              <a:buSzPts val="4800"/>
-              <a:buFont typeface="Arial"/>
-              <a:buChar char="○"/>
-              <a:defRPr>
-                <a:solidFill>
-                  <a:srgbClr val="595959"/>
-                </a:solidFill>
-                <a:latin typeface="Arial"/>
-                <a:ea typeface="Arial"/>
-                <a:cs typeface="Arial"/>
-                <a:sym typeface="Arial"/>
-              </a:defRPr>
-            </a:lvl5pPr>
-          </a:lstStyle>
-          <a:p>
-            <a:r>
-              <a:t>Nivel de texto 1</a:t>
-            </a:r>
-          </a:p>
-          <a:p>
-            <a:pPr lvl="1"/>
-            <a:r>
-              <a:t>Nivel de texto 2</a:t>
-            </a:r>
-          </a:p>
-          <a:p>
-            <a:pPr lvl="2"/>
-            <a:r>
-              <a:t>Nivel de texto 3</a:t>
-            </a:r>
-          </a:p>
-          <a:p>
-            <a:pPr lvl="3"/>
-            <a:r>
-              <a:t>Nivel de texto 4</a:t>
-            </a:r>
-          </a:p>
-          <a:p>
-            <a:pPr lvl="4"/>
-            <a:r>
-              <a:t>Nivel de texto 5</a:t>
-            </a:r>
-          </a:p>
-        </p:txBody>
-      </p:sp>
-      <p:sp>
-        <p:nvSpPr>
-          <p:cNvPr id="309" name="Texto del título"/>
-          <p:cNvSpPr txBox="1">
-            <a:spLocks noGrp="1"/>
-          </p:cNvSpPr>
-          <p:nvPr>
-            <p:ph type="title"/>
-          </p:nvPr>
-        </p:nvSpPr>
-        <p:spPr>
-          <a:xfrm>
-            <a:off x="600132" y="520733"/>
-            <a:ext cx="13542403" cy="1208801"/>
-          </a:xfrm>
-          <a:prstGeom prst="rect">
-            <a:avLst/>
-          </a:prstGeom>
-        </p:spPr>
-        <p:txBody>
-          <a:bodyPr lIns="143999" tIns="143999" rIns="143999" bIns="143999"/>
-          <a:lstStyle>
-            <a:lvl1pPr defTabSz="2438400">
-              <a:lnSpc>
-                <a:spcPct val="90000"/>
-              </a:lnSpc>
-              <a:defRPr sz="7400" b="0" spc="0">
-                <a:latin typeface="Arial"/>
-                <a:ea typeface="Arial"/>
-                <a:cs typeface="Arial"/>
-                <a:sym typeface="Arial"/>
-              </a:defRPr>
-            </a:lvl1pPr>
-          </a:lstStyle>
-          <a:p>
-            <a:r>
-              <a:t>Texto del título</a:t>
-            </a:r>
-          </a:p>
-        </p:txBody>
-      </p:sp>
-      <p:sp>
-        <p:nvSpPr>
-          <p:cNvPr id="310" name="Número de diapositiva"/>
-          <p:cNvSpPr txBox="1">
-            <a:spLocks noGrp="1"/>
-          </p:cNvSpPr>
-          <p:nvPr>
-            <p:ph type="sldNum" sz="quarter" idx="2"/>
-          </p:nvPr>
-        </p:nvSpPr>
-        <p:spPr>
-          <a:xfrm>
-            <a:off x="23299217" y="12609177"/>
-            <a:ext cx="667984" cy="670898"/>
-          </a:xfrm>
-          <a:prstGeom prst="rect">
-            <a:avLst/>
-          </a:prstGeom>
-        </p:spPr>
-        <p:txBody>
-          <a:bodyPr lIns="143999" tIns="143999" rIns="143999" bIns="143999" anchor="ctr">
-            <a:normAutofit/>
-          </a:bodyPr>
-          <a:lstStyle>
-            <a:lvl1pPr algn="r" defTabSz="2438400">
-              <a:defRPr sz="2600">
-                <a:solidFill>
-                  <a:srgbClr val="595959"/>
-                </a:solidFill>
-                <a:latin typeface="Arial"/>
-                <a:ea typeface="Arial"/>
-                <a:cs typeface="Arial"/>
-                <a:sym typeface="Arial"/>
-              </a:defRPr>
-            </a:lvl1pPr>
-          </a:lstStyle>
-          <a:p>
-            <a:fld id="{86CB4B4D-7CA3-9044-876B-883B54F8677D}" type="slidenum">
-              <a:t>‹Nº›</a:t>
-            </a:fld>
-            <a:endParaRPr/>
-          </a:p>
-        </p:txBody>
-      </p:sp>
-    </p:spTree>
-  </p:cSld>
-  <p:clrMapOvr>
-    <a:masterClrMapping/>
-  </p:clrMapOvr>
-  <p:transition spd="med"/>
-</p:sldLayout>
-</file>
-
-<file path=ppt/slideLayouts/slideLayout3.xml><?xml version="1.0" encoding="utf-8"?>
-<p:sldLayout xmlns:a="http://schemas.openxmlformats.org/drawingml/2006/main" xmlns:r="http://schemas.openxmlformats.org/officeDocument/2006/relationships" xmlns:p="http://schemas.openxmlformats.org/presentationml/2006/main" showMasterSp="0" type="tx">
-  <p:cSld name="Seccion azul">
-    <p:bg>
-      <p:bgPr>
-        <a:solidFill>
-          <a:srgbClr val="3579BB"/>
-        </a:solidFill>
-        <a:effectLst/>
-      </p:bgPr>
-    </p:bg>
-    <p:spTree>
-      <p:nvGrpSpPr>
-        <p:cNvPr id="1" name=""/>
-        <p:cNvGrpSpPr/>
-        <p:nvPr/>
-      </p:nvGrpSpPr>
-      <p:grpSpPr>
-        <a:xfrm>
-          <a:off x="0" y="0"/>
-          <a:ext cx="0" cy="0"/>
-          <a:chOff x="0" y="0"/>
-          <a:chExt cx="0" cy="0"/>
-        </a:xfrm>
-      </p:grpSpPr>
-      <p:sp>
-        <p:nvSpPr>
-          <p:cNvPr id="41" name="Rectángulo"/>
-          <p:cNvSpPr/>
-          <p:nvPr/>
-        </p:nvSpPr>
-        <p:spPr>
-          <a:xfrm>
-            <a:off x="14126288" y="-6313"/>
-            <a:ext cx="10340622" cy="13728625"/>
-          </a:xfrm>
-          <a:prstGeom prst="rect">
-            <a:avLst/>
-          </a:prstGeom>
-          <a:solidFill>
-            <a:srgbClr val="FFFFFF"/>
-          </a:solidFill>
-          <a:ln w="12700">
-            <a:miter lim="400000"/>
-          </a:ln>
-        </p:spPr>
-        <p:txBody>
-          <a:bodyPr lIns="50800" tIns="50800" rIns="50800" bIns="50800" anchor="ctr"/>
-          <a:lstStyle/>
-          <a:p>
-            <a:pPr defTabSz="825500">
-              <a:defRPr sz="3200">
-                <a:solidFill>
-                  <a:srgbClr val="FFFFFF"/>
-                </a:solidFill>
-                <a:latin typeface="Helvetica Neue Medium"/>
-                <a:ea typeface="Helvetica Neue Medium"/>
-                <a:cs typeface="Helvetica Neue Medium"/>
-                <a:sym typeface="Helvetica Neue Medium"/>
-              </a:defRPr>
-            </a:pPr>
-            <a:endParaRPr/>
-          </a:p>
-        </p:txBody>
-      </p:sp>
-      <p:sp>
-        <p:nvSpPr>
-          <p:cNvPr id="42" name="Título de la presentación"/>
-          <p:cNvSpPr txBox="1">
-            <a:spLocks noGrp="1"/>
-          </p:cNvSpPr>
-          <p:nvPr>
-            <p:ph type="title" hasCustomPrompt="1"/>
-          </p:nvPr>
-        </p:nvSpPr>
-        <p:spPr>
-          <a:xfrm>
-            <a:off x="1107219" y="6108808"/>
-            <a:ext cx="13577991" cy="4648201"/>
-          </a:xfrm>
-          <a:prstGeom prst="rect">
-            <a:avLst/>
-          </a:prstGeom>
-        </p:spPr>
-        <p:txBody>
-          <a:bodyPr anchor="b"/>
-          <a:lstStyle>
-            <a:lvl1pPr>
-              <a:defRPr>
-                <a:solidFill>
-                  <a:srgbClr val="FFFFFF"/>
-                </a:solidFill>
-              </a:defRPr>
-            </a:lvl1pPr>
-          </a:lstStyle>
-          <a:p>
-            <a:r>
-              <a:t>Título de la presentación</a:t>
-            </a:r>
-          </a:p>
-        </p:txBody>
-      </p:sp>
-      <p:sp>
-        <p:nvSpPr>
-          <p:cNvPr id="43" name="Nivel de texto 1…"/>
-          <p:cNvSpPr txBox="1">
-            <a:spLocks noGrp="1"/>
-          </p:cNvSpPr>
-          <p:nvPr>
-            <p:ph type="body" sz="quarter" idx="1" hasCustomPrompt="1"/>
-          </p:nvPr>
-        </p:nvSpPr>
-        <p:spPr>
-          <a:xfrm>
-            <a:off x="1182261" y="11205037"/>
-            <a:ext cx="13042206" cy="1905001"/>
-          </a:xfrm>
-          <a:prstGeom prst="rect">
-            <a:avLst/>
-          </a:prstGeom>
-        </p:spPr>
-        <p:txBody>
-          <a:bodyPr/>
-          <a:lstStyle>
-            <a:lvl1pPr marL="0" indent="0" defTabSz="825500">
-              <a:lnSpc>
-                <a:spcPct val="100000"/>
-              </a:lnSpc>
-              <a:spcBef>
-                <a:spcPts val="0"/>
-              </a:spcBef>
-              <a:buSzTx/>
-              <a:buNone/>
-              <a:defRPr sz="5000" b="1" i="1">
-                <a:solidFill>
-                  <a:srgbClr val="D5D5D5"/>
-                </a:solidFill>
-              </a:defRPr>
-            </a:lvl1pPr>
-            <a:lvl2pPr marL="0" indent="457200" defTabSz="825500">
-              <a:lnSpc>
-                <a:spcPct val="100000"/>
-              </a:lnSpc>
-              <a:spcBef>
-                <a:spcPts val="0"/>
-              </a:spcBef>
-              <a:buSzTx/>
-              <a:buNone/>
-              <a:defRPr sz="5000" b="1" i="1">
-                <a:solidFill>
-                  <a:srgbClr val="D5D5D5"/>
-                </a:solidFill>
-              </a:defRPr>
-            </a:lvl2pPr>
-            <a:lvl3pPr marL="0" indent="914400" defTabSz="825500">
-              <a:lnSpc>
-                <a:spcPct val="100000"/>
-              </a:lnSpc>
-              <a:spcBef>
-                <a:spcPts val="0"/>
-              </a:spcBef>
-              <a:buSzTx/>
-              <a:buNone/>
-              <a:defRPr sz="5000" b="1" i="1">
-                <a:solidFill>
-                  <a:srgbClr val="D5D5D5"/>
-                </a:solidFill>
-              </a:defRPr>
-            </a:lvl3pPr>
-            <a:lvl4pPr marL="0" indent="1371600" defTabSz="825500">
-              <a:lnSpc>
-                <a:spcPct val="100000"/>
-              </a:lnSpc>
-              <a:spcBef>
-                <a:spcPts val="0"/>
-              </a:spcBef>
-              <a:buSzTx/>
-              <a:buNone/>
-              <a:defRPr sz="5000" b="1" i="1">
-                <a:solidFill>
-                  <a:srgbClr val="D5D5D5"/>
-                </a:solidFill>
-              </a:defRPr>
-            </a:lvl4pPr>
-            <a:lvl5pPr marL="0" indent="1828800" defTabSz="825500">
-              <a:lnSpc>
-                <a:spcPct val="100000"/>
-              </a:lnSpc>
-              <a:spcBef>
-                <a:spcPts val="0"/>
-              </a:spcBef>
-              <a:buSzTx/>
-              <a:buNone/>
-              <a:defRPr sz="5000" b="1" i="1">
-                <a:solidFill>
-                  <a:srgbClr val="D5D5D5"/>
-                </a:solidFill>
-              </a:defRPr>
-            </a:lvl5pPr>
-          </a:lstStyle>
-          <a:p>
-            <a:r>
-              <a:t>Subtítulo de la presentación</a:t>
-            </a:r>
-          </a:p>
-          <a:p>
-            <a:pPr lvl="1"/>
-            <a:endParaRPr/>
-          </a:p>
-          <a:p>
-            <a:pPr lvl="2"/>
-            <a:endParaRPr/>
-          </a:p>
-          <a:p>
-            <a:pPr lvl="3"/>
-            <a:endParaRPr/>
-          </a:p>
-          <a:p>
-            <a:pPr lvl="4"/>
-            <a:endParaRPr/>
-          </a:p>
-        </p:txBody>
-      </p:sp>
-      <p:pic>
-        <p:nvPicPr>
-          <p:cNvPr id="44" name="UPC-positiu-p3005.png" descr="UPC-positiu-p3005.png"/>
-          <p:cNvPicPr>
-            <a:picLocks noChangeAspect="1"/>
-          </p:cNvPicPr>
-          <p:nvPr/>
-        </p:nvPicPr>
-        <p:blipFill>
-          <a:blip r:embed="rId2"/>
-          <a:stretch>
-            <a:fillRect/>
-          </a:stretch>
-        </p:blipFill>
-        <p:spPr>
-          <a:xfrm>
-            <a:off x="18069270" y="980584"/>
-            <a:ext cx="6095179" cy="1827480"/>
-          </a:xfrm>
-          <a:prstGeom prst="rect">
-            <a:avLst/>
-          </a:prstGeom>
-          <a:ln w="12700">
-            <a:miter lim="400000"/>
-          </a:ln>
-        </p:spPr>
-      </p:pic>
-      <p:pic>
-        <p:nvPicPr>
-          <p:cNvPr id="45" name="Imagen" descr="Imagen"/>
-          <p:cNvPicPr>
-            <a:picLocks noChangeAspect="1"/>
-          </p:cNvPicPr>
-          <p:nvPr/>
-        </p:nvPicPr>
-        <p:blipFill>
-          <a:blip r:embed="rId3"/>
-          <a:stretch>
-            <a:fillRect/>
-          </a:stretch>
-        </p:blipFill>
-        <p:spPr>
-          <a:xfrm>
-            <a:off x="14121083" y="-101600"/>
-            <a:ext cx="3711788" cy="13919200"/>
-          </a:xfrm>
-          <a:prstGeom prst="rect">
-            <a:avLst/>
-          </a:prstGeom>
-          <a:ln w="12700">
-            <a:miter lim="400000"/>
-          </a:ln>
-        </p:spPr>
-      </p:pic>
-      <p:pic>
-        <p:nvPicPr>
-          <p:cNvPr id="46" name="TTL-logo_color.png" descr="TTL-logo_color.png"/>
-          <p:cNvPicPr>
-            <a:picLocks noChangeAspect="1"/>
-          </p:cNvPicPr>
-          <p:nvPr/>
-        </p:nvPicPr>
-        <p:blipFill>
-          <a:blip r:embed="rId4"/>
-          <a:stretch>
-            <a:fillRect/>
-          </a:stretch>
-        </p:blipFill>
-        <p:spPr>
-          <a:xfrm>
-            <a:off x="18246506" y="3132573"/>
-            <a:ext cx="5740706" cy="1442332"/>
-          </a:xfrm>
-          <a:prstGeom prst="rect">
-            <a:avLst/>
-          </a:prstGeom>
-          <a:ln w="12700">
-            <a:miter lim="400000"/>
-          </a:ln>
-        </p:spPr>
-      </p:pic>
-      <p:sp>
-        <p:nvSpPr>
-          <p:cNvPr id="47" name="Triángulo"/>
-          <p:cNvSpPr/>
-          <p:nvPr/>
-        </p:nvSpPr>
-        <p:spPr>
-          <a:xfrm>
-            <a:off x="14099153" y="-43542"/>
-            <a:ext cx="3984247" cy="13828484"/>
-          </a:xfrm>
-          <a:custGeom>
-            <a:avLst/>
-            <a:gdLst/>
-            <a:ahLst/>
-            <a:cxnLst>
-              <a:cxn ang="0">
-                <a:pos x="wd2" y="hd2"/>
-              </a:cxn>
-              <a:cxn ang="5400000">
-                <a:pos x="wd2" y="hd2"/>
-              </a:cxn>
-              <a:cxn ang="10800000">
-                <a:pos x="wd2" y="hd2"/>
-              </a:cxn>
-              <a:cxn ang="16200000">
-                <a:pos x="wd2" y="hd2"/>
-              </a:cxn>
-            </a:cxnLst>
-            <a:rect l="0" t="0" r="r" b="b"/>
-            <a:pathLst>
-              <a:path w="21600" h="21600" extrusionOk="0">
-                <a:moveTo>
-                  <a:pt x="0" y="21600"/>
-                </a:moveTo>
-                <a:lnTo>
-                  <a:pt x="0" y="0"/>
-                </a:lnTo>
-                <a:lnTo>
-                  <a:pt x="21600" y="0"/>
-                </a:lnTo>
-                <a:close/>
-              </a:path>
-            </a:pathLst>
-          </a:custGeom>
-          <a:solidFill>
-            <a:srgbClr val="3579BB"/>
-          </a:solidFill>
-          <a:ln w="12700">
-            <a:miter lim="400000"/>
-          </a:ln>
-        </p:spPr>
-        <p:txBody>
-          <a:bodyPr lIns="50800" tIns="50800" rIns="50800" bIns="50800" anchor="ctr"/>
-          <a:lstStyle/>
-          <a:p>
-            <a:pPr defTabSz="825500">
-              <a:defRPr sz="3200">
-                <a:solidFill>
-                  <a:srgbClr val="FFFFFF"/>
-                </a:solidFill>
-                <a:latin typeface="Helvetica Neue Medium"/>
-                <a:ea typeface="Helvetica Neue Medium"/>
-                <a:cs typeface="Helvetica Neue Medium"/>
-                <a:sym typeface="Helvetica Neue Medium"/>
-              </a:defRPr>
-            </a:pPr>
-            <a:endParaRPr/>
-          </a:p>
-        </p:txBody>
-      </p:sp>
-      <p:sp>
-        <p:nvSpPr>
-          <p:cNvPr id="48" name="Número de diapositiva"/>
-          <p:cNvSpPr txBox="1">
-            <a:spLocks noGrp="1"/>
-          </p:cNvSpPr>
-          <p:nvPr>
-            <p:ph type="sldNum" sz="quarter" idx="2"/>
-          </p:nvPr>
-        </p:nvSpPr>
-        <p:spPr>
-          <a:prstGeom prst="rect">
-            <a:avLst/>
-          </a:prstGeom>
-        </p:spPr>
-        <p:txBody>
-          <a:bodyPr/>
-          <a:lstStyle/>
-          <a:p>
-            <a:fld id="{86CB4B4D-7CA3-9044-876B-883B54F8677D}" type="slidenum">
-              <a:t>‹Nº›</a:t>
-            </a:fld>
-            <a:endParaRPr/>
-          </a:p>
-        </p:txBody>
-      </p:sp>
-    </p:spTree>
-  </p:cSld>
-  <p:clrMapOvr>
-    <a:masterClrMapping/>
-  </p:clrMapOvr>
-  <p:transition spd="med"/>
-</p:sldLayout>
-</file>
-
-<file path=ppt/slideLayouts/slideLayout30.xml><?xml version="1.0" encoding="utf-8"?>
+<file path=ppt/slideLayouts/slideLayout25.xml><?xml version="1.0" encoding="utf-8"?>
 <p:sldLayout xmlns:a="http://schemas.openxmlformats.org/drawingml/2006/main" xmlns:r="http://schemas.openxmlformats.org/officeDocument/2006/relationships" xmlns:p="http://schemas.openxmlformats.org/presentationml/2006/main" showMasterSp="0" type="tx">
   <p:cSld name="TITLE_AND_BODY">
     <p:spTree>
@@ -5786,9 +4426,17 @@
 </p:sldLayout>
 </file>
 
-<file path=ppt/slideLayouts/slideLayout31.xml><?xml version="1.0" encoding="utf-8"?>
+<file path=ppt/slideLayouts/slideLayout3.xml><?xml version="1.0" encoding="utf-8"?>
 <p:sldLayout xmlns:a="http://schemas.openxmlformats.org/drawingml/2006/main" xmlns:r="http://schemas.openxmlformats.org/officeDocument/2006/relationships" xmlns:p="http://schemas.openxmlformats.org/presentationml/2006/main" showMasterSp="0" type="tx">
-  <p:cSld name="TITLE_AND_BODY">
+  <p:cSld name="Seccion azul">
+    <p:bg>
+      <p:bgPr>
+        <a:solidFill>
+          <a:srgbClr val="3579BB"/>
+        </a:solidFill>
+        <a:effectLst/>
+      </p:bgPr>
+    </p:bg>
     <p:spTree>
       <p:nvGrpSpPr>
         <p:cNvPr id="1" name=""/>
@@ -5805,594 +4453,47 @@
       </p:grpSpPr>
       <p:sp>
         <p:nvSpPr>
-          <p:cNvPr id="326" name="Texto del título"/>
-          <p:cNvSpPr txBox="1">
-            <a:spLocks noGrp="1"/>
-          </p:cNvSpPr>
-          <p:nvPr>
-            <p:ph type="title"/>
-          </p:nvPr>
+          <p:cNvPr id="41" name="Rectángulo"/>
+          <p:cNvSpPr/>
+          <p:nvPr/>
         </p:nvSpPr>
         <p:spPr>
           <a:xfrm>
-            <a:off x="831199" y="1186733"/>
-            <a:ext cx="22721602" cy="1527201"/>
+            <a:off x="14126288" y="-6313"/>
+            <a:ext cx="10340622" cy="13728625"/>
           </a:xfrm>
           <a:prstGeom prst="rect">
             <a:avLst/>
           </a:prstGeom>
+          <a:solidFill>
+            <a:srgbClr val="FFFFFF"/>
+          </a:solidFill>
+          <a:ln w="12700">
+            <a:miter lim="400000"/>
+          </a:ln>
         </p:spPr>
         <p:txBody>
-          <a:bodyPr lIns="243799" tIns="243799" rIns="243799" bIns="243799"/>
-          <a:lstStyle>
-            <a:lvl1pPr defTabSz="2438400">
-              <a:lnSpc>
-                <a:spcPct val="100000"/>
-              </a:lnSpc>
-              <a:defRPr sz="7400" b="0" spc="0">
-                <a:latin typeface="Roboto"/>
-                <a:ea typeface="Roboto"/>
-                <a:cs typeface="Roboto"/>
-                <a:sym typeface="Roboto"/>
+          <a:bodyPr lIns="50800" tIns="50800" rIns="50800" bIns="50800" anchor="ctr"/>
+          <a:lstStyle/>
+          <a:p>
+            <a:pPr defTabSz="825500">
+              <a:defRPr sz="3200">
+                <a:solidFill>
+                  <a:srgbClr val="FFFFFF"/>
+                </a:solidFill>
+                <a:latin typeface="Helvetica Neue Medium"/>
+                <a:ea typeface="Helvetica Neue Medium"/>
+                <a:cs typeface="Helvetica Neue Medium"/>
+                <a:sym typeface="Helvetica Neue Medium"/>
               </a:defRPr>
-            </a:lvl1pPr>
-          </a:lstStyle>
-          <a:p>
-            <a:r>
-              <a:t>Texto del título</a:t>
-            </a:r>
+            </a:pPr>
+            <a:endParaRPr/>
           </a:p>
         </p:txBody>
       </p:sp>
       <p:sp>
         <p:nvSpPr>
-          <p:cNvPr id="327" name="Nivel de texto 1…"/>
-          <p:cNvSpPr txBox="1">
-            <a:spLocks noGrp="1"/>
-          </p:cNvSpPr>
-          <p:nvPr>
-            <p:ph type="body" idx="1"/>
-          </p:nvPr>
-        </p:nvSpPr>
-        <p:spPr>
-          <a:xfrm>
-            <a:off x="831199" y="3073266"/>
-            <a:ext cx="22721602" cy="9110401"/>
-          </a:xfrm>
-          <a:prstGeom prst="rect">
-            <a:avLst/>
-          </a:prstGeom>
-        </p:spPr>
-        <p:txBody>
-          <a:bodyPr lIns="243799" tIns="243799" rIns="243799" bIns="243799"/>
-          <a:lstStyle>
-            <a:lvl1pPr marL="1028700" indent="-914400" defTabSz="2438400">
-              <a:lnSpc>
-                <a:spcPct val="115000"/>
-              </a:lnSpc>
-              <a:spcBef>
-                <a:spcPts val="0"/>
-              </a:spcBef>
-              <a:buClr>
-                <a:srgbClr val="595959"/>
-              </a:buClr>
-              <a:buSzPts val="4800"/>
-              <a:buFont typeface="Helvetica"/>
-              <a:buChar char="●"/>
-              <a:defRPr>
-                <a:solidFill>
-                  <a:srgbClr val="595959"/>
-                </a:solidFill>
-                <a:latin typeface="Roboto"/>
-                <a:ea typeface="Roboto"/>
-                <a:cs typeface="Roboto"/>
-                <a:sym typeface="Roboto"/>
-              </a:defRPr>
-            </a:lvl1pPr>
-            <a:lvl2pPr marL="1685471" indent="-1088571" defTabSz="2438400">
-              <a:lnSpc>
-                <a:spcPct val="115000"/>
-              </a:lnSpc>
-              <a:spcBef>
-                <a:spcPts val="0"/>
-              </a:spcBef>
-              <a:buClr>
-                <a:srgbClr val="595959"/>
-              </a:buClr>
-              <a:buSzPts val="4800"/>
-              <a:buFont typeface="Helvetica"/>
-              <a:buChar char="○"/>
-              <a:defRPr>
-                <a:solidFill>
-                  <a:srgbClr val="595959"/>
-                </a:solidFill>
-                <a:latin typeface="Roboto"/>
-                <a:ea typeface="Roboto"/>
-                <a:cs typeface="Roboto"/>
-                <a:sym typeface="Roboto"/>
-              </a:defRPr>
-            </a:lvl2pPr>
-            <a:lvl3pPr marL="2142671" indent="-1088571" defTabSz="2438400">
-              <a:lnSpc>
-                <a:spcPct val="115000"/>
-              </a:lnSpc>
-              <a:spcBef>
-                <a:spcPts val="0"/>
-              </a:spcBef>
-              <a:buClr>
-                <a:srgbClr val="595959"/>
-              </a:buClr>
-              <a:buSzPts val="4800"/>
-              <a:buFont typeface="Helvetica"/>
-              <a:buChar char="■"/>
-              <a:defRPr>
-                <a:solidFill>
-                  <a:srgbClr val="595959"/>
-                </a:solidFill>
-                <a:latin typeface="Roboto"/>
-                <a:ea typeface="Roboto"/>
-                <a:cs typeface="Roboto"/>
-                <a:sym typeface="Roboto"/>
-              </a:defRPr>
-            </a:lvl3pPr>
-            <a:lvl4pPr marL="2599871" indent="-1088571" defTabSz="2438400">
-              <a:lnSpc>
-                <a:spcPct val="115000"/>
-              </a:lnSpc>
-              <a:spcBef>
-                <a:spcPts val="0"/>
-              </a:spcBef>
-              <a:buClr>
-                <a:srgbClr val="595959"/>
-              </a:buClr>
-              <a:buSzPts val="4800"/>
-              <a:buFont typeface="Helvetica"/>
-              <a:buChar char="●"/>
-              <a:defRPr>
-                <a:solidFill>
-                  <a:srgbClr val="595959"/>
-                </a:solidFill>
-                <a:latin typeface="Roboto"/>
-                <a:ea typeface="Roboto"/>
-                <a:cs typeface="Roboto"/>
-                <a:sym typeface="Roboto"/>
-              </a:defRPr>
-            </a:lvl4pPr>
-            <a:lvl5pPr marL="3057071" indent="-1088571" defTabSz="2438400">
-              <a:lnSpc>
-                <a:spcPct val="115000"/>
-              </a:lnSpc>
-              <a:spcBef>
-                <a:spcPts val="0"/>
-              </a:spcBef>
-              <a:buClr>
-                <a:srgbClr val="595959"/>
-              </a:buClr>
-              <a:buSzPts val="4800"/>
-              <a:buFont typeface="Helvetica"/>
-              <a:buChar char="○"/>
-              <a:defRPr>
-                <a:solidFill>
-                  <a:srgbClr val="595959"/>
-                </a:solidFill>
-                <a:latin typeface="Roboto"/>
-                <a:ea typeface="Roboto"/>
-                <a:cs typeface="Roboto"/>
-                <a:sym typeface="Roboto"/>
-              </a:defRPr>
-            </a:lvl5pPr>
-          </a:lstStyle>
-          <a:p>
-            <a:r>
-              <a:t>Nivel de texto 1</a:t>
-            </a:r>
-          </a:p>
-          <a:p>
-            <a:pPr lvl="1"/>
-            <a:r>
-              <a:t>Nivel de texto 2</a:t>
-            </a:r>
-          </a:p>
-          <a:p>
-            <a:pPr lvl="2"/>
-            <a:r>
-              <a:t>Nivel de texto 3</a:t>
-            </a:r>
-          </a:p>
-          <a:p>
-            <a:pPr lvl="3"/>
-            <a:r>
-              <a:t>Nivel de texto 4</a:t>
-            </a:r>
-          </a:p>
-          <a:p>
-            <a:pPr lvl="4"/>
-            <a:r>
-              <a:t>Nivel de texto 5</a:t>
-            </a:r>
-          </a:p>
-        </p:txBody>
-      </p:sp>
-      <p:sp>
-        <p:nvSpPr>
-          <p:cNvPr id="328" name="Número de diapositiva"/>
-          <p:cNvSpPr txBox="1">
-            <a:spLocks noGrp="1"/>
-          </p:cNvSpPr>
-          <p:nvPr>
-            <p:ph type="sldNum" sz="quarter" idx="2"/>
-          </p:nvPr>
-        </p:nvSpPr>
-        <p:spPr>
-          <a:xfrm>
-            <a:off x="23188838" y="12524796"/>
-            <a:ext cx="867584" cy="870499"/>
-          </a:xfrm>
-          <a:prstGeom prst="rect">
-            <a:avLst/>
-          </a:prstGeom>
-        </p:spPr>
-        <p:txBody>
-          <a:bodyPr lIns="243799" tIns="243799" rIns="243799" bIns="243799" anchor="ctr">
-            <a:normAutofit/>
-          </a:bodyPr>
-          <a:lstStyle>
-            <a:lvl1pPr algn="r" defTabSz="2438400">
-              <a:defRPr sz="2600">
-                <a:solidFill>
-                  <a:srgbClr val="595959"/>
-                </a:solidFill>
-                <a:latin typeface="Arial"/>
-                <a:ea typeface="Arial"/>
-                <a:cs typeface="Arial"/>
-                <a:sym typeface="Arial"/>
-              </a:defRPr>
-            </a:lvl1pPr>
-          </a:lstStyle>
-          <a:p>
-            <a:fld id="{86CB4B4D-7CA3-9044-876B-883B54F8677D}" type="slidenum">
-              <a:t>‹Nº›</a:t>
-            </a:fld>
-            <a:endParaRPr/>
-          </a:p>
-        </p:txBody>
-      </p:sp>
-    </p:spTree>
-  </p:cSld>
-  <p:clrMapOvr>
-    <a:masterClrMapping/>
-  </p:clrMapOvr>
-  <p:transition spd="med"/>
-</p:sldLayout>
-</file>
-
-<file path=ppt/slideLayouts/slideLayout32.xml><?xml version="1.0" encoding="utf-8"?>
-<p:sldLayout xmlns:a="http://schemas.openxmlformats.org/drawingml/2006/main" xmlns:r="http://schemas.openxmlformats.org/officeDocument/2006/relationships" xmlns:p="http://schemas.openxmlformats.org/presentationml/2006/main" showMasterSp="0" type="tx">
-  <p:cSld name="2_Título y objetos con foto_2_2_3_1">
-    <p:spTree>
-      <p:nvGrpSpPr>
-        <p:cNvPr id="1" name=""/>
-        <p:cNvGrpSpPr/>
-        <p:nvPr/>
-      </p:nvGrpSpPr>
-      <p:grpSpPr>
-        <a:xfrm>
-          <a:off x="0" y="0"/>
-          <a:ext cx="0" cy="0"/>
-          <a:chOff x="0" y="0"/>
-          <a:chExt cx="0" cy="0"/>
-        </a:xfrm>
-      </p:grpSpPr>
-      <p:sp>
-        <p:nvSpPr>
-          <p:cNvPr id="335" name="Nivel de texto 1…"/>
-          <p:cNvSpPr txBox="1">
-            <a:spLocks noGrp="1"/>
-          </p:cNvSpPr>
-          <p:nvPr>
-            <p:ph type="body" sz="half" idx="1"/>
-          </p:nvPr>
-        </p:nvSpPr>
-        <p:spPr>
-          <a:xfrm>
-            <a:off x="600132" y="2743199"/>
-            <a:ext cx="13542403" cy="9041601"/>
-          </a:xfrm>
-          <a:prstGeom prst="rect">
-            <a:avLst/>
-          </a:prstGeom>
-        </p:spPr>
-        <p:txBody>
-          <a:bodyPr lIns="143999" tIns="143999" rIns="143999" bIns="143999"/>
-          <a:lstStyle>
-            <a:lvl1pPr marL="1028700" indent="-914400" defTabSz="2438400">
-              <a:lnSpc>
-                <a:spcPct val="100000"/>
-              </a:lnSpc>
-              <a:spcBef>
-                <a:spcPts val="1300"/>
-              </a:spcBef>
-              <a:buClr>
-                <a:srgbClr val="595959"/>
-              </a:buClr>
-              <a:buSzPts val="4800"/>
-              <a:buFont typeface="Helvetica"/>
-              <a:buChar char="●"/>
-              <a:defRPr>
-                <a:solidFill>
-                  <a:srgbClr val="595959"/>
-                </a:solidFill>
-                <a:latin typeface="Roboto"/>
-                <a:ea typeface="Roboto"/>
-                <a:cs typeface="Roboto"/>
-                <a:sym typeface="Roboto"/>
-              </a:defRPr>
-            </a:lvl1pPr>
-            <a:lvl2pPr marL="1685471" indent="-1088571" defTabSz="2438400">
-              <a:lnSpc>
-                <a:spcPct val="100000"/>
-              </a:lnSpc>
-              <a:spcBef>
-                <a:spcPts val="1300"/>
-              </a:spcBef>
-              <a:buClr>
-                <a:srgbClr val="595959"/>
-              </a:buClr>
-              <a:buSzPts val="4800"/>
-              <a:buFont typeface="Helvetica"/>
-              <a:buChar char="○"/>
-              <a:defRPr>
-                <a:solidFill>
-                  <a:srgbClr val="595959"/>
-                </a:solidFill>
-                <a:latin typeface="Roboto"/>
-                <a:ea typeface="Roboto"/>
-                <a:cs typeface="Roboto"/>
-                <a:sym typeface="Roboto"/>
-              </a:defRPr>
-            </a:lvl2pPr>
-            <a:lvl3pPr marL="2142671" indent="-1088571" defTabSz="2438400">
-              <a:lnSpc>
-                <a:spcPct val="100000"/>
-              </a:lnSpc>
-              <a:spcBef>
-                <a:spcPts val="1300"/>
-              </a:spcBef>
-              <a:buClr>
-                <a:srgbClr val="595959"/>
-              </a:buClr>
-              <a:buSzPts val="4800"/>
-              <a:buFont typeface="Helvetica"/>
-              <a:buChar char="■"/>
-              <a:defRPr>
-                <a:solidFill>
-                  <a:srgbClr val="595959"/>
-                </a:solidFill>
-                <a:latin typeface="Roboto"/>
-                <a:ea typeface="Roboto"/>
-                <a:cs typeface="Roboto"/>
-                <a:sym typeface="Roboto"/>
-              </a:defRPr>
-            </a:lvl3pPr>
-            <a:lvl4pPr marL="2599871" indent="-1088571" defTabSz="2438400">
-              <a:lnSpc>
-                <a:spcPct val="100000"/>
-              </a:lnSpc>
-              <a:spcBef>
-                <a:spcPts val="1300"/>
-              </a:spcBef>
-              <a:buClr>
-                <a:srgbClr val="595959"/>
-              </a:buClr>
-              <a:buSzPts val="4800"/>
-              <a:buFont typeface="Helvetica"/>
-              <a:buChar char="●"/>
-              <a:defRPr>
-                <a:solidFill>
-                  <a:srgbClr val="595959"/>
-                </a:solidFill>
-                <a:latin typeface="Roboto"/>
-                <a:ea typeface="Roboto"/>
-                <a:cs typeface="Roboto"/>
-                <a:sym typeface="Roboto"/>
-              </a:defRPr>
-            </a:lvl4pPr>
-            <a:lvl5pPr marL="3057071" indent="-1088571" defTabSz="2438400">
-              <a:lnSpc>
-                <a:spcPct val="100000"/>
-              </a:lnSpc>
-              <a:spcBef>
-                <a:spcPts val="1300"/>
-              </a:spcBef>
-              <a:buClr>
-                <a:srgbClr val="595959"/>
-              </a:buClr>
-              <a:buSzPts val="4800"/>
-              <a:buFont typeface="Helvetica"/>
-              <a:buChar char="○"/>
-              <a:defRPr>
-                <a:solidFill>
-                  <a:srgbClr val="595959"/>
-                </a:solidFill>
-                <a:latin typeface="Roboto"/>
-                <a:ea typeface="Roboto"/>
-                <a:cs typeface="Roboto"/>
-                <a:sym typeface="Roboto"/>
-              </a:defRPr>
-            </a:lvl5pPr>
-          </a:lstStyle>
-          <a:p>
-            <a:r>
-              <a:t>Nivel de texto 1</a:t>
-            </a:r>
-          </a:p>
-          <a:p>
-            <a:pPr lvl="1"/>
-            <a:r>
-              <a:t>Nivel de texto 2</a:t>
-            </a:r>
-          </a:p>
-          <a:p>
-            <a:pPr lvl="2"/>
-            <a:r>
-              <a:t>Nivel de texto 3</a:t>
-            </a:r>
-          </a:p>
-          <a:p>
-            <a:pPr lvl="3"/>
-            <a:r>
-              <a:t>Nivel de texto 4</a:t>
-            </a:r>
-          </a:p>
-          <a:p>
-            <a:pPr lvl="4"/>
-            <a:r>
-              <a:t>Nivel de texto 5</a:t>
-            </a:r>
-          </a:p>
-        </p:txBody>
-      </p:sp>
-      <p:sp>
-        <p:nvSpPr>
-          <p:cNvPr id="336" name="Texto del título"/>
-          <p:cNvSpPr txBox="1">
-            <a:spLocks noGrp="1"/>
-          </p:cNvSpPr>
-          <p:nvPr>
-            <p:ph type="title"/>
-          </p:nvPr>
-        </p:nvSpPr>
-        <p:spPr>
-          <a:xfrm>
-            <a:off x="600132" y="520733"/>
-            <a:ext cx="13542403" cy="1208801"/>
-          </a:xfrm>
-          <a:prstGeom prst="rect">
-            <a:avLst/>
-          </a:prstGeom>
-        </p:spPr>
-        <p:txBody>
-          <a:bodyPr lIns="143999" tIns="143999" rIns="143999" bIns="143999"/>
-          <a:lstStyle>
-            <a:lvl1pPr defTabSz="2438400">
-              <a:lnSpc>
-                <a:spcPct val="90000"/>
-              </a:lnSpc>
-              <a:defRPr sz="7400" b="0" spc="0">
-                <a:latin typeface="Roboto"/>
-                <a:ea typeface="Roboto"/>
-                <a:cs typeface="Roboto"/>
-                <a:sym typeface="Roboto"/>
-              </a:defRPr>
-            </a:lvl1pPr>
-          </a:lstStyle>
-          <a:p>
-            <a:r>
-              <a:t>Texto del título</a:t>
-            </a:r>
-          </a:p>
-        </p:txBody>
-      </p:sp>
-      <p:sp>
-        <p:nvSpPr>
-          <p:cNvPr id="337" name="Número de diapositiva"/>
-          <p:cNvSpPr txBox="1">
-            <a:spLocks noGrp="1"/>
-          </p:cNvSpPr>
-          <p:nvPr>
-            <p:ph type="sldNum" sz="quarter" idx="2"/>
-          </p:nvPr>
-        </p:nvSpPr>
-        <p:spPr>
-          <a:xfrm>
-            <a:off x="23299217" y="12609177"/>
-            <a:ext cx="667984" cy="670898"/>
-          </a:xfrm>
-          <a:prstGeom prst="rect">
-            <a:avLst/>
-          </a:prstGeom>
-        </p:spPr>
-        <p:txBody>
-          <a:bodyPr lIns="143999" tIns="143999" rIns="143999" bIns="143999" anchor="ctr">
-            <a:normAutofit/>
-          </a:bodyPr>
-          <a:lstStyle>
-            <a:lvl1pPr algn="r" defTabSz="2438400">
-              <a:defRPr sz="2600">
-                <a:solidFill>
-                  <a:srgbClr val="595959"/>
-                </a:solidFill>
-                <a:latin typeface="Arial"/>
-                <a:ea typeface="Arial"/>
-                <a:cs typeface="Arial"/>
-                <a:sym typeface="Arial"/>
-              </a:defRPr>
-            </a:lvl1pPr>
-          </a:lstStyle>
-          <a:p>
-            <a:fld id="{86CB4B4D-7CA3-9044-876B-883B54F8677D}" type="slidenum">
-              <a:t>‹Nº›</a:t>
-            </a:fld>
-            <a:endParaRPr/>
-          </a:p>
-        </p:txBody>
-      </p:sp>
-    </p:spTree>
-  </p:cSld>
-  <p:clrMapOvr>
-    <a:masterClrMapping/>
-  </p:clrMapOvr>
-  <p:transition spd="med"/>
-</p:sldLayout>
-</file>
-
-<file path=ppt/slideLayouts/slideLayout4.xml><?xml version="1.0" encoding="utf-8"?>
-<p:sldLayout xmlns:a="http://schemas.openxmlformats.org/drawingml/2006/main" xmlns:r="http://schemas.openxmlformats.org/officeDocument/2006/relationships" xmlns:p="http://schemas.openxmlformats.org/presentationml/2006/main" showMasterSp="0" type="tx">
-  <p:cSld name="Sección especial">
-    <p:spTree>
-      <p:nvGrpSpPr>
-        <p:cNvPr id="1" name=""/>
-        <p:cNvGrpSpPr/>
-        <p:nvPr/>
-      </p:nvGrpSpPr>
-      <p:grpSpPr>
-        <a:xfrm>
-          <a:off x="0" y="0"/>
-          <a:ext cx="0" cy="0"/>
-          <a:chOff x="0" y="0"/>
-          <a:chExt cx="0" cy="0"/>
-        </a:xfrm>
-      </p:grpSpPr>
-      <p:pic>
-        <p:nvPicPr>
-          <p:cNvPr id="55" name="grid-3227320_1920.jpg" descr="grid-3227320_1920.jpg"/>
-          <p:cNvPicPr>
-            <a:picLocks noChangeAspect="1"/>
-          </p:cNvPicPr>
-          <p:nvPr/>
-        </p:nvPicPr>
-        <p:blipFill>
-          <a:blip r:embed="rId2"/>
-          <a:stretch>
-            <a:fillRect/>
-          </a:stretch>
-        </p:blipFill>
-        <p:spPr>
-          <a:xfrm>
-            <a:off x="0" y="0"/>
-            <a:ext cx="24384000" cy="13716000"/>
-          </a:xfrm>
-          <a:prstGeom prst="rect">
-            <a:avLst/>
-          </a:prstGeom>
-          <a:ln w="12700">
-            <a:miter lim="400000"/>
-          </a:ln>
-        </p:spPr>
-      </p:pic>
-      <p:sp>
-        <p:nvSpPr>
-          <p:cNvPr id="56" name="Título de la presentación"/>
+          <p:cNvPr id="42" name="Título de la presentación"/>
           <p:cNvSpPr txBox="1">
             <a:spLocks noGrp="1"/>
           </p:cNvSpPr>
@@ -6402,8 +4503,8 @@
         </p:nvSpPr>
         <p:spPr>
           <a:xfrm>
-            <a:off x="1206500" y="7124700"/>
-            <a:ext cx="21971000" cy="4648200"/>
+            <a:off x="1107219" y="6108808"/>
+            <a:ext cx="13577991" cy="4648201"/>
           </a:xfrm>
           <a:prstGeom prst="rect">
             <a:avLst/>
@@ -6411,7 +4512,15 @@
         </p:spPr>
         <p:txBody>
           <a:bodyPr anchor="b"/>
-          <a:lstStyle/>
+          <a:lstStyle>
+            <a:lvl1pPr>
+              <a:defRPr>
+                <a:solidFill>
+                  <a:srgbClr val="FFFFFF"/>
+                </a:solidFill>
+              </a:defRPr>
+            </a:lvl1pPr>
+          </a:lstStyle>
           <a:p>
             <a:r>
               <a:t>Título de la presentación</a:t>
@@ -6421,7 +4530,7 @@
       </p:sp>
       <p:sp>
         <p:nvSpPr>
-          <p:cNvPr id="57" name="Nivel de texto 1…"/>
+          <p:cNvPr id="43" name="Nivel de texto 1…"/>
           <p:cNvSpPr txBox="1">
             <a:spLocks noGrp="1"/>
           </p:cNvSpPr>
@@ -6431,8 +4540,8 @@
         </p:nvSpPr>
         <p:spPr>
           <a:xfrm>
-            <a:off x="1206500" y="11609910"/>
-            <a:ext cx="21971000" cy="1116952"/>
+            <a:off x="1182261" y="11205037"/>
+            <a:ext cx="13042206" cy="1905001"/>
           </a:xfrm>
           <a:prstGeom prst="rect">
             <a:avLst/>
@@ -6450,9 +4559,9 @@
               </a:spcBef>
               <a:buSzTx/>
               <a:buNone/>
-              <a:defRPr sz="4500" b="1" i="1">
+              <a:defRPr sz="5000" b="1" i="1">
                 <a:solidFill>
-                  <a:srgbClr val="929292"/>
+                  <a:srgbClr val="D5D5D5"/>
                 </a:solidFill>
               </a:defRPr>
             </a:lvl1pPr>
@@ -6465,9 +4574,9 @@
               </a:spcBef>
               <a:buSzTx/>
               <a:buNone/>
-              <a:defRPr sz="4500" b="1" i="1">
+              <a:defRPr sz="5000" b="1" i="1">
                 <a:solidFill>
-                  <a:srgbClr val="929292"/>
+                  <a:srgbClr val="D5D5D5"/>
                 </a:solidFill>
               </a:defRPr>
             </a:lvl2pPr>
@@ -6480,9 +4589,9 @@
               </a:spcBef>
               <a:buSzTx/>
               <a:buNone/>
-              <a:defRPr sz="4500" b="1" i="1">
+              <a:defRPr sz="5000" b="1" i="1">
                 <a:solidFill>
-                  <a:srgbClr val="929292"/>
+                  <a:srgbClr val="D5D5D5"/>
                 </a:solidFill>
               </a:defRPr>
             </a:lvl3pPr>
@@ -6495,9 +4604,9 @@
               </a:spcBef>
               <a:buSzTx/>
               <a:buNone/>
-              <a:defRPr sz="4500" b="1" i="1">
+              <a:defRPr sz="5000" b="1" i="1">
                 <a:solidFill>
-                  <a:srgbClr val="929292"/>
+                  <a:srgbClr val="D5D5D5"/>
                 </a:solidFill>
               </a:defRPr>
             </a:lvl4pPr>
@@ -6510,9 +4619,9 @@
               </a:spcBef>
               <a:buSzTx/>
               <a:buNone/>
-              <a:defRPr sz="4500" b="1" i="1">
+              <a:defRPr sz="5000" b="1" i="1">
                 <a:solidFill>
-                  <a:srgbClr val="929292"/>
+                  <a:srgbClr val="D5D5D5"/>
                 </a:solidFill>
               </a:defRPr>
             </a:lvl5pPr>
@@ -6542,22 +4651,22 @@
       </p:sp>
       <p:pic>
         <p:nvPicPr>
-          <p:cNvPr id="58" name="TTL-logo_color.png" descr="TTL-logo_color.png"/>
+          <p:cNvPr id="44" name="UPC-positiu-p3005.png" descr="UPC-positiu-p3005.png"/>
           <p:cNvPicPr>
             <a:picLocks noChangeAspect="1"/>
           </p:cNvPicPr>
           <p:nvPr/>
         </p:nvPicPr>
         <p:blipFill>
-          <a:blip r:embed="rId3"/>
+          <a:blip r:embed="rId2"/>
           <a:stretch>
             <a:fillRect/>
           </a:stretch>
         </p:blipFill>
         <p:spPr>
           <a:xfrm>
-            <a:off x="7185453" y="952197"/>
-            <a:ext cx="3795086" cy="953502"/>
+            <a:off x="18069270" y="980584"/>
+            <a:ext cx="6095179" cy="1827480"/>
           </a:xfrm>
           <a:prstGeom prst="rect">
             <a:avLst/>
@@ -6567,36 +4676,80 @@
           </a:ln>
         </p:spPr>
       </p:pic>
-      <p:pic>
-        <p:nvPicPr>
-          <p:cNvPr id="59" name="UPC-positiu-p3005.png" descr="UPC-positiu-p3005.png"/>
-          <p:cNvPicPr>
-            <a:picLocks noChangeAspect="1"/>
-          </p:cNvPicPr>
+      <p:sp>
+        <p:nvSpPr>
+          <p:cNvPr id="47" name="Triángulo"/>
+          <p:cNvSpPr/>
           <p:nvPr/>
-        </p:nvPicPr>
-        <p:blipFill>
-          <a:blip r:embed="rId4"/>
-          <a:stretch>
-            <a:fillRect/>
-          </a:stretch>
-        </p:blipFill>
+        </p:nvSpPr>
         <p:spPr>
           <a:xfrm>
-            <a:off x="1207690" y="741430"/>
-            <a:ext cx="4586153" cy="1375037"/>
+            <a:off x="14085023" y="0"/>
+            <a:ext cx="3984247" cy="13828484"/>
           </a:xfrm>
-          <a:prstGeom prst="rect">
-            <a:avLst/>
-          </a:prstGeom>
+          <a:custGeom>
+            <a:avLst/>
+            <a:gdLst/>
+            <a:ahLst/>
+            <a:cxnLst>
+              <a:cxn ang="0">
+                <a:pos x="wd2" y="hd2"/>
+              </a:cxn>
+              <a:cxn ang="5400000">
+                <a:pos x="wd2" y="hd2"/>
+              </a:cxn>
+              <a:cxn ang="10800000">
+                <a:pos x="wd2" y="hd2"/>
+              </a:cxn>
+              <a:cxn ang="16200000">
+                <a:pos x="wd2" y="hd2"/>
+              </a:cxn>
+            </a:cxnLst>
+            <a:rect l="0" t="0" r="r" b="b"/>
+            <a:pathLst>
+              <a:path w="21600" h="21600" extrusionOk="0">
+                <a:moveTo>
+                  <a:pt x="0" y="21600"/>
+                </a:moveTo>
+                <a:lnTo>
+                  <a:pt x="0" y="0"/>
+                </a:lnTo>
+                <a:lnTo>
+                  <a:pt x="21600" y="0"/>
+                </a:lnTo>
+                <a:close/>
+              </a:path>
+            </a:pathLst>
+          </a:custGeom>
+          <a:solidFill>
+            <a:srgbClr val="3579BB"/>
+          </a:solidFill>
           <a:ln w="12700">
             <a:miter lim="400000"/>
           </a:ln>
         </p:spPr>
-      </p:pic>
+        <p:txBody>
+          <a:bodyPr lIns="50800" tIns="50800" rIns="50800" bIns="50800" anchor="ctr"/>
+          <a:lstStyle/>
+          <a:p>
+            <a:pPr defTabSz="825500">
+              <a:defRPr sz="3200">
+                <a:solidFill>
+                  <a:srgbClr val="FFFFFF"/>
+                </a:solidFill>
+                <a:latin typeface="Helvetica Neue Medium"/>
+                <a:ea typeface="Helvetica Neue Medium"/>
+                <a:cs typeface="Helvetica Neue Medium"/>
+                <a:sym typeface="Helvetica Neue Medium"/>
+              </a:defRPr>
+            </a:pPr>
+            <a:endParaRPr/>
+          </a:p>
+        </p:txBody>
+      </p:sp>
       <p:sp>
         <p:nvSpPr>
-          <p:cNvPr id="60" name="Número de diapositiva"/>
+          <p:cNvPr id="48" name="Número de diapositiva"/>
           <p:cNvSpPr txBox="1">
             <a:spLocks noGrp="1"/>
           </p:cNvSpPr>
@@ -6620,6 +4773,53 @@
           </a:p>
         </p:txBody>
       </p:sp>
+      <p:pic>
+        <p:nvPicPr>
+          <p:cNvPr id="2" name="Picture 2" descr="Hipoteca Caixabank - Genial Banking">
+            <a:extLst>
+              <a:ext uri="{FF2B5EF4-FFF2-40B4-BE49-F238E27FC236}">
+                <a16:creationId xmlns:a16="http://schemas.microsoft.com/office/drawing/2014/main" id="{6FA2040E-BFA9-6223-5710-2E728A6E53BD}"/>
+              </a:ext>
+            </a:extLst>
+          </p:cNvPr>
+          <p:cNvPicPr>
+            <a:picLocks noChangeAspect="1" noChangeArrowheads="1"/>
+          </p:cNvPicPr>
+          <p:nvPr userDrawn="1"/>
+        </p:nvPicPr>
+        <p:blipFill rotWithShape="1">
+          <a:blip r:embed="rId3" cstate="print">
+            <a:extLst>
+              <a:ext uri="{28A0092B-C50C-407E-A947-70E740481C1C}">
+                <a14:useLocalDpi xmlns:a14="http://schemas.microsoft.com/office/drawing/2010/main" val="0"/>
+              </a:ext>
+            </a:extLst>
+          </a:blip>
+          <a:srcRect t="27531" b="26543"/>
+          <a:stretch>
+            <a:fillRect/>
+          </a:stretch>
+        </p:blipFill>
+        <p:spPr bwMode="auto">
+          <a:xfrm>
+            <a:off x="18330432" y="3075133"/>
+            <a:ext cx="5572854" cy="1439655"/>
+          </a:xfrm>
+          <a:prstGeom prst="rect">
+            <a:avLst/>
+          </a:prstGeom>
+          <a:noFill/>
+          <a:extLst>
+            <a:ext uri="{909E8E84-426E-40DD-AFC4-6F175D3DCCD1}">
+              <a14:hiddenFill xmlns:a14="http://schemas.microsoft.com/office/drawing/2010/main">
+                <a:solidFill>
+                  <a:srgbClr val="FFFFFF"/>
+                </a:solidFill>
+              </a14:hiddenFill>
+            </a:ext>
+          </a:extLst>
+        </p:spPr>
+      </p:pic>
     </p:spTree>
   </p:cSld>
   <p:clrMapOvr>
@@ -6629,7 +4829,7 @@
 </p:sldLayout>
 </file>
 
-<file path=ppt/slideLayouts/slideLayout5.xml><?xml version="1.0" encoding="utf-8"?>
+<file path=ppt/slideLayouts/slideLayout4.xml><?xml version="1.0" encoding="utf-8"?>
 <p:sldLayout xmlns:a="http://schemas.openxmlformats.org/drawingml/2006/main" xmlns:r="http://schemas.openxmlformats.org/officeDocument/2006/relationships" xmlns:p="http://schemas.openxmlformats.org/presentationml/2006/main" type="tx">
   <p:cSld name="Título y viñetas">
     <p:spTree>
@@ -6792,7 +4992,7 @@
 </p:sldLayout>
 </file>
 
-<file path=ppt/slideLayouts/slideLayout6.xml><?xml version="1.0" encoding="utf-8"?>
+<file path=ppt/slideLayouts/slideLayout5.xml><?xml version="1.0" encoding="utf-8"?>
 <p:sldLayout xmlns:a="http://schemas.openxmlformats.org/drawingml/2006/main" xmlns:r="http://schemas.openxmlformats.org/officeDocument/2006/relationships" xmlns:p="http://schemas.openxmlformats.org/presentationml/2006/main" showMasterSp="0" type="tx">
   <p:cSld name="Título y viñetas azul">
     <p:bg>
@@ -7035,29 +5235,49 @@
       </p:pic>
       <p:pic>
         <p:nvPicPr>
-          <p:cNvPr id="82" name="TTL-logo_white.png" descr="TTL-logo_white.png"/>
+          <p:cNvPr id="2" name="Picture 2" descr="Industry Office - Industry Office - Connecting Science &amp; Industry">
+            <a:extLst>
+              <a:ext uri="{FF2B5EF4-FFF2-40B4-BE49-F238E27FC236}">
+                <a16:creationId xmlns:a16="http://schemas.microsoft.com/office/drawing/2014/main" id="{0D6FDC25-BC61-AD67-EADF-D483E561AEB7}"/>
+              </a:ext>
+            </a:extLst>
+          </p:cNvPr>
           <p:cNvPicPr>
-            <a:picLocks noChangeAspect="1"/>
+            <a:picLocks noChangeAspect="1" noChangeArrowheads="1"/>
           </p:cNvPicPr>
-          <p:nvPr/>
+          <p:nvPr userDrawn="1"/>
         </p:nvPicPr>
         <p:blipFill>
-          <a:blip r:embed="rId3"/>
+          <a:blip r:embed="rId3">
+            <a:extLst>
+              <a:ext uri="{28A0092B-C50C-407E-A947-70E740481C1C}">
+                <a14:useLocalDpi xmlns:a14="http://schemas.microsoft.com/office/drawing/2010/main" val="0"/>
+              </a:ext>
+            </a:extLst>
+          </a:blip>
+          <a:srcRect/>
           <a:stretch>
             <a:fillRect/>
           </a:stretch>
         </p:blipFill>
-        <p:spPr>
+        <p:spPr bwMode="auto">
           <a:xfrm>
-            <a:off x="17703800" y="12801600"/>
-            <a:ext cx="3111500" cy="723456"/>
+            <a:off x="16865600" y="12708830"/>
+            <a:ext cx="3749816" cy="960890"/>
           </a:xfrm>
           <a:prstGeom prst="rect">
             <a:avLst/>
           </a:prstGeom>
-          <a:ln w="12700">
-            <a:miter lim="400000"/>
-          </a:ln>
+          <a:noFill/>
+          <a:extLst>
+            <a:ext uri="{909E8E84-426E-40DD-AFC4-6F175D3DCCD1}">
+              <a14:hiddenFill xmlns:a14="http://schemas.microsoft.com/office/drawing/2010/main">
+                <a:solidFill>
+                  <a:srgbClr val="FFFFFF"/>
+                </a:solidFill>
+              </a14:hiddenFill>
+            </a:ext>
+          </a:extLst>
         </p:spPr>
       </p:pic>
     </p:spTree>
@@ -7069,7 +5289,7 @@
 </p:sldLayout>
 </file>
 
-<file path=ppt/slideLayouts/slideLayout7.xml><?xml version="1.0" encoding="utf-8"?>
+<file path=ppt/slideLayouts/slideLayout6.xml><?xml version="1.0" encoding="utf-8"?>
 <p:sldLayout xmlns:a="http://schemas.openxmlformats.org/drawingml/2006/main" xmlns:r="http://schemas.openxmlformats.org/officeDocument/2006/relationships" xmlns:p="http://schemas.openxmlformats.org/presentationml/2006/main" type="tx">
   <p:cSld name="Solo título">
     <p:spTree>
@@ -7195,7 +5415,7 @@
 </p:sldLayout>
 </file>
 
-<file path=ppt/slideLayouts/slideLayout8.xml><?xml version="1.0" encoding="utf-8"?>
+<file path=ppt/slideLayouts/slideLayout7.xml><?xml version="1.0" encoding="utf-8"?>
 <p:sldLayout xmlns:a="http://schemas.openxmlformats.org/drawingml/2006/main" xmlns:r="http://schemas.openxmlformats.org/officeDocument/2006/relationships" xmlns:p="http://schemas.openxmlformats.org/presentationml/2006/main" showMasterSp="0" type="tx">
   <p:cSld name="Solo título azul">
     <p:bg>
@@ -7329,33 +5549,6 @@
           </a:ln>
         </p:spPr>
       </p:pic>
-      <p:pic>
-        <p:nvPicPr>
-          <p:cNvPr id="101" name="TTL-logo_white.png" descr="TTL-logo_white.png"/>
-          <p:cNvPicPr>
-            <a:picLocks noChangeAspect="1"/>
-          </p:cNvPicPr>
-          <p:nvPr/>
-        </p:nvPicPr>
-        <p:blipFill>
-          <a:blip r:embed="rId3"/>
-          <a:stretch>
-            <a:fillRect/>
-          </a:stretch>
-        </p:blipFill>
-        <p:spPr>
-          <a:xfrm>
-            <a:off x="17703800" y="12801600"/>
-            <a:ext cx="3111500" cy="723456"/>
-          </a:xfrm>
-          <a:prstGeom prst="rect">
-            <a:avLst/>
-          </a:prstGeom>
-          <a:ln w="12700">
-            <a:miter lim="400000"/>
-          </a:ln>
-        </p:spPr>
-      </p:pic>
       <p:sp>
         <p:nvSpPr>
           <p:cNvPr id="102" name="Número de diapositiva"/>
@@ -7390,6 +5583,53 @@
           </a:p>
         </p:txBody>
       </p:sp>
+      <p:pic>
+        <p:nvPicPr>
+          <p:cNvPr id="2" name="Picture 2" descr="Industry Office - Industry Office - Connecting Science &amp; Industry">
+            <a:extLst>
+              <a:ext uri="{FF2B5EF4-FFF2-40B4-BE49-F238E27FC236}">
+                <a16:creationId xmlns:a16="http://schemas.microsoft.com/office/drawing/2014/main" id="{6B9E3A99-1110-845E-DB71-D669D5057FDA}"/>
+              </a:ext>
+            </a:extLst>
+          </p:cNvPr>
+          <p:cNvPicPr>
+            <a:picLocks noChangeAspect="1" noChangeArrowheads="1"/>
+          </p:cNvPicPr>
+          <p:nvPr userDrawn="1"/>
+        </p:nvPicPr>
+        <p:blipFill>
+          <a:blip r:embed="rId3">
+            <a:extLst>
+              <a:ext uri="{28A0092B-C50C-407E-A947-70E740481C1C}">
+                <a14:useLocalDpi xmlns:a14="http://schemas.microsoft.com/office/drawing/2010/main" val="0"/>
+              </a:ext>
+            </a:extLst>
+          </a:blip>
+          <a:srcRect/>
+          <a:stretch>
+            <a:fillRect/>
+          </a:stretch>
+        </p:blipFill>
+        <p:spPr bwMode="auto">
+          <a:xfrm>
+            <a:off x="16865600" y="12708830"/>
+            <a:ext cx="3749816" cy="960890"/>
+          </a:xfrm>
+          <a:prstGeom prst="rect">
+            <a:avLst/>
+          </a:prstGeom>
+          <a:noFill/>
+          <a:extLst>
+            <a:ext uri="{909E8E84-426E-40DD-AFC4-6F175D3DCCD1}">
+              <a14:hiddenFill xmlns:a14="http://schemas.microsoft.com/office/drawing/2010/main">
+                <a:solidFill>
+                  <a:srgbClr val="FFFFFF"/>
+                </a:solidFill>
+              </a14:hiddenFill>
+            </a:ext>
+          </a:extLst>
+        </p:spPr>
+      </p:pic>
     </p:spTree>
   </p:cSld>
   <p:clrMapOvr>
@@ -7399,7 +5639,7 @@
 </p:sldLayout>
 </file>
 
-<file path=ppt/slideLayouts/slideLayout9.xml><?xml version="1.0" encoding="utf-8"?>
+<file path=ppt/slideLayouts/slideLayout8.xml><?xml version="1.0" encoding="utf-8"?>
 <p:sldLayout xmlns:a="http://schemas.openxmlformats.org/drawingml/2006/main" xmlns:r="http://schemas.openxmlformats.org/officeDocument/2006/relationships" xmlns:p="http://schemas.openxmlformats.org/presentationml/2006/main" type="tx">
   <p:cSld name="Título, viñetas y foto">
     <p:spTree>
@@ -7590,6 +5830,340 @@
           </a:p>
         </p:txBody>
       </p:sp>
+    </p:spTree>
+  </p:cSld>
+  <p:clrMapOvr>
+    <a:masterClrMapping/>
+  </p:clrMapOvr>
+  <p:transition spd="med"/>
+</p:sldLayout>
+</file>
+
+<file path=ppt/slideLayouts/slideLayout9.xml><?xml version="1.0" encoding="utf-8"?>
+<p:sldLayout xmlns:a="http://schemas.openxmlformats.org/drawingml/2006/main" xmlns:r="http://schemas.openxmlformats.org/officeDocument/2006/relationships" xmlns:p="http://schemas.openxmlformats.org/presentationml/2006/main" showMasterSp="0" type="tx">
+  <p:cSld name="Título, viñetas y foto azul">
+    <p:bg>
+      <p:bgPr>
+        <a:solidFill>
+          <a:srgbClr val="3579BB"/>
+        </a:solidFill>
+        <a:effectLst/>
+      </p:bgPr>
+    </p:bg>
+    <p:spTree>
+      <p:nvGrpSpPr>
+        <p:cNvPr id="1" name=""/>
+        <p:cNvGrpSpPr/>
+        <p:nvPr/>
+      </p:nvGrpSpPr>
+      <p:grpSpPr>
+        <a:xfrm>
+          <a:off x="0" y="0"/>
+          <a:ext cx="0" cy="0"/>
+          <a:chOff x="0" y="0"/>
+          <a:chExt cx="0" cy="0"/>
+        </a:xfrm>
+      </p:grpSpPr>
+      <p:sp>
+        <p:nvSpPr>
+          <p:cNvPr id="120" name="Subtítulo de la diapositiva"/>
+          <p:cNvSpPr txBox="1">
+            <a:spLocks noGrp="1"/>
+          </p:cNvSpPr>
+          <p:nvPr>
+            <p:ph type="body" sz="quarter" idx="21" hasCustomPrompt="1"/>
+          </p:nvPr>
+        </p:nvSpPr>
+        <p:spPr>
+          <a:xfrm>
+            <a:off x="1206500" y="2372962"/>
+            <a:ext cx="9779000" cy="934780"/>
+          </a:xfrm>
+          <a:prstGeom prst="rect">
+            <a:avLst/>
+          </a:prstGeom>
+        </p:spPr>
+        <p:txBody>
+          <a:bodyPr lIns="45719" tIns="45719" rIns="45719" bIns="45719"/>
+          <a:lstStyle>
+            <a:lvl1pPr marL="0" indent="0" defTabSz="825500">
+              <a:lnSpc>
+                <a:spcPct val="100000"/>
+              </a:lnSpc>
+              <a:spcBef>
+                <a:spcPts val="0"/>
+              </a:spcBef>
+              <a:buSzTx/>
+              <a:buNone/>
+              <a:defRPr sz="5500" b="1" i="1">
+                <a:solidFill>
+                  <a:srgbClr val="D5D5D5"/>
+                </a:solidFill>
+              </a:defRPr>
+            </a:lvl1pPr>
+          </a:lstStyle>
+          <a:p>
+            <a:r>
+              <a:t>Subtítulo de la diapositiva</a:t>
+            </a:r>
+          </a:p>
+        </p:txBody>
+      </p:sp>
+      <p:sp>
+        <p:nvSpPr>
+          <p:cNvPr id="121" name="Nivel de texto 1…"/>
+          <p:cNvSpPr txBox="1">
+            <a:spLocks noGrp="1"/>
+          </p:cNvSpPr>
+          <p:nvPr>
+            <p:ph type="body" sz="half" idx="1" hasCustomPrompt="1"/>
+          </p:nvPr>
+        </p:nvSpPr>
+        <p:spPr>
+          <a:xfrm>
+            <a:off x="1206500" y="4248504"/>
+            <a:ext cx="9779000" cy="8256630"/>
+          </a:xfrm>
+          <a:prstGeom prst="rect">
+            <a:avLst/>
+          </a:prstGeom>
+        </p:spPr>
+        <p:txBody>
+          <a:bodyPr/>
+          <a:lstStyle>
+            <a:lvl1pPr>
+              <a:defRPr>
+                <a:solidFill>
+                  <a:srgbClr val="FFFFFF"/>
+                </a:solidFill>
+              </a:defRPr>
+            </a:lvl1pPr>
+            <a:lvl2pPr>
+              <a:defRPr>
+                <a:solidFill>
+                  <a:srgbClr val="FFFFFF"/>
+                </a:solidFill>
+              </a:defRPr>
+            </a:lvl2pPr>
+            <a:lvl3pPr>
+              <a:defRPr>
+                <a:solidFill>
+                  <a:srgbClr val="FFFFFF"/>
+                </a:solidFill>
+              </a:defRPr>
+            </a:lvl3pPr>
+            <a:lvl4pPr>
+              <a:defRPr>
+                <a:solidFill>
+                  <a:srgbClr val="FFFFFF"/>
+                </a:solidFill>
+              </a:defRPr>
+            </a:lvl4pPr>
+            <a:lvl5pPr>
+              <a:defRPr>
+                <a:solidFill>
+                  <a:srgbClr val="FFFFFF"/>
+                </a:solidFill>
+              </a:defRPr>
+            </a:lvl5pPr>
+          </a:lstStyle>
+          <a:p>
+            <a:r>
+              <a:t>Texto de viñeta de la diapositiva</a:t>
+            </a:r>
+          </a:p>
+          <a:p>
+            <a:pPr lvl="1"/>
+            <a:endParaRPr/>
+          </a:p>
+          <a:p>
+            <a:pPr lvl="2"/>
+            <a:endParaRPr/>
+          </a:p>
+          <a:p>
+            <a:pPr lvl="3"/>
+            <a:endParaRPr/>
+          </a:p>
+          <a:p>
+            <a:pPr lvl="4"/>
+            <a:endParaRPr/>
+          </a:p>
+        </p:txBody>
+      </p:sp>
+      <p:sp>
+        <p:nvSpPr>
+          <p:cNvPr id="122" name="Cuenco de pappardelle con mantequilla de perejil, avellanas tostadas y lascas de queso parmesano"/>
+          <p:cNvSpPr>
+            <a:spLocks noGrp="1"/>
+          </p:cNvSpPr>
+          <p:nvPr>
+            <p:ph type="pic" idx="22"/>
+          </p:nvPr>
+        </p:nvSpPr>
+        <p:spPr>
+          <a:xfrm>
+            <a:off x="12192000" y="-407266"/>
+            <a:ext cx="10916874" cy="14555832"/>
+          </a:xfrm>
+          <a:prstGeom prst="rect">
+            <a:avLst/>
+          </a:prstGeom>
+        </p:spPr>
+        <p:txBody>
+          <a:bodyPr lIns="91439" tIns="45719" rIns="91439" bIns="45719">
+            <a:noAutofit/>
+          </a:bodyPr>
+          <a:lstStyle/>
+          <a:p>
+            <a:endParaRPr/>
+          </a:p>
+        </p:txBody>
+      </p:sp>
+      <p:sp>
+        <p:nvSpPr>
+          <p:cNvPr id="123" name="Título de la diapositiva"/>
+          <p:cNvSpPr txBox="1">
+            <a:spLocks noGrp="1"/>
+          </p:cNvSpPr>
+          <p:nvPr>
+            <p:ph type="title" hasCustomPrompt="1"/>
+          </p:nvPr>
+        </p:nvSpPr>
+        <p:spPr>
+          <a:xfrm>
+            <a:off x="1206500" y="1079500"/>
+            <a:ext cx="9779000" cy="1435100"/>
+          </a:xfrm>
+          <a:prstGeom prst="rect">
+            <a:avLst/>
+          </a:prstGeom>
+        </p:spPr>
+        <p:txBody>
+          <a:bodyPr/>
+          <a:lstStyle>
+            <a:lvl1pPr>
+              <a:defRPr>
+                <a:solidFill>
+                  <a:srgbClr val="FFFFFF"/>
+                </a:solidFill>
+              </a:defRPr>
+            </a:lvl1pPr>
+          </a:lstStyle>
+          <a:p>
+            <a:r>
+              <a:t>Título de la diapositiva</a:t>
+            </a:r>
+          </a:p>
+        </p:txBody>
+      </p:sp>
+      <p:pic>
+        <p:nvPicPr>
+          <p:cNvPr id="124" name="UPC-blanc-fons-transp.png" descr="UPC-blanc-fons-transp.png"/>
+          <p:cNvPicPr>
+            <a:picLocks noChangeAspect="1"/>
+          </p:cNvPicPr>
+          <p:nvPr/>
+        </p:nvPicPr>
+        <p:blipFill>
+          <a:blip r:embed="rId2"/>
+          <a:stretch>
+            <a:fillRect/>
+          </a:stretch>
+        </p:blipFill>
+        <p:spPr>
+          <a:xfrm>
+            <a:off x="20853400" y="12661900"/>
+            <a:ext cx="3517900" cy="1054750"/>
+          </a:xfrm>
+          <a:prstGeom prst="rect">
+            <a:avLst/>
+          </a:prstGeom>
+          <a:ln w="12700">
+            <a:miter lim="400000"/>
+          </a:ln>
+        </p:spPr>
+      </p:pic>
+      <p:sp>
+        <p:nvSpPr>
+          <p:cNvPr id="126" name="Número de diapositiva"/>
+          <p:cNvSpPr txBox="1">
+            <a:spLocks noGrp="1"/>
+          </p:cNvSpPr>
+          <p:nvPr>
+            <p:ph type="sldNum" sz="quarter" idx="2"/>
+          </p:nvPr>
+        </p:nvSpPr>
+        <p:spPr>
+          <a:prstGeom prst="rect">
+            <a:avLst/>
+          </a:prstGeom>
+        </p:spPr>
+        <p:txBody>
+          <a:bodyPr/>
+          <a:lstStyle>
+            <a:lvl1pPr>
+              <a:defRPr>
+                <a:solidFill>
+                  <a:srgbClr val="D5D5D5"/>
+                </a:solidFill>
+              </a:defRPr>
+            </a:lvl1pPr>
+          </a:lstStyle>
+          <a:p>
+            <a:fld id="{86CB4B4D-7CA3-9044-876B-883B54F8677D}" type="slidenum">
+              <a:t>‹Nº›</a:t>
+            </a:fld>
+            <a:endParaRPr/>
+          </a:p>
+        </p:txBody>
+      </p:sp>
+      <p:pic>
+        <p:nvPicPr>
+          <p:cNvPr id="2" name="Picture 2" descr="Industry Office - Industry Office - Connecting Science &amp; Industry">
+            <a:extLst>
+              <a:ext uri="{FF2B5EF4-FFF2-40B4-BE49-F238E27FC236}">
+                <a16:creationId xmlns:a16="http://schemas.microsoft.com/office/drawing/2014/main" id="{4C1068CB-81C0-DD0D-20CC-6813E947C8D5}"/>
+              </a:ext>
+            </a:extLst>
+          </p:cNvPr>
+          <p:cNvPicPr>
+            <a:picLocks noChangeAspect="1" noChangeArrowheads="1"/>
+          </p:cNvPicPr>
+          <p:nvPr userDrawn="1"/>
+        </p:nvPicPr>
+        <p:blipFill>
+          <a:blip r:embed="rId3">
+            <a:extLst>
+              <a:ext uri="{28A0092B-C50C-407E-A947-70E740481C1C}">
+                <a14:useLocalDpi xmlns:a14="http://schemas.microsoft.com/office/drawing/2010/main" val="0"/>
+              </a:ext>
+            </a:extLst>
+          </a:blip>
+          <a:srcRect/>
+          <a:stretch>
+            <a:fillRect/>
+          </a:stretch>
+        </p:blipFill>
+        <p:spPr bwMode="auto">
+          <a:xfrm>
+            <a:off x="16865600" y="12708830"/>
+            <a:ext cx="3749816" cy="960890"/>
+          </a:xfrm>
+          <a:prstGeom prst="rect">
+            <a:avLst/>
+          </a:prstGeom>
+          <a:noFill/>
+          <a:extLst>
+            <a:ext uri="{909E8E84-426E-40DD-AFC4-6F175D3DCCD1}">
+              <a14:hiddenFill xmlns:a14="http://schemas.microsoft.com/office/drawing/2010/main">
+                <a:solidFill>
+                  <a:srgbClr val="FFFFFF"/>
+                </a:solidFill>
+              </a14:hiddenFill>
+            </a:ext>
+          </a:extLst>
+        </p:spPr>
+      </p:pic>
     </p:spTree>
   </p:cSld>
   <p:clrMapOvr>
@@ -7647,7 +6221,7 @@
           </a:ln>
           <a:extLst>
             <a:ext uri="{C572A759-6A51-4108-AA02-DFA0A04FC94B}">
-              <ma14:wrappingTextBoxFlag xmlns="" xmlns:m="http://schemas.openxmlformats.org/officeDocument/2006/math" xmlns:a14="http://schemas.microsoft.com/office/drawing/2010/main" xmlns:ma14="http://schemas.microsoft.com/office/mac/drawingml/2011/main" val="1"/>
+              <ma14:wrappingTextBoxFlag xmlns:ma14="http://schemas.microsoft.com/office/mac/drawingml/2011/main" xmlns:a14="http://schemas.microsoft.com/office/drawing/2010/main" xmlns:m="http://schemas.openxmlformats.org/officeDocument/2006/math" xmlns="" val="1"/>
             </a:ext>
           </a:extLst>
         </p:spPr>
@@ -7686,7 +6260,7 @@
           </a:ln>
           <a:extLst>
             <a:ext uri="{C572A759-6A51-4108-AA02-DFA0A04FC94B}">
-              <ma14:wrappingTextBoxFlag xmlns="" xmlns:m="http://schemas.openxmlformats.org/officeDocument/2006/math" xmlns:a14="http://schemas.microsoft.com/office/drawing/2010/main" xmlns:ma14="http://schemas.microsoft.com/office/mac/drawingml/2011/main" val="1"/>
+              <ma14:wrappingTextBoxFlag xmlns:ma14="http://schemas.microsoft.com/office/mac/drawingml/2011/main" xmlns:a14="http://schemas.microsoft.com/office/drawing/2010/main" xmlns:m="http://schemas.openxmlformats.org/officeDocument/2006/math" xmlns="" val="1"/>
             </a:ext>
           </a:extLst>
         </p:spPr>
@@ -7727,7 +6301,7 @@
           <p:nvPr/>
         </p:nvPicPr>
         <p:blipFill>
-          <a:blip r:embed="rId34"/>
+          <a:blip r:embed="rId27"/>
           <a:stretch>
             <a:fillRect/>
           </a:stretch>
@@ -7803,7 +6377,7 @@
           <p:nvPr userDrawn="1"/>
         </p:nvPicPr>
         <p:blipFill rotWithShape="1">
-          <a:blip r:embed="rId35" cstate="print">
+          <a:blip r:embed="rId28" cstate="print">
             <a:extLst>
               <a:ext uri="{28A0092B-C50C-407E-A947-70E740481C1C}">
                 <a14:useLocalDpi xmlns:a14="http://schemas.microsoft.com/office/drawing/2010/main" val="0"/>
@@ -7842,35 +6416,28 @@
     <p:sldLayoutId id="2147483649" r:id="rId1"/>
     <p:sldLayoutId id="2147483650" r:id="rId2"/>
     <p:sldLayoutId id="2147483651" r:id="rId3"/>
-    <p:sldLayoutId id="2147483652" r:id="rId4"/>
-    <p:sldLayoutId id="2147483653" r:id="rId5"/>
-    <p:sldLayoutId id="2147483654" r:id="rId6"/>
-    <p:sldLayoutId id="2147483655" r:id="rId7"/>
-    <p:sldLayoutId id="2147483656" r:id="rId8"/>
-    <p:sldLayoutId id="2147483657" r:id="rId9"/>
-    <p:sldLayoutId id="2147483658" r:id="rId10"/>
-    <p:sldLayoutId id="2147483659" r:id="rId11"/>
-    <p:sldLayoutId id="2147483660" r:id="rId12"/>
-    <p:sldLayoutId id="2147483661" r:id="rId13"/>
-    <p:sldLayoutId id="2147483662" r:id="rId14"/>
-    <p:sldLayoutId id="2147483663" r:id="rId15"/>
-    <p:sldLayoutId id="2147483664" r:id="rId16"/>
-    <p:sldLayoutId id="2147483665" r:id="rId17"/>
-    <p:sldLayoutId id="2147483666" r:id="rId18"/>
-    <p:sldLayoutId id="2147483667" r:id="rId19"/>
-    <p:sldLayoutId id="2147483668" r:id="rId20"/>
-    <p:sldLayoutId id="2147483669" r:id="rId21"/>
-    <p:sldLayoutId id="2147483670" r:id="rId22"/>
-    <p:sldLayoutId id="2147483671" r:id="rId23"/>
-    <p:sldLayoutId id="2147483672" r:id="rId24"/>
-    <p:sldLayoutId id="2147483673" r:id="rId25"/>
-    <p:sldLayoutId id="2147483674" r:id="rId26"/>
-    <p:sldLayoutId id="2147483675" r:id="rId27"/>
-    <p:sldLayoutId id="2147483676" r:id="rId28"/>
-    <p:sldLayoutId id="2147483677" r:id="rId29"/>
-    <p:sldLayoutId id="2147483678" r:id="rId30"/>
-    <p:sldLayoutId id="2147483679" r:id="rId31"/>
-    <p:sldLayoutId id="2147483680" r:id="rId32"/>
+    <p:sldLayoutId id="2147483653" r:id="rId4"/>
+    <p:sldLayoutId id="2147483654" r:id="rId5"/>
+    <p:sldLayoutId id="2147483655" r:id="rId6"/>
+    <p:sldLayoutId id="2147483656" r:id="rId7"/>
+    <p:sldLayoutId id="2147483657" r:id="rId8"/>
+    <p:sldLayoutId id="2147483658" r:id="rId9"/>
+    <p:sldLayoutId id="2147483659" r:id="rId10"/>
+    <p:sldLayoutId id="2147483660" r:id="rId11"/>
+    <p:sldLayoutId id="2147483661" r:id="rId12"/>
+    <p:sldLayoutId id="2147483662" r:id="rId13"/>
+    <p:sldLayoutId id="2147483663" r:id="rId14"/>
+    <p:sldLayoutId id="2147483664" r:id="rId15"/>
+    <p:sldLayoutId id="2147483665" r:id="rId16"/>
+    <p:sldLayoutId id="2147483666" r:id="rId17"/>
+    <p:sldLayoutId id="2147483667" r:id="rId18"/>
+    <p:sldLayoutId id="2147483668" r:id="rId19"/>
+    <p:sldLayoutId id="2147483669" r:id="rId20"/>
+    <p:sldLayoutId id="2147483670" r:id="rId21"/>
+    <p:sldLayoutId id="2147483671" r:id="rId22"/>
+    <p:sldLayoutId id="2147483672" r:id="rId23"/>
+    <p:sldLayoutId id="2147483673" r:id="rId24"/>
+    <p:sldLayoutId id="2147483678" r:id="rId25"/>
   </p:sldLayoutIdLst>
   <p:transition spd="med"/>
   <p:txStyles>
@@ -8635,7 +7202,7 @@
           </a:prstGeom>
           <a:extLst>
             <a:ext uri="{C572A759-6A51-4108-AA02-DFA0A04FC94B}">
-              <ma14:wrappingTextBoxFlag xmlns="" xmlns:m="http://schemas.openxmlformats.org/officeDocument/2006/math" xmlns:a14="http://schemas.microsoft.com/office/drawing/2010/main" xmlns:ma14="http://schemas.microsoft.com/office/mac/drawingml/2011/main" val="1"/>
+              <ma14:wrappingTextBoxFlag xmlns:ma14="http://schemas.microsoft.com/office/mac/drawingml/2011/main" xmlns:a14="http://schemas.microsoft.com/office/drawing/2010/main" xmlns:m="http://schemas.openxmlformats.org/officeDocument/2006/math" xmlns="" val="1"/>
             </a:ext>
           </a:extLst>
         </p:spPr>
@@ -8646,8 +7213,20 @@
           <a:lstStyle/>
           <a:p>
             <a:r>
-              <a:t>Dr. Vicenç Fernández Alarcón</a:t>
+              <a:rPr lang="es-ES" dirty="0"/>
+              <a:t>Sergi </a:t>
             </a:r>
+            <a:r>
+              <a:rPr lang="es-ES" dirty="0" err="1"/>
+              <a:t>Ramirez</a:t>
+            </a:r>
+            <a:r>
+              <a:rPr lang="es-ES" dirty="0"/>
+              <a:t> Mitjans</a:t>
+            </a:r>
+          </a:p>
+          <a:p>
+            <a:endParaRPr dirty="0"/>
           </a:p>
         </p:txBody>
       </p:sp>
@@ -8671,7 +7250,76 @@
           <a:lstStyle/>
           <a:p>
             <a:r>
-              <a:t>Storytelling con datos</a:t>
+              <a:rPr lang="es-ES" b="1" i="0" u="none" strike="noStrike" dirty="0" err="1">
+                <a:solidFill>
+                  <a:schemeClr val="bg2">
+                    <a:lumMod val="10000"/>
+                  </a:schemeClr>
+                </a:solidFill>
+                <a:effectLst/>
+                <a:latin typeface="Mona Sans VF"/>
+              </a:rPr>
+              <a:t>Model</a:t>
+            </a:r>
+            <a:r>
+              <a:rPr lang="es-ES" b="1" i="0" u="none" strike="noStrike" dirty="0">
+                <a:solidFill>
+                  <a:schemeClr val="bg2">
+                    <a:lumMod val="10000"/>
+                  </a:schemeClr>
+                </a:solidFill>
+                <a:effectLst/>
+                <a:latin typeface="Mona Sans VF"/>
+              </a:rPr>
+              <a:t> </a:t>
+            </a:r>
+            <a:r>
+              <a:rPr lang="es-ES" b="1" i="0" u="none" strike="noStrike" dirty="0" err="1">
+                <a:solidFill>
+                  <a:schemeClr val="bg2">
+                    <a:lumMod val="10000"/>
+                  </a:schemeClr>
+                </a:solidFill>
+                <a:effectLst/>
+                <a:latin typeface="Mona Sans VF"/>
+              </a:rPr>
+              <a:t>Risk</a:t>
+            </a:r>
+            <a:r>
+              <a:rPr lang="es-ES" b="1" i="0" u="none" strike="noStrike" dirty="0">
+                <a:solidFill>
+                  <a:schemeClr val="bg2">
+                    <a:lumMod val="10000"/>
+                  </a:schemeClr>
+                </a:solidFill>
+                <a:effectLst/>
+                <a:latin typeface="Mona Sans VF"/>
+              </a:rPr>
+              <a:t> &amp; Data </a:t>
+            </a:r>
+            <a:r>
+              <a:rPr lang="es-ES" b="1" i="0" u="none" strike="noStrike" dirty="0" err="1">
+                <a:solidFill>
+                  <a:schemeClr val="bg2">
+                    <a:lumMod val="10000"/>
+                  </a:schemeClr>
+                </a:solidFill>
+                <a:effectLst/>
+                <a:latin typeface="Mona Sans VF"/>
+              </a:rPr>
+              <a:t>Science</a:t>
+            </a:r>
+            <a:r>
+              <a:rPr lang="es-ES" b="1" i="0" u="none" strike="noStrike" dirty="0">
+                <a:solidFill>
+                  <a:schemeClr val="bg2">
+                    <a:lumMod val="10000"/>
+                  </a:schemeClr>
+                </a:solidFill>
+                <a:effectLst/>
+                <a:latin typeface="Mona Sans VF"/>
+              </a:rPr>
+              <a:t> Training</a:t>
             </a:r>
           </a:p>
         </p:txBody>
@@ -8696,8 +7344,72 @@
           <a:lstStyle/>
           <a:p>
             <a:r>
-              <a:t>¡¡¡Contando historias!!!</a:t>
+              <a:rPr lang="es-ES" b="1" i="0" u="none" strike="noStrike" dirty="0">
+                <a:solidFill>
+                  <a:schemeClr val="tx1"/>
+                </a:solidFill>
+                <a:effectLst/>
+                <a:latin typeface="Mona Sans VF"/>
+              </a:rPr>
+              <a:t>CaixaBank · </a:t>
             </a:r>
+            <a:r>
+              <a:rPr lang="es-ES" b="1" i="0" u="none" strike="noStrike" dirty="0" err="1">
+                <a:solidFill>
+                  <a:schemeClr val="tx1"/>
+                </a:solidFill>
+                <a:effectLst/>
+                <a:latin typeface="Mona Sans VF"/>
+              </a:rPr>
+              <a:t>Advanced</a:t>
+            </a:r>
+            <a:r>
+              <a:rPr lang="es-ES" b="1" i="0" u="none" strike="noStrike" dirty="0">
+                <a:solidFill>
+                  <a:schemeClr val="tx1"/>
+                </a:solidFill>
+                <a:effectLst/>
+                <a:latin typeface="Mona Sans VF"/>
+              </a:rPr>
+              <a:t> </a:t>
+            </a:r>
+            <a:r>
+              <a:rPr lang="es-ES" b="1" i="0" u="none" strike="noStrike" dirty="0" err="1">
+                <a:solidFill>
+                  <a:schemeClr val="tx1"/>
+                </a:solidFill>
+                <a:effectLst/>
+                <a:latin typeface="Mona Sans VF"/>
+              </a:rPr>
+              <a:t>Analytics</a:t>
+            </a:r>
+            <a:r>
+              <a:rPr lang="es-ES" b="1" i="0" u="none" strike="noStrike" dirty="0">
+                <a:solidFill>
+                  <a:schemeClr val="tx1"/>
+                </a:solidFill>
+                <a:effectLst/>
+                <a:latin typeface="Mona Sans VF"/>
+              </a:rPr>
+              <a:t> </a:t>
+            </a:r>
+            <a:r>
+              <a:rPr lang="es-ES" b="1" i="0" u="none" strike="noStrike" dirty="0" err="1">
+                <a:solidFill>
+                  <a:schemeClr val="tx1"/>
+                </a:solidFill>
+                <a:effectLst/>
+                <a:latin typeface="Mona Sans VF"/>
+              </a:rPr>
+              <a:t>Program</a:t>
+            </a:r>
+            <a:endParaRPr lang="es-ES" b="1" i="0" u="none" strike="noStrike" dirty="0">
+              <a:solidFill>
+                <a:schemeClr val="tx1"/>
+              </a:solidFill>
+              <a:effectLst/>
+              <a:latin typeface="Mona Sans VF"/>
+            </a:endParaRPr>
           </a:p>
         </p:txBody>
       </p:sp>
@@ -8711,348 +7423,6 @@
 </file>
 
 <file path=ppt/slides/slide2.xml><?xml version="1.0" encoding="utf-8"?>
-<p:sld xmlns:a="http://schemas.openxmlformats.org/drawingml/2006/main" xmlns:r="http://schemas.openxmlformats.org/officeDocument/2006/relationships" xmlns:p="http://schemas.openxmlformats.org/presentationml/2006/main">
-  <p:cSld>
-    <p:spTree>
-      <p:nvGrpSpPr>
-        <p:cNvPr id="1" name=""/>
-        <p:cNvGrpSpPr/>
-        <p:nvPr/>
-      </p:nvGrpSpPr>
-      <p:grpSpPr>
-        <a:xfrm>
-          <a:off x="0" y="0"/>
-          <a:ext cx="0" cy="0"/>
-          <a:chOff x="0" y="0"/>
-          <a:chExt cx="0" cy="0"/>
-        </a:xfrm>
-      </p:grpSpPr>
-      <p:sp>
-        <p:nvSpPr>
-          <p:cNvPr id="350" name="Storytelling"/>
-          <p:cNvSpPr txBox="1">
-            <a:spLocks noGrp="1"/>
-          </p:cNvSpPr>
-          <p:nvPr>
-            <p:ph type="body" idx="21"/>
-          </p:nvPr>
-        </p:nvSpPr>
-        <p:spPr>
-          <a:prstGeom prst="rect">
-            <a:avLst/>
-          </a:prstGeom>
-          <a:extLst>
-            <a:ext uri="{C572A759-6A51-4108-AA02-DFA0A04FC94B}">
-              <ma14:wrappingTextBoxFlag xmlns="" xmlns:m="http://schemas.openxmlformats.org/officeDocument/2006/math" xmlns:a14="http://schemas.microsoft.com/office/drawing/2010/main" xmlns:ma14="http://schemas.microsoft.com/office/mac/drawingml/2011/main" val="1"/>
-            </a:ext>
-          </a:extLst>
-        </p:spPr>
-        <p:txBody>
-          <a:bodyPr/>
-          <a:lstStyle/>
-          <a:p>
-            <a:r>
-              <a:t>Storytelling</a:t>
-            </a:r>
-          </a:p>
-        </p:txBody>
-      </p:sp>
-      <p:sp>
-        <p:nvSpPr>
-          <p:cNvPr id="351" name="El por qué……"/>
-          <p:cNvSpPr txBox="1">
-            <a:spLocks noGrp="1"/>
-          </p:cNvSpPr>
-          <p:nvPr>
-            <p:ph type="body" sz="half" idx="1"/>
-          </p:nvPr>
-        </p:nvSpPr>
-        <p:spPr>
-          <a:prstGeom prst="rect">
-            <a:avLst/>
-          </a:prstGeom>
-        </p:spPr>
-        <p:txBody>
-          <a:bodyPr/>
-          <a:lstStyle/>
-          <a:p>
-            <a:pPr>
-              <a:defRPr sz="9600"/>
-            </a:pPr>
-            <a:r>
-              <a:t>El por qué…</a:t>
-            </a:r>
-          </a:p>
-          <a:p>
-            <a:pPr>
-              <a:defRPr sz="9600"/>
-            </a:pPr>
-            <a:r>
-              <a:t>El qué…</a:t>
-            </a:r>
-          </a:p>
-          <a:p>
-            <a:pPr>
-              <a:defRPr sz="9600"/>
-            </a:pPr>
-            <a:r>
-              <a:t>El cómo… </a:t>
-            </a:r>
-          </a:p>
-        </p:txBody>
-      </p:sp>
-      <p:pic>
-        <p:nvPicPr>
-          <p:cNvPr id="352" name="Cuenco de pappardelle con mantequilla de perejil, avellanas tostadas y lascas de queso parmesano" descr="Cuenco de pappardelle con mantequilla de perejil, avellanas tostadas y lascas de queso parmesano"/>
-          <p:cNvPicPr>
-            <a:picLocks noGrp="1" noChangeAspect="1"/>
-          </p:cNvPicPr>
-          <p:nvPr>
-            <p:ph type="pic" idx="22"/>
-          </p:nvPr>
-        </p:nvPicPr>
-        <p:blipFill>
-          <a:blip r:embed="rId2"/>
-          <a:srcRect l="609" r="30478"/>
-          <a:stretch>
-            <a:fillRect/>
-          </a:stretch>
-        </p:blipFill>
-        <p:spPr>
-          <a:xfrm>
-            <a:off x="12191999" y="1263848"/>
-            <a:ext cx="10916874" cy="11188205"/>
-          </a:xfrm>
-          <a:prstGeom prst="rect">
-            <a:avLst/>
-          </a:prstGeom>
-        </p:spPr>
-      </p:pic>
-      <p:sp>
-        <p:nvSpPr>
-          <p:cNvPr id="353" name="Agenda"/>
-          <p:cNvSpPr txBox="1">
-            <a:spLocks noGrp="1"/>
-          </p:cNvSpPr>
-          <p:nvPr>
-            <p:ph type="title"/>
-          </p:nvPr>
-        </p:nvSpPr>
-        <p:spPr>
-          <a:prstGeom prst="rect">
-            <a:avLst/>
-          </a:prstGeom>
-        </p:spPr>
-        <p:txBody>
-          <a:bodyPr/>
-          <a:lstStyle/>
-          <a:p>
-            <a:r>
-              <a:t>Agenda</a:t>
-            </a:r>
-          </a:p>
-        </p:txBody>
-      </p:sp>
-      <p:sp>
-        <p:nvSpPr>
-          <p:cNvPr id="354" name="Número de diapositiva"/>
-          <p:cNvSpPr txBox="1">
-            <a:spLocks noGrp="1"/>
-          </p:cNvSpPr>
-          <p:nvPr>
-            <p:ph type="sldNum" sz="quarter" idx="2"/>
-          </p:nvPr>
-        </p:nvSpPr>
-        <p:spPr>
-          <a:xfrm>
-            <a:off x="12065050" y="13080999"/>
-            <a:ext cx="241403" cy="374600"/>
-          </a:xfrm>
-          <a:prstGeom prst="rect">
-            <a:avLst/>
-          </a:prstGeom>
-          <a:extLst>
-            <a:ext uri="{C572A759-6A51-4108-AA02-DFA0A04FC94B}">
-              <ma14:wrappingTextBoxFlag xmlns="" xmlns:m="http://schemas.openxmlformats.org/officeDocument/2006/math" xmlns:a14="http://schemas.microsoft.com/office/drawing/2010/main" xmlns:ma14="http://schemas.microsoft.com/office/mac/drawingml/2011/main" val="1"/>
-            </a:ext>
-          </a:extLst>
-        </p:spPr>
-        <p:txBody>
-          <a:bodyPr/>
-          <a:lstStyle/>
-          <a:p>
-            <a:fld id="{86CB4B4D-7CA3-9044-876B-883B54F8677D}" type="slidenum">
-              <a:t>2</a:t>
-            </a:fld>
-            <a:endParaRPr/>
-          </a:p>
-        </p:txBody>
-      </p:sp>
-      <p:sp>
-        <p:nvSpPr>
-          <p:cNvPr id="355" name="Image by Dorothe from Pixabay"/>
-          <p:cNvSpPr txBox="1"/>
-          <p:nvPr/>
-        </p:nvSpPr>
-        <p:spPr>
-          <a:xfrm>
-            <a:off x="12196105" y="12449290"/>
-            <a:ext cx="2959507" cy="324511"/>
-          </a:xfrm>
-          <a:prstGeom prst="rect">
-            <a:avLst/>
-          </a:prstGeom>
-          <a:ln w="12700">
-            <a:miter lim="400000"/>
-          </a:ln>
-          <a:extLst>
-            <a:ext uri="{C572A759-6A51-4108-AA02-DFA0A04FC94B}">
-              <ma14:wrappingTextBoxFlag xmlns="" xmlns:m="http://schemas.openxmlformats.org/officeDocument/2006/math" xmlns:a14="http://schemas.microsoft.com/office/drawing/2010/main" xmlns:ma14="http://schemas.microsoft.com/office/mac/drawingml/2011/main" val="1"/>
-            </a:ext>
-          </a:extLst>
-        </p:spPr>
-        <p:txBody>
-          <a:bodyPr wrap="none" lIns="50800" tIns="50800" rIns="50800" bIns="50800" anchor="ctr">
-            <a:spAutoFit/>
-          </a:bodyPr>
-          <a:lstStyle>
-            <a:lvl1pPr>
-              <a:defRPr sz="1600" i="1">
-                <a:solidFill>
-                  <a:srgbClr val="D5D5D5"/>
-                </a:solidFill>
-              </a:defRPr>
-            </a:lvl1pPr>
-          </a:lstStyle>
-          <a:p>
-            <a:r>
-              <a:t>Image by Dorothe from Pixabay</a:t>
-            </a:r>
-          </a:p>
-        </p:txBody>
-      </p:sp>
-    </p:spTree>
-  </p:cSld>
-  <p:clrMapOvr>
-    <a:masterClrMapping/>
-  </p:clrMapOvr>
-  <p:transition spd="med"/>
-</p:sld>
-</file>
-
-<file path=ppt/slides/slide3.xml><?xml version="1.0" encoding="utf-8"?>
-<p:sld xmlns:a="http://schemas.openxmlformats.org/drawingml/2006/main" xmlns:r="http://schemas.openxmlformats.org/officeDocument/2006/relationships" xmlns:p="http://schemas.openxmlformats.org/presentationml/2006/main">
-  <p:cSld>
-    <p:spTree>
-      <p:nvGrpSpPr>
-        <p:cNvPr id="1" name=""/>
-        <p:cNvGrpSpPr/>
-        <p:nvPr/>
-      </p:nvGrpSpPr>
-      <p:grpSpPr>
-        <a:xfrm>
-          <a:off x="0" y="0"/>
-          <a:ext cx="0" cy="0"/>
-          <a:chOff x="0" y="0"/>
-          <a:chExt cx="0" cy="0"/>
-        </a:xfrm>
-      </p:grpSpPr>
-      <p:sp>
-        <p:nvSpPr>
-          <p:cNvPr id="357" name="vicenc.fernandez@upc.edu"/>
-          <p:cNvSpPr txBox="1">
-            <a:spLocks noGrp="1"/>
-          </p:cNvSpPr>
-          <p:nvPr>
-            <p:ph type="title"/>
-          </p:nvPr>
-        </p:nvSpPr>
-        <p:spPr>
-          <a:prstGeom prst="rect">
-            <a:avLst/>
-          </a:prstGeom>
-        </p:spPr>
-        <p:txBody>
-          <a:bodyPr/>
-          <a:lstStyle>
-            <a:lvl1pPr>
-              <a:defRPr i="1"/>
-            </a:lvl1pPr>
-          </a:lstStyle>
-          <a:p>
-            <a:r>
-              <a:rPr dirty="0"/>
-              <a:t>vicenc.fernandez@upc.edu</a:t>
-            </a:r>
-          </a:p>
-        </p:txBody>
-      </p:sp>
-    </p:spTree>
-  </p:cSld>
-  <p:clrMapOvr>
-    <a:masterClrMapping/>
-  </p:clrMapOvr>
-  <p:transition spd="med"/>
-</p:sld>
-</file>
-
-<file path=ppt/slides/slide4.xml><?xml version="1.0" encoding="utf-8"?>
-<p:sld xmlns:a="http://schemas.openxmlformats.org/drawingml/2006/main" xmlns:r="http://schemas.openxmlformats.org/officeDocument/2006/relationships" xmlns:p="http://schemas.openxmlformats.org/presentationml/2006/main">
-  <p:cSld>
-    <p:spTree>
-      <p:nvGrpSpPr>
-        <p:cNvPr id="1" name=""/>
-        <p:cNvGrpSpPr/>
-        <p:nvPr/>
-      </p:nvGrpSpPr>
-      <p:grpSpPr>
-        <a:xfrm>
-          <a:off x="0" y="0"/>
-          <a:ext cx="0" cy="0"/>
-          <a:chOff x="0" y="0"/>
-          <a:chExt cx="0" cy="0"/>
-        </a:xfrm>
-      </p:grpSpPr>
-      <p:sp>
-        <p:nvSpPr>
-          <p:cNvPr id="2" name="Título 1">
-            <a:extLst>
-              <a:ext uri="{FF2B5EF4-FFF2-40B4-BE49-F238E27FC236}">
-                <a16:creationId xmlns:a16="http://schemas.microsoft.com/office/drawing/2014/main" id="{AE0AC092-D7C9-1413-22C7-2BF4D0120034}"/>
-              </a:ext>
-            </a:extLst>
-          </p:cNvPr>
-          <p:cNvSpPr>
-            <a:spLocks noGrp="1"/>
-          </p:cNvSpPr>
-          <p:nvPr>
-            <p:ph type="title"/>
-          </p:nvPr>
-        </p:nvSpPr>
-        <p:spPr/>
-        <p:txBody>
-          <a:bodyPr/>
-          <a:lstStyle/>
-          <a:p>
-            <a:endParaRPr lang="es-ES"/>
-          </a:p>
-        </p:txBody>
-      </p:sp>
-    </p:spTree>
-    <p:extLst>
-      <p:ext uri="{BB962C8B-B14F-4D97-AF65-F5344CB8AC3E}">
-        <p14:creationId xmlns:p14="http://schemas.microsoft.com/office/powerpoint/2010/main" val="376384476"/>
-      </p:ext>
-    </p:extLst>
-  </p:cSld>
-  <p:clrMapOvr>
-    <a:masterClrMapping/>
-  </p:clrMapOvr>
-  <p:transition spd="med"/>
-</p:sld>
-</file>
-
-<file path=ppt/slides/slide5.xml><?xml version="1.0" encoding="utf-8"?>
 <p:sld xmlns:a="http://schemas.openxmlformats.org/drawingml/2006/main" xmlns:r="http://schemas.openxmlformats.org/officeDocument/2006/relationships" xmlns:p="http://schemas.openxmlformats.org/presentationml/2006/main">
   <p:cSld>
     <p:spTree>
@@ -9097,7 +7467,7 @@
         </p:blipFill>
         <p:spPr bwMode="auto">
           <a:xfrm>
-            <a:off x="5423960" y="136525"/>
+            <a:off x="4655864" y="146304"/>
             <a:ext cx="13536081" cy="12387263"/>
           </a:xfrm>
           <a:prstGeom prst="rect">
@@ -9121,6 +7491,928 @@
         <p14:creationId xmlns:p14="http://schemas.microsoft.com/office/powerpoint/2010/main" val="2799412023"/>
       </p:ext>
     </p:extLst>
+  </p:cSld>
+  <p:clrMapOvr>
+    <a:masterClrMapping/>
+  </p:clrMapOvr>
+  <p:transition spd="med"/>
+</p:sld>
+</file>
+
+<file path=ppt/slides/slide3.xml><?xml version="1.0" encoding="utf-8"?>
+<p:sld xmlns:a="http://schemas.openxmlformats.org/drawingml/2006/main" xmlns:r="http://schemas.openxmlformats.org/officeDocument/2006/relationships" xmlns:p="http://schemas.openxmlformats.org/presentationml/2006/main">
+  <p:cSld>
+    <p:spTree>
+      <p:nvGrpSpPr>
+        <p:cNvPr id="1" name=""/>
+        <p:cNvGrpSpPr/>
+        <p:nvPr/>
+      </p:nvGrpSpPr>
+      <p:grpSpPr>
+        <a:xfrm>
+          <a:off x="0" y="0"/>
+          <a:ext cx="0" cy="0"/>
+          <a:chOff x="0" y="0"/>
+          <a:chExt cx="0" cy="0"/>
+        </a:xfrm>
+      </p:grpSpPr>
+      <p:sp>
+        <p:nvSpPr>
+          <p:cNvPr id="353" name="Agenda"/>
+          <p:cNvSpPr txBox="1">
+            <a:spLocks noGrp="1"/>
+          </p:cNvSpPr>
+          <p:nvPr>
+            <p:ph type="title"/>
+          </p:nvPr>
+        </p:nvSpPr>
+        <p:spPr>
+          <a:prstGeom prst="rect">
+            <a:avLst/>
+          </a:prstGeom>
+        </p:spPr>
+        <p:txBody>
+          <a:bodyPr/>
+          <a:lstStyle/>
+          <a:p>
+            <a:r>
+              <a:t>Agenda</a:t>
+            </a:r>
+          </a:p>
+        </p:txBody>
+      </p:sp>
+      <p:sp>
+        <p:nvSpPr>
+          <p:cNvPr id="354" name="Número de diapositiva"/>
+          <p:cNvSpPr txBox="1">
+            <a:spLocks noGrp="1"/>
+          </p:cNvSpPr>
+          <p:nvPr>
+            <p:ph type="sldNum" sz="quarter" idx="2"/>
+          </p:nvPr>
+        </p:nvSpPr>
+        <p:spPr>
+          <a:xfrm>
+            <a:off x="12065050" y="13080999"/>
+            <a:ext cx="241403" cy="374600"/>
+          </a:xfrm>
+          <a:prstGeom prst="rect">
+            <a:avLst/>
+          </a:prstGeom>
+          <a:extLst>
+            <a:ext uri="{C572A759-6A51-4108-AA02-DFA0A04FC94B}">
+              <ma14:wrappingTextBoxFlag xmlns:ma14="http://schemas.microsoft.com/office/mac/drawingml/2011/main" xmlns:a14="http://schemas.microsoft.com/office/drawing/2010/main" xmlns:m="http://schemas.openxmlformats.org/officeDocument/2006/math" xmlns="" val="1"/>
+            </a:ext>
+          </a:extLst>
+        </p:spPr>
+        <p:txBody>
+          <a:bodyPr/>
+          <a:lstStyle/>
+          <a:p>
+            <a:fld id="{86CB4B4D-7CA3-9044-876B-883B54F8677D}" type="slidenum">
+              <a:rPr/>
+              <a:t>3</a:t>
+            </a:fld>
+            <a:endParaRPr/>
+          </a:p>
+        </p:txBody>
+      </p:sp>
+      <p:sp>
+        <p:nvSpPr>
+          <p:cNvPr id="8" name="Rectángulo 7">
+            <a:extLst>
+              <a:ext uri="{FF2B5EF4-FFF2-40B4-BE49-F238E27FC236}">
+                <a16:creationId xmlns:a16="http://schemas.microsoft.com/office/drawing/2014/main" id="{8976EAF4-3406-1482-8D1B-D7F2D544019C}"/>
+              </a:ext>
+            </a:extLst>
+          </p:cNvPr>
+          <p:cNvSpPr/>
+          <p:nvPr/>
+        </p:nvSpPr>
+        <p:spPr>
+          <a:xfrm>
+            <a:off x="2184704" y="4998970"/>
+            <a:ext cx="5774163" cy="2872581"/>
+          </a:xfrm>
+          <a:prstGeom prst="rect">
+            <a:avLst/>
+          </a:prstGeom>
+          <a:ln/>
+        </p:spPr>
+        <p:style>
+          <a:lnRef idx="2">
+            <a:schemeClr val="dk1"/>
+          </a:lnRef>
+          <a:fillRef idx="1">
+            <a:schemeClr val="lt1"/>
+          </a:fillRef>
+          <a:effectRef idx="0">
+            <a:schemeClr val="dk1"/>
+          </a:effectRef>
+          <a:fontRef idx="minor">
+            <a:schemeClr val="dk1"/>
+          </a:fontRef>
+        </p:style>
+        <p:txBody>
+          <a:bodyPr rot="0" spcFirstLastPara="1" vertOverflow="overflow" horzOverflow="overflow" vert="horz" wrap="square" lIns="50800" tIns="50800" rIns="50800" bIns="50800" numCol="1" spcCol="38100" rtlCol="0" anchor="b">
+            <a:spAutoFit/>
+          </a:bodyPr>
+          <a:lstStyle/>
+          <a:p>
+            <a:pPr marR="0" algn="l" defTabSz="825500" rtl="0" fontAlgn="auto" latinLnBrk="0" hangingPunct="0">
+              <a:lnSpc>
+                <a:spcPct val="100000"/>
+              </a:lnSpc>
+              <a:spcBef>
+                <a:spcPts val="0"/>
+              </a:spcBef>
+              <a:spcAft>
+                <a:spcPts val="0"/>
+              </a:spcAft>
+              <a:buClrTx/>
+              <a:buSzTx/>
+              <a:tabLst/>
+            </a:pPr>
+            <a:endParaRPr kumimoji="0" lang="es-ES" sz="6000" b="1" i="0" u="none" strike="noStrike" cap="none" spc="0" normalizeH="0" baseline="0" dirty="0">
+              <a:ln>
+                <a:noFill/>
+              </a:ln>
+              <a:solidFill>
+                <a:srgbClr val="3479BB"/>
+              </a:solidFill>
+              <a:effectLst/>
+              <a:uFillTx/>
+              <a:latin typeface="Helvetica Neue Medium"/>
+              <a:ea typeface="Helvetica Neue Medium"/>
+              <a:cs typeface="Helvetica Neue Medium"/>
+              <a:sym typeface="Helvetica Neue Medium"/>
+            </a:endParaRPr>
+          </a:p>
+          <a:p>
+            <a:pPr marR="0" algn="l" defTabSz="825500" rtl="0" fontAlgn="auto" latinLnBrk="0" hangingPunct="0">
+              <a:lnSpc>
+                <a:spcPct val="100000"/>
+              </a:lnSpc>
+              <a:spcBef>
+                <a:spcPts val="0"/>
+              </a:spcBef>
+              <a:spcAft>
+                <a:spcPts val="0"/>
+              </a:spcAft>
+              <a:buClrTx/>
+              <a:buSzTx/>
+              <a:tabLst/>
+            </a:pPr>
+            <a:r>
+              <a:rPr kumimoji="0" lang="es-ES" sz="6000" b="1" i="0" u="none" strike="noStrike" cap="none" spc="0" normalizeH="0" baseline="0" dirty="0">
+                <a:ln>
+                  <a:noFill/>
+                </a:ln>
+                <a:solidFill>
+                  <a:srgbClr val="3479BB"/>
+                </a:solidFill>
+                <a:effectLst/>
+                <a:uFillTx/>
+                <a:latin typeface="Helvetica Neue Medium"/>
+                <a:ea typeface="Helvetica Neue Medium"/>
+                <a:cs typeface="Helvetica Neue Medium"/>
+                <a:sym typeface="Helvetica Neue Medium"/>
+              </a:rPr>
+              <a:t>01. MODELS SUPERVISATS</a:t>
+            </a:r>
+          </a:p>
+        </p:txBody>
+      </p:sp>
+      <p:sp>
+        <p:nvSpPr>
+          <p:cNvPr id="17" name="Rectángulo 16">
+            <a:extLst>
+              <a:ext uri="{FF2B5EF4-FFF2-40B4-BE49-F238E27FC236}">
+                <a16:creationId xmlns:a16="http://schemas.microsoft.com/office/drawing/2014/main" id="{12855C56-94F5-5B3E-93C8-4CD2662D6D85}"/>
+              </a:ext>
+            </a:extLst>
+          </p:cNvPr>
+          <p:cNvSpPr/>
+          <p:nvPr/>
+        </p:nvSpPr>
+        <p:spPr>
+          <a:xfrm>
+            <a:off x="8672548" y="4998971"/>
+            <a:ext cx="5774163" cy="2872581"/>
+          </a:xfrm>
+          <a:prstGeom prst="rect">
+            <a:avLst/>
+          </a:prstGeom>
+          <a:ln/>
+        </p:spPr>
+        <p:style>
+          <a:lnRef idx="2">
+            <a:schemeClr val="dk1"/>
+          </a:lnRef>
+          <a:fillRef idx="1">
+            <a:schemeClr val="lt1"/>
+          </a:fillRef>
+          <a:effectRef idx="0">
+            <a:schemeClr val="dk1"/>
+          </a:effectRef>
+          <a:fontRef idx="minor">
+            <a:schemeClr val="dk1"/>
+          </a:fontRef>
+        </p:style>
+        <p:txBody>
+          <a:bodyPr rot="0" spcFirstLastPara="1" vertOverflow="overflow" horzOverflow="overflow" vert="horz" wrap="square" lIns="50800" tIns="50800" rIns="50800" bIns="50800" numCol="1" spcCol="38100" rtlCol="0" anchor="b">
+            <a:spAutoFit/>
+          </a:bodyPr>
+          <a:lstStyle/>
+          <a:p>
+            <a:pPr marR="0" algn="l" defTabSz="825500" rtl="0" fontAlgn="auto" latinLnBrk="0" hangingPunct="0">
+              <a:lnSpc>
+                <a:spcPct val="100000"/>
+              </a:lnSpc>
+              <a:spcBef>
+                <a:spcPts val="0"/>
+              </a:spcBef>
+              <a:spcAft>
+                <a:spcPts val="0"/>
+              </a:spcAft>
+              <a:buClrTx/>
+              <a:buSzTx/>
+              <a:tabLst/>
+            </a:pPr>
+            <a:endParaRPr kumimoji="0" lang="es-ES" sz="6000" b="1" i="0" u="none" strike="noStrike" cap="none" spc="0" normalizeH="0" baseline="0" dirty="0">
+              <a:ln>
+                <a:noFill/>
+              </a:ln>
+              <a:solidFill>
+                <a:srgbClr val="3479BB"/>
+              </a:solidFill>
+              <a:effectLst/>
+              <a:uFillTx/>
+              <a:latin typeface="Helvetica Neue Medium"/>
+              <a:ea typeface="Helvetica Neue Medium"/>
+              <a:cs typeface="Helvetica Neue Medium"/>
+              <a:sym typeface="Helvetica Neue Medium"/>
+            </a:endParaRPr>
+          </a:p>
+          <a:p>
+            <a:pPr marR="0" algn="l" defTabSz="825500" rtl="0" fontAlgn="auto" latinLnBrk="0" hangingPunct="0">
+              <a:lnSpc>
+                <a:spcPct val="100000"/>
+              </a:lnSpc>
+              <a:spcBef>
+                <a:spcPts val="0"/>
+              </a:spcBef>
+              <a:spcAft>
+                <a:spcPts val="0"/>
+              </a:spcAft>
+              <a:buClrTx/>
+              <a:buSzTx/>
+              <a:tabLst/>
+            </a:pPr>
+            <a:r>
+              <a:rPr kumimoji="0" lang="es-ES" sz="6000" b="1" i="0" u="none" strike="noStrike" cap="none" spc="0" normalizeH="0" baseline="0" dirty="0">
+                <a:ln>
+                  <a:noFill/>
+                </a:ln>
+                <a:solidFill>
+                  <a:srgbClr val="3479BB"/>
+                </a:solidFill>
+                <a:effectLst/>
+                <a:uFillTx/>
+                <a:latin typeface="Helvetica Neue Medium"/>
+                <a:ea typeface="Helvetica Neue Medium"/>
+                <a:cs typeface="Helvetica Neue Medium"/>
+                <a:sym typeface="Helvetica Neue Medium"/>
+              </a:rPr>
+              <a:t>01. MODELS SUPERVISATS</a:t>
+            </a:r>
+          </a:p>
+        </p:txBody>
+      </p:sp>
+      <p:sp>
+        <p:nvSpPr>
+          <p:cNvPr id="18" name="Rectángulo 17">
+            <a:extLst>
+              <a:ext uri="{FF2B5EF4-FFF2-40B4-BE49-F238E27FC236}">
+                <a16:creationId xmlns:a16="http://schemas.microsoft.com/office/drawing/2014/main" id="{3E73D25C-A3AC-1C8A-B9E5-A577FDC18552}"/>
+              </a:ext>
+            </a:extLst>
+          </p:cNvPr>
+          <p:cNvSpPr/>
+          <p:nvPr/>
+        </p:nvSpPr>
+        <p:spPr>
+          <a:xfrm>
+            <a:off x="2184704" y="9143568"/>
+            <a:ext cx="5774163" cy="2872581"/>
+          </a:xfrm>
+          <a:prstGeom prst="rect">
+            <a:avLst/>
+          </a:prstGeom>
+          <a:ln/>
+        </p:spPr>
+        <p:style>
+          <a:lnRef idx="2">
+            <a:schemeClr val="dk1"/>
+          </a:lnRef>
+          <a:fillRef idx="1">
+            <a:schemeClr val="lt1"/>
+          </a:fillRef>
+          <a:effectRef idx="0">
+            <a:schemeClr val="dk1"/>
+          </a:effectRef>
+          <a:fontRef idx="minor">
+            <a:schemeClr val="dk1"/>
+          </a:fontRef>
+        </p:style>
+        <p:txBody>
+          <a:bodyPr rot="0" spcFirstLastPara="1" vertOverflow="overflow" horzOverflow="overflow" vert="horz" wrap="square" lIns="50800" tIns="50800" rIns="50800" bIns="50800" numCol="1" spcCol="38100" rtlCol="0" anchor="b">
+            <a:spAutoFit/>
+          </a:bodyPr>
+          <a:lstStyle/>
+          <a:p>
+            <a:pPr marR="0" algn="l" defTabSz="825500" rtl="0" fontAlgn="auto" latinLnBrk="0" hangingPunct="0">
+              <a:lnSpc>
+                <a:spcPct val="100000"/>
+              </a:lnSpc>
+              <a:spcBef>
+                <a:spcPts val="0"/>
+              </a:spcBef>
+              <a:spcAft>
+                <a:spcPts val="0"/>
+              </a:spcAft>
+              <a:buClrTx/>
+              <a:buSzTx/>
+              <a:tabLst/>
+            </a:pPr>
+            <a:endParaRPr kumimoji="0" lang="es-ES" sz="6000" b="1" i="0" u="none" strike="noStrike" cap="none" spc="0" normalizeH="0" baseline="0" dirty="0">
+              <a:ln>
+                <a:noFill/>
+              </a:ln>
+              <a:solidFill>
+                <a:srgbClr val="3479BB"/>
+              </a:solidFill>
+              <a:effectLst/>
+              <a:uFillTx/>
+              <a:latin typeface="Helvetica Neue Medium"/>
+              <a:ea typeface="Helvetica Neue Medium"/>
+              <a:cs typeface="Helvetica Neue Medium"/>
+              <a:sym typeface="Helvetica Neue Medium"/>
+            </a:endParaRPr>
+          </a:p>
+          <a:p>
+            <a:pPr marR="0" algn="l" defTabSz="825500" rtl="0" fontAlgn="auto" latinLnBrk="0" hangingPunct="0">
+              <a:lnSpc>
+                <a:spcPct val="100000"/>
+              </a:lnSpc>
+              <a:spcBef>
+                <a:spcPts val="0"/>
+              </a:spcBef>
+              <a:spcAft>
+                <a:spcPts val="0"/>
+              </a:spcAft>
+              <a:buClrTx/>
+              <a:buSzTx/>
+              <a:tabLst/>
+            </a:pPr>
+            <a:r>
+              <a:rPr kumimoji="0" lang="es-ES" sz="6000" b="1" i="0" u="none" strike="noStrike" cap="none" spc="0" normalizeH="0" baseline="0" dirty="0">
+                <a:ln>
+                  <a:noFill/>
+                </a:ln>
+                <a:solidFill>
+                  <a:srgbClr val="3479BB"/>
+                </a:solidFill>
+                <a:effectLst/>
+                <a:uFillTx/>
+                <a:latin typeface="Helvetica Neue Medium"/>
+                <a:ea typeface="Helvetica Neue Medium"/>
+                <a:cs typeface="Helvetica Neue Medium"/>
+                <a:sym typeface="Helvetica Neue Medium"/>
+              </a:rPr>
+              <a:t>01. MODELS SUPERVISATS</a:t>
+            </a:r>
+          </a:p>
+        </p:txBody>
+      </p:sp>
+      <p:sp>
+        <p:nvSpPr>
+          <p:cNvPr id="19" name="Rectángulo 18">
+            <a:extLst>
+              <a:ext uri="{FF2B5EF4-FFF2-40B4-BE49-F238E27FC236}">
+                <a16:creationId xmlns:a16="http://schemas.microsoft.com/office/drawing/2014/main" id="{CAA9BEC0-1425-9D7C-9AC1-FFE05DEDBEEE}"/>
+              </a:ext>
+            </a:extLst>
+          </p:cNvPr>
+          <p:cNvSpPr/>
+          <p:nvPr/>
+        </p:nvSpPr>
+        <p:spPr>
+          <a:xfrm>
+            <a:off x="8672548" y="9143568"/>
+            <a:ext cx="5774163" cy="2872581"/>
+          </a:xfrm>
+          <a:prstGeom prst="rect">
+            <a:avLst/>
+          </a:prstGeom>
+          <a:ln/>
+        </p:spPr>
+        <p:style>
+          <a:lnRef idx="2">
+            <a:schemeClr val="dk1"/>
+          </a:lnRef>
+          <a:fillRef idx="1">
+            <a:schemeClr val="lt1"/>
+          </a:fillRef>
+          <a:effectRef idx="0">
+            <a:schemeClr val="dk1"/>
+          </a:effectRef>
+          <a:fontRef idx="minor">
+            <a:schemeClr val="dk1"/>
+          </a:fontRef>
+        </p:style>
+        <p:txBody>
+          <a:bodyPr rot="0" spcFirstLastPara="1" vertOverflow="overflow" horzOverflow="overflow" vert="horz" wrap="square" lIns="50800" tIns="50800" rIns="50800" bIns="50800" numCol="1" spcCol="38100" rtlCol="0" anchor="b">
+            <a:spAutoFit/>
+          </a:bodyPr>
+          <a:lstStyle/>
+          <a:p>
+            <a:pPr marR="0" algn="l" defTabSz="825500" rtl="0" fontAlgn="auto" latinLnBrk="0" hangingPunct="0">
+              <a:lnSpc>
+                <a:spcPct val="100000"/>
+              </a:lnSpc>
+              <a:spcBef>
+                <a:spcPts val="0"/>
+              </a:spcBef>
+              <a:spcAft>
+                <a:spcPts val="0"/>
+              </a:spcAft>
+              <a:buClrTx/>
+              <a:buSzTx/>
+              <a:tabLst/>
+            </a:pPr>
+            <a:endParaRPr kumimoji="0" lang="es-ES" sz="6000" b="1" i="0" u="none" strike="noStrike" cap="none" spc="0" normalizeH="0" baseline="0" dirty="0">
+              <a:ln>
+                <a:noFill/>
+              </a:ln>
+              <a:solidFill>
+                <a:srgbClr val="3479BB"/>
+              </a:solidFill>
+              <a:effectLst/>
+              <a:uFillTx/>
+              <a:latin typeface="Helvetica Neue Medium"/>
+              <a:ea typeface="Helvetica Neue Medium"/>
+              <a:cs typeface="Helvetica Neue Medium"/>
+              <a:sym typeface="Helvetica Neue Medium"/>
+            </a:endParaRPr>
+          </a:p>
+          <a:p>
+            <a:pPr marR="0" algn="l" defTabSz="825500" rtl="0" fontAlgn="auto" latinLnBrk="0" hangingPunct="0">
+              <a:lnSpc>
+                <a:spcPct val="100000"/>
+              </a:lnSpc>
+              <a:spcBef>
+                <a:spcPts val="0"/>
+              </a:spcBef>
+              <a:spcAft>
+                <a:spcPts val="0"/>
+              </a:spcAft>
+              <a:buClrTx/>
+              <a:buSzTx/>
+              <a:tabLst/>
+            </a:pPr>
+            <a:r>
+              <a:rPr kumimoji="0" lang="es-ES" sz="6000" b="1" i="0" u="none" strike="noStrike" cap="none" spc="0" normalizeH="0" baseline="0" dirty="0">
+                <a:ln>
+                  <a:noFill/>
+                </a:ln>
+                <a:solidFill>
+                  <a:srgbClr val="3479BB"/>
+                </a:solidFill>
+                <a:effectLst/>
+                <a:uFillTx/>
+                <a:latin typeface="Helvetica Neue Medium"/>
+                <a:ea typeface="Helvetica Neue Medium"/>
+                <a:cs typeface="Helvetica Neue Medium"/>
+                <a:sym typeface="Helvetica Neue Medium"/>
+              </a:rPr>
+              <a:t>01. MODELS SUPERVISATS</a:t>
+            </a:r>
+          </a:p>
+        </p:txBody>
+      </p:sp>
+    </p:spTree>
+  </p:cSld>
+  <p:clrMapOvr>
+    <a:masterClrMapping/>
+  </p:clrMapOvr>
+  <p:transition spd="med"/>
+</p:sld>
+</file>
+
+<file path=ppt/slides/slide4.xml><?xml version="1.0" encoding="utf-8"?>
+<p:sld xmlns:a="http://schemas.openxmlformats.org/drawingml/2006/main" xmlns:r="http://schemas.openxmlformats.org/officeDocument/2006/relationships" xmlns:p="http://schemas.openxmlformats.org/presentationml/2006/main">
+  <p:cSld>
+    <p:spTree>
+      <p:nvGrpSpPr>
+        <p:cNvPr id="1" name=""/>
+        <p:cNvGrpSpPr/>
+        <p:nvPr/>
+      </p:nvGrpSpPr>
+      <p:grpSpPr>
+        <a:xfrm>
+          <a:off x="0" y="0"/>
+          <a:ext cx="0" cy="0"/>
+          <a:chOff x="0" y="0"/>
+          <a:chExt cx="0" cy="0"/>
+        </a:xfrm>
+      </p:grpSpPr>
+      <p:sp>
+        <p:nvSpPr>
+          <p:cNvPr id="2" name="CuadroTexto 1">
+            <a:extLst>
+              <a:ext uri="{FF2B5EF4-FFF2-40B4-BE49-F238E27FC236}">
+                <a16:creationId xmlns:a16="http://schemas.microsoft.com/office/drawing/2014/main" id="{48FBE165-ABD4-81D8-CC0C-05CDB3372B74}"/>
+              </a:ext>
+            </a:extLst>
+          </p:cNvPr>
+          <p:cNvSpPr txBox="1"/>
+          <p:nvPr/>
+        </p:nvSpPr>
+        <p:spPr>
+          <a:xfrm>
+            <a:off x="2755900" y="4936961"/>
+            <a:ext cx="18872200" cy="3842077"/>
+          </a:xfrm>
+          <a:prstGeom prst="rect">
+            <a:avLst/>
+          </a:prstGeom>
+          <a:noFill/>
+          <a:ln w="12700" cap="flat">
+            <a:noFill/>
+            <a:miter lim="400000"/>
+          </a:ln>
+          <a:effectLst/>
+          <a:sp3d/>
+        </p:spPr>
+        <p:style>
+          <a:lnRef idx="0">
+            <a:scrgbClr r="0" g="0" b="0"/>
+          </a:lnRef>
+          <a:fillRef idx="0">
+            <a:scrgbClr r="0" g="0" b="0"/>
+          </a:fillRef>
+          <a:effectRef idx="0">
+            <a:scrgbClr r="0" g="0" b="0"/>
+          </a:effectRef>
+          <a:fontRef idx="none"/>
+        </p:style>
+        <p:txBody>
+          <a:bodyPr rot="0" spcFirstLastPara="1" vertOverflow="overflow" horzOverflow="overflow" vert="horz" wrap="square" lIns="50800" tIns="50800" rIns="50800" bIns="50800" numCol="1" spcCol="38100" rtlCol="0" anchor="ctr">
+            <a:spAutoFit/>
+          </a:bodyPr>
+          <a:lstStyle/>
+          <a:p>
+            <a:pPr marL="0" marR="0" indent="0" algn="ctr" defTabSz="2438338" rtl="0" fontAlgn="auto" latinLnBrk="0" hangingPunct="0">
+              <a:lnSpc>
+                <a:spcPct val="100000"/>
+              </a:lnSpc>
+              <a:spcBef>
+                <a:spcPts val="0"/>
+              </a:spcBef>
+              <a:spcAft>
+                <a:spcPts val="0"/>
+              </a:spcAft>
+              <a:buClrTx/>
+              <a:buSzTx/>
+              <a:buFontTx/>
+              <a:buNone/>
+              <a:tabLst/>
+            </a:pPr>
+            <a:r>
+              <a:rPr kumimoji="0" lang="es-ES" sz="24300" b="0" i="0" u="none" strike="noStrike" cap="none" spc="0" normalizeH="0" baseline="0" dirty="0">
+                <a:ln>
+                  <a:noFill/>
+                </a:ln>
+                <a:solidFill>
+                  <a:schemeClr val="bg1"/>
+                </a:solidFill>
+                <a:effectLst/>
+                <a:uFillTx/>
+                <a:latin typeface="ADLaM Display" panose="02010000000000000000" pitchFamily="2" charset="77"/>
+                <a:ea typeface="ADLaM Display" panose="02010000000000000000" pitchFamily="2" charset="77"/>
+                <a:cs typeface="ADLaM Display" panose="02010000000000000000" pitchFamily="2" charset="77"/>
+                <a:sym typeface="Helvetica Neue"/>
+              </a:rPr>
+              <a:t>FINAL DIA 1</a:t>
+            </a:r>
+          </a:p>
+        </p:txBody>
+      </p:sp>
+    </p:spTree>
+    <p:extLst>
+      <p:ext uri="{BB962C8B-B14F-4D97-AF65-F5344CB8AC3E}">
+        <p14:creationId xmlns:p14="http://schemas.microsoft.com/office/powerpoint/2010/main" val="1365634657"/>
+      </p:ext>
+    </p:extLst>
+  </p:cSld>
+  <p:clrMapOvr>
+    <a:masterClrMapping/>
+  </p:clrMapOvr>
+  <p:transition spd="med"/>
+</p:sld>
+</file>
+
+<file path=ppt/slides/slide5.xml><?xml version="1.0" encoding="utf-8"?>
+<p:sld xmlns:a="http://schemas.openxmlformats.org/drawingml/2006/main" xmlns:r="http://schemas.openxmlformats.org/officeDocument/2006/relationships" xmlns:p="http://schemas.openxmlformats.org/presentationml/2006/main">
+  <p:cSld>
+    <p:spTree>
+      <p:nvGrpSpPr>
+        <p:cNvPr id="1" name="">
+          <a:extLst>
+            <a:ext uri="{FF2B5EF4-FFF2-40B4-BE49-F238E27FC236}">
+              <a16:creationId xmlns:a16="http://schemas.microsoft.com/office/drawing/2014/main" id="{8C486EAA-7190-0E66-6E8A-AA3B7FC85244}"/>
+            </a:ext>
+          </a:extLst>
+        </p:cNvPr>
+        <p:cNvGrpSpPr/>
+        <p:nvPr/>
+      </p:nvGrpSpPr>
+      <p:grpSpPr>
+        <a:xfrm>
+          <a:off x="0" y="0"/>
+          <a:ext cx="0" cy="0"/>
+          <a:chOff x="0" y="0"/>
+          <a:chExt cx="0" cy="0"/>
+        </a:xfrm>
+      </p:grpSpPr>
+      <p:sp>
+        <p:nvSpPr>
+          <p:cNvPr id="2" name="CuadroTexto 1">
+            <a:extLst>
+              <a:ext uri="{FF2B5EF4-FFF2-40B4-BE49-F238E27FC236}">
+                <a16:creationId xmlns:a16="http://schemas.microsoft.com/office/drawing/2014/main" id="{5005F7B1-00EB-6E26-AF4F-4E47473C3636}"/>
+              </a:ext>
+            </a:extLst>
+          </p:cNvPr>
+          <p:cNvSpPr txBox="1"/>
+          <p:nvPr/>
+        </p:nvSpPr>
+        <p:spPr>
+          <a:xfrm>
+            <a:off x="2755900" y="4936961"/>
+            <a:ext cx="18872200" cy="3842077"/>
+          </a:xfrm>
+          <a:prstGeom prst="rect">
+            <a:avLst/>
+          </a:prstGeom>
+          <a:noFill/>
+          <a:ln w="12700" cap="flat">
+            <a:noFill/>
+            <a:miter lim="400000"/>
+          </a:ln>
+          <a:effectLst/>
+          <a:sp3d/>
+        </p:spPr>
+        <p:style>
+          <a:lnRef idx="0">
+            <a:scrgbClr r="0" g="0" b="0"/>
+          </a:lnRef>
+          <a:fillRef idx="0">
+            <a:scrgbClr r="0" g="0" b="0"/>
+          </a:fillRef>
+          <a:effectRef idx="0">
+            <a:scrgbClr r="0" g="0" b="0"/>
+          </a:effectRef>
+          <a:fontRef idx="none"/>
+        </p:style>
+        <p:txBody>
+          <a:bodyPr rot="0" spcFirstLastPara="1" vertOverflow="overflow" horzOverflow="overflow" vert="horz" wrap="square" lIns="50800" tIns="50800" rIns="50800" bIns="50800" numCol="1" spcCol="38100" rtlCol="0" anchor="ctr">
+            <a:spAutoFit/>
+          </a:bodyPr>
+          <a:lstStyle/>
+          <a:p>
+            <a:pPr marL="0" marR="0" indent="0" algn="ctr" defTabSz="2438338" rtl="0" fontAlgn="auto" latinLnBrk="0" hangingPunct="0">
+              <a:lnSpc>
+                <a:spcPct val="100000"/>
+              </a:lnSpc>
+              <a:spcBef>
+                <a:spcPts val="0"/>
+              </a:spcBef>
+              <a:spcAft>
+                <a:spcPts val="0"/>
+              </a:spcAft>
+              <a:buClrTx/>
+              <a:buSzTx/>
+              <a:buFontTx/>
+              <a:buNone/>
+              <a:tabLst/>
+            </a:pPr>
+            <a:r>
+              <a:rPr kumimoji="0" lang="es-ES" sz="24300" b="0" i="0" u="none" strike="noStrike" cap="none" spc="0" normalizeH="0" baseline="0" dirty="0">
+                <a:ln>
+                  <a:noFill/>
+                </a:ln>
+                <a:solidFill>
+                  <a:schemeClr val="bg1"/>
+                </a:solidFill>
+                <a:effectLst/>
+                <a:uFillTx/>
+                <a:latin typeface="ADLaM Display" panose="02010000000000000000" pitchFamily="2" charset="77"/>
+                <a:ea typeface="ADLaM Display" panose="02010000000000000000" pitchFamily="2" charset="77"/>
+                <a:cs typeface="ADLaM Display" panose="02010000000000000000" pitchFamily="2" charset="77"/>
+                <a:sym typeface="Helvetica Neue"/>
+              </a:rPr>
+              <a:t>FINAL DIA 2</a:t>
+            </a:r>
+          </a:p>
+        </p:txBody>
+      </p:sp>
+    </p:spTree>
+    <p:extLst>
+      <p:ext uri="{BB962C8B-B14F-4D97-AF65-F5344CB8AC3E}">
+        <p14:creationId xmlns:p14="http://schemas.microsoft.com/office/powerpoint/2010/main" val="4087996809"/>
+      </p:ext>
+    </p:extLst>
+  </p:cSld>
+  <p:clrMapOvr>
+    <a:masterClrMapping/>
+  </p:clrMapOvr>
+  <p:transition spd="med"/>
+</p:sld>
+</file>
+
+<file path=ppt/slides/slide6.xml><?xml version="1.0" encoding="utf-8"?>
+<p:sld xmlns:a="http://schemas.openxmlformats.org/drawingml/2006/main" xmlns:r="http://schemas.openxmlformats.org/officeDocument/2006/relationships" xmlns:p="http://schemas.openxmlformats.org/presentationml/2006/main">
+  <p:cSld>
+    <p:spTree>
+      <p:nvGrpSpPr>
+        <p:cNvPr id="1" name="">
+          <a:extLst>
+            <a:ext uri="{FF2B5EF4-FFF2-40B4-BE49-F238E27FC236}">
+              <a16:creationId xmlns:a16="http://schemas.microsoft.com/office/drawing/2014/main" id="{F4AA493B-9C69-CB37-346C-D65108D83DD4}"/>
+            </a:ext>
+          </a:extLst>
+        </p:cNvPr>
+        <p:cNvGrpSpPr/>
+        <p:nvPr/>
+      </p:nvGrpSpPr>
+      <p:grpSpPr>
+        <a:xfrm>
+          <a:off x="0" y="0"/>
+          <a:ext cx="0" cy="0"/>
+          <a:chOff x="0" y="0"/>
+          <a:chExt cx="0" cy="0"/>
+        </a:xfrm>
+      </p:grpSpPr>
+      <p:sp>
+        <p:nvSpPr>
+          <p:cNvPr id="2" name="CuadroTexto 1">
+            <a:extLst>
+              <a:ext uri="{FF2B5EF4-FFF2-40B4-BE49-F238E27FC236}">
+                <a16:creationId xmlns:a16="http://schemas.microsoft.com/office/drawing/2014/main" id="{3991B40E-BF69-6FAD-6CF5-83832F2287A7}"/>
+              </a:ext>
+            </a:extLst>
+          </p:cNvPr>
+          <p:cNvSpPr txBox="1"/>
+          <p:nvPr/>
+        </p:nvSpPr>
+        <p:spPr>
+          <a:xfrm>
+            <a:off x="2755900" y="4936961"/>
+            <a:ext cx="18872200" cy="3842077"/>
+          </a:xfrm>
+          <a:prstGeom prst="rect">
+            <a:avLst/>
+          </a:prstGeom>
+          <a:noFill/>
+          <a:ln w="12700" cap="flat">
+            <a:noFill/>
+            <a:miter lim="400000"/>
+          </a:ln>
+          <a:effectLst/>
+          <a:sp3d/>
+        </p:spPr>
+        <p:style>
+          <a:lnRef idx="0">
+            <a:scrgbClr r="0" g="0" b="0"/>
+          </a:lnRef>
+          <a:fillRef idx="0">
+            <a:scrgbClr r="0" g="0" b="0"/>
+          </a:fillRef>
+          <a:effectRef idx="0">
+            <a:scrgbClr r="0" g="0" b="0"/>
+          </a:effectRef>
+          <a:fontRef idx="none"/>
+        </p:style>
+        <p:txBody>
+          <a:bodyPr rot="0" spcFirstLastPara="1" vertOverflow="overflow" horzOverflow="overflow" vert="horz" wrap="square" lIns="50800" tIns="50800" rIns="50800" bIns="50800" numCol="1" spcCol="38100" rtlCol="0" anchor="ctr">
+            <a:spAutoFit/>
+          </a:bodyPr>
+          <a:lstStyle/>
+          <a:p>
+            <a:pPr marL="0" marR="0" indent="0" algn="ctr" defTabSz="2438338" rtl="0" fontAlgn="auto" latinLnBrk="0" hangingPunct="0">
+              <a:lnSpc>
+                <a:spcPct val="100000"/>
+              </a:lnSpc>
+              <a:spcBef>
+                <a:spcPts val="0"/>
+              </a:spcBef>
+              <a:spcAft>
+                <a:spcPts val="0"/>
+              </a:spcAft>
+              <a:buClrTx/>
+              <a:buSzTx/>
+              <a:buFontTx/>
+              <a:buNone/>
+              <a:tabLst/>
+            </a:pPr>
+            <a:r>
+              <a:rPr kumimoji="0" lang="es-ES" sz="24300" b="0" i="0" u="none" strike="noStrike" cap="none" spc="0" normalizeH="0" baseline="0" dirty="0">
+                <a:ln>
+                  <a:noFill/>
+                </a:ln>
+                <a:solidFill>
+                  <a:schemeClr val="bg1"/>
+                </a:solidFill>
+                <a:effectLst/>
+                <a:uFillTx/>
+                <a:latin typeface="ADLaM Display" panose="02010000000000000000" pitchFamily="2" charset="77"/>
+                <a:ea typeface="ADLaM Display" panose="02010000000000000000" pitchFamily="2" charset="77"/>
+                <a:cs typeface="ADLaM Display" panose="02010000000000000000" pitchFamily="2" charset="77"/>
+                <a:sym typeface="Helvetica Neue"/>
+              </a:rPr>
+              <a:t>FINAL DIA 3</a:t>
+            </a:r>
+          </a:p>
+        </p:txBody>
+      </p:sp>
+    </p:spTree>
+    <p:extLst>
+      <p:ext uri="{BB962C8B-B14F-4D97-AF65-F5344CB8AC3E}">
+        <p14:creationId xmlns:p14="http://schemas.microsoft.com/office/powerpoint/2010/main" val="2638605457"/>
+      </p:ext>
+    </p:extLst>
+  </p:cSld>
+  <p:clrMapOvr>
+    <a:masterClrMapping/>
+  </p:clrMapOvr>
+  <p:transition spd="med"/>
+</p:sld>
+</file>
+
+<file path=ppt/slides/slide7.xml><?xml version="1.0" encoding="utf-8"?>
+<p:sld xmlns:a="http://schemas.openxmlformats.org/drawingml/2006/main" xmlns:r="http://schemas.openxmlformats.org/officeDocument/2006/relationships" xmlns:p="http://schemas.openxmlformats.org/presentationml/2006/main">
+  <p:cSld>
+    <p:spTree>
+      <p:nvGrpSpPr>
+        <p:cNvPr id="1" name=""/>
+        <p:cNvGrpSpPr/>
+        <p:nvPr/>
+      </p:nvGrpSpPr>
+      <p:grpSpPr>
+        <a:xfrm>
+          <a:off x="0" y="0"/>
+          <a:ext cx="0" cy="0"/>
+          <a:chOff x="0" y="0"/>
+          <a:chExt cx="0" cy="0"/>
+        </a:xfrm>
+      </p:grpSpPr>
+      <p:sp>
+        <p:nvSpPr>
+          <p:cNvPr id="357" name="vicenc.fernandez@upc.edu"/>
+          <p:cNvSpPr txBox="1">
+            <a:spLocks noGrp="1"/>
+          </p:cNvSpPr>
+          <p:nvPr>
+            <p:ph type="title"/>
+          </p:nvPr>
+        </p:nvSpPr>
+        <p:spPr>
+          <a:prstGeom prst="rect">
+            <a:avLst/>
+          </a:prstGeom>
+        </p:spPr>
+        <p:txBody>
+          <a:bodyPr/>
+          <a:lstStyle>
+            <a:lvl1pPr>
+              <a:defRPr i="1"/>
+            </a:lvl1pPr>
+          </a:lstStyle>
+          <a:p>
+            <a:r>
+              <a:rPr lang="es-ES" dirty="0" err="1"/>
+              <a:t>sergi.ramirez</a:t>
+            </a:r>
+            <a:r>
+              <a:rPr dirty="0"/>
+              <a:t>@upc.edu</a:t>
+            </a:r>
+          </a:p>
+        </p:txBody>
+      </p:sp>
+    </p:spTree>
   </p:cSld>
   <p:clrMapOvr>
     <a:masterClrMapping/>

--- a/26Workshop.pptx
+++ b/26Workshop.pptx
@@ -5,19 +5,29 @@
     <p:sldMasterId id="2147483648" r:id="rId1"/>
   </p:sldMasterIdLst>
   <p:notesMasterIdLst>
-    <p:notesMasterId r:id="rId9"/>
+    <p:notesMasterId r:id="rId19"/>
   </p:notesMasterIdLst>
   <p:handoutMasterIdLst>
-    <p:handoutMasterId r:id="rId10"/>
+    <p:handoutMasterId r:id="rId20"/>
   </p:handoutMasterIdLst>
   <p:sldIdLst>
     <p:sldId id="256" r:id="rId2"/>
     <p:sldId id="260" r:id="rId3"/>
-    <p:sldId id="257" r:id="rId4"/>
-    <p:sldId id="261" r:id="rId5"/>
-    <p:sldId id="264" r:id="rId6"/>
-    <p:sldId id="265" r:id="rId7"/>
-    <p:sldId id="258" r:id="rId8"/>
+    <p:sldId id="274" r:id="rId4"/>
+    <p:sldId id="275" r:id="rId5"/>
+    <p:sldId id="276" r:id="rId6"/>
+    <p:sldId id="277" r:id="rId7"/>
+    <p:sldId id="266" r:id="rId8"/>
+    <p:sldId id="278" r:id="rId9"/>
+    <p:sldId id="282" r:id="rId10"/>
+    <p:sldId id="283" r:id="rId11"/>
+    <p:sldId id="284" r:id="rId12"/>
+    <p:sldId id="267" r:id="rId13"/>
+    <p:sldId id="285" r:id="rId14"/>
+    <p:sldId id="286" r:id="rId15"/>
+    <p:sldId id="287" r:id="rId16"/>
+    <p:sldId id="258" r:id="rId17"/>
+    <p:sldId id="261" r:id="rId18"/>
   </p:sldIdLst>
   <p:sldSz cx="24384000" cy="13716000"/>
   <p:notesSz cx="6858000" cy="9144000"/>
@@ -435,7 +445,7 @@
           <a:p>
             <a:fld id="{7F503C6F-49BD-47BC-9EDA-98E10EA3EBA1}" type="datetimeFigureOut">
               <a:rPr lang="es-ES" smtClean="0"/>
-              <a:t>14/4/26</a:t>
+              <a:t>14/04/2026</a:t>
             </a:fld>
             <a:endParaRPr lang="es-ES"/>
           </a:p>
@@ -1346,7 +1356,7 @@
           <p:nvPr userDrawn="1"/>
         </p:nvPicPr>
         <p:blipFill>
-          <a:blip r:embed="rId3">
+          <a:blip r:embed="rId3" cstate="print">
             <a:extLst>
               <a:ext uri="{28A0092B-C50C-407E-A947-70E740481C1C}">
                 <a14:useLocalDpi xmlns:a14="http://schemas.microsoft.com/office/drawing/2010/main" val="0"/>
@@ -1848,7 +1858,7 @@
           <p:nvPr userDrawn="1"/>
         </p:nvPicPr>
         <p:blipFill>
-          <a:blip r:embed="rId3">
+          <a:blip r:embed="rId3" cstate="print">
             <a:extLst>
               <a:ext uri="{28A0092B-C50C-407E-A947-70E740481C1C}">
                 <a14:useLocalDpi xmlns:a14="http://schemas.microsoft.com/office/drawing/2010/main" val="0"/>
@@ -2042,7 +2052,7 @@
           <p:nvPr userDrawn="1"/>
         </p:nvPicPr>
         <p:blipFill>
-          <a:blip r:embed="rId3">
+          <a:blip r:embed="rId3" cstate="print">
             <a:extLst>
               <a:ext uri="{28A0092B-C50C-407E-A947-70E740481C1C}">
                 <a14:useLocalDpi xmlns:a14="http://schemas.microsoft.com/office/drawing/2010/main" val="0"/>
@@ -2410,7 +2420,7 @@
           <p:nvPr userDrawn="1"/>
         </p:nvPicPr>
         <p:blipFill>
-          <a:blip r:embed="rId3">
+          <a:blip r:embed="rId3" cstate="print">
             <a:extLst>
               <a:ext uri="{28A0092B-C50C-407E-A947-70E740481C1C}">
                 <a14:useLocalDpi xmlns:a14="http://schemas.microsoft.com/office/drawing/2010/main" val="0"/>
@@ -2571,7 +2581,7 @@
           </a:ln>
           <a:extLst>
             <a:ext uri="{C572A759-6A51-4108-AA02-DFA0A04FC94B}">
-              <ma14:wrappingTextBoxFlag xmlns:ma14="http://schemas.microsoft.com/office/mac/drawingml/2011/main" xmlns:a14="http://schemas.microsoft.com/office/drawing/2010/main" xmlns:m="http://schemas.openxmlformats.org/officeDocument/2006/math" xmlns="" val="1"/>
+              <ma14:wrappingTextBoxFlag xmlns="" xmlns:m="http://schemas.openxmlformats.org/officeDocument/2006/math" xmlns:a14="http://schemas.microsoft.com/office/drawing/2010/main" xmlns:ma14="http://schemas.microsoft.com/office/mac/drawingml/2011/main" val="1"/>
             </a:ext>
           </a:extLst>
         </p:spPr>
@@ -2743,7 +2753,7 @@
           </a:ln>
           <a:extLst>
             <a:ext uri="{C572A759-6A51-4108-AA02-DFA0A04FC94B}">
-              <ma14:wrappingTextBoxFlag xmlns:ma14="http://schemas.microsoft.com/office/mac/drawingml/2011/main" xmlns:a14="http://schemas.microsoft.com/office/drawing/2010/main" xmlns:m="http://schemas.openxmlformats.org/officeDocument/2006/math" xmlns="" val="1"/>
+              <ma14:wrappingTextBoxFlag xmlns="" xmlns:m="http://schemas.openxmlformats.org/officeDocument/2006/math" xmlns:a14="http://schemas.microsoft.com/office/drawing/2010/main" xmlns:ma14="http://schemas.microsoft.com/office/mac/drawingml/2011/main" val="1"/>
             </a:ext>
           </a:extLst>
         </p:spPr>
@@ -2812,7 +2822,7 @@
           <p:nvPr userDrawn="1"/>
         </p:nvPicPr>
         <p:blipFill>
-          <a:blip r:embed="rId3">
+          <a:blip r:embed="rId3" cstate="print">
             <a:extLst>
               <a:ext uri="{28A0092B-C50C-407E-A947-70E740481C1C}">
                 <a14:useLocalDpi xmlns:a14="http://schemas.microsoft.com/office/drawing/2010/main" val="0"/>
@@ -3579,7 +3589,7 @@
           </a:ln>
           <a:extLst>
             <a:ext uri="{C572A759-6A51-4108-AA02-DFA0A04FC94B}">
-              <ma14:wrappingTextBoxFlag xmlns:ma14="http://schemas.microsoft.com/office/mac/drawingml/2011/main" xmlns:a14="http://schemas.microsoft.com/office/drawing/2010/main" xmlns:m="http://schemas.openxmlformats.org/officeDocument/2006/math" xmlns="" val="1"/>
+              <ma14:wrappingTextBoxFlag xmlns="" xmlns:m="http://schemas.openxmlformats.org/officeDocument/2006/math" xmlns:a14="http://schemas.microsoft.com/office/drawing/2010/main" xmlns:ma14="http://schemas.microsoft.com/office/mac/drawingml/2011/main" val="1"/>
             </a:ext>
           </a:extLst>
         </p:spPr>
@@ -4033,7 +4043,7 @@
           </a:ln>
           <a:extLst>
             <a:ext uri="{C572A759-6A51-4108-AA02-DFA0A04FC94B}">
-              <ma14:wrappingTextBoxFlag xmlns:ma14="http://schemas.microsoft.com/office/mac/drawingml/2011/main" xmlns:a14="http://schemas.microsoft.com/office/drawing/2010/main" xmlns:m="http://schemas.openxmlformats.org/officeDocument/2006/math" xmlns="" val="1"/>
+              <ma14:wrappingTextBoxFlag xmlns="" xmlns:m="http://schemas.openxmlformats.org/officeDocument/2006/math" xmlns:a14="http://schemas.microsoft.com/office/drawing/2010/main" xmlns:ma14="http://schemas.microsoft.com/office/mac/drawingml/2011/main" val="1"/>
             </a:ext>
           </a:extLst>
         </p:spPr>
@@ -5248,7 +5258,7 @@
           <p:nvPr userDrawn="1"/>
         </p:nvPicPr>
         <p:blipFill>
-          <a:blip r:embed="rId3">
+          <a:blip r:embed="rId3" cstate="print">
             <a:extLst>
               <a:ext uri="{28A0092B-C50C-407E-A947-70E740481C1C}">
                 <a14:useLocalDpi xmlns:a14="http://schemas.microsoft.com/office/drawing/2010/main" val="0"/>
@@ -5598,7 +5608,7 @@
           <p:nvPr userDrawn="1"/>
         </p:nvPicPr>
         <p:blipFill>
-          <a:blip r:embed="rId3">
+          <a:blip r:embed="rId3" cstate="print">
             <a:extLst>
               <a:ext uri="{28A0092B-C50C-407E-A947-70E740481C1C}">
                 <a14:useLocalDpi xmlns:a14="http://schemas.microsoft.com/office/drawing/2010/main" val="0"/>
@@ -6132,7 +6142,7 @@
           <p:nvPr userDrawn="1"/>
         </p:nvPicPr>
         <p:blipFill>
-          <a:blip r:embed="rId3">
+          <a:blip r:embed="rId3" cstate="print">
             <a:extLst>
               <a:ext uri="{28A0092B-C50C-407E-A947-70E740481C1C}">
                 <a14:useLocalDpi xmlns:a14="http://schemas.microsoft.com/office/drawing/2010/main" val="0"/>
@@ -6221,7 +6231,7 @@
           </a:ln>
           <a:extLst>
             <a:ext uri="{C572A759-6A51-4108-AA02-DFA0A04FC94B}">
-              <ma14:wrappingTextBoxFlag xmlns:ma14="http://schemas.microsoft.com/office/mac/drawingml/2011/main" xmlns:a14="http://schemas.microsoft.com/office/drawing/2010/main" xmlns:m="http://schemas.openxmlformats.org/officeDocument/2006/math" xmlns="" val="1"/>
+              <ma14:wrappingTextBoxFlag xmlns="" xmlns:m="http://schemas.openxmlformats.org/officeDocument/2006/math" xmlns:a14="http://schemas.microsoft.com/office/drawing/2010/main" xmlns:ma14="http://schemas.microsoft.com/office/mac/drawingml/2011/main" val="1"/>
             </a:ext>
           </a:extLst>
         </p:spPr>
@@ -6260,7 +6270,7 @@
           </a:ln>
           <a:extLst>
             <a:ext uri="{C572A759-6A51-4108-AA02-DFA0A04FC94B}">
-              <ma14:wrappingTextBoxFlag xmlns:ma14="http://schemas.microsoft.com/office/mac/drawingml/2011/main" xmlns:a14="http://schemas.microsoft.com/office/drawing/2010/main" xmlns:m="http://schemas.openxmlformats.org/officeDocument/2006/math" xmlns="" val="1"/>
+              <ma14:wrappingTextBoxFlag xmlns="" xmlns:m="http://schemas.openxmlformats.org/officeDocument/2006/math" xmlns:a14="http://schemas.microsoft.com/office/drawing/2010/main" xmlns:ma14="http://schemas.microsoft.com/office/mac/drawingml/2011/main" val="1"/>
             </a:ext>
           </a:extLst>
         </p:spPr>
@@ -7202,7 +7212,7 @@
           </a:prstGeom>
           <a:extLst>
             <a:ext uri="{C572A759-6A51-4108-AA02-DFA0A04FC94B}">
-              <ma14:wrappingTextBoxFlag xmlns:ma14="http://schemas.microsoft.com/office/mac/drawingml/2011/main" xmlns:a14="http://schemas.microsoft.com/office/drawing/2010/main" xmlns:m="http://schemas.openxmlformats.org/officeDocument/2006/math" xmlns="" val="1"/>
+              <ma14:wrappingTextBoxFlag xmlns="" xmlns:m="http://schemas.openxmlformats.org/officeDocument/2006/math" xmlns:a14="http://schemas.microsoft.com/office/drawing/2010/main" xmlns:ma14="http://schemas.microsoft.com/office/mac/drawingml/2011/main" val="1"/>
             </a:ext>
           </a:extLst>
         </p:spPr>
@@ -7414,6 +7424,1423 @@
         </p:txBody>
       </p:sp>
     </p:spTree>
+  </p:cSld>
+  <p:clrMapOvr>
+    <a:masterClrMapping/>
+  </p:clrMapOvr>
+  <p:transition spd="med"/>
+</p:sld>
+</file>
+
+<file path=ppt/slides/slide10.xml><?xml version="1.0" encoding="utf-8"?>
+<p:sld xmlns:a="http://schemas.openxmlformats.org/drawingml/2006/main" xmlns:r="http://schemas.openxmlformats.org/officeDocument/2006/relationships" xmlns:p="http://schemas.openxmlformats.org/presentationml/2006/main">
+  <p:cSld>
+    <p:spTree>
+      <p:nvGrpSpPr>
+        <p:cNvPr id="1" name="">
+          <a:extLst>
+            <a:ext uri="{FF2B5EF4-FFF2-40B4-BE49-F238E27FC236}">
+              <a16:creationId xmlns:a16="http://schemas.microsoft.com/office/drawing/2014/main" id="{7AFB1616-6718-B9D5-223D-65F15C5BAC39}"/>
+            </a:ext>
+          </a:extLst>
+        </p:cNvPr>
+        <p:cNvGrpSpPr/>
+        <p:nvPr/>
+      </p:nvGrpSpPr>
+      <p:grpSpPr>
+        <a:xfrm>
+          <a:off x="0" y="0"/>
+          <a:ext cx="0" cy="0"/>
+          <a:chOff x="0" y="0"/>
+          <a:chExt cx="0" cy="0"/>
+        </a:xfrm>
+      </p:grpSpPr>
+      <p:sp>
+        <p:nvSpPr>
+          <p:cNvPr id="26" name="CuadroTexto 25">
+            <a:extLst>
+              <a:ext uri="{FF2B5EF4-FFF2-40B4-BE49-F238E27FC236}">
+                <a16:creationId xmlns:a16="http://schemas.microsoft.com/office/drawing/2014/main" id="{DA140309-F701-0D0F-3299-6A55CD01E524}"/>
+              </a:ext>
+            </a:extLst>
+          </p:cNvPr>
+          <p:cNvSpPr txBox="1"/>
+          <p:nvPr/>
+        </p:nvSpPr>
+        <p:spPr>
+          <a:xfrm>
+            <a:off x="1417814" y="3879559"/>
+            <a:ext cx="1905444" cy="1719852"/>
+          </a:xfrm>
+          <a:prstGeom prst="rect">
+            <a:avLst/>
+          </a:prstGeom>
+        </p:spPr>
+        <p:txBody>
+          <a:bodyPr vert="horz" wrap="square" lIns="91440" tIns="45720" rIns="91440" bIns="45720" rtlCol="0">
+            <a:noAutofit/>
+          </a:bodyPr>
+          <a:lstStyle/>
+          <a:p>
+            <a:r>
+              <a:rPr lang="es-ES" sz="8800" b="1" dirty="0">
+                <a:solidFill>
+                  <a:srgbClr val="3479BB"/>
+                </a:solidFill>
+                <a:latin typeface="Montserrat" pitchFamily="2" charset="77"/>
+              </a:rPr>
+              <a:t>1. </a:t>
+            </a:r>
+          </a:p>
+        </p:txBody>
+      </p:sp>
+      <p:sp>
+        <p:nvSpPr>
+          <p:cNvPr id="46" name="CuadroTexto 45">
+            <a:extLst>
+              <a:ext uri="{FF2B5EF4-FFF2-40B4-BE49-F238E27FC236}">
+                <a16:creationId xmlns:a16="http://schemas.microsoft.com/office/drawing/2014/main" id="{678EB100-5C5A-6CCE-3846-6D5093E389E9}"/>
+              </a:ext>
+            </a:extLst>
+          </p:cNvPr>
+          <p:cNvSpPr txBox="1"/>
+          <p:nvPr/>
+        </p:nvSpPr>
+        <p:spPr>
+          <a:xfrm>
+            <a:off x="2783840" y="7256664"/>
+            <a:ext cx="20706080" cy="1719852"/>
+          </a:xfrm>
+          <a:prstGeom prst="rect">
+            <a:avLst/>
+          </a:prstGeom>
+        </p:spPr>
+        <p:txBody>
+          <a:bodyPr vert="horz" wrap="square" lIns="91440" tIns="45720" rIns="91440" bIns="45720" rtlCol="0">
+            <a:noAutofit/>
+          </a:bodyPr>
+          <a:lstStyle/>
+          <a:p>
+            <a:pPr algn="r"/>
+            <a:r>
+              <a:rPr lang="es-ES" sz="11500" b="1" dirty="0">
+                <a:solidFill>
+                  <a:srgbClr val="F2F2F2"/>
+                </a:solidFill>
+                <a:latin typeface="Montserrat" pitchFamily="2" charset="77"/>
+              </a:rPr>
+              <a:t>7. Evaluación e interpretabilidad de modelos</a:t>
+            </a:r>
+          </a:p>
+        </p:txBody>
+      </p:sp>
+    </p:spTree>
+    <p:extLst>
+      <p:ext uri="{BB962C8B-B14F-4D97-AF65-F5344CB8AC3E}">
+        <p14:creationId xmlns:p14="http://schemas.microsoft.com/office/powerpoint/2010/main" val="2417975974"/>
+      </p:ext>
+    </p:extLst>
+  </p:cSld>
+  <p:clrMapOvr>
+    <a:masterClrMapping/>
+  </p:clrMapOvr>
+  <p:transition spd="med"/>
+</p:sld>
+</file>
+
+<file path=ppt/slides/slide11.xml><?xml version="1.0" encoding="utf-8"?>
+<p:sld xmlns:a="http://schemas.openxmlformats.org/drawingml/2006/main" xmlns:r="http://schemas.openxmlformats.org/officeDocument/2006/relationships" xmlns:p="http://schemas.openxmlformats.org/presentationml/2006/main">
+  <p:cSld>
+    <p:spTree>
+      <p:nvGrpSpPr>
+        <p:cNvPr id="1" name="">
+          <a:extLst>
+            <a:ext uri="{FF2B5EF4-FFF2-40B4-BE49-F238E27FC236}">
+              <a16:creationId xmlns:a16="http://schemas.microsoft.com/office/drawing/2014/main" id="{F5FDDA47-6697-3C80-BDBE-FC42834F1C2C}"/>
+            </a:ext>
+          </a:extLst>
+        </p:cNvPr>
+        <p:cNvGrpSpPr/>
+        <p:nvPr/>
+      </p:nvGrpSpPr>
+      <p:grpSpPr>
+        <a:xfrm>
+          <a:off x="0" y="0"/>
+          <a:ext cx="0" cy="0"/>
+          <a:chOff x="0" y="0"/>
+          <a:chExt cx="0" cy="0"/>
+        </a:xfrm>
+      </p:grpSpPr>
+      <p:sp>
+        <p:nvSpPr>
+          <p:cNvPr id="26" name="CuadroTexto 25">
+            <a:extLst>
+              <a:ext uri="{FF2B5EF4-FFF2-40B4-BE49-F238E27FC236}">
+                <a16:creationId xmlns:a16="http://schemas.microsoft.com/office/drawing/2014/main" id="{02FFE846-0258-B8A2-4A6A-2E8BF8D85184}"/>
+              </a:ext>
+            </a:extLst>
+          </p:cNvPr>
+          <p:cNvSpPr txBox="1"/>
+          <p:nvPr/>
+        </p:nvSpPr>
+        <p:spPr>
+          <a:xfrm>
+            <a:off x="1417814" y="3879559"/>
+            <a:ext cx="1905444" cy="1719852"/>
+          </a:xfrm>
+          <a:prstGeom prst="rect">
+            <a:avLst/>
+          </a:prstGeom>
+        </p:spPr>
+        <p:txBody>
+          <a:bodyPr vert="horz" wrap="square" lIns="91440" tIns="45720" rIns="91440" bIns="45720" rtlCol="0">
+            <a:noAutofit/>
+          </a:bodyPr>
+          <a:lstStyle/>
+          <a:p>
+            <a:r>
+              <a:rPr lang="es-ES" sz="8800" b="1" dirty="0">
+                <a:solidFill>
+                  <a:srgbClr val="3479BB"/>
+                </a:solidFill>
+                <a:latin typeface="Montserrat" pitchFamily="2" charset="77"/>
+              </a:rPr>
+              <a:t>1. </a:t>
+            </a:r>
+          </a:p>
+        </p:txBody>
+      </p:sp>
+      <p:sp>
+        <p:nvSpPr>
+          <p:cNvPr id="46" name="CuadroTexto 45">
+            <a:extLst>
+              <a:ext uri="{FF2B5EF4-FFF2-40B4-BE49-F238E27FC236}">
+                <a16:creationId xmlns:a16="http://schemas.microsoft.com/office/drawing/2014/main" id="{C630A510-7B4D-7277-5C86-7400383B33C4}"/>
+              </a:ext>
+            </a:extLst>
+          </p:cNvPr>
+          <p:cNvSpPr txBox="1"/>
+          <p:nvPr/>
+        </p:nvSpPr>
+        <p:spPr>
+          <a:xfrm>
+            <a:off x="2783840" y="7256664"/>
+            <a:ext cx="20706080" cy="1719852"/>
+          </a:xfrm>
+          <a:prstGeom prst="rect">
+            <a:avLst/>
+          </a:prstGeom>
+        </p:spPr>
+        <p:txBody>
+          <a:bodyPr vert="horz" wrap="square" lIns="91440" tIns="45720" rIns="91440" bIns="45720" rtlCol="0">
+            <a:noAutofit/>
+          </a:bodyPr>
+          <a:lstStyle/>
+          <a:p>
+            <a:pPr algn="r"/>
+            <a:r>
+              <a:rPr lang="es-ES" sz="11500" b="1" dirty="0">
+                <a:solidFill>
+                  <a:srgbClr val="F2F2F2"/>
+                </a:solidFill>
+                <a:latin typeface="Montserrat" pitchFamily="2" charset="77"/>
+              </a:rPr>
+              <a:t>8. Deep </a:t>
+            </a:r>
+            <a:r>
+              <a:rPr lang="es-ES" sz="11500" b="1" dirty="0" err="1">
+                <a:solidFill>
+                  <a:srgbClr val="F2F2F2"/>
+                </a:solidFill>
+                <a:latin typeface="Montserrat" pitchFamily="2" charset="77"/>
+              </a:rPr>
+              <a:t>Learning</a:t>
+            </a:r>
+            <a:r>
+              <a:rPr lang="es-ES" sz="11500" b="1" dirty="0">
+                <a:solidFill>
+                  <a:srgbClr val="F2F2F2"/>
+                </a:solidFill>
+                <a:latin typeface="Montserrat" pitchFamily="2" charset="77"/>
+              </a:rPr>
+              <a:t>:</a:t>
+            </a:r>
+          </a:p>
+          <a:p>
+            <a:pPr algn="r"/>
+            <a:r>
+              <a:rPr lang="es-ES" sz="11500" b="1" dirty="0">
+                <a:solidFill>
+                  <a:srgbClr val="F2F2F2"/>
+                </a:solidFill>
+                <a:latin typeface="Montserrat" pitchFamily="2" charset="77"/>
+              </a:rPr>
+              <a:t>Artificial Neuronal Network (ANN)</a:t>
+            </a:r>
+          </a:p>
+        </p:txBody>
+      </p:sp>
+    </p:spTree>
+    <p:extLst>
+      <p:ext uri="{BB962C8B-B14F-4D97-AF65-F5344CB8AC3E}">
+        <p14:creationId xmlns:p14="http://schemas.microsoft.com/office/powerpoint/2010/main" val="1116637264"/>
+      </p:ext>
+    </p:extLst>
+  </p:cSld>
+  <p:clrMapOvr>
+    <a:masterClrMapping/>
+  </p:clrMapOvr>
+  <p:transition spd="med"/>
+</p:sld>
+</file>
+
+<file path=ppt/slides/slide12.xml><?xml version="1.0" encoding="utf-8"?>
+<p:sld xmlns:a="http://schemas.openxmlformats.org/drawingml/2006/main" xmlns:r="http://schemas.openxmlformats.org/officeDocument/2006/relationships" xmlns:p="http://schemas.openxmlformats.org/presentationml/2006/main">
+  <p:cSld>
+    <p:spTree>
+      <p:nvGrpSpPr>
+        <p:cNvPr id="1" name="">
+          <a:extLst>
+            <a:ext uri="{FF2B5EF4-FFF2-40B4-BE49-F238E27FC236}">
+              <a16:creationId xmlns:a16="http://schemas.microsoft.com/office/drawing/2014/main" id="{429F56C4-C640-E1CF-D4BC-0E1FDD76F49C}"/>
+            </a:ext>
+          </a:extLst>
+        </p:cNvPr>
+        <p:cNvGrpSpPr/>
+        <p:nvPr/>
+      </p:nvGrpSpPr>
+      <p:grpSpPr>
+        <a:xfrm>
+          <a:off x="0" y="0"/>
+          <a:ext cx="0" cy="0"/>
+          <a:chOff x="0" y="0"/>
+          <a:chExt cx="0" cy="0"/>
+        </a:xfrm>
+      </p:grpSpPr>
+      <p:sp>
+        <p:nvSpPr>
+          <p:cNvPr id="2" name="CuadroTexto 1">
+            <a:extLst>
+              <a:ext uri="{FF2B5EF4-FFF2-40B4-BE49-F238E27FC236}">
+                <a16:creationId xmlns:a16="http://schemas.microsoft.com/office/drawing/2014/main" id="{51721F05-1F00-6C08-9CCE-577994F6DAB6}"/>
+              </a:ext>
+            </a:extLst>
+          </p:cNvPr>
+          <p:cNvSpPr txBox="1"/>
+          <p:nvPr/>
+        </p:nvSpPr>
+        <p:spPr>
+          <a:xfrm>
+            <a:off x="2755900" y="4936961"/>
+            <a:ext cx="18872200" cy="3842077"/>
+          </a:xfrm>
+          <a:prstGeom prst="rect">
+            <a:avLst/>
+          </a:prstGeom>
+          <a:noFill/>
+          <a:ln w="12700" cap="flat">
+            <a:noFill/>
+            <a:miter lim="400000"/>
+          </a:ln>
+          <a:effectLst/>
+          <a:sp3d/>
+        </p:spPr>
+        <p:style>
+          <a:lnRef idx="0">
+            <a:scrgbClr r="0" g="0" b="0"/>
+          </a:lnRef>
+          <a:fillRef idx="0">
+            <a:scrgbClr r="0" g="0" b="0"/>
+          </a:fillRef>
+          <a:effectRef idx="0">
+            <a:scrgbClr r="0" g="0" b="0"/>
+          </a:effectRef>
+          <a:fontRef idx="none"/>
+        </p:style>
+        <p:txBody>
+          <a:bodyPr rot="0" spcFirstLastPara="1" vertOverflow="overflow" horzOverflow="overflow" vert="horz" wrap="square" lIns="50800" tIns="50800" rIns="50800" bIns="50800" numCol="1" spcCol="38100" rtlCol="0" anchor="ctr">
+            <a:spAutoFit/>
+          </a:bodyPr>
+          <a:lstStyle/>
+          <a:p>
+            <a:pPr marL="0" marR="0" indent="0" algn="ctr" defTabSz="2438338" rtl="0" fontAlgn="auto" latinLnBrk="0" hangingPunct="0">
+              <a:lnSpc>
+                <a:spcPct val="100000"/>
+              </a:lnSpc>
+              <a:spcBef>
+                <a:spcPts val="0"/>
+              </a:spcBef>
+              <a:spcAft>
+                <a:spcPts val="0"/>
+              </a:spcAft>
+              <a:buClrTx/>
+              <a:buSzTx/>
+              <a:buFontTx/>
+              <a:buNone/>
+              <a:tabLst/>
+            </a:pPr>
+            <a:r>
+              <a:rPr kumimoji="0" lang="es-ES" sz="24300" b="0" i="0" u="none" strike="noStrike" cap="none" spc="0" normalizeH="0" baseline="0" dirty="0" err="1">
+                <a:ln>
+                  <a:noFill/>
+                </a:ln>
+                <a:solidFill>
+                  <a:schemeClr val="bg1"/>
+                </a:solidFill>
+                <a:effectLst/>
+                <a:uFillTx/>
+                <a:latin typeface="Script MT Bold" panose="03040602040607080904" pitchFamily="66" charset="0"/>
+                <a:ea typeface="ADLaM Display" panose="02010000000000000000" pitchFamily="2" charset="0"/>
+                <a:cs typeface="ADLaM Display" panose="02010000000000000000" pitchFamily="2" charset="0"/>
+                <a:sym typeface="Helvetica Neue"/>
+              </a:rPr>
+              <a:t>End</a:t>
+            </a:r>
+            <a:r>
+              <a:rPr kumimoji="0" lang="es-ES" sz="24300" b="0" i="0" u="none" strike="noStrike" cap="none" spc="0" normalizeH="0" baseline="0" dirty="0">
+                <a:ln>
+                  <a:noFill/>
+                </a:ln>
+                <a:solidFill>
+                  <a:schemeClr val="bg1"/>
+                </a:solidFill>
+                <a:effectLst/>
+                <a:uFillTx/>
+                <a:latin typeface="Script MT Bold" panose="03040602040607080904" pitchFamily="66" charset="0"/>
+                <a:ea typeface="ADLaM Display" panose="02010000000000000000" pitchFamily="2" charset="0"/>
+                <a:cs typeface="ADLaM Display" panose="02010000000000000000" pitchFamily="2" charset="0"/>
+                <a:sym typeface="Helvetica Neue"/>
+              </a:rPr>
+              <a:t> </a:t>
+            </a:r>
+            <a:r>
+              <a:rPr kumimoji="0" lang="es-ES" sz="24300" b="0" i="0" u="none" strike="noStrike" cap="none" spc="0" normalizeH="0" baseline="0" dirty="0" err="1">
+                <a:ln>
+                  <a:noFill/>
+                </a:ln>
+                <a:solidFill>
+                  <a:schemeClr val="bg1"/>
+                </a:solidFill>
+                <a:effectLst/>
+                <a:uFillTx/>
+                <a:latin typeface="Script MT Bold" panose="03040602040607080904" pitchFamily="66" charset="0"/>
+                <a:ea typeface="ADLaM Display" panose="02010000000000000000" pitchFamily="2" charset="0"/>
+                <a:cs typeface="ADLaM Display" panose="02010000000000000000" pitchFamily="2" charset="0"/>
+                <a:sym typeface="Helvetica Neue"/>
+              </a:rPr>
+              <a:t>the</a:t>
+            </a:r>
+            <a:r>
+              <a:rPr kumimoji="0" lang="es-ES" sz="24300" b="0" i="0" u="none" strike="noStrike" cap="none" spc="0" normalizeH="0" baseline="0" dirty="0">
+                <a:ln>
+                  <a:noFill/>
+                </a:ln>
+                <a:solidFill>
+                  <a:schemeClr val="bg1"/>
+                </a:solidFill>
+                <a:effectLst/>
+                <a:uFillTx/>
+                <a:latin typeface="Script MT Bold" panose="03040602040607080904" pitchFamily="66" charset="0"/>
+                <a:ea typeface="ADLaM Display" panose="02010000000000000000" pitchFamily="2" charset="0"/>
+                <a:cs typeface="ADLaM Display" panose="02010000000000000000" pitchFamily="2" charset="0"/>
+                <a:sym typeface="Helvetica Neue"/>
+              </a:rPr>
+              <a:t> </a:t>
+            </a:r>
+            <a:r>
+              <a:rPr kumimoji="0" lang="es-ES" sz="24300" b="0" i="0" u="none" strike="noStrike" cap="none" spc="0" normalizeH="0" baseline="0" dirty="0" err="1">
+                <a:ln>
+                  <a:noFill/>
+                </a:ln>
+                <a:solidFill>
+                  <a:schemeClr val="bg1"/>
+                </a:solidFill>
+                <a:effectLst/>
+                <a:uFillTx/>
+                <a:latin typeface="Script MT Bold" panose="03040602040607080904" pitchFamily="66" charset="0"/>
+                <a:ea typeface="ADLaM Display" panose="02010000000000000000" pitchFamily="2" charset="0"/>
+                <a:cs typeface="ADLaM Display" panose="02010000000000000000" pitchFamily="2" charset="0"/>
+                <a:sym typeface="Helvetica Neue"/>
+              </a:rPr>
+              <a:t>day</a:t>
+            </a:r>
+            <a:r>
+              <a:rPr kumimoji="0" lang="es-ES" sz="24300" b="0" i="0" u="none" strike="noStrike" cap="none" spc="0" normalizeH="0" baseline="0" dirty="0">
+                <a:ln>
+                  <a:noFill/>
+                </a:ln>
+                <a:solidFill>
+                  <a:schemeClr val="bg1"/>
+                </a:solidFill>
+                <a:effectLst/>
+                <a:uFillTx/>
+                <a:latin typeface="Script MT Bold" panose="03040602040607080904" pitchFamily="66" charset="0"/>
+                <a:ea typeface="ADLaM Display" panose="02010000000000000000" pitchFamily="2" charset="0"/>
+                <a:cs typeface="ADLaM Display" panose="02010000000000000000" pitchFamily="2" charset="0"/>
+                <a:sym typeface="Helvetica Neue"/>
+              </a:rPr>
+              <a:t> 2</a:t>
+            </a:r>
+          </a:p>
+        </p:txBody>
+      </p:sp>
+    </p:spTree>
+    <p:extLst>
+      <p:ext uri="{BB962C8B-B14F-4D97-AF65-F5344CB8AC3E}">
+        <p14:creationId xmlns:p14="http://schemas.microsoft.com/office/powerpoint/2010/main" val="31621155"/>
+      </p:ext>
+    </p:extLst>
+  </p:cSld>
+  <p:clrMapOvr>
+    <a:masterClrMapping/>
+  </p:clrMapOvr>
+  <p:transition spd="med"/>
+</p:sld>
+</file>
+
+<file path=ppt/slides/slide13.xml><?xml version="1.0" encoding="utf-8"?>
+<p:sld xmlns:a="http://schemas.openxmlformats.org/drawingml/2006/main" xmlns:r="http://schemas.openxmlformats.org/officeDocument/2006/relationships" xmlns:p="http://schemas.openxmlformats.org/presentationml/2006/main">
+  <p:cSld>
+    <p:spTree>
+      <p:nvGrpSpPr>
+        <p:cNvPr id="1" name="">
+          <a:extLst>
+            <a:ext uri="{FF2B5EF4-FFF2-40B4-BE49-F238E27FC236}">
+              <a16:creationId xmlns:a16="http://schemas.microsoft.com/office/drawing/2014/main" id="{BCCE0B4B-F14C-7235-96E0-FCA7FF90D05F}"/>
+            </a:ext>
+          </a:extLst>
+        </p:cNvPr>
+        <p:cNvGrpSpPr/>
+        <p:nvPr/>
+      </p:nvGrpSpPr>
+      <p:grpSpPr>
+        <a:xfrm>
+          <a:off x="0" y="0"/>
+          <a:ext cx="0" cy="0"/>
+          <a:chOff x="0" y="0"/>
+          <a:chExt cx="0" cy="0"/>
+        </a:xfrm>
+      </p:grpSpPr>
+      <p:sp>
+        <p:nvSpPr>
+          <p:cNvPr id="26" name="CuadroTexto 25">
+            <a:extLst>
+              <a:ext uri="{FF2B5EF4-FFF2-40B4-BE49-F238E27FC236}">
+                <a16:creationId xmlns:a16="http://schemas.microsoft.com/office/drawing/2014/main" id="{BB3C0C01-9DE6-AD7C-1CC2-4B56F087073B}"/>
+              </a:ext>
+            </a:extLst>
+          </p:cNvPr>
+          <p:cNvSpPr txBox="1"/>
+          <p:nvPr/>
+        </p:nvSpPr>
+        <p:spPr>
+          <a:xfrm>
+            <a:off x="1417814" y="3879559"/>
+            <a:ext cx="1905444" cy="1719852"/>
+          </a:xfrm>
+          <a:prstGeom prst="rect">
+            <a:avLst/>
+          </a:prstGeom>
+        </p:spPr>
+        <p:txBody>
+          <a:bodyPr vert="horz" wrap="square" lIns="91440" tIns="45720" rIns="91440" bIns="45720" rtlCol="0">
+            <a:noAutofit/>
+          </a:bodyPr>
+          <a:lstStyle/>
+          <a:p>
+            <a:r>
+              <a:rPr lang="es-ES" sz="8800" b="1" dirty="0">
+                <a:solidFill>
+                  <a:srgbClr val="3479BB"/>
+                </a:solidFill>
+                <a:latin typeface="Montserrat" pitchFamily="2" charset="77"/>
+              </a:rPr>
+              <a:t>1. </a:t>
+            </a:r>
+          </a:p>
+        </p:txBody>
+      </p:sp>
+      <p:sp>
+        <p:nvSpPr>
+          <p:cNvPr id="46" name="CuadroTexto 45">
+            <a:extLst>
+              <a:ext uri="{FF2B5EF4-FFF2-40B4-BE49-F238E27FC236}">
+                <a16:creationId xmlns:a16="http://schemas.microsoft.com/office/drawing/2014/main" id="{A6BEA3A7-88C6-BEF1-F51D-FDDA3F045117}"/>
+              </a:ext>
+            </a:extLst>
+          </p:cNvPr>
+          <p:cNvSpPr txBox="1"/>
+          <p:nvPr/>
+        </p:nvSpPr>
+        <p:spPr>
+          <a:xfrm>
+            <a:off x="2783840" y="7256664"/>
+            <a:ext cx="20706080" cy="1719852"/>
+          </a:xfrm>
+          <a:prstGeom prst="rect">
+            <a:avLst/>
+          </a:prstGeom>
+        </p:spPr>
+        <p:txBody>
+          <a:bodyPr vert="horz" wrap="square" lIns="91440" tIns="45720" rIns="91440" bIns="45720" rtlCol="0">
+            <a:noAutofit/>
+          </a:bodyPr>
+          <a:lstStyle/>
+          <a:p>
+            <a:pPr algn="r"/>
+            <a:r>
+              <a:rPr lang="es-ES" sz="11500" b="1" dirty="0">
+                <a:solidFill>
+                  <a:srgbClr val="F2F2F2"/>
+                </a:solidFill>
+                <a:latin typeface="Montserrat" pitchFamily="2" charset="77"/>
+              </a:rPr>
+              <a:t>9. Deep </a:t>
+            </a:r>
+            <a:r>
+              <a:rPr lang="es-ES" sz="11500" b="1" dirty="0" err="1">
+                <a:solidFill>
+                  <a:srgbClr val="F2F2F2"/>
+                </a:solidFill>
+                <a:latin typeface="Montserrat" pitchFamily="2" charset="77"/>
+              </a:rPr>
+              <a:t>Learning</a:t>
+            </a:r>
+            <a:r>
+              <a:rPr lang="es-ES" sz="11500" b="1" dirty="0">
+                <a:solidFill>
+                  <a:srgbClr val="F2F2F2"/>
+                </a:solidFill>
+                <a:latin typeface="Montserrat" pitchFamily="2" charset="77"/>
+              </a:rPr>
+              <a:t>:</a:t>
+            </a:r>
+          </a:p>
+          <a:p>
+            <a:pPr algn="r"/>
+            <a:r>
+              <a:rPr lang="es-ES" sz="11500" b="1" dirty="0" err="1">
+                <a:solidFill>
+                  <a:srgbClr val="F2F2F2"/>
+                </a:solidFill>
+                <a:latin typeface="Montserrat" pitchFamily="2" charset="77"/>
+              </a:rPr>
+              <a:t>Convolutional</a:t>
+            </a:r>
+            <a:r>
+              <a:rPr lang="es-ES" sz="11500" b="1" dirty="0">
+                <a:solidFill>
+                  <a:srgbClr val="F2F2F2"/>
+                </a:solidFill>
+                <a:latin typeface="Montserrat" pitchFamily="2" charset="77"/>
+              </a:rPr>
+              <a:t> Neuronal Network (CNN)</a:t>
+            </a:r>
+          </a:p>
+        </p:txBody>
+      </p:sp>
+    </p:spTree>
+    <p:extLst>
+      <p:ext uri="{BB962C8B-B14F-4D97-AF65-F5344CB8AC3E}">
+        <p14:creationId xmlns:p14="http://schemas.microsoft.com/office/powerpoint/2010/main" val="2715285498"/>
+      </p:ext>
+    </p:extLst>
+  </p:cSld>
+  <p:clrMapOvr>
+    <a:masterClrMapping/>
+  </p:clrMapOvr>
+  <p:transition spd="med"/>
+</p:sld>
+</file>
+
+<file path=ppt/slides/slide14.xml><?xml version="1.0" encoding="utf-8"?>
+<p:sld xmlns:a="http://schemas.openxmlformats.org/drawingml/2006/main" xmlns:r="http://schemas.openxmlformats.org/officeDocument/2006/relationships" xmlns:p="http://schemas.openxmlformats.org/presentationml/2006/main">
+  <p:cSld>
+    <p:spTree>
+      <p:nvGrpSpPr>
+        <p:cNvPr id="1" name="">
+          <a:extLst>
+            <a:ext uri="{FF2B5EF4-FFF2-40B4-BE49-F238E27FC236}">
+              <a16:creationId xmlns:a16="http://schemas.microsoft.com/office/drawing/2014/main" id="{469524BC-9FBB-381A-90D3-B50A9B598955}"/>
+            </a:ext>
+          </a:extLst>
+        </p:cNvPr>
+        <p:cNvGrpSpPr/>
+        <p:nvPr/>
+      </p:nvGrpSpPr>
+      <p:grpSpPr>
+        <a:xfrm>
+          <a:off x="0" y="0"/>
+          <a:ext cx="0" cy="0"/>
+          <a:chOff x="0" y="0"/>
+          <a:chExt cx="0" cy="0"/>
+        </a:xfrm>
+      </p:grpSpPr>
+      <p:sp>
+        <p:nvSpPr>
+          <p:cNvPr id="26" name="CuadroTexto 25">
+            <a:extLst>
+              <a:ext uri="{FF2B5EF4-FFF2-40B4-BE49-F238E27FC236}">
+                <a16:creationId xmlns:a16="http://schemas.microsoft.com/office/drawing/2014/main" id="{6815A6B6-6D8E-7F89-C40B-D3FB3D2949F4}"/>
+              </a:ext>
+            </a:extLst>
+          </p:cNvPr>
+          <p:cNvSpPr txBox="1"/>
+          <p:nvPr/>
+        </p:nvSpPr>
+        <p:spPr>
+          <a:xfrm>
+            <a:off x="1417814" y="3879559"/>
+            <a:ext cx="1905444" cy="1719852"/>
+          </a:xfrm>
+          <a:prstGeom prst="rect">
+            <a:avLst/>
+          </a:prstGeom>
+        </p:spPr>
+        <p:txBody>
+          <a:bodyPr vert="horz" wrap="square" lIns="91440" tIns="45720" rIns="91440" bIns="45720" rtlCol="0">
+            <a:noAutofit/>
+          </a:bodyPr>
+          <a:lstStyle/>
+          <a:p>
+            <a:r>
+              <a:rPr lang="es-ES" sz="8800" b="1" dirty="0">
+                <a:solidFill>
+                  <a:srgbClr val="3479BB"/>
+                </a:solidFill>
+                <a:latin typeface="Montserrat" pitchFamily="2" charset="77"/>
+              </a:rPr>
+              <a:t>1. </a:t>
+            </a:r>
+          </a:p>
+        </p:txBody>
+      </p:sp>
+      <p:sp>
+        <p:nvSpPr>
+          <p:cNvPr id="46" name="CuadroTexto 45">
+            <a:extLst>
+              <a:ext uri="{FF2B5EF4-FFF2-40B4-BE49-F238E27FC236}">
+                <a16:creationId xmlns:a16="http://schemas.microsoft.com/office/drawing/2014/main" id="{BE7448C7-94B8-2D5E-AF97-73E754DA0880}"/>
+              </a:ext>
+            </a:extLst>
+          </p:cNvPr>
+          <p:cNvSpPr txBox="1"/>
+          <p:nvPr/>
+        </p:nvSpPr>
+        <p:spPr>
+          <a:xfrm>
+            <a:off x="2783840" y="7256664"/>
+            <a:ext cx="20706080" cy="1719852"/>
+          </a:xfrm>
+          <a:prstGeom prst="rect">
+            <a:avLst/>
+          </a:prstGeom>
+        </p:spPr>
+        <p:txBody>
+          <a:bodyPr vert="horz" wrap="square" lIns="91440" tIns="45720" rIns="91440" bIns="45720" rtlCol="0">
+            <a:noAutofit/>
+          </a:bodyPr>
+          <a:lstStyle/>
+          <a:p>
+            <a:pPr algn="r"/>
+            <a:r>
+              <a:rPr lang="es-ES" sz="11500" b="1" dirty="0">
+                <a:solidFill>
+                  <a:srgbClr val="F2F2F2"/>
+                </a:solidFill>
+                <a:latin typeface="Montserrat" pitchFamily="2" charset="77"/>
+              </a:rPr>
+              <a:t>10. Deep </a:t>
+            </a:r>
+            <a:r>
+              <a:rPr lang="es-ES" sz="11500" b="1" dirty="0" err="1">
+                <a:solidFill>
+                  <a:srgbClr val="F2F2F2"/>
+                </a:solidFill>
+                <a:latin typeface="Montserrat" pitchFamily="2" charset="77"/>
+              </a:rPr>
+              <a:t>Learning</a:t>
+            </a:r>
+            <a:r>
+              <a:rPr lang="es-ES" sz="11500" b="1" dirty="0">
+                <a:solidFill>
+                  <a:srgbClr val="F2F2F2"/>
+                </a:solidFill>
+                <a:latin typeface="Montserrat" pitchFamily="2" charset="77"/>
+              </a:rPr>
+              <a:t>:</a:t>
+            </a:r>
+          </a:p>
+          <a:p>
+            <a:pPr algn="r"/>
+            <a:r>
+              <a:rPr lang="es-ES" sz="11500" b="1" dirty="0">
+                <a:solidFill>
+                  <a:srgbClr val="F2F2F2"/>
+                </a:solidFill>
+                <a:latin typeface="Montserrat" pitchFamily="2" charset="77"/>
+              </a:rPr>
+              <a:t>Transfer </a:t>
+            </a:r>
+            <a:r>
+              <a:rPr lang="es-ES" sz="11500" b="1" dirty="0" err="1">
+                <a:solidFill>
+                  <a:srgbClr val="F2F2F2"/>
+                </a:solidFill>
+                <a:latin typeface="Montserrat" pitchFamily="2" charset="77"/>
+              </a:rPr>
+              <a:t>Learning</a:t>
+            </a:r>
+            <a:endParaRPr lang="es-ES" sz="11500" b="1" dirty="0">
+              <a:solidFill>
+                <a:srgbClr val="F2F2F2"/>
+              </a:solidFill>
+              <a:latin typeface="Montserrat" pitchFamily="2" charset="77"/>
+            </a:endParaRPr>
+          </a:p>
+        </p:txBody>
+      </p:sp>
+    </p:spTree>
+    <p:extLst>
+      <p:ext uri="{BB962C8B-B14F-4D97-AF65-F5344CB8AC3E}">
+        <p14:creationId xmlns:p14="http://schemas.microsoft.com/office/powerpoint/2010/main" val="3916363036"/>
+      </p:ext>
+    </p:extLst>
+  </p:cSld>
+  <p:clrMapOvr>
+    <a:masterClrMapping/>
+  </p:clrMapOvr>
+  <p:transition spd="med"/>
+</p:sld>
+</file>
+
+<file path=ppt/slides/slide15.xml><?xml version="1.0" encoding="utf-8"?>
+<p:sld xmlns:a="http://schemas.openxmlformats.org/drawingml/2006/main" xmlns:r="http://schemas.openxmlformats.org/officeDocument/2006/relationships" xmlns:p="http://schemas.openxmlformats.org/presentationml/2006/main">
+  <p:cSld>
+    <p:spTree>
+      <p:nvGrpSpPr>
+        <p:cNvPr id="1" name="">
+          <a:extLst>
+            <a:ext uri="{FF2B5EF4-FFF2-40B4-BE49-F238E27FC236}">
+              <a16:creationId xmlns:a16="http://schemas.microsoft.com/office/drawing/2014/main" id="{60C0F020-FB85-B129-97F3-6AA7C1225E65}"/>
+            </a:ext>
+          </a:extLst>
+        </p:cNvPr>
+        <p:cNvGrpSpPr/>
+        <p:nvPr/>
+      </p:nvGrpSpPr>
+      <p:grpSpPr>
+        <a:xfrm>
+          <a:off x="0" y="0"/>
+          <a:ext cx="0" cy="0"/>
+          <a:chOff x="0" y="0"/>
+          <a:chExt cx="0" cy="0"/>
+        </a:xfrm>
+      </p:grpSpPr>
+      <p:sp>
+        <p:nvSpPr>
+          <p:cNvPr id="26" name="CuadroTexto 25">
+            <a:extLst>
+              <a:ext uri="{FF2B5EF4-FFF2-40B4-BE49-F238E27FC236}">
+                <a16:creationId xmlns:a16="http://schemas.microsoft.com/office/drawing/2014/main" id="{4DF99C7D-D79C-D356-E6B7-4A96F0642984}"/>
+              </a:ext>
+            </a:extLst>
+          </p:cNvPr>
+          <p:cNvSpPr txBox="1"/>
+          <p:nvPr/>
+        </p:nvSpPr>
+        <p:spPr>
+          <a:xfrm>
+            <a:off x="1417814" y="3879559"/>
+            <a:ext cx="1905444" cy="1719852"/>
+          </a:xfrm>
+          <a:prstGeom prst="rect">
+            <a:avLst/>
+          </a:prstGeom>
+        </p:spPr>
+        <p:txBody>
+          <a:bodyPr vert="horz" wrap="square" lIns="91440" tIns="45720" rIns="91440" bIns="45720" rtlCol="0">
+            <a:noAutofit/>
+          </a:bodyPr>
+          <a:lstStyle/>
+          <a:p>
+            <a:r>
+              <a:rPr lang="es-ES" sz="8800" b="1" dirty="0">
+                <a:solidFill>
+                  <a:srgbClr val="3479BB"/>
+                </a:solidFill>
+                <a:latin typeface="Montserrat" pitchFamily="2" charset="77"/>
+              </a:rPr>
+              <a:t>1. </a:t>
+            </a:r>
+          </a:p>
+        </p:txBody>
+      </p:sp>
+      <p:sp>
+        <p:nvSpPr>
+          <p:cNvPr id="46" name="CuadroTexto 45">
+            <a:extLst>
+              <a:ext uri="{FF2B5EF4-FFF2-40B4-BE49-F238E27FC236}">
+                <a16:creationId xmlns:a16="http://schemas.microsoft.com/office/drawing/2014/main" id="{5BC70C81-0A86-5CBB-9E40-A5AC9EEE79E2}"/>
+              </a:ext>
+            </a:extLst>
+          </p:cNvPr>
+          <p:cNvSpPr txBox="1"/>
+          <p:nvPr/>
+        </p:nvSpPr>
+        <p:spPr>
+          <a:xfrm>
+            <a:off x="2783840" y="7256664"/>
+            <a:ext cx="20706080" cy="1719852"/>
+          </a:xfrm>
+          <a:prstGeom prst="rect">
+            <a:avLst/>
+          </a:prstGeom>
+        </p:spPr>
+        <p:txBody>
+          <a:bodyPr vert="horz" wrap="square" lIns="91440" tIns="45720" rIns="91440" bIns="45720" rtlCol="0">
+            <a:noAutofit/>
+          </a:bodyPr>
+          <a:lstStyle/>
+          <a:p>
+            <a:pPr algn="r"/>
+            <a:r>
+              <a:rPr lang="es-ES" sz="11500" b="1" dirty="0">
+                <a:solidFill>
+                  <a:srgbClr val="F2F2F2"/>
+                </a:solidFill>
+                <a:latin typeface="Montserrat" pitchFamily="2" charset="77"/>
+              </a:rPr>
+              <a:t>11. Casos de usos: </a:t>
+            </a:r>
+          </a:p>
+          <a:p>
+            <a:pPr algn="r"/>
+            <a:r>
+              <a:rPr lang="es-ES" sz="11500" b="1" dirty="0" err="1">
+                <a:solidFill>
+                  <a:srgbClr val="F2F2F2"/>
+                </a:solidFill>
+                <a:latin typeface="Montserrat" pitchFamily="2" charset="77"/>
+              </a:rPr>
+              <a:t>End</a:t>
+            </a:r>
+            <a:r>
+              <a:rPr lang="es-ES" sz="11500" b="1" dirty="0">
+                <a:solidFill>
+                  <a:srgbClr val="F2F2F2"/>
+                </a:solidFill>
+                <a:latin typeface="Montserrat" pitchFamily="2" charset="77"/>
+              </a:rPr>
+              <a:t> – </a:t>
+            </a:r>
+            <a:r>
+              <a:rPr lang="es-ES" sz="11500" b="1" dirty="0" err="1">
+                <a:solidFill>
+                  <a:srgbClr val="F2F2F2"/>
+                </a:solidFill>
+                <a:latin typeface="Montserrat" pitchFamily="2" charset="77"/>
+              </a:rPr>
+              <a:t>to</a:t>
+            </a:r>
+            <a:r>
+              <a:rPr lang="es-ES" sz="11500" b="1" dirty="0">
+                <a:solidFill>
+                  <a:srgbClr val="F2F2F2"/>
+                </a:solidFill>
+                <a:latin typeface="Montserrat" pitchFamily="2" charset="77"/>
+              </a:rPr>
+              <a:t> - </a:t>
+            </a:r>
+            <a:r>
+              <a:rPr lang="es-ES" sz="11500" b="1" dirty="0" err="1">
+                <a:solidFill>
+                  <a:srgbClr val="F2F2F2"/>
+                </a:solidFill>
+                <a:latin typeface="Montserrat" pitchFamily="2" charset="77"/>
+              </a:rPr>
+              <a:t>end</a:t>
+            </a:r>
+            <a:endParaRPr lang="es-ES" sz="11500" b="1" dirty="0">
+              <a:solidFill>
+                <a:srgbClr val="F2F2F2"/>
+              </a:solidFill>
+              <a:latin typeface="Montserrat" pitchFamily="2" charset="77"/>
+            </a:endParaRPr>
+          </a:p>
+        </p:txBody>
+      </p:sp>
+    </p:spTree>
+    <p:extLst>
+      <p:ext uri="{BB962C8B-B14F-4D97-AF65-F5344CB8AC3E}">
+        <p14:creationId xmlns:p14="http://schemas.microsoft.com/office/powerpoint/2010/main" val="2492934483"/>
+      </p:ext>
+    </p:extLst>
+  </p:cSld>
+  <p:clrMapOvr>
+    <a:masterClrMapping/>
+  </p:clrMapOvr>
+  <p:transition spd="med"/>
+</p:sld>
+</file>
+
+<file path=ppt/slides/slide16.xml><?xml version="1.0" encoding="utf-8"?>
+<p:sld xmlns:a="http://schemas.openxmlformats.org/drawingml/2006/main" xmlns:r="http://schemas.openxmlformats.org/officeDocument/2006/relationships" xmlns:p="http://schemas.openxmlformats.org/presentationml/2006/main">
+  <p:cSld>
+    <p:spTree>
+      <p:nvGrpSpPr>
+        <p:cNvPr id="1" name=""/>
+        <p:cNvGrpSpPr/>
+        <p:nvPr/>
+      </p:nvGrpSpPr>
+      <p:grpSpPr>
+        <a:xfrm>
+          <a:off x="0" y="0"/>
+          <a:ext cx="0" cy="0"/>
+          <a:chOff x="0" y="0"/>
+          <a:chExt cx="0" cy="0"/>
+        </a:xfrm>
+      </p:grpSpPr>
+      <p:sp>
+        <p:nvSpPr>
+          <p:cNvPr id="357" name="vicenc.fernandez@upc.edu"/>
+          <p:cNvSpPr txBox="1">
+            <a:spLocks noGrp="1"/>
+          </p:cNvSpPr>
+          <p:nvPr>
+            <p:ph type="title"/>
+          </p:nvPr>
+        </p:nvSpPr>
+        <p:spPr>
+          <a:prstGeom prst="rect">
+            <a:avLst/>
+          </a:prstGeom>
+        </p:spPr>
+        <p:txBody>
+          <a:bodyPr/>
+          <a:lstStyle>
+            <a:lvl1pPr>
+              <a:defRPr i="1"/>
+            </a:lvl1pPr>
+          </a:lstStyle>
+          <a:p>
+            <a:r>
+              <a:rPr lang="es-ES" dirty="0" err="1"/>
+              <a:t>sergi.ramirez</a:t>
+            </a:r>
+            <a:r>
+              <a:rPr dirty="0"/>
+              <a:t>@upc.edu</a:t>
+            </a:r>
+          </a:p>
+        </p:txBody>
+      </p:sp>
+    </p:spTree>
+  </p:cSld>
+  <p:clrMapOvr>
+    <a:masterClrMapping/>
+  </p:clrMapOvr>
+  <p:transition spd="med"/>
+</p:sld>
+</file>
+
+<file path=ppt/slides/slide17.xml><?xml version="1.0" encoding="utf-8"?>
+<p:sld xmlns:a="http://schemas.openxmlformats.org/drawingml/2006/main" xmlns:r="http://schemas.openxmlformats.org/officeDocument/2006/relationships" xmlns:p="http://schemas.openxmlformats.org/presentationml/2006/main" show="0">
+  <p:cSld>
+    <p:spTree>
+      <p:nvGrpSpPr>
+        <p:cNvPr id="1" name=""/>
+        <p:cNvGrpSpPr/>
+        <p:nvPr/>
+      </p:nvGrpSpPr>
+      <p:grpSpPr>
+        <a:xfrm>
+          <a:off x="0" y="0"/>
+          <a:ext cx="0" cy="0"/>
+          <a:chOff x="0" y="0"/>
+          <a:chExt cx="0" cy="0"/>
+        </a:xfrm>
+      </p:grpSpPr>
+      <p:sp>
+        <p:nvSpPr>
+          <p:cNvPr id="2" name="CuadroTexto 1">
+            <a:extLst>
+              <a:ext uri="{FF2B5EF4-FFF2-40B4-BE49-F238E27FC236}">
+                <a16:creationId xmlns:a16="http://schemas.microsoft.com/office/drawing/2014/main" id="{48FBE165-ABD4-81D8-CC0C-05CDB3372B74}"/>
+              </a:ext>
+            </a:extLst>
+          </p:cNvPr>
+          <p:cNvSpPr txBox="1"/>
+          <p:nvPr/>
+        </p:nvSpPr>
+        <p:spPr>
+          <a:xfrm>
+            <a:off x="2755900" y="4936961"/>
+            <a:ext cx="18872200" cy="3842077"/>
+          </a:xfrm>
+          <a:prstGeom prst="rect">
+            <a:avLst/>
+          </a:prstGeom>
+          <a:noFill/>
+          <a:ln w="12700" cap="flat">
+            <a:noFill/>
+            <a:miter lim="400000"/>
+          </a:ln>
+          <a:effectLst/>
+          <a:sp3d/>
+        </p:spPr>
+        <p:style>
+          <a:lnRef idx="0">
+            <a:scrgbClr r="0" g="0" b="0"/>
+          </a:lnRef>
+          <a:fillRef idx="0">
+            <a:scrgbClr r="0" g="0" b="0"/>
+          </a:fillRef>
+          <a:effectRef idx="0">
+            <a:scrgbClr r="0" g="0" b="0"/>
+          </a:effectRef>
+          <a:fontRef idx="none"/>
+        </p:style>
+        <p:txBody>
+          <a:bodyPr rot="0" spcFirstLastPara="1" vertOverflow="overflow" horzOverflow="overflow" vert="horz" wrap="square" lIns="50800" tIns="50800" rIns="50800" bIns="50800" numCol="1" spcCol="38100" rtlCol="0" anchor="ctr">
+            <a:spAutoFit/>
+          </a:bodyPr>
+          <a:lstStyle/>
+          <a:p>
+            <a:pPr marL="0" marR="0" indent="0" algn="ctr" defTabSz="2438338" rtl="0" fontAlgn="auto" latinLnBrk="0" hangingPunct="0">
+              <a:lnSpc>
+                <a:spcPct val="100000"/>
+              </a:lnSpc>
+              <a:spcBef>
+                <a:spcPts val="0"/>
+              </a:spcBef>
+              <a:spcAft>
+                <a:spcPts val="0"/>
+              </a:spcAft>
+              <a:buClrTx/>
+              <a:buSzTx/>
+              <a:buFontTx/>
+              <a:buNone/>
+              <a:tabLst/>
+            </a:pPr>
+            <a:r>
+              <a:rPr kumimoji="0" lang="es-ES" sz="24300" b="0" i="0" u="none" strike="noStrike" cap="none" spc="0" normalizeH="0" baseline="0" dirty="0">
+                <a:ln>
+                  <a:noFill/>
+                </a:ln>
+                <a:solidFill>
+                  <a:schemeClr val="bg1"/>
+                </a:solidFill>
+                <a:effectLst/>
+                <a:uFillTx/>
+                <a:latin typeface="ADLaM Display" panose="02010000000000000000" pitchFamily="2" charset="77"/>
+                <a:ea typeface="ADLaM Display" panose="02010000000000000000" pitchFamily="2" charset="77"/>
+                <a:cs typeface="ADLaM Display" panose="02010000000000000000" pitchFamily="2" charset="77"/>
+                <a:sym typeface="Helvetica Neue"/>
+              </a:rPr>
+              <a:t>FINAL DIA 1</a:t>
+            </a:r>
+          </a:p>
+        </p:txBody>
+      </p:sp>
+      <p:sp>
+        <p:nvSpPr>
+          <p:cNvPr id="3" name="Rectángulo 2">
+            <a:extLst>
+              <a:ext uri="{FF2B5EF4-FFF2-40B4-BE49-F238E27FC236}">
+                <a16:creationId xmlns:a16="http://schemas.microsoft.com/office/drawing/2014/main" id="{658913AC-9300-E97A-7EBB-BCA9550587E8}"/>
+              </a:ext>
+            </a:extLst>
+          </p:cNvPr>
+          <p:cNvSpPr/>
+          <p:nvPr/>
+        </p:nvSpPr>
+        <p:spPr>
+          <a:xfrm>
+            <a:off x="3592054" y="5190168"/>
+            <a:ext cx="6487160" cy="4042132"/>
+          </a:xfrm>
+          <a:prstGeom prst="rect">
+            <a:avLst/>
+          </a:prstGeom>
+          <a:solidFill>
+            <a:srgbClr val="3479BB">
+              <a:alpha val="62000"/>
+            </a:srgbClr>
+          </a:solidFill>
+          <a:ln w="12700" cap="flat">
+            <a:noFill/>
+            <a:miter lim="400000"/>
+          </a:ln>
+          <a:effectLst/>
+          <a:sp3d/>
+        </p:spPr>
+        <p:style>
+          <a:lnRef idx="0">
+            <a:scrgbClr r="0" g="0" b="0"/>
+          </a:lnRef>
+          <a:fillRef idx="0">
+            <a:scrgbClr r="0" g="0" b="0"/>
+          </a:fillRef>
+          <a:effectRef idx="0">
+            <a:scrgbClr r="0" g="0" b="0"/>
+          </a:effectRef>
+          <a:fontRef idx="none"/>
+        </p:style>
+        <p:txBody>
+          <a:bodyPr rot="0" spcFirstLastPara="1" vertOverflow="overflow" horzOverflow="overflow" vert="horz" wrap="square" lIns="50800" tIns="50800" rIns="50800" bIns="50800" numCol="1" spcCol="38100" rtlCol="0" anchor="ctr">
+            <a:spAutoFit/>
+          </a:bodyPr>
+          <a:lstStyle/>
+          <a:p>
+            <a:pPr marL="0" marR="0" indent="0" algn="ctr" defTabSz="825500" rtl="0" fontAlgn="auto" latinLnBrk="0" hangingPunct="0">
+              <a:lnSpc>
+                <a:spcPct val="100000"/>
+              </a:lnSpc>
+              <a:spcBef>
+                <a:spcPts val="0"/>
+              </a:spcBef>
+              <a:spcAft>
+                <a:spcPts val="0"/>
+              </a:spcAft>
+              <a:buClrTx/>
+              <a:buSzTx/>
+              <a:buFontTx/>
+              <a:buNone/>
+              <a:tabLst/>
+            </a:pPr>
+            <a:endParaRPr kumimoji="0" lang="es-ES" sz="3200" b="0" i="0" u="none" strike="noStrike" cap="none" spc="0" normalizeH="0" baseline="0" dirty="0">
+              <a:ln>
+                <a:noFill/>
+              </a:ln>
+              <a:solidFill>
+                <a:srgbClr val="FFFFFF"/>
+              </a:solidFill>
+              <a:effectLst/>
+              <a:uFillTx/>
+              <a:latin typeface="Helvetica Neue Medium"/>
+              <a:ea typeface="Helvetica Neue Medium"/>
+              <a:cs typeface="Helvetica Neue Medium"/>
+              <a:sym typeface="Helvetica Neue Medium"/>
+            </a:endParaRPr>
+          </a:p>
+          <a:p>
+            <a:pPr marL="0" marR="0" indent="0" algn="ctr" defTabSz="825500" rtl="0" fontAlgn="auto" latinLnBrk="0" hangingPunct="0">
+              <a:lnSpc>
+                <a:spcPct val="100000"/>
+              </a:lnSpc>
+              <a:spcBef>
+                <a:spcPts val="0"/>
+              </a:spcBef>
+              <a:spcAft>
+                <a:spcPts val="0"/>
+              </a:spcAft>
+              <a:buClrTx/>
+              <a:buSzTx/>
+              <a:buFontTx/>
+              <a:buNone/>
+              <a:tabLst/>
+            </a:pPr>
+            <a:endParaRPr lang="es-ES" sz="3200" dirty="0">
+              <a:solidFill>
+                <a:srgbClr val="FFFFFF"/>
+              </a:solidFill>
+              <a:latin typeface="Helvetica Neue Medium"/>
+              <a:ea typeface="Helvetica Neue Medium"/>
+              <a:cs typeface="Helvetica Neue Medium"/>
+              <a:sym typeface="Helvetica Neue Medium"/>
+            </a:endParaRPr>
+          </a:p>
+          <a:p>
+            <a:pPr marL="0" marR="0" indent="0" algn="ctr" defTabSz="825500" rtl="0" fontAlgn="auto" latinLnBrk="0" hangingPunct="0">
+              <a:lnSpc>
+                <a:spcPct val="100000"/>
+              </a:lnSpc>
+              <a:spcBef>
+                <a:spcPts val="0"/>
+              </a:spcBef>
+              <a:spcAft>
+                <a:spcPts val="0"/>
+              </a:spcAft>
+              <a:buClrTx/>
+              <a:buSzTx/>
+              <a:buFontTx/>
+              <a:buNone/>
+              <a:tabLst/>
+            </a:pPr>
+            <a:endParaRPr kumimoji="0" lang="es-ES" sz="3200" b="0" i="0" u="none" strike="noStrike" cap="none" spc="0" normalizeH="0" baseline="0" dirty="0">
+              <a:ln>
+                <a:noFill/>
+              </a:ln>
+              <a:solidFill>
+                <a:srgbClr val="FFFFFF"/>
+              </a:solidFill>
+              <a:effectLst/>
+              <a:uFillTx/>
+              <a:latin typeface="Helvetica Neue Medium"/>
+              <a:ea typeface="Helvetica Neue Medium"/>
+              <a:cs typeface="Helvetica Neue Medium"/>
+              <a:sym typeface="Helvetica Neue Medium"/>
+            </a:endParaRPr>
+          </a:p>
+          <a:p>
+            <a:pPr marL="0" marR="0" indent="0" algn="ctr" defTabSz="825500" rtl="0" fontAlgn="auto" latinLnBrk="0" hangingPunct="0">
+              <a:lnSpc>
+                <a:spcPct val="100000"/>
+              </a:lnSpc>
+              <a:spcBef>
+                <a:spcPts val="0"/>
+              </a:spcBef>
+              <a:spcAft>
+                <a:spcPts val="0"/>
+              </a:spcAft>
+              <a:buClrTx/>
+              <a:buSzTx/>
+              <a:buFontTx/>
+              <a:buNone/>
+              <a:tabLst/>
+            </a:pPr>
+            <a:endParaRPr lang="es-ES" sz="3200" dirty="0">
+              <a:solidFill>
+                <a:srgbClr val="FFFFFF"/>
+              </a:solidFill>
+              <a:latin typeface="Helvetica Neue Medium"/>
+              <a:ea typeface="Helvetica Neue Medium"/>
+              <a:cs typeface="Helvetica Neue Medium"/>
+              <a:sym typeface="Helvetica Neue Medium"/>
+            </a:endParaRPr>
+          </a:p>
+          <a:p>
+            <a:pPr marL="0" marR="0" indent="0" algn="ctr" defTabSz="825500" rtl="0" fontAlgn="auto" latinLnBrk="0" hangingPunct="0">
+              <a:lnSpc>
+                <a:spcPct val="100000"/>
+              </a:lnSpc>
+              <a:spcBef>
+                <a:spcPts val="0"/>
+              </a:spcBef>
+              <a:spcAft>
+                <a:spcPts val="0"/>
+              </a:spcAft>
+              <a:buClrTx/>
+              <a:buSzTx/>
+              <a:buFontTx/>
+              <a:buNone/>
+              <a:tabLst/>
+            </a:pPr>
+            <a:endParaRPr kumimoji="0" lang="es-ES" sz="3200" b="0" i="0" u="none" strike="noStrike" cap="none" spc="0" normalizeH="0" baseline="0" dirty="0">
+              <a:ln>
+                <a:noFill/>
+              </a:ln>
+              <a:solidFill>
+                <a:srgbClr val="FFFFFF"/>
+              </a:solidFill>
+              <a:effectLst/>
+              <a:uFillTx/>
+              <a:latin typeface="Helvetica Neue Medium"/>
+              <a:ea typeface="Helvetica Neue Medium"/>
+              <a:cs typeface="Helvetica Neue Medium"/>
+              <a:sym typeface="Helvetica Neue Medium"/>
+            </a:endParaRPr>
+          </a:p>
+          <a:p>
+            <a:pPr marL="0" marR="0" indent="0" algn="ctr" defTabSz="825500" rtl="0" fontAlgn="auto" latinLnBrk="0" hangingPunct="0">
+              <a:lnSpc>
+                <a:spcPct val="100000"/>
+              </a:lnSpc>
+              <a:spcBef>
+                <a:spcPts val="0"/>
+              </a:spcBef>
+              <a:spcAft>
+                <a:spcPts val="0"/>
+              </a:spcAft>
+              <a:buClrTx/>
+              <a:buSzTx/>
+              <a:buFontTx/>
+              <a:buNone/>
+              <a:tabLst/>
+            </a:pPr>
+            <a:endParaRPr lang="es-ES" sz="3200" dirty="0">
+              <a:solidFill>
+                <a:srgbClr val="FFFFFF"/>
+              </a:solidFill>
+              <a:latin typeface="Helvetica Neue Medium"/>
+              <a:ea typeface="Helvetica Neue Medium"/>
+              <a:cs typeface="Helvetica Neue Medium"/>
+              <a:sym typeface="Helvetica Neue Medium"/>
+            </a:endParaRPr>
+          </a:p>
+          <a:p>
+            <a:pPr marL="0" marR="0" indent="0" algn="ctr" defTabSz="825500" rtl="0" fontAlgn="auto" latinLnBrk="0" hangingPunct="0">
+              <a:lnSpc>
+                <a:spcPct val="100000"/>
+              </a:lnSpc>
+              <a:spcBef>
+                <a:spcPts val="0"/>
+              </a:spcBef>
+              <a:spcAft>
+                <a:spcPts val="0"/>
+              </a:spcAft>
+              <a:buClrTx/>
+              <a:buSzTx/>
+              <a:buFontTx/>
+              <a:buNone/>
+              <a:tabLst/>
+            </a:pPr>
+            <a:endParaRPr kumimoji="0" lang="es-ES" sz="3200" b="0" i="0" u="none" strike="noStrike" cap="none" spc="0" normalizeH="0" baseline="0" dirty="0">
+              <a:ln>
+                <a:noFill/>
+              </a:ln>
+              <a:solidFill>
+                <a:srgbClr val="FFFFFF"/>
+              </a:solidFill>
+              <a:effectLst/>
+              <a:uFillTx/>
+              <a:latin typeface="Helvetica Neue Medium"/>
+              <a:ea typeface="Helvetica Neue Medium"/>
+              <a:cs typeface="Helvetica Neue Medium"/>
+              <a:sym typeface="Helvetica Neue Medium"/>
+            </a:endParaRPr>
+          </a:p>
+          <a:p>
+            <a:pPr marL="0" marR="0" indent="0" algn="ctr" defTabSz="825500" rtl="0" fontAlgn="auto" latinLnBrk="0" hangingPunct="0">
+              <a:lnSpc>
+                <a:spcPct val="100000"/>
+              </a:lnSpc>
+              <a:spcBef>
+                <a:spcPts val="0"/>
+              </a:spcBef>
+              <a:spcAft>
+                <a:spcPts val="0"/>
+              </a:spcAft>
+              <a:buClrTx/>
+              <a:buSzTx/>
+              <a:buFontTx/>
+              <a:buNone/>
+              <a:tabLst/>
+            </a:pPr>
+            <a:endParaRPr kumimoji="0" lang="es-ES" sz="3200" b="0" i="0" u="none" strike="noStrike" cap="none" spc="0" normalizeH="0" baseline="0" dirty="0">
+              <a:ln>
+                <a:noFill/>
+              </a:ln>
+              <a:solidFill>
+                <a:srgbClr val="FFFFFF"/>
+              </a:solidFill>
+              <a:effectLst/>
+              <a:uFillTx/>
+              <a:latin typeface="Helvetica Neue Medium"/>
+              <a:ea typeface="Helvetica Neue Medium"/>
+              <a:cs typeface="Helvetica Neue Medium"/>
+              <a:sym typeface="Helvetica Neue Medium"/>
+            </a:endParaRPr>
+          </a:p>
+        </p:txBody>
+      </p:sp>
+    </p:spTree>
+    <p:extLst>
+      <p:ext uri="{BB962C8B-B14F-4D97-AF65-F5344CB8AC3E}">
+        <p14:creationId xmlns:p14="http://schemas.microsoft.com/office/powerpoint/2010/main" val="1365634657"/>
+      </p:ext>
+    </p:extLst>
   </p:cSld>
   <p:clrMapOvr>
     <a:masterClrMapping/>
@@ -7467,7 +8894,7 @@
         </p:blipFill>
         <p:spPr bwMode="auto">
           <a:xfrm>
-            <a:off x="4655864" y="146304"/>
+            <a:off x="2766104" y="664368"/>
             <a:ext cx="13536081" cy="12387263"/>
           </a:xfrm>
           <a:prstGeom prst="rect">
@@ -7504,7 +8931,13 @@
   <p:cSld>
     <p:spTree>
       <p:nvGrpSpPr>
-        <p:cNvPr id="1" name=""/>
+        <p:cNvPr id="1" name="">
+          <a:extLst>
+            <a:ext uri="{FF2B5EF4-FFF2-40B4-BE49-F238E27FC236}">
+              <a16:creationId xmlns:a16="http://schemas.microsoft.com/office/drawing/2014/main" id="{D40D903E-0335-BE61-BD6B-FB3F8CAC6003}"/>
+            </a:ext>
+          </a:extLst>
+        </p:cNvPr>
         <p:cNvGrpSpPr/>
         <p:nvPr/>
       </p:nvGrpSpPr>
@@ -7518,490 +8951,89 @@
       </p:grpSpPr>
       <p:sp>
         <p:nvSpPr>
-          <p:cNvPr id="353" name="Agenda"/>
-          <p:cNvSpPr txBox="1">
-            <a:spLocks noGrp="1"/>
-          </p:cNvSpPr>
-          <p:nvPr>
-            <p:ph type="title"/>
-          </p:nvPr>
+          <p:cNvPr id="26" name="CuadroTexto 25">
+            <a:extLst>
+              <a:ext uri="{FF2B5EF4-FFF2-40B4-BE49-F238E27FC236}">
+                <a16:creationId xmlns:a16="http://schemas.microsoft.com/office/drawing/2014/main" id="{DD84C0C8-4C70-8D58-A544-87BAB76D6E5B}"/>
+              </a:ext>
+            </a:extLst>
+          </p:cNvPr>
+          <p:cNvSpPr txBox="1"/>
+          <p:nvPr/>
         </p:nvSpPr>
         <p:spPr>
+          <a:xfrm>
+            <a:off x="1417814" y="3879559"/>
+            <a:ext cx="1905444" cy="1719852"/>
+          </a:xfrm>
           <a:prstGeom prst="rect">
             <a:avLst/>
           </a:prstGeom>
         </p:spPr>
         <p:txBody>
-          <a:bodyPr/>
+          <a:bodyPr vert="horz" wrap="square" lIns="91440" tIns="45720" rIns="91440" bIns="45720" rtlCol="0">
+            <a:noAutofit/>
+          </a:bodyPr>
           <a:lstStyle/>
           <a:p>
             <a:r>
-              <a:t>Agenda</a:t>
+              <a:rPr lang="es-ES" sz="8800" b="1" dirty="0">
+                <a:solidFill>
+                  <a:srgbClr val="3479BB"/>
+                </a:solidFill>
+                <a:latin typeface="Montserrat" pitchFamily="2" charset="77"/>
+              </a:rPr>
+              <a:t>1. </a:t>
             </a:r>
           </a:p>
         </p:txBody>
       </p:sp>
       <p:sp>
         <p:nvSpPr>
-          <p:cNvPr id="354" name="Número de diapositiva"/>
-          <p:cNvSpPr txBox="1">
-            <a:spLocks noGrp="1"/>
-          </p:cNvSpPr>
-          <p:nvPr>
-            <p:ph type="sldNum" sz="quarter" idx="2"/>
-          </p:nvPr>
-        </p:nvSpPr>
-        <p:spPr>
-          <a:xfrm>
-            <a:off x="12065050" y="13080999"/>
-            <a:ext cx="241403" cy="374600"/>
-          </a:xfrm>
-          <a:prstGeom prst="rect">
-            <a:avLst/>
-          </a:prstGeom>
-          <a:extLst>
-            <a:ext uri="{C572A759-6A51-4108-AA02-DFA0A04FC94B}">
-              <ma14:wrappingTextBoxFlag xmlns:ma14="http://schemas.microsoft.com/office/mac/drawingml/2011/main" xmlns:a14="http://schemas.microsoft.com/office/drawing/2010/main" xmlns:m="http://schemas.openxmlformats.org/officeDocument/2006/math" xmlns="" val="1"/>
-            </a:ext>
-          </a:extLst>
-        </p:spPr>
-        <p:txBody>
-          <a:bodyPr/>
-          <a:lstStyle/>
-          <a:p>
-            <a:fld id="{86CB4B4D-7CA3-9044-876B-883B54F8677D}" type="slidenum">
-              <a:rPr/>
-              <a:t>3</a:t>
-            </a:fld>
-            <a:endParaRPr/>
-          </a:p>
-        </p:txBody>
-      </p:sp>
-      <p:sp>
-        <p:nvSpPr>
-          <p:cNvPr id="8" name="Rectángulo 7">
+          <p:cNvPr id="46" name="CuadroTexto 45">
             <a:extLst>
               <a:ext uri="{FF2B5EF4-FFF2-40B4-BE49-F238E27FC236}">
-                <a16:creationId xmlns:a16="http://schemas.microsoft.com/office/drawing/2014/main" id="{8976EAF4-3406-1482-8D1B-D7F2D544019C}"/>
+                <a16:creationId xmlns:a16="http://schemas.microsoft.com/office/drawing/2014/main" id="{5E42FA19-8765-EF4D-0310-705A62EE2BBD}"/>
               </a:ext>
             </a:extLst>
           </p:cNvPr>
-          <p:cNvSpPr/>
+          <p:cNvSpPr txBox="1"/>
           <p:nvPr/>
         </p:nvSpPr>
         <p:spPr>
           <a:xfrm>
-            <a:off x="2184704" y="4998970"/>
-            <a:ext cx="5774163" cy="2872581"/>
+            <a:off x="8351520" y="8006459"/>
+            <a:ext cx="15016480" cy="1719852"/>
           </a:xfrm>
           <a:prstGeom prst="rect">
             <a:avLst/>
           </a:prstGeom>
-          <a:ln/>
-        </p:spPr>
-        <p:style>
-          <a:lnRef idx="2">
-            <a:schemeClr val="dk1"/>
-          </a:lnRef>
-          <a:fillRef idx="1">
-            <a:schemeClr val="lt1"/>
-          </a:fillRef>
-          <a:effectRef idx="0">
-            <a:schemeClr val="dk1"/>
-          </a:effectRef>
-          <a:fontRef idx="minor">
-            <a:schemeClr val="dk1"/>
-          </a:fontRef>
-        </p:style>
+        </p:spPr>
         <p:txBody>
-          <a:bodyPr rot="0" spcFirstLastPara="1" vertOverflow="overflow" horzOverflow="overflow" vert="horz" wrap="square" lIns="50800" tIns="50800" rIns="50800" bIns="50800" numCol="1" spcCol="38100" rtlCol="0" anchor="b">
-            <a:spAutoFit/>
+          <a:bodyPr vert="horz" wrap="square" lIns="91440" tIns="45720" rIns="91440" bIns="45720" rtlCol="0">
+            <a:noAutofit/>
           </a:bodyPr>
           <a:lstStyle/>
           <a:p>
-            <a:pPr marR="0" algn="l" defTabSz="825500" rtl="0" fontAlgn="auto" latinLnBrk="0" hangingPunct="0">
-              <a:lnSpc>
-                <a:spcPct val="100000"/>
-              </a:lnSpc>
-              <a:spcBef>
-                <a:spcPts val="0"/>
-              </a:spcBef>
-              <a:spcAft>
-                <a:spcPts val="0"/>
-              </a:spcAft>
-              <a:buClrTx/>
-              <a:buSzTx/>
-              <a:tabLst/>
-            </a:pPr>
-            <a:endParaRPr kumimoji="0" lang="es-ES" sz="6000" b="1" i="0" u="none" strike="noStrike" cap="none" spc="0" normalizeH="0" baseline="0" dirty="0">
-              <a:ln>
-                <a:noFill/>
-              </a:ln>
-              <a:solidFill>
-                <a:srgbClr val="3479BB"/>
-              </a:solidFill>
-              <a:effectLst/>
-              <a:uFillTx/>
-              <a:latin typeface="Helvetica Neue Medium"/>
-              <a:ea typeface="Helvetica Neue Medium"/>
-              <a:cs typeface="Helvetica Neue Medium"/>
-              <a:sym typeface="Helvetica Neue Medium"/>
-            </a:endParaRPr>
-          </a:p>
-          <a:p>
-            <a:pPr marR="0" algn="l" defTabSz="825500" rtl="0" fontAlgn="auto" latinLnBrk="0" hangingPunct="0">
-              <a:lnSpc>
-                <a:spcPct val="100000"/>
-              </a:lnSpc>
-              <a:spcBef>
-                <a:spcPts val="0"/>
-              </a:spcBef>
-              <a:spcAft>
-                <a:spcPts val="0"/>
-              </a:spcAft>
-              <a:buClrTx/>
-              <a:buSzTx/>
-              <a:tabLst/>
-            </a:pPr>
-            <a:r>
-              <a:rPr kumimoji="0" lang="es-ES" sz="6000" b="1" i="0" u="none" strike="noStrike" cap="none" spc="0" normalizeH="0" baseline="0" dirty="0">
-                <a:ln>
-                  <a:noFill/>
-                </a:ln>
-                <a:solidFill>
-                  <a:srgbClr val="3479BB"/>
-                </a:solidFill>
-                <a:effectLst/>
-                <a:uFillTx/>
-                <a:latin typeface="Helvetica Neue Medium"/>
-                <a:ea typeface="Helvetica Neue Medium"/>
-                <a:cs typeface="Helvetica Neue Medium"/>
-                <a:sym typeface="Helvetica Neue Medium"/>
+            <a:pPr algn="r"/>
+            <a:r>
+              <a:rPr lang="es-ES" sz="11500" b="1" dirty="0">
+                <a:solidFill>
+                  <a:srgbClr val="F2F2F2"/>
+                </a:solidFill>
+                <a:latin typeface="Montserrat" pitchFamily="2" charset="77"/>
               </a:rPr>
-              <a:t>01. MODELS SUPERVISATS</a:t>
-            </a:r>
-          </a:p>
-        </p:txBody>
-      </p:sp>
-      <p:sp>
-        <p:nvSpPr>
-          <p:cNvPr id="17" name="Rectángulo 16">
-            <a:extLst>
-              <a:ext uri="{FF2B5EF4-FFF2-40B4-BE49-F238E27FC236}">
-                <a16:creationId xmlns:a16="http://schemas.microsoft.com/office/drawing/2014/main" id="{12855C56-94F5-5B3E-93C8-4CD2662D6D85}"/>
-              </a:ext>
-            </a:extLst>
-          </p:cNvPr>
-          <p:cNvSpPr/>
-          <p:nvPr/>
-        </p:nvSpPr>
-        <p:spPr>
-          <a:xfrm>
-            <a:off x="8672548" y="4998971"/>
-            <a:ext cx="5774163" cy="2872581"/>
-          </a:xfrm>
-          <a:prstGeom prst="rect">
-            <a:avLst/>
-          </a:prstGeom>
-          <a:ln/>
-        </p:spPr>
-        <p:style>
-          <a:lnRef idx="2">
-            <a:schemeClr val="dk1"/>
-          </a:lnRef>
-          <a:fillRef idx="1">
-            <a:schemeClr val="lt1"/>
-          </a:fillRef>
-          <a:effectRef idx="0">
-            <a:schemeClr val="dk1"/>
-          </a:effectRef>
-          <a:fontRef idx="minor">
-            <a:schemeClr val="dk1"/>
-          </a:fontRef>
-        </p:style>
-        <p:txBody>
-          <a:bodyPr rot="0" spcFirstLastPara="1" vertOverflow="overflow" horzOverflow="overflow" vert="horz" wrap="square" lIns="50800" tIns="50800" rIns="50800" bIns="50800" numCol="1" spcCol="38100" rtlCol="0" anchor="b">
-            <a:spAutoFit/>
-          </a:bodyPr>
-          <a:lstStyle/>
-          <a:p>
-            <a:pPr marR="0" algn="l" defTabSz="825500" rtl="0" fontAlgn="auto" latinLnBrk="0" hangingPunct="0">
-              <a:lnSpc>
-                <a:spcPct val="100000"/>
-              </a:lnSpc>
-              <a:spcBef>
-                <a:spcPts val="0"/>
-              </a:spcBef>
-              <a:spcAft>
-                <a:spcPts val="0"/>
-              </a:spcAft>
-              <a:buClrTx/>
-              <a:buSzTx/>
-              <a:tabLst/>
-            </a:pPr>
-            <a:endParaRPr kumimoji="0" lang="es-ES" sz="6000" b="1" i="0" u="none" strike="noStrike" cap="none" spc="0" normalizeH="0" baseline="0" dirty="0">
-              <a:ln>
-                <a:noFill/>
-              </a:ln>
-              <a:solidFill>
-                <a:srgbClr val="3479BB"/>
-              </a:solidFill>
-              <a:effectLst/>
-              <a:uFillTx/>
-              <a:latin typeface="Helvetica Neue Medium"/>
-              <a:ea typeface="Helvetica Neue Medium"/>
-              <a:cs typeface="Helvetica Neue Medium"/>
-              <a:sym typeface="Helvetica Neue Medium"/>
-            </a:endParaRPr>
-          </a:p>
-          <a:p>
-            <a:pPr marR="0" algn="l" defTabSz="825500" rtl="0" fontAlgn="auto" latinLnBrk="0" hangingPunct="0">
-              <a:lnSpc>
-                <a:spcPct val="100000"/>
-              </a:lnSpc>
-              <a:spcBef>
-                <a:spcPts val="0"/>
-              </a:spcBef>
-              <a:spcAft>
-                <a:spcPts val="0"/>
-              </a:spcAft>
-              <a:buClrTx/>
-              <a:buSzTx/>
-              <a:tabLst/>
-            </a:pPr>
-            <a:r>
-              <a:rPr kumimoji="0" lang="es-ES" sz="6000" b="1" i="0" u="none" strike="noStrike" cap="none" spc="0" normalizeH="0" baseline="0" dirty="0">
-                <a:ln>
-                  <a:noFill/>
-                </a:ln>
-                <a:solidFill>
-                  <a:srgbClr val="3479BB"/>
-                </a:solidFill>
-                <a:effectLst/>
-                <a:uFillTx/>
-                <a:latin typeface="Helvetica Neue Medium"/>
-                <a:ea typeface="Helvetica Neue Medium"/>
-                <a:cs typeface="Helvetica Neue Medium"/>
-                <a:sym typeface="Helvetica Neue Medium"/>
-              </a:rPr>
-              <a:t>01. MODELS SUPERVISATS</a:t>
-            </a:r>
-          </a:p>
-        </p:txBody>
-      </p:sp>
-      <p:sp>
-        <p:nvSpPr>
-          <p:cNvPr id="18" name="Rectángulo 17">
-            <a:extLst>
-              <a:ext uri="{FF2B5EF4-FFF2-40B4-BE49-F238E27FC236}">
-                <a16:creationId xmlns:a16="http://schemas.microsoft.com/office/drawing/2014/main" id="{3E73D25C-A3AC-1C8A-B9E5-A577FDC18552}"/>
-              </a:ext>
-            </a:extLst>
-          </p:cNvPr>
-          <p:cNvSpPr/>
-          <p:nvPr/>
-        </p:nvSpPr>
-        <p:spPr>
-          <a:xfrm>
-            <a:off x="2184704" y="9143568"/>
-            <a:ext cx="5774163" cy="2872581"/>
-          </a:xfrm>
-          <a:prstGeom prst="rect">
-            <a:avLst/>
-          </a:prstGeom>
-          <a:ln/>
-        </p:spPr>
-        <p:style>
-          <a:lnRef idx="2">
-            <a:schemeClr val="dk1"/>
-          </a:lnRef>
-          <a:fillRef idx="1">
-            <a:schemeClr val="lt1"/>
-          </a:fillRef>
-          <a:effectRef idx="0">
-            <a:schemeClr val="dk1"/>
-          </a:effectRef>
-          <a:fontRef idx="minor">
-            <a:schemeClr val="dk1"/>
-          </a:fontRef>
-        </p:style>
-        <p:txBody>
-          <a:bodyPr rot="0" spcFirstLastPara="1" vertOverflow="overflow" horzOverflow="overflow" vert="horz" wrap="square" lIns="50800" tIns="50800" rIns="50800" bIns="50800" numCol="1" spcCol="38100" rtlCol="0" anchor="b">
-            <a:spAutoFit/>
-          </a:bodyPr>
-          <a:lstStyle/>
-          <a:p>
-            <a:pPr marR="0" algn="l" defTabSz="825500" rtl="0" fontAlgn="auto" latinLnBrk="0" hangingPunct="0">
-              <a:lnSpc>
-                <a:spcPct val="100000"/>
-              </a:lnSpc>
-              <a:spcBef>
-                <a:spcPts val="0"/>
-              </a:spcBef>
-              <a:spcAft>
-                <a:spcPts val="0"/>
-              </a:spcAft>
-              <a:buClrTx/>
-              <a:buSzTx/>
-              <a:tabLst/>
-            </a:pPr>
-            <a:endParaRPr kumimoji="0" lang="es-ES" sz="6000" b="1" i="0" u="none" strike="noStrike" cap="none" spc="0" normalizeH="0" baseline="0" dirty="0">
-              <a:ln>
-                <a:noFill/>
-              </a:ln>
-              <a:solidFill>
-                <a:srgbClr val="3479BB"/>
-              </a:solidFill>
-              <a:effectLst/>
-              <a:uFillTx/>
-              <a:latin typeface="Helvetica Neue Medium"/>
-              <a:ea typeface="Helvetica Neue Medium"/>
-              <a:cs typeface="Helvetica Neue Medium"/>
-              <a:sym typeface="Helvetica Neue Medium"/>
-            </a:endParaRPr>
-          </a:p>
-          <a:p>
-            <a:pPr marR="0" algn="l" defTabSz="825500" rtl="0" fontAlgn="auto" latinLnBrk="0" hangingPunct="0">
-              <a:lnSpc>
-                <a:spcPct val="100000"/>
-              </a:lnSpc>
-              <a:spcBef>
-                <a:spcPts val="0"/>
-              </a:spcBef>
-              <a:spcAft>
-                <a:spcPts val="0"/>
-              </a:spcAft>
-              <a:buClrTx/>
-              <a:buSzTx/>
-              <a:tabLst/>
-            </a:pPr>
-            <a:r>
-              <a:rPr kumimoji="0" lang="es-ES" sz="6000" b="1" i="0" u="none" strike="noStrike" cap="none" spc="0" normalizeH="0" baseline="0" dirty="0">
-                <a:ln>
-                  <a:noFill/>
-                </a:ln>
-                <a:solidFill>
-                  <a:srgbClr val="3479BB"/>
-                </a:solidFill>
-                <a:effectLst/>
-                <a:uFillTx/>
-                <a:latin typeface="Helvetica Neue Medium"/>
-                <a:ea typeface="Helvetica Neue Medium"/>
-                <a:cs typeface="Helvetica Neue Medium"/>
-                <a:sym typeface="Helvetica Neue Medium"/>
-              </a:rPr>
-              <a:t>01. MODELS SUPERVISATS</a:t>
-            </a:r>
-          </a:p>
-        </p:txBody>
-      </p:sp>
-      <p:sp>
-        <p:nvSpPr>
-          <p:cNvPr id="19" name="Rectángulo 18">
-            <a:extLst>
-              <a:ext uri="{FF2B5EF4-FFF2-40B4-BE49-F238E27FC236}">
-                <a16:creationId xmlns:a16="http://schemas.microsoft.com/office/drawing/2014/main" id="{CAA9BEC0-1425-9D7C-9AC1-FFE05DEDBEEE}"/>
-              </a:ext>
-            </a:extLst>
-          </p:cNvPr>
-          <p:cNvSpPr/>
-          <p:nvPr/>
-        </p:nvSpPr>
-        <p:spPr>
-          <a:xfrm>
-            <a:off x="8672548" y="9143568"/>
-            <a:ext cx="5774163" cy="2872581"/>
-          </a:xfrm>
-          <a:prstGeom prst="rect">
-            <a:avLst/>
-          </a:prstGeom>
-          <a:ln/>
-        </p:spPr>
-        <p:style>
-          <a:lnRef idx="2">
-            <a:schemeClr val="dk1"/>
-          </a:lnRef>
-          <a:fillRef idx="1">
-            <a:schemeClr val="lt1"/>
-          </a:fillRef>
-          <a:effectRef idx="0">
-            <a:schemeClr val="dk1"/>
-          </a:effectRef>
-          <a:fontRef idx="minor">
-            <a:schemeClr val="dk1"/>
-          </a:fontRef>
-        </p:style>
-        <p:txBody>
-          <a:bodyPr rot="0" spcFirstLastPara="1" vertOverflow="overflow" horzOverflow="overflow" vert="horz" wrap="square" lIns="50800" tIns="50800" rIns="50800" bIns="50800" numCol="1" spcCol="38100" rtlCol="0" anchor="b">
-            <a:spAutoFit/>
-          </a:bodyPr>
-          <a:lstStyle/>
-          <a:p>
-            <a:pPr marR="0" algn="l" defTabSz="825500" rtl="0" fontAlgn="auto" latinLnBrk="0" hangingPunct="0">
-              <a:lnSpc>
-                <a:spcPct val="100000"/>
-              </a:lnSpc>
-              <a:spcBef>
-                <a:spcPts val="0"/>
-              </a:spcBef>
-              <a:spcAft>
-                <a:spcPts val="0"/>
-              </a:spcAft>
-              <a:buClrTx/>
-              <a:buSzTx/>
-              <a:tabLst/>
-            </a:pPr>
-            <a:endParaRPr kumimoji="0" lang="es-ES" sz="6000" b="1" i="0" u="none" strike="noStrike" cap="none" spc="0" normalizeH="0" baseline="0" dirty="0">
-              <a:ln>
-                <a:noFill/>
-              </a:ln>
-              <a:solidFill>
-                <a:srgbClr val="3479BB"/>
-              </a:solidFill>
-              <a:effectLst/>
-              <a:uFillTx/>
-              <a:latin typeface="Helvetica Neue Medium"/>
-              <a:ea typeface="Helvetica Neue Medium"/>
-              <a:cs typeface="Helvetica Neue Medium"/>
-              <a:sym typeface="Helvetica Neue Medium"/>
-            </a:endParaRPr>
-          </a:p>
-          <a:p>
-            <a:pPr marR="0" algn="l" defTabSz="825500" rtl="0" fontAlgn="auto" latinLnBrk="0" hangingPunct="0">
-              <a:lnSpc>
-                <a:spcPct val="100000"/>
-              </a:lnSpc>
-              <a:spcBef>
-                <a:spcPts val="0"/>
-              </a:spcBef>
-              <a:spcAft>
-                <a:spcPts val="0"/>
-              </a:spcAft>
-              <a:buClrTx/>
-              <a:buSzTx/>
-              <a:tabLst/>
-            </a:pPr>
-            <a:r>
-              <a:rPr kumimoji="0" lang="es-ES" sz="6000" b="1" i="0" u="none" strike="noStrike" cap="none" spc="0" normalizeH="0" baseline="0" dirty="0">
-                <a:ln>
-                  <a:noFill/>
-                </a:ln>
-                <a:solidFill>
-                  <a:srgbClr val="3479BB"/>
-                </a:solidFill>
-                <a:effectLst/>
-                <a:uFillTx/>
-                <a:latin typeface="Helvetica Neue Medium"/>
-                <a:ea typeface="Helvetica Neue Medium"/>
-                <a:cs typeface="Helvetica Neue Medium"/>
-                <a:sym typeface="Helvetica Neue Medium"/>
-              </a:rPr>
-              <a:t>01. MODELS SUPERVISATS</a:t>
+              <a:t>1.  Modelos supervisados</a:t>
             </a:r>
           </a:p>
         </p:txBody>
       </p:sp>
     </p:spTree>
+    <p:extLst>
+      <p:ext uri="{BB962C8B-B14F-4D97-AF65-F5344CB8AC3E}">
+        <p14:creationId xmlns:p14="http://schemas.microsoft.com/office/powerpoint/2010/main" val="892759005"/>
+      </p:ext>
+    </p:extLst>
   </p:cSld>
   <p:clrMapOvr>
     <a:masterClrMapping/>
@@ -8015,7 +9047,13 @@
   <p:cSld>
     <p:spTree>
       <p:nvGrpSpPr>
-        <p:cNvPr id="1" name=""/>
+        <p:cNvPr id="1" name="">
+          <a:extLst>
+            <a:ext uri="{FF2B5EF4-FFF2-40B4-BE49-F238E27FC236}">
+              <a16:creationId xmlns:a16="http://schemas.microsoft.com/office/drawing/2014/main" id="{63E5D213-98AD-484E-ED8B-4F787C9A6B94}"/>
+            </a:ext>
+          </a:extLst>
+        </p:cNvPr>
         <p:cNvGrpSpPr/>
         <p:nvPr/>
       </p:nvGrpSpPr>
@@ -8029,10 +9067,10 @@
       </p:grpSpPr>
       <p:sp>
         <p:nvSpPr>
-          <p:cNvPr id="2" name="CuadroTexto 1">
+          <p:cNvPr id="26" name="CuadroTexto 25">
             <a:extLst>
               <a:ext uri="{FF2B5EF4-FFF2-40B4-BE49-F238E27FC236}">
-                <a16:creationId xmlns:a16="http://schemas.microsoft.com/office/drawing/2014/main" id="{48FBE165-ABD4-81D8-CC0C-05CDB3372B74}"/>
+                <a16:creationId xmlns:a16="http://schemas.microsoft.com/office/drawing/2014/main" id="{5F4C3C3D-6360-816C-9538-FF26EEE56498}"/>
               </a:ext>
             </a:extLst>
           </p:cNvPr>
@@ -8041,70 +9079,67 @@
         </p:nvSpPr>
         <p:spPr>
           <a:xfrm>
-            <a:off x="2755900" y="4936961"/>
-            <a:ext cx="18872200" cy="3842077"/>
+            <a:off x="1417814" y="3879559"/>
+            <a:ext cx="1905444" cy="1719852"/>
           </a:xfrm>
           <a:prstGeom prst="rect">
             <a:avLst/>
           </a:prstGeom>
-          <a:noFill/>
-          <a:ln w="12700" cap="flat">
-            <a:noFill/>
-            <a:miter lim="400000"/>
-          </a:ln>
-          <a:effectLst/>
-          <a:sp3d/>
-        </p:spPr>
-        <p:style>
-          <a:lnRef idx="0">
-            <a:scrgbClr r="0" g="0" b="0"/>
-          </a:lnRef>
-          <a:fillRef idx="0">
-            <a:scrgbClr r="0" g="0" b="0"/>
-          </a:fillRef>
-          <a:effectRef idx="0">
-            <a:scrgbClr r="0" g="0" b="0"/>
-          </a:effectRef>
-          <a:fontRef idx="none"/>
-        </p:style>
+        </p:spPr>
         <p:txBody>
-          <a:bodyPr rot="0" spcFirstLastPara="1" vertOverflow="overflow" horzOverflow="overflow" vert="horz" wrap="square" lIns="50800" tIns="50800" rIns="50800" bIns="50800" numCol="1" spcCol="38100" rtlCol="0" anchor="ctr">
-            <a:spAutoFit/>
+          <a:bodyPr vert="horz" wrap="square" lIns="91440" tIns="45720" rIns="91440" bIns="45720" rtlCol="0">
+            <a:noAutofit/>
           </a:bodyPr>
           <a:lstStyle/>
           <a:p>
-            <a:pPr marL="0" marR="0" indent="0" algn="ctr" defTabSz="2438338" rtl="0" fontAlgn="auto" latinLnBrk="0" hangingPunct="0">
-              <a:lnSpc>
-                <a:spcPct val="100000"/>
-              </a:lnSpc>
-              <a:spcBef>
-                <a:spcPts val="0"/>
-              </a:spcBef>
-              <a:spcAft>
-                <a:spcPts val="0"/>
-              </a:spcAft>
-              <a:buClrTx/>
-              <a:buSzTx/>
-              <a:buFontTx/>
-              <a:buNone/>
-              <a:tabLst/>
-            </a:pPr>
-            <a:r>
-              <a:rPr kumimoji="0" lang="es-ES" sz="24300" b="0" i="0" u="none" strike="noStrike" cap="none" spc="0" normalizeH="0" baseline="0" dirty="0">
-                <a:ln>
-                  <a:noFill/>
-                </a:ln>
-                <a:solidFill>
-                  <a:schemeClr val="bg1"/>
-                </a:solidFill>
-                <a:effectLst/>
-                <a:uFillTx/>
-                <a:latin typeface="ADLaM Display" panose="02010000000000000000" pitchFamily="2" charset="77"/>
-                <a:ea typeface="ADLaM Display" panose="02010000000000000000" pitchFamily="2" charset="77"/>
-                <a:cs typeface="ADLaM Display" panose="02010000000000000000" pitchFamily="2" charset="77"/>
-                <a:sym typeface="Helvetica Neue"/>
+            <a:r>
+              <a:rPr lang="es-ES" sz="8800" b="1" dirty="0">
+                <a:solidFill>
+                  <a:srgbClr val="3479BB"/>
+                </a:solidFill>
+                <a:latin typeface="Montserrat" pitchFamily="2" charset="77"/>
               </a:rPr>
-              <a:t>FINAL DIA 1</a:t>
+              <a:t>1. </a:t>
+            </a:r>
+          </a:p>
+        </p:txBody>
+      </p:sp>
+      <p:sp>
+        <p:nvSpPr>
+          <p:cNvPr id="46" name="CuadroTexto 45">
+            <a:extLst>
+              <a:ext uri="{FF2B5EF4-FFF2-40B4-BE49-F238E27FC236}">
+                <a16:creationId xmlns:a16="http://schemas.microsoft.com/office/drawing/2014/main" id="{5ED8B24D-D0A3-6575-5619-1271E66A880F}"/>
+              </a:ext>
+            </a:extLst>
+          </p:cNvPr>
+          <p:cNvSpPr txBox="1"/>
+          <p:nvPr/>
+        </p:nvSpPr>
+        <p:spPr>
+          <a:xfrm>
+            <a:off x="8351520" y="8006459"/>
+            <a:ext cx="15016480" cy="1719852"/>
+          </a:xfrm>
+          <a:prstGeom prst="rect">
+            <a:avLst/>
+          </a:prstGeom>
+        </p:spPr>
+        <p:txBody>
+          <a:bodyPr vert="horz" wrap="square" lIns="91440" tIns="45720" rIns="91440" bIns="45720" rtlCol="0">
+            <a:noAutofit/>
+          </a:bodyPr>
+          <a:lstStyle/>
+          <a:p>
+            <a:pPr algn="r"/>
+            <a:r>
+              <a:rPr lang="es-ES" sz="11500" b="1" dirty="0">
+                <a:solidFill>
+                  <a:srgbClr val="F2F2F2"/>
+                </a:solidFill>
+                <a:latin typeface="Montserrat" pitchFamily="2" charset="77"/>
+              </a:rPr>
+              <a:t>2.  Modelos lineales generalizados </a:t>
             </a:r>
           </a:p>
         </p:txBody>
@@ -8112,7 +9147,7 @@
     </p:spTree>
     <p:extLst>
       <p:ext uri="{BB962C8B-B14F-4D97-AF65-F5344CB8AC3E}">
-        <p14:creationId xmlns:p14="http://schemas.microsoft.com/office/powerpoint/2010/main" val="1365634657"/>
+        <p14:creationId xmlns:p14="http://schemas.microsoft.com/office/powerpoint/2010/main" val="1268194915"/>
       </p:ext>
     </p:extLst>
   </p:cSld>
@@ -8131,7 +9166,298 @@
         <p:cNvPr id="1" name="">
           <a:extLst>
             <a:ext uri="{FF2B5EF4-FFF2-40B4-BE49-F238E27FC236}">
-              <a16:creationId xmlns:a16="http://schemas.microsoft.com/office/drawing/2014/main" id="{8C486EAA-7190-0E66-6E8A-AA3B7FC85244}"/>
+              <a16:creationId xmlns:a16="http://schemas.microsoft.com/office/drawing/2014/main" id="{68D38A64-BCF3-0738-8F00-F6254B3C1477}"/>
+            </a:ext>
+          </a:extLst>
+        </p:cNvPr>
+        <p:cNvGrpSpPr/>
+        <p:nvPr/>
+      </p:nvGrpSpPr>
+      <p:grpSpPr>
+        <a:xfrm>
+          <a:off x="0" y="0"/>
+          <a:ext cx="0" cy="0"/>
+          <a:chOff x="0" y="0"/>
+          <a:chExt cx="0" cy="0"/>
+        </a:xfrm>
+      </p:grpSpPr>
+      <p:sp>
+        <p:nvSpPr>
+          <p:cNvPr id="26" name="CuadroTexto 25">
+            <a:extLst>
+              <a:ext uri="{FF2B5EF4-FFF2-40B4-BE49-F238E27FC236}">
+                <a16:creationId xmlns:a16="http://schemas.microsoft.com/office/drawing/2014/main" id="{24B046AC-0743-2DB5-7246-3C15513B745C}"/>
+              </a:ext>
+            </a:extLst>
+          </p:cNvPr>
+          <p:cNvSpPr txBox="1"/>
+          <p:nvPr/>
+        </p:nvSpPr>
+        <p:spPr>
+          <a:xfrm>
+            <a:off x="1417814" y="3879559"/>
+            <a:ext cx="1905444" cy="1719852"/>
+          </a:xfrm>
+          <a:prstGeom prst="rect">
+            <a:avLst/>
+          </a:prstGeom>
+        </p:spPr>
+        <p:txBody>
+          <a:bodyPr vert="horz" wrap="square" lIns="91440" tIns="45720" rIns="91440" bIns="45720" rtlCol="0">
+            <a:noAutofit/>
+          </a:bodyPr>
+          <a:lstStyle/>
+          <a:p>
+            <a:r>
+              <a:rPr lang="es-ES" sz="8800" b="1" dirty="0">
+                <a:solidFill>
+                  <a:srgbClr val="3479BB"/>
+                </a:solidFill>
+                <a:latin typeface="Montserrat" pitchFamily="2" charset="77"/>
+              </a:rPr>
+              <a:t>1. </a:t>
+            </a:r>
+          </a:p>
+        </p:txBody>
+      </p:sp>
+      <p:sp>
+        <p:nvSpPr>
+          <p:cNvPr id="46" name="CuadroTexto 45">
+            <a:extLst>
+              <a:ext uri="{FF2B5EF4-FFF2-40B4-BE49-F238E27FC236}">
+                <a16:creationId xmlns:a16="http://schemas.microsoft.com/office/drawing/2014/main" id="{FF1198CA-E540-40B2-FA95-17A2FBD3DA45}"/>
+              </a:ext>
+            </a:extLst>
+          </p:cNvPr>
+          <p:cNvSpPr txBox="1"/>
+          <p:nvPr/>
+        </p:nvSpPr>
+        <p:spPr>
+          <a:xfrm>
+            <a:off x="8351520" y="8006459"/>
+            <a:ext cx="15016480" cy="1719852"/>
+          </a:xfrm>
+          <a:prstGeom prst="rect">
+            <a:avLst/>
+          </a:prstGeom>
+        </p:spPr>
+        <p:txBody>
+          <a:bodyPr vert="horz" wrap="square" lIns="91440" tIns="45720" rIns="91440" bIns="45720" rtlCol="0">
+            <a:noAutofit/>
+          </a:bodyPr>
+          <a:lstStyle/>
+          <a:p>
+            <a:pPr algn="r"/>
+            <a:r>
+              <a:rPr lang="es-ES" sz="11500" b="1" dirty="0">
+                <a:solidFill>
+                  <a:srgbClr val="F2F2F2"/>
+                </a:solidFill>
+                <a:latin typeface="Montserrat" pitchFamily="2" charset="77"/>
+              </a:rPr>
+              <a:t>3.  Árboles de decisión</a:t>
+            </a:r>
+          </a:p>
+        </p:txBody>
+      </p:sp>
+    </p:spTree>
+    <p:extLst>
+      <p:ext uri="{BB962C8B-B14F-4D97-AF65-F5344CB8AC3E}">
+        <p14:creationId xmlns:p14="http://schemas.microsoft.com/office/powerpoint/2010/main" val="3102087876"/>
+      </p:ext>
+    </p:extLst>
+  </p:cSld>
+  <p:clrMapOvr>
+    <a:masterClrMapping/>
+  </p:clrMapOvr>
+  <p:transition spd="med"/>
+</p:sld>
+</file>
+
+<file path=ppt/slides/slide6.xml><?xml version="1.0" encoding="utf-8"?>
+<p:sld xmlns:a="http://schemas.openxmlformats.org/drawingml/2006/main" xmlns:r="http://schemas.openxmlformats.org/officeDocument/2006/relationships" xmlns:p="http://schemas.openxmlformats.org/presentationml/2006/main">
+  <p:cSld>
+    <p:spTree>
+      <p:nvGrpSpPr>
+        <p:cNvPr id="1" name="">
+          <a:extLst>
+            <a:ext uri="{FF2B5EF4-FFF2-40B4-BE49-F238E27FC236}">
+              <a16:creationId xmlns:a16="http://schemas.microsoft.com/office/drawing/2014/main" id="{5CE27486-3B44-CCB1-5762-08157B22B3CF}"/>
+            </a:ext>
+          </a:extLst>
+        </p:cNvPr>
+        <p:cNvGrpSpPr/>
+        <p:nvPr/>
+      </p:nvGrpSpPr>
+      <p:grpSpPr>
+        <a:xfrm>
+          <a:off x="0" y="0"/>
+          <a:ext cx="0" cy="0"/>
+          <a:chOff x="0" y="0"/>
+          <a:chExt cx="0" cy="0"/>
+        </a:xfrm>
+      </p:grpSpPr>
+      <p:sp>
+        <p:nvSpPr>
+          <p:cNvPr id="26" name="CuadroTexto 25">
+            <a:extLst>
+              <a:ext uri="{FF2B5EF4-FFF2-40B4-BE49-F238E27FC236}">
+                <a16:creationId xmlns:a16="http://schemas.microsoft.com/office/drawing/2014/main" id="{F615E401-48D9-DF72-5EC1-B6990AA880B6}"/>
+              </a:ext>
+            </a:extLst>
+          </p:cNvPr>
+          <p:cNvSpPr txBox="1"/>
+          <p:nvPr/>
+        </p:nvSpPr>
+        <p:spPr>
+          <a:xfrm>
+            <a:off x="1417814" y="3879559"/>
+            <a:ext cx="1905444" cy="1719852"/>
+          </a:xfrm>
+          <a:prstGeom prst="rect">
+            <a:avLst/>
+          </a:prstGeom>
+        </p:spPr>
+        <p:txBody>
+          <a:bodyPr vert="horz" wrap="square" lIns="91440" tIns="45720" rIns="91440" bIns="45720" rtlCol="0">
+            <a:noAutofit/>
+          </a:bodyPr>
+          <a:lstStyle/>
+          <a:p>
+            <a:r>
+              <a:rPr lang="es-ES" sz="8800" b="1" dirty="0">
+                <a:solidFill>
+                  <a:srgbClr val="3479BB"/>
+                </a:solidFill>
+                <a:latin typeface="Montserrat" pitchFamily="2" charset="77"/>
+              </a:rPr>
+              <a:t>1. </a:t>
+            </a:r>
+          </a:p>
+        </p:txBody>
+      </p:sp>
+      <p:sp>
+        <p:nvSpPr>
+          <p:cNvPr id="46" name="CuadroTexto 45">
+            <a:extLst>
+              <a:ext uri="{FF2B5EF4-FFF2-40B4-BE49-F238E27FC236}">
+                <a16:creationId xmlns:a16="http://schemas.microsoft.com/office/drawing/2014/main" id="{D06AACBE-E58B-81E6-32DB-C4555014F09B}"/>
+              </a:ext>
+            </a:extLst>
+          </p:cNvPr>
+          <p:cNvSpPr txBox="1"/>
+          <p:nvPr/>
+        </p:nvSpPr>
+        <p:spPr>
+          <a:xfrm>
+            <a:off x="8351520" y="8006459"/>
+            <a:ext cx="15016480" cy="1719852"/>
+          </a:xfrm>
+          <a:prstGeom prst="rect">
+            <a:avLst/>
+          </a:prstGeom>
+        </p:spPr>
+        <p:txBody>
+          <a:bodyPr vert="horz" wrap="square" lIns="91440" tIns="45720" rIns="91440" bIns="45720" rtlCol="0">
+            <a:noAutofit/>
+          </a:bodyPr>
+          <a:lstStyle/>
+          <a:p>
+            <a:pPr marL="1371600" indent="-1371600" algn="r">
+              <a:buAutoNum type="arabicPeriod" startAt="4"/>
+            </a:pPr>
+            <a:r>
+              <a:rPr lang="es-ES" sz="11500" b="1" dirty="0">
+                <a:solidFill>
+                  <a:srgbClr val="F2F2F2"/>
+                </a:solidFill>
+                <a:latin typeface="Montserrat" pitchFamily="2" charset="77"/>
+              </a:rPr>
+              <a:t> </a:t>
+            </a:r>
+            <a:r>
+              <a:rPr lang="es-ES" sz="11500" b="1" dirty="0" err="1">
+                <a:solidFill>
+                  <a:srgbClr val="F2F2F2"/>
+                </a:solidFill>
+                <a:latin typeface="Montserrat" pitchFamily="2" charset="77"/>
+              </a:rPr>
+              <a:t>Bagging</a:t>
+            </a:r>
+            <a:r>
+              <a:rPr lang="es-ES" sz="11500" b="1" dirty="0">
+                <a:solidFill>
+                  <a:srgbClr val="F2F2F2"/>
+                </a:solidFill>
+                <a:latin typeface="Montserrat" pitchFamily="2" charset="77"/>
+              </a:rPr>
+              <a:t> </a:t>
+            </a:r>
+            <a:r>
+              <a:rPr lang="es-ES" sz="11500" b="1" dirty="0" err="1">
+                <a:solidFill>
+                  <a:srgbClr val="F2F2F2"/>
+                </a:solidFill>
+                <a:latin typeface="Montserrat" pitchFamily="2" charset="77"/>
+              </a:rPr>
+              <a:t>models</a:t>
+            </a:r>
+            <a:r>
+              <a:rPr lang="es-ES" sz="11500" b="1" dirty="0">
+                <a:solidFill>
+                  <a:srgbClr val="F2F2F2"/>
+                </a:solidFill>
+                <a:latin typeface="Montserrat" pitchFamily="2" charset="77"/>
+              </a:rPr>
+              <a:t>:  </a:t>
+            </a:r>
+          </a:p>
+          <a:p>
+            <a:pPr algn="r"/>
+            <a:r>
+              <a:rPr lang="es-ES" sz="11500" b="1" dirty="0" err="1">
+                <a:solidFill>
+                  <a:srgbClr val="F2F2F2"/>
+                </a:solidFill>
+                <a:latin typeface="Montserrat" pitchFamily="2" charset="77"/>
+              </a:rPr>
+              <a:t>Random</a:t>
+            </a:r>
+            <a:r>
+              <a:rPr lang="es-ES" sz="11500" b="1" dirty="0">
+                <a:solidFill>
+                  <a:srgbClr val="F2F2F2"/>
+                </a:solidFill>
+                <a:latin typeface="Montserrat" pitchFamily="2" charset="77"/>
+              </a:rPr>
+              <a:t> Forest</a:t>
+            </a:r>
+          </a:p>
+        </p:txBody>
+      </p:sp>
+    </p:spTree>
+    <p:extLst>
+      <p:ext uri="{BB962C8B-B14F-4D97-AF65-F5344CB8AC3E}">
+        <p14:creationId xmlns:p14="http://schemas.microsoft.com/office/powerpoint/2010/main" val="58496880"/>
+      </p:ext>
+    </p:extLst>
+  </p:cSld>
+  <p:clrMapOvr>
+    <a:masterClrMapping/>
+  </p:clrMapOvr>
+  <p:transition spd="med"/>
+</p:sld>
+</file>
+
+<file path=ppt/slides/slide7.xml><?xml version="1.0" encoding="utf-8"?>
+<p:sld xmlns:a="http://schemas.openxmlformats.org/drawingml/2006/main" xmlns:r="http://schemas.openxmlformats.org/officeDocument/2006/relationships" xmlns:p="http://schemas.openxmlformats.org/presentationml/2006/main">
+  <p:cSld>
+    <p:spTree>
+      <p:nvGrpSpPr>
+        <p:cNvPr id="1" name="">
+          <a:extLst>
+            <a:ext uri="{FF2B5EF4-FFF2-40B4-BE49-F238E27FC236}">
+              <a16:creationId xmlns:a16="http://schemas.microsoft.com/office/drawing/2014/main" id="{DA3813ED-47B1-C7C0-ECB0-809269841C8D}"/>
             </a:ext>
           </a:extLst>
         </p:cNvPr>
@@ -8151,7 +9477,7 @@
           <p:cNvPr id="2" name="CuadroTexto 1">
             <a:extLst>
               <a:ext uri="{FF2B5EF4-FFF2-40B4-BE49-F238E27FC236}">
-                <a16:creationId xmlns:a16="http://schemas.microsoft.com/office/drawing/2014/main" id="{5005F7B1-00EB-6E26-AF4F-4E47473C3636}"/>
+                <a16:creationId xmlns:a16="http://schemas.microsoft.com/office/drawing/2014/main" id="{51D1D47F-9072-9C7B-072B-22A521695B66}"/>
               </a:ext>
             </a:extLst>
           </p:cNvPr>
@@ -8209,6 +9535,23 @@
               <a:tabLst/>
             </a:pPr>
             <a:r>
+              <a:rPr kumimoji="0" lang="es-ES" sz="24300" b="0" i="0" u="none" strike="noStrike" cap="none" spc="0" normalizeH="0" baseline="0" dirty="0" err="1">
+                <a:ln>
+                  <a:noFill/>
+                </a:ln>
+                <a:solidFill>
+                  <a:schemeClr val="bg1"/>
+                </a:solidFill>
+                <a:effectLst/>
+                <a:uFillTx/>
+                <a:latin typeface="Script MT Bold" panose="03040602040607080904" pitchFamily="66" charset="0"/>
+                <a:ea typeface="ADLaM Display" panose="02010000000000000000" pitchFamily="2" charset="0"/>
+                <a:cs typeface="ADLaM Display" panose="02010000000000000000" pitchFamily="2" charset="0"/>
+                <a:sym typeface="Helvetica Neue"/>
+              </a:rPr>
+              <a:t>End</a:t>
+            </a:r>
+            <a:r>
               <a:rPr kumimoji="0" lang="es-ES" sz="24300" b="0" i="0" u="none" strike="noStrike" cap="none" spc="0" normalizeH="0" baseline="0" dirty="0">
                 <a:ln>
                   <a:noFill/>
@@ -8218,12 +9561,80 @@
                 </a:solidFill>
                 <a:effectLst/>
                 <a:uFillTx/>
-                <a:latin typeface="ADLaM Display" panose="02010000000000000000" pitchFamily="2" charset="77"/>
-                <a:ea typeface="ADLaM Display" panose="02010000000000000000" pitchFamily="2" charset="77"/>
-                <a:cs typeface="ADLaM Display" panose="02010000000000000000" pitchFamily="2" charset="77"/>
+                <a:latin typeface="Script MT Bold" panose="03040602040607080904" pitchFamily="66" charset="0"/>
+                <a:ea typeface="ADLaM Display" panose="02010000000000000000" pitchFamily="2" charset="0"/>
+                <a:cs typeface="ADLaM Display" panose="02010000000000000000" pitchFamily="2" charset="0"/>
                 <a:sym typeface="Helvetica Neue"/>
               </a:rPr>
-              <a:t>FINAL DIA 2</a:t>
+              <a:t> </a:t>
+            </a:r>
+            <a:r>
+              <a:rPr kumimoji="0" lang="es-ES" sz="24300" b="0" i="0" u="none" strike="noStrike" cap="none" spc="0" normalizeH="0" baseline="0" dirty="0" err="1">
+                <a:ln>
+                  <a:noFill/>
+                </a:ln>
+                <a:solidFill>
+                  <a:schemeClr val="bg1"/>
+                </a:solidFill>
+                <a:effectLst/>
+                <a:uFillTx/>
+                <a:latin typeface="Script MT Bold" panose="03040602040607080904" pitchFamily="66" charset="0"/>
+                <a:ea typeface="ADLaM Display" panose="02010000000000000000" pitchFamily="2" charset="0"/>
+                <a:cs typeface="ADLaM Display" panose="02010000000000000000" pitchFamily="2" charset="0"/>
+                <a:sym typeface="Helvetica Neue"/>
+              </a:rPr>
+              <a:t>the</a:t>
+            </a:r>
+            <a:r>
+              <a:rPr kumimoji="0" lang="es-ES" sz="24300" b="0" i="0" u="none" strike="noStrike" cap="none" spc="0" normalizeH="0" baseline="0" dirty="0">
+                <a:ln>
+                  <a:noFill/>
+                </a:ln>
+                <a:solidFill>
+                  <a:schemeClr val="bg1"/>
+                </a:solidFill>
+                <a:effectLst/>
+                <a:uFillTx/>
+                <a:latin typeface="Script MT Bold" panose="03040602040607080904" pitchFamily="66" charset="0"/>
+                <a:ea typeface="ADLaM Display" panose="02010000000000000000" pitchFamily="2" charset="0"/>
+                <a:cs typeface="ADLaM Display" panose="02010000000000000000" pitchFamily="2" charset="0"/>
+                <a:sym typeface="Helvetica Neue"/>
+              </a:rPr>
+              <a:t> </a:t>
+            </a:r>
+            <a:r>
+              <a:rPr kumimoji="0" lang="es-ES" sz="24300" b="0" i="0" u="none" strike="noStrike" cap="none" spc="0" normalizeH="0" baseline="0" dirty="0" err="1">
+                <a:ln>
+                  <a:noFill/>
+                </a:ln>
+                <a:solidFill>
+                  <a:schemeClr val="bg1"/>
+                </a:solidFill>
+                <a:effectLst/>
+                <a:uFillTx/>
+                <a:latin typeface="Script MT Bold" panose="03040602040607080904" pitchFamily="66" charset="0"/>
+                <a:ea typeface="ADLaM Display" panose="02010000000000000000" pitchFamily="2" charset="0"/>
+                <a:cs typeface="ADLaM Display" panose="02010000000000000000" pitchFamily="2" charset="0"/>
+                <a:sym typeface="Helvetica Neue"/>
+              </a:rPr>
+              <a:t>day</a:t>
+            </a:r>
+            <a:r>
+              <a:rPr kumimoji="0" lang="es-ES" sz="24300" b="0" i="0" u="none" strike="noStrike" cap="none" spc="0" normalizeH="0" baseline="0" dirty="0">
+                <a:ln>
+                  <a:noFill/>
+                </a:ln>
+                <a:solidFill>
+                  <a:schemeClr val="bg1"/>
+                </a:solidFill>
+                <a:effectLst/>
+                <a:uFillTx/>
+                <a:latin typeface="Script MT Bold" panose="03040602040607080904" pitchFamily="66" charset="0"/>
+                <a:ea typeface="ADLaM Display" panose="02010000000000000000" pitchFamily="2" charset="0"/>
+                <a:cs typeface="ADLaM Display" panose="02010000000000000000" pitchFamily="2" charset="0"/>
+                <a:sym typeface="Helvetica Neue"/>
+              </a:rPr>
+              <a:t> 1</a:t>
             </a:r>
           </a:p>
         </p:txBody>
@@ -8231,7 +9642,7 @@
     </p:spTree>
     <p:extLst>
       <p:ext uri="{BB962C8B-B14F-4D97-AF65-F5344CB8AC3E}">
-        <p14:creationId xmlns:p14="http://schemas.microsoft.com/office/powerpoint/2010/main" val="4087996809"/>
+        <p14:creationId xmlns:p14="http://schemas.microsoft.com/office/powerpoint/2010/main" val="67953572"/>
       </p:ext>
     </p:extLst>
   </p:cSld>
@@ -8242,7 +9653,7 @@
 </p:sld>
 </file>
 
-<file path=ppt/slides/slide6.xml><?xml version="1.0" encoding="utf-8"?>
+<file path=ppt/slides/slide8.xml><?xml version="1.0" encoding="utf-8"?>
 <p:sld xmlns:a="http://schemas.openxmlformats.org/drawingml/2006/main" xmlns:r="http://schemas.openxmlformats.org/officeDocument/2006/relationships" xmlns:p="http://schemas.openxmlformats.org/presentationml/2006/main">
   <p:cSld>
     <p:spTree>
@@ -8250,7 +9661,7 @@
         <p:cNvPr id="1" name="">
           <a:extLst>
             <a:ext uri="{FF2B5EF4-FFF2-40B4-BE49-F238E27FC236}">
-              <a16:creationId xmlns:a16="http://schemas.microsoft.com/office/drawing/2014/main" id="{F4AA493B-9C69-CB37-346C-D65108D83DD4}"/>
+              <a16:creationId xmlns:a16="http://schemas.microsoft.com/office/drawing/2014/main" id="{09079EB2-75A3-2FE4-FCCE-8B1AC5512CD7}"/>
             </a:ext>
           </a:extLst>
         </p:cNvPr>
@@ -8267,10 +9678,10 @@
       </p:grpSpPr>
       <p:sp>
         <p:nvSpPr>
-          <p:cNvPr id="2" name="CuadroTexto 1">
+          <p:cNvPr id="26" name="CuadroTexto 25">
             <a:extLst>
               <a:ext uri="{FF2B5EF4-FFF2-40B4-BE49-F238E27FC236}">
-                <a16:creationId xmlns:a16="http://schemas.microsoft.com/office/drawing/2014/main" id="{3991B40E-BF69-6FAD-6CF5-83832F2287A7}"/>
+                <a16:creationId xmlns:a16="http://schemas.microsoft.com/office/drawing/2014/main" id="{618B768D-D6B3-9E58-88AC-A1EA30BAE42A}"/>
               </a:ext>
             </a:extLst>
           </p:cNvPr>
@@ -8279,78 +9690,165 @@
         </p:nvSpPr>
         <p:spPr>
           <a:xfrm>
-            <a:off x="2755900" y="4936961"/>
-            <a:ext cx="18872200" cy="3842077"/>
+            <a:off x="1417814" y="3879559"/>
+            <a:ext cx="1905444" cy="1719852"/>
           </a:xfrm>
           <a:prstGeom prst="rect">
             <a:avLst/>
           </a:prstGeom>
-          <a:noFill/>
-          <a:ln w="12700" cap="flat">
-            <a:noFill/>
-            <a:miter lim="400000"/>
-          </a:ln>
-          <a:effectLst/>
-          <a:sp3d/>
-        </p:spPr>
-        <p:style>
-          <a:lnRef idx="0">
-            <a:scrgbClr r="0" g="0" b="0"/>
-          </a:lnRef>
-          <a:fillRef idx="0">
-            <a:scrgbClr r="0" g="0" b="0"/>
-          </a:fillRef>
-          <a:effectRef idx="0">
-            <a:scrgbClr r="0" g="0" b="0"/>
-          </a:effectRef>
-          <a:fontRef idx="none"/>
-        </p:style>
+        </p:spPr>
         <p:txBody>
-          <a:bodyPr rot="0" spcFirstLastPara="1" vertOverflow="overflow" horzOverflow="overflow" vert="horz" wrap="square" lIns="50800" tIns="50800" rIns="50800" bIns="50800" numCol="1" spcCol="38100" rtlCol="0" anchor="ctr">
-            <a:spAutoFit/>
+          <a:bodyPr vert="horz" wrap="square" lIns="91440" tIns="45720" rIns="91440" bIns="45720" rtlCol="0">
+            <a:noAutofit/>
           </a:bodyPr>
           <a:lstStyle/>
           <a:p>
-            <a:pPr marL="0" marR="0" indent="0" algn="ctr" defTabSz="2438338" rtl="0" fontAlgn="auto" latinLnBrk="0" hangingPunct="0">
-              <a:lnSpc>
-                <a:spcPct val="100000"/>
-              </a:lnSpc>
-              <a:spcBef>
-                <a:spcPts val="0"/>
-              </a:spcBef>
-              <a:spcAft>
-                <a:spcPts val="0"/>
-              </a:spcAft>
-              <a:buClrTx/>
-              <a:buSzTx/>
-              <a:buFontTx/>
-              <a:buNone/>
-              <a:tabLst/>
-            </a:pPr>
-            <a:r>
-              <a:rPr kumimoji="0" lang="es-ES" sz="24300" b="0" i="0" u="none" strike="noStrike" cap="none" spc="0" normalizeH="0" baseline="0" dirty="0">
-                <a:ln>
-                  <a:noFill/>
-                </a:ln>
-                <a:solidFill>
-                  <a:schemeClr val="bg1"/>
-                </a:solidFill>
-                <a:effectLst/>
-                <a:uFillTx/>
-                <a:latin typeface="ADLaM Display" panose="02010000000000000000" pitchFamily="2" charset="77"/>
-                <a:ea typeface="ADLaM Display" panose="02010000000000000000" pitchFamily="2" charset="77"/>
-                <a:cs typeface="ADLaM Display" panose="02010000000000000000" pitchFamily="2" charset="77"/>
-                <a:sym typeface="Helvetica Neue"/>
+            <a:r>
+              <a:rPr lang="es-ES" sz="8800" b="1" dirty="0">
+                <a:solidFill>
+                  <a:srgbClr val="3479BB"/>
+                </a:solidFill>
+                <a:latin typeface="Montserrat" pitchFamily="2" charset="77"/>
               </a:rPr>
-              <a:t>FINAL DIA 3</a:t>
-            </a:r>
+              <a:t>1. </a:t>
+            </a:r>
+          </a:p>
+        </p:txBody>
+      </p:sp>
+      <p:sp>
+        <p:nvSpPr>
+          <p:cNvPr id="46" name="CuadroTexto 45">
+            <a:extLst>
+              <a:ext uri="{FF2B5EF4-FFF2-40B4-BE49-F238E27FC236}">
+                <a16:creationId xmlns:a16="http://schemas.microsoft.com/office/drawing/2014/main" id="{235214DA-E2B5-3350-EEC5-F8D12C4C48A2}"/>
+              </a:ext>
+            </a:extLst>
+          </p:cNvPr>
+          <p:cNvSpPr txBox="1"/>
+          <p:nvPr/>
+        </p:nvSpPr>
+        <p:spPr>
+          <a:xfrm>
+            <a:off x="2783840" y="7256664"/>
+            <a:ext cx="20706080" cy="1719852"/>
+          </a:xfrm>
+          <a:prstGeom prst="rect">
+            <a:avLst/>
+          </a:prstGeom>
+        </p:spPr>
+        <p:txBody>
+          <a:bodyPr vert="horz" wrap="square" lIns="91440" tIns="45720" rIns="91440" bIns="45720" rtlCol="0">
+            <a:noAutofit/>
+          </a:bodyPr>
+          <a:lstStyle/>
+          <a:p>
+            <a:pPr algn="r"/>
+            <a:r>
+              <a:rPr lang="es-ES" sz="11500" b="1" dirty="0">
+                <a:solidFill>
+                  <a:srgbClr val="F2F2F2"/>
+                </a:solidFill>
+                <a:latin typeface="Montserrat" pitchFamily="2" charset="77"/>
+              </a:rPr>
+              <a:t>5. </a:t>
+            </a:r>
+            <a:r>
+              <a:rPr lang="es-ES" sz="11500" b="1" dirty="0" err="1">
+                <a:solidFill>
+                  <a:srgbClr val="F2F2F2"/>
+                </a:solidFill>
+                <a:latin typeface="Montserrat" pitchFamily="2" charset="77"/>
+              </a:rPr>
+              <a:t>Boosting</a:t>
+            </a:r>
+            <a:r>
+              <a:rPr lang="es-ES" sz="11500" b="1" dirty="0">
+                <a:solidFill>
+                  <a:srgbClr val="F2F2F2"/>
+                </a:solidFill>
+                <a:latin typeface="Montserrat" pitchFamily="2" charset="77"/>
+              </a:rPr>
+              <a:t> </a:t>
+            </a:r>
+            <a:r>
+              <a:rPr lang="es-ES" sz="11500" b="1" dirty="0" err="1">
+                <a:solidFill>
+                  <a:srgbClr val="F2F2F2"/>
+                </a:solidFill>
+                <a:latin typeface="Montserrat" pitchFamily="2" charset="77"/>
+              </a:rPr>
+              <a:t>models</a:t>
+            </a:r>
+            <a:r>
+              <a:rPr lang="es-ES" sz="11500" b="1" dirty="0">
+                <a:solidFill>
+                  <a:srgbClr val="F2F2F2"/>
+                </a:solidFill>
+                <a:latin typeface="Montserrat" pitchFamily="2" charset="77"/>
+              </a:rPr>
+              <a:t>:</a:t>
+            </a:r>
+          </a:p>
+          <a:p>
+            <a:pPr algn="r"/>
+            <a:r>
+              <a:rPr lang="es-ES" sz="11500" b="1" dirty="0" err="1">
+                <a:solidFill>
+                  <a:srgbClr val="F2F2F2"/>
+                </a:solidFill>
+                <a:latin typeface="Montserrat" pitchFamily="2" charset="77"/>
+              </a:rPr>
+              <a:t>XGBoost</a:t>
+            </a:r>
+            <a:r>
+              <a:rPr lang="es-ES" sz="11500" b="1" dirty="0">
+                <a:solidFill>
+                  <a:srgbClr val="F2F2F2"/>
+                </a:solidFill>
+                <a:latin typeface="Montserrat" pitchFamily="2" charset="77"/>
+              </a:rPr>
+              <a:t>, </a:t>
+            </a:r>
+            <a:r>
+              <a:rPr lang="es-ES" sz="11500" b="1" dirty="0" err="1">
+                <a:solidFill>
+                  <a:srgbClr val="F2F2F2"/>
+                </a:solidFill>
+                <a:latin typeface="Montserrat" pitchFamily="2" charset="77"/>
+              </a:rPr>
+              <a:t>AdaBoost</a:t>
+            </a:r>
+            <a:r>
+              <a:rPr lang="es-ES" sz="11500" b="1" dirty="0">
+                <a:solidFill>
+                  <a:srgbClr val="F2F2F2"/>
+                </a:solidFill>
+                <a:latin typeface="Montserrat" pitchFamily="2" charset="77"/>
+              </a:rPr>
+              <a:t>, </a:t>
+            </a:r>
+            <a:r>
+              <a:rPr lang="es-ES" sz="11500" b="1" dirty="0" err="1">
+                <a:solidFill>
+                  <a:srgbClr val="F2F2F2"/>
+                </a:solidFill>
+                <a:latin typeface="Montserrat" pitchFamily="2" charset="77"/>
+              </a:rPr>
+              <a:t>CatBoost</a:t>
+            </a:r>
+            <a:endParaRPr lang="es-ES" sz="11500" b="1" dirty="0">
+              <a:solidFill>
+                <a:srgbClr val="F2F2F2"/>
+              </a:solidFill>
+              <a:latin typeface="Montserrat" pitchFamily="2" charset="77"/>
+            </a:endParaRPr>
           </a:p>
         </p:txBody>
       </p:sp>
     </p:spTree>
     <p:extLst>
       <p:ext uri="{BB962C8B-B14F-4D97-AF65-F5344CB8AC3E}">
-        <p14:creationId xmlns:p14="http://schemas.microsoft.com/office/powerpoint/2010/main" val="2638605457"/>
+        <p14:creationId xmlns:p14="http://schemas.microsoft.com/office/powerpoint/2010/main" val="3909224401"/>
       </p:ext>
     </p:extLst>
   </p:cSld>
@@ -8361,12 +9859,18 @@
 </p:sld>
 </file>
 
-<file path=ppt/slides/slide7.xml><?xml version="1.0" encoding="utf-8"?>
+<file path=ppt/slides/slide9.xml><?xml version="1.0" encoding="utf-8"?>
 <p:sld xmlns:a="http://schemas.openxmlformats.org/drawingml/2006/main" xmlns:r="http://schemas.openxmlformats.org/officeDocument/2006/relationships" xmlns:p="http://schemas.openxmlformats.org/presentationml/2006/main">
   <p:cSld>
     <p:spTree>
       <p:nvGrpSpPr>
-        <p:cNvPr id="1" name=""/>
+        <p:cNvPr id="1" name="">
+          <a:extLst>
+            <a:ext uri="{FF2B5EF4-FFF2-40B4-BE49-F238E27FC236}">
+              <a16:creationId xmlns:a16="http://schemas.microsoft.com/office/drawing/2014/main" id="{02046490-BBA7-5FA7-5B8B-E2D84F88BE0F}"/>
+            </a:ext>
+          </a:extLst>
+        </p:cNvPr>
         <p:cNvGrpSpPr/>
         <p:nvPr/>
       </p:nvGrpSpPr>
@@ -8380,39 +9884,107 @@
       </p:grpSpPr>
       <p:sp>
         <p:nvSpPr>
-          <p:cNvPr id="357" name="vicenc.fernandez@upc.edu"/>
-          <p:cNvSpPr txBox="1">
-            <a:spLocks noGrp="1"/>
-          </p:cNvSpPr>
-          <p:nvPr>
-            <p:ph type="title"/>
-          </p:nvPr>
+          <p:cNvPr id="26" name="CuadroTexto 25">
+            <a:extLst>
+              <a:ext uri="{FF2B5EF4-FFF2-40B4-BE49-F238E27FC236}">
+                <a16:creationId xmlns:a16="http://schemas.microsoft.com/office/drawing/2014/main" id="{9DB372C2-1EFC-9267-7FEB-A0B9F14A2ACE}"/>
+              </a:ext>
+            </a:extLst>
+          </p:cNvPr>
+          <p:cNvSpPr txBox="1"/>
+          <p:nvPr/>
         </p:nvSpPr>
         <p:spPr>
+          <a:xfrm>
+            <a:off x="1417814" y="3879559"/>
+            <a:ext cx="1905444" cy="1719852"/>
+          </a:xfrm>
           <a:prstGeom prst="rect">
             <a:avLst/>
           </a:prstGeom>
         </p:spPr>
         <p:txBody>
-          <a:bodyPr/>
-          <a:lstStyle>
-            <a:lvl1pPr>
-              <a:defRPr i="1"/>
-            </a:lvl1pPr>
-          </a:lstStyle>
-          <a:p>
-            <a:r>
-              <a:rPr lang="es-ES" dirty="0" err="1"/>
-              <a:t>sergi.ramirez</a:t>
-            </a:r>
-            <a:r>
-              <a:rPr dirty="0"/>
-              <a:t>@upc.edu</a:t>
+          <a:bodyPr vert="horz" wrap="square" lIns="91440" tIns="45720" rIns="91440" bIns="45720" rtlCol="0">
+            <a:noAutofit/>
+          </a:bodyPr>
+          <a:lstStyle/>
+          <a:p>
+            <a:r>
+              <a:rPr lang="es-ES" sz="8800" b="1" dirty="0">
+                <a:solidFill>
+                  <a:srgbClr val="3479BB"/>
+                </a:solidFill>
+                <a:latin typeface="Montserrat" pitchFamily="2" charset="77"/>
+              </a:rPr>
+              <a:t>1. </a:t>
+            </a:r>
+          </a:p>
+        </p:txBody>
+      </p:sp>
+      <p:sp>
+        <p:nvSpPr>
+          <p:cNvPr id="46" name="CuadroTexto 45">
+            <a:extLst>
+              <a:ext uri="{FF2B5EF4-FFF2-40B4-BE49-F238E27FC236}">
+                <a16:creationId xmlns:a16="http://schemas.microsoft.com/office/drawing/2014/main" id="{89E07715-59A9-641E-4408-39D81867300A}"/>
+              </a:ext>
+            </a:extLst>
+          </p:cNvPr>
+          <p:cNvSpPr txBox="1"/>
+          <p:nvPr/>
+        </p:nvSpPr>
+        <p:spPr>
+          <a:xfrm>
+            <a:off x="9527458" y="7256664"/>
+            <a:ext cx="13962462" cy="1719852"/>
+          </a:xfrm>
+          <a:prstGeom prst="rect">
+            <a:avLst/>
+          </a:prstGeom>
+        </p:spPr>
+        <p:txBody>
+          <a:bodyPr vert="horz" wrap="square" lIns="91440" tIns="45720" rIns="91440" bIns="45720" rtlCol="0">
+            <a:noAutofit/>
+          </a:bodyPr>
+          <a:lstStyle/>
+          <a:p>
+            <a:pPr algn="r"/>
+            <a:r>
+              <a:rPr lang="es-ES" sz="11500" b="1" dirty="0">
+                <a:solidFill>
+                  <a:srgbClr val="F2F2F2"/>
+                </a:solidFill>
+                <a:latin typeface="Montserrat" pitchFamily="2" charset="77"/>
+              </a:rPr>
+              <a:t>6. </a:t>
+            </a:r>
+            <a:r>
+              <a:rPr lang="es-ES" sz="11500" b="1" dirty="0" err="1">
+                <a:solidFill>
+                  <a:srgbClr val="F2F2F2"/>
+                </a:solidFill>
+                <a:latin typeface="Montserrat" pitchFamily="2" charset="77"/>
+              </a:rPr>
+              <a:t>Support</a:t>
+            </a:r>
+            <a:r>
+              <a:rPr lang="es-ES" sz="11500" b="1" dirty="0">
+                <a:solidFill>
+                  <a:srgbClr val="F2F2F2"/>
+                </a:solidFill>
+                <a:latin typeface="Montserrat" pitchFamily="2" charset="77"/>
+              </a:rPr>
+              <a:t> Vector Machine (SVM)</a:t>
             </a:r>
           </a:p>
         </p:txBody>
       </p:sp>
     </p:spTree>
+    <p:extLst>
+      <p:ext uri="{BB962C8B-B14F-4D97-AF65-F5344CB8AC3E}">
+        <p14:creationId xmlns:p14="http://schemas.microsoft.com/office/powerpoint/2010/main" val="916019761"/>
+      </p:ext>
+    </p:extLst>
   </p:cSld>
   <p:clrMapOvr>
     <a:masterClrMapping/>
